--- a/assets/finance/D13_FI_I_Instruments_Markets.pptx
+++ b/assets/finance/D13_FI_I_Instruments_Markets.pptx
@@ -537,7 +537,12 @@
           <a:p>
             <a:r>
               <a:rPr lang="en-US" dirty="0"/>
-              <a:t/>
+              <a:t>ANGLE — Two hours. Equity was one instrument per issuer; debt is dozens. That is the whole reframe.
+•  Open cold: "Apple has one share class and had 80+ bonds outstanding." Let it sit.
+•  Flag that this is my day job — DCM, ratings advisory, event-driven financing.
+•  Housekeeping: five sections, break after §3 (repo).
+•  Say what we are NOT doing today: pricing and duration are Decks 14 and 15.
+NEXT — Straight into the agenda — five blocks, one arc: features → cash flows → how it gets sold.</a:t>
             </a:r>
             <a:endParaRPr lang="en-US" dirty="0"/>
           </a:p>
@@ -625,7 +630,14 @@
           <a:p>
             <a:r>
               <a:rPr lang="en-US" dirty="0"/>
-              <a:t/>
+              <a:t>ANGLE — One table, three shapes. The interest is mechanical once the principal schedule is chosen.
+•  Point out the one thing that is identical across all three: the FIRST interest payment, 4.8.
+•  Bullet: 4.8 nine times, then 304.8. Amortizing: 32.70 ten times, flat.
+•  Show the balloon decomposition — it is the exam trick: 300 = PV(150 balloon) 127.98 + 172.02 to amortize.
+•  Then A on 172 at 1.6% over 10 periods = 18.75, and the last payment is 18.75 + 150 = 168.75.
+•  Credit risk vs reinvestment risk: amortizing lowers the first and raises the second. Always a trade.
+FROM THE DESK — Shape follows the asset, not preference. Project finance amortizes because the asset depreciates. A CRE loan balloons because the sponsor plans to sell or refinance, not repay. When a corporate asks for a bullet on a wasting asset, that is a credit question, not a structuring one.
+NEXT — Take the fully amortizing case to its most familiar form — a mortgage.</a:t>
             </a:r>
             <a:endParaRPr lang="en-US" dirty="0"/>
           </a:p>
@@ -713,7 +725,15 @@
           <a:p>
             <a:r>
               <a:rPr lang="en-US" dirty="0"/>
-              <a:t/>
+              <a:t>ANGLE — The payment is level; the SPLIT is not. That asymmetry is the whole point and it surprises people every time.
+•  Get them to compute A before you show it. The common error is forgetting to divide 3.50% by 12.
+•  Numerator 1,166.67 is also month 1's interest — that is not a coincidence, it is r × the full balance.
+•  Read the table across: month 1 is 65% interest, month 360 is 0.3% interest.
+•  Total interest 246,625 on 400,000 borrowed. Let that land before moving on.
+•  Same equation as BRWA on the last slide — only r, N and P changed.
+FROM THE DESK — This is why mortgage prepayment matters so much in Deck 16. A borrower who refinances in year 5 has paid the bank almost nothing back in principal but nearly a quarter of the total interest. Prepayment is not a rounding error in an MBS — it is the security.
+ASK THE ROOM — You refinance after five years. Roughly how much of the 400,000 have you actually repaid?
+NEXT — Two more ways principal comes back early: sinking funds and waterfalls.</a:t>
             </a:r>
             <a:endParaRPr lang="en-US" dirty="0"/>
           </a:p>
@@ -801,7 +821,14 @@
           <a:p>
             <a:r>
               <a:rPr lang="en-US" dirty="0"/>
-              <a:t/>
+              <a:t>ANGLE — Both structures return principal early — but a sinking fund shrinks the debt, while a waterfall just re-ranks who gets paid first.
+•  Sinking fund: money into escrow, bonds retired. Random lottery OR repurchase at a fixed price.
+•  CORRECTION to the usual student mental model: in a waterfall, INTEREST is pro rata to all tranches. Only PRINCIPAL is sequential.
+•  Losses run the other way — bottom-up. C absorbs first, A last.
+•  So A has the lowest credit risk and the lowest coupon; C the highest of both.
+•  Same trade as always: less credit risk bought with more reinvestment risk.
+FROM THE DESK — The interest-pro-rata / principal-sequential split is exactly what made 2007 so slow to show up. Junior tranches kept receiving coupons long after the collateral was clearly impaired — the cash flow looked fine right up until the principal window opened.
+NEXT — That was principal. Now the other side: coupons that move.</a:t>
             </a:r>
             <a:endParaRPr lang="en-US" dirty="0"/>
           </a:p>
@@ -889,7 +916,16 @@
           <a:p>
             <a:r>
               <a:rPr lang="en-US" dirty="0"/>
-              <a:t/>
+              <a:t>ANGLE — Five mechanisms, one question each time: whose risk just moved, and in which direction?
+•  FRN moves rate risk to the investor's benefit; step-up moves it back if rates rise.
+•  PPC is the ESG step-up: 50 bps if it misses a 40% CO₂ cut by December 2022 — the coupon prices a promise.
+•  Antelas credit-linked: 250 bps at ≤2.5× leverage, stepping to 325 bps at ≥3.5×. The spread follows the ratio.
+•  PIK: interest capitalises into principal. No cash out — and a bigger balance to repay. Distress signal.
+•  TIPS: index the PRINCIPAL, then apply the fixed rate to it. Compute 115m × 1.00849 first, then 1% / 2.
+•  Footnote distinction: capital-indexed (TIPS) vs interest-indexed. Only one protects the principal.
+FROM THE DESK — PIK toggles are the single best distress signal in leveraged finance. A sponsor exercising the toggle is telling you it would rather grow the debt than write a cheque — you almost always see it a full quarter before the covenant breach shows up.
+ASK THE ROOM — Deflation hits and CPI falls. What does a TIPS holder receive at maturity? The GREATER of adjusted principal or par.
+NEXT — Two structures where the coupon is not adaptive but absent.</a:t>
             </a:r>
             <a:endParaRPr lang="en-US" dirty="0"/>
           </a:p>
@@ -977,7 +1013,13 @@
           <a:p>
             <a:r>
               <a:rPr lang="en-US" dirty="0"/>
-              <a:t/>
+              <a:t>ANGLE — A zero is not an exotic instrument. It is a bond with the coupons removed and the price adjusted so the maths still works.
+•  Discount = cumulative interest. Say it that way, not "it pays no interest".
+•  The killer feature: no coupons means no reinvestment risk. That is why insurers buy them.
+•  STRIPS: intermediaries separate the coupon and principal payments off a sovereign bullet and sell each as a zero.
+•  Deferred coupon: cash conservation. Construction finance is the honest use; weak credit is the other one.
+•  Deferred bonds still price at a discount — the later coupons do not compensate for the early gap.
+NEXT — Section 1 gave the issuer an option. Now the two options that belong to the INVESTOR.</a:t>
             </a:r>
             <a:endParaRPr lang="en-US" dirty="0"/>
           </a:p>
@@ -1065,7 +1107,16 @@
           <a:p>
             <a:r>
               <a:rPr lang="en-US" dirty="0"/>
-              <a:t/>
+              <a:t>ANGLE — Mirror image of slide 8. The investor holds these, so the investor PAYS for them in yield — the opposite direction to a call.
+•  Put = investor sells back at a fixed price. Exercised when rates RISE. Price floor.
+•  Direction check on the board: callable yields MORE, putable yields LESS, convertible yields least.
+•  Conversion ratio 1,000 / 42 = 23.81. Then value = 23.81 × the share price, moving daily.
+•  At EUR 35 the conversion value is 833 against a bond worth ~1,000 — so you do not convert. Obvious once said.
+•  CoCo is the reversal: converts DOWN, automatically, on a capital-ratio trigger. Not the holder's option.
+•  Mention warrants: an ATTACHED option that trades separately, unlike an embedded one.
+FROM THE DESK — Convertibles are equity capital raised by a company that will not accept today's share price. That is the honest description. And most carry a call — the issuer forces conversion once the shares are comfortably through the strike, so the "free upside" is capped in practice.
+ASK THE ROOM — Rates rise 300 bps. Which holder is happier — the putable bondholder or the callable bondholder?
+NEXT — We have the instrument. Now: who issues it, who buys it, and how does it get sold?</a:t>
             </a:r>
             <a:endParaRPr lang="en-US" dirty="0"/>
           </a:p>
@@ -1153,7 +1204,11 @@
           <a:p>
             <a:r>
               <a:rPr lang="en-US" dirty="0"/>
-              <a:t/>
+              <a:t>ANGLE — Section 3 of 5. About 25 minutes. Least maths, most of my actual working life.
+•  Frame: markets are sliced three ways at once — issuer type, credit quality, maturity.
+•  The IG issuance timeline is the slide to slow down on.
+•  Coffee break after this section.
+NEXT — The map first: the credit × maturity grid.</a:t>
             </a:r>
             <a:endParaRPr lang="en-US" dirty="0"/>
           </a:p>
@@ -1241,7 +1296,14 @@
           <a:p>
             <a:r>
               <a:rPr lang="en-US" dirty="0"/>
-              <a:t/>
+              <a:t>ANGLE — This grid is the map for the rest of the module. Every later slide is one cell in it.
+•  Three dimensions, not two — issuer type is the third and it is easy to lose.
+•  Read the grid down the left column, then across. Note the empty cell: HY has no short-term market.
+•  Apple: 80+ bonds, one share class. That is the difference from Deck 11 in one number.
+•  Investors sit in cells too — pensions long, money-market funds short. Cash-flow matching drives it.
+•  Set up section 4: the IG short-term cell (repo, CP, ABCP) is where we spend the most time later.
+FROM THE DESK — The empty cell is the interesting one. A high-yield issuer cannot fund short — no money-market fund will take the paper — so it lives on a revolver and a bond. That single structural fact is why a HY refinancing wall is a genuine crisis and an IG one is a diary entry.
+NEXT — The vertical axis is credit quality. Who decides where an issuer sits?</a:t>
             </a:r>
             <a:endParaRPr lang="en-US" dirty="0"/>
           </a:p>
@@ -1329,7 +1391,15 @@
           <a:p>
             <a:r>
               <a:rPr lang="en-US" dirty="0"/>
-              <a:t/>
+              <a:t>ANGLE — One line on a letter scale decides who is legally allowed to own the bond. That is why it moves prices.
+•  Nail the boundary: BBB- (Baa3) is the lowest INVESTMENT GRADE. BB+ (Ba1) is the highest HIGH YIELD.
+•  A rating is not just default probability — it is probability AND expected loss given default.
+•  Issuer ratings and issue ratings differ: a secured issue can rate above its own issuer.
+•  Fallen angel: downgraded FROM IG. Its paper keeps IG features but loses its IG buyer base.
+•  Do not over-teach the letters. The line and the forced-seller mechanic are what matter.
+FROM THE DESK — Rating advisory is a real product because of this line. A BBB- issuer will restructure a whole acquisition — smaller cash component, an equity bridge, a disposal committed up front — purely to keep the agencies from moving one notch. The one notch costs far more than the deal economics it gives up.
+ASK THE ROOM — An issuer is downgraded BBB- to BB+. What changed about the bond itself? Nothing. What changed about who may hold it? Everything.
+NEXT — Ratings define index eligibility. So: what is a bond index?</a:t>
             </a:r>
             <a:endParaRPr lang="en-US" dirty="0"/>
           </a:p>
@@ -1417,7 +1487,15 @@
           <a:p>
             <a:r>
               <a:rPr lang="en-US" dirty="0"/>
-              <a:t/>
+              <a:t>ANGLE — Three funnels of decreasing width. The filters ARE the product — that is what an index actually sells.
+•  Give the three differences from equity indexes first: constituent count, turnover, market-value-of-debt weighting.
+•  Because issuers can have dozens of eligible bonds, some indexes exceed 10,000 lines.
+•  Consequence: no fund replicates the index. They hold a representative sample.
+•  Walk left to right — global IG, then EM sovereign USD, then EUR IG with an ESG screen.
+•  Note the weighting quirk: weight by debt outstanding means the MOST indebted issuers get the biggest weight.
+FROM THE DESK — Index inclusion is a funding decision, not a marketing one. Issuing EUR 300m rather than EUR 250m to clear the minimum size buys you the passive bid and usually pays for itself in spread. Every DCM banker has had that conversation with a treasurer.
+ASK THE ROOM — Weighting by debt outstanding gives the largest weight to the biggest borrower. Is that what a bond investor wants?
+NEXT — Indexes buy bonds in the secondary market. But first the bond has to be born — the primary market.</a:t>
             </a:r>
             <a:endParaRPr lang="en-US" dirty="0"/>
           </a:p>
@@ -1505,7 +1583,13 @@
           <a:p>
             <a:r>
               <a:rPr lang="en-US" dirty="0"/>
-              <a:t/>
+              <a:t>ANGLE — Show the arc so they know where the hard maths lands and can pace themselves.
+•  Sections 1–2 ≈ 45 min: the contract and the cash flows.
+•  Section 3 ≈ 25 min: how a bond actually gets sold. Break after this.
+•  Section 4 ≈ 30 min: repo is the technical peak — flag it now.
+•  Section 5 ≈ 20 min: sovereigns and auctions, then takeaways.
+•  Four worked examples today. Tell them to keep a calculator out.
+NEXT — Objectives — what they should be able to DO by lunch.</a:t>
             </a:r>
             <a:endParaRPr lang="en-US" dirty="0"/>
           </a:p>
@@ -1593,7 +1677,15 @@
           <a:p>
             <a:r>
               <a:rPr lang="en-US" dirty="0"/>
-              <a:t/>
+              <a:t>ANGLE — Seven hours from silence to a priced bond. Say it once, then explain why that is possible at all.
+•  Order of operations matters — 12:00 the book CLOSES and guidance goes out; 1:00 the deal LAUNCHES with final terms.
+•  Underwritten means the banks guarantee the sale at a negotiated price. Best-efforts means they only try.
+•  Shelf registration is what makes the speed possible: the disclosure is already filed and current.
+•  Reopening = tapping an existing bond at a price well away from par. Less common than a new line.
+•  Debut issuers get weeks of roadshow, not one call — first-time credit needs an education process.
+FROM THE DESK — The number nobody teaches is new issue concession — the extra spread over your own secondary curve that you pay to get the book done. In a calm market it is 5–10 bp; in a jittery one it is 25 bp or the deal is pulled. And the 12:00 book close is theatre with a purpose: it forces every real-money account to commit inside a window rather than wait for the last look.
+ASK THE ROOM — If the banks underwrite the deal, who owns the risk between 3pm and the moment the bonds are placed?
+NEXT — From 4pm onward the bond lives in the secondary market. That market is nothing like an exchange.</a:t>
             </a:r>
             <a:endParaRPr lang="en-US" dirty="0"/>
           </a:p>
@@ -1681,7 +1773,15 @@
           <a:p>
             <a:r>
               <a:rPr lang="en-US" dirty="0"/>
-              <a:t/>
+              <a:t>ANGLE — Bid–offer is not a fee. It is the market telling you how hard it will be to get out.
+•  Order of magnitude first: fraction of a bp on an on-the-run UST, 10–20 bp on a seasoned corporate.
+•  Why the difference is inventory, not credit — a dealer quotes tight on what it already holds.
+•  On-the-run vs off-the-run: same issuer, same risk, completely different liquidity.
+•  Hertz: &gt;90% down in three months, back to pre-pandemic a year later. Distress is not the same as loss.
+•  Last row matters: many bonds simply never trade, and get priced off comparable liquid bonds.
+•  Correct the common assumption — the BONDS keep trading; it is the EQUITY that gets delisted first.
+FROM THE DESK — Ask a dealer for a two-way price in size on a seasoned name and you will get one number quickly and the other after a phone call. The second number is the real one. In a stressed tape, bid–offer does not widen gracefully — the bid simply disappears, and screens still show a stale mid.
+NEXT — Break. Then the corporate funding stack, starting with the cheapest and least reliable end.</a:t>
             </a:r>
             <a:endParaRPr lang="en-US" dirty="0"/>
           </a:p>
@@ -1769,7 +1869,11 @@
           <a:p>
             <a:r>
               <a:rPr lang="en-US" dirty="0"/>
-              <a:t/>
+              <a:t>ANGLE — Section 4 of 5. About 30 minutes and the technical peak of the deck.
+•  Arc: bank lines → commercial paper → repo → long-term IG vs HY.
+•  Warn them: three repo slides in a row, and the maths is on the first one.
+•  Bear Stearns is the payoff — do not rush to it.
+NEXT — Start at the cheapest, least reliable end of the funding stack.</a:t>
             </a:r>
             <a:endParaRPr lang="en-US" dirty="0"/>
           </a:p>
@@ -1857,7 +1961,15 @@
           <a:p>
             <a:r>
               <a:rPr lang="en-US" dirty="0"/>
-              <a:t/>
+              <a:t>ANGLE — One axis: how sure are you the money will actually be there? Every other difference follows from that.
+•  Uncommitted = cheapest, and the bank can walk. Committed = written promise. Revolver = multi-year and binding.
+•  The commitment fee is paid on the UNDRAWN amount — you pay for availability, not for cash.
+•  Secured / asset-based is for borrowers who cannot get unsecured credit. It is a downgrade, not a discount.
+•  Distinguish assignment (collateral, you still collect) from factoring (sale, they collect). Classic exam pair.
+•  Geography: uncommitted lines and revolvers dominate the US; regular committed lines are more common elsewhere.
+FROM THE DESK — The revolver is never really about drawing it. It is the ratings agencies' liquidity test and the CP programme's backstop — which is why an IG treasurer will pay a fee for years on a facility they intend never to touch. The moment you actually draw a revolver, the market reads it as distress.
+ASK THE ROOM — Why would a company pay a fee on money it has no intention of borrowing?
+NEXT — One of the things a revolver backstops: commercial paper.</a:t>
             </a:r>
             <a:endParaRPr lang="en-US" dirty="0"/>
           </a:p>
@@ -1945,7 +2057,15 @@
           <a:p>
             <a:r>
               <a:rPr lang="en-US" dirty="0"/>
-              <a:t/>
+              <a:t>ANGLE — Cheap short-term money always carries the same hidden clause: it has to be renewed. Everything on this slide is about who is on the hook when it is not.
+•  CP is an unsecured promissory note, under three months, repaid with new CP. Say "rolled over" and define it.
+•  Rollover risk is why investors DEMAND the backup line. It is the investor's protection, not the issuer's luxury.
+•  ~60% of issuance is financial institutions — CP is a bank funding tool as much as a corporate one.
+•  ABCP: the SPE issues, the bank provides liquidity but not a guarantee. Know who is on which side.
+•  Off balance sheet = lower capital charge. That is the whole reason ABCP exists.
+•  Third column is a quick sweep — CDs, interbank, central bank funds, discount window. Do not dwell.
+FROM THE DESK — The 2007 ABCP freeze is the cleanest lesson in the module: the assets were fine on day one, the structure was legal, and the whole market still stopped inside a fortnight — because the liquidity lines were sized for one issuer failing, not for all of them at once. Correlation is what kills a liquidity backstop.
+NEXT — CP is unsecured short-term funding. Repo is its secured twin — and it is bigger.</a:t>
             </a:r>
             <a:endParaRPr lang="en-US" dirty="0"/>
           </a:p>
@@ -2033,7 +2153,17 @@
           <a:p>
             <a:r>
               <a:rPr lang="en-US" dirty="0"/>
-              <a:t/>
+              <a:t>ANGLE — Four facts, and students invert at least two of them every year: who lends cash, who keeps the bond, who pays the rate, what the haircut protects.
+•  Say the roles slowly. Security SELLER = cash BORROWER. Security BUYER = cash LENDER.
+•  THE FACT THEY MISS: the seller keeps ownership of the collateral AND its coupons. Only the repo rate goes to the lender.
+•  Divide, do not multiply: 100m / 1.02, not 100m × 1.02. This is the single most common arithmetic slip.
+•  Haircut 1.96% protects the CASH LENDER against a fall in collateral value. It is the borrower's skin in the game.
+•  Repo rate is quoted on a 360-day basis here: 0.25% × 30/360.
+•  Variation margin: if the collateral price falls, the borrower posts more; if it rises, it can call some back.
+•  Three uses of repo: finance a position, earn secured short-term income, borrow a bond to short it.
+FROM THE DESK — Repo is where a crisis shows up first, and it never announces itself as a price. It announces itself as a haircut. Your counterparty does not refuse to trade — it moves you from 2% to 8% overnight, and suddenly you need four times the equity behind the same book. Watch haircuts, not spreads.
+ASK THE ROOM — The Treasury pays a coupon during the repo term. Who receives it — the buyer or the seller?
+NEXT — Third use of repo: renting a bond in order to sell it short.</a:t>
             </a:r>
             <a:endParaRPr lang="en-US" dirty="0"/>
           </a:p>
@@ -2121,7 +2251,15 @@
           <a:p>
             <a:r>
               <a:rPr lang="en-US" dirty="0"/>
-              <a:t/>
+              <a:t>ANGLE — Same contract, opposite seat. Naming the seat is what makes the four-step flow readable.
+•  Reverse repo is not a different product — it is the same trade named from the cash lender's side.
+•  Walk the four steps physically: bond in, bond out, bond back in, bond returned.
+•  The arithmetic: sold at 100m, bought back at 99m = 1.00m gain, PLUS 20,833 of repo interest earned. Total 1,020,833.
+•  Correct the instinct — here the fund is the LENDER of cash, so it RECEIVES the repo rate rather than paying it.
+•  Specials: the real cost of the short is a depressed repo rate on that one bond, not an explicit borrow fee.
+•  Triparty: an agent for valuation and custody. It does NOT take the credit risk away.
+FROM THE DESK — A bond going special is the earliest visible sign of a crowded short. When the on-the-run 10-year prints deeply negative in repo, someone large is positioned against it — and the squeeze, when it comes, is in the repo market long before it shows in the cash price.
+NEXT — Repo is cheap, secured and uncommitted. Here is what "uncommitted" costs you.</a:t>
             </a:r>
             <a:endParaRPr lang="en-US" dirty="0"/>
           </a:p>
@@ -2209,7 +2347,16 @@
           <a:p>
             <a:r>
               <a:rPr lang="en-US" dirty="0"/>
-              <a:t/>
+              <a:t>ANGLE — A solvency story told through a funding table. The assets did not disappear — the willingness to fund them did.
+•  Row four is the whole case: Bear replaced UNSECURED short-term funding with SECURED repo. It looked safer.
+•  Two days, 18bn to 2bn. Let that number sit before you explain it.
+•  Three simultaneous runs: repo lenders, prime brokerage clients, and other banks pulling credit lines.
+•  Point at footnote 1: repo is uncommitted. Nobody breached a contract by walking away.
+•  Footnote 2 lists the five repo risks the curriculum names — worth reading aloud once.
+•  Post-crisis answers: triparty reform, intraday margining, a standing central bank repo facility.
+FROM THE DESK — Nobody at Bear thought "we have a funding problem" — they thought they had a collateral problem, and collateral was something they had plenty of. The lesson every treasurer took away is that funding diversification is measured in counterparties and tenor, not in instrument type. Overnight secured money from ten lenders is not diversified; it is one bet on your own reputation.
+ASK THE ROOM — Bear's collateral was mostly good. Why did being secured not save it?
+NEXT — Enough short-term. Back up the curve: how long should a corporate borrow for?</a:t>
             </a:r>
             <a:endParaRPr lang="en-US" dirty="0"/>
           </a:p>
@@ -2297,7 +2444,14 @@
           <a:p>
             <a:r>
               <a:rPr lang="en-US" dirty="0"/>
-              <a:t/>
+              <a:t>ANGLE — One decision — how long to borrow — and it produces a different named risk depending on which side of the trade you sit.
+•  Two things rise with maturity, not one: the benchmark yield AND the credit spread on top of it.
+•  Why the spread widens: the chance of financial distress compounds over time.
+•  Be honest about the numbers — only the 5y point (2.30% / 3.20% / 90 bps) is in the curriculum. Say so.
+•  Horizon vs maturity is the organising idea. Longer than horizon → price risk. Shorter → reinvestment risk.
+•  Issuer mirror: shorter than the project → rollover risk. Longer → paying for money you do not need yet.
+FROM THE DESK — In practice nobody picks one tenor. You build a maturity ladder so no single year carries a wall, and you pre-fund the wall twelve to eighteen months early. The credit committee question is never "what is our average maturity" — it is "what is our worst single year".
+NEXT — Same trade-off, but IG and HY live it very differently.</a:t>
             </a:r>
             <a:endParaRPr lang="en-US" dirty="0"/>
           </a:p>
@@ -2385,7 +2539,15 @@
           <a:p>
             <a:r>
               <a:rPr lang="en-US" dirty="0"/>
-              <a:t/>
+              <a:t>ANGLE — Two regimes, not two spreads. Everything on this table follows from one thing: how likely the cash flows are.
+•  Start at row two — bond-like vs equity-like cash flows. Every other row is a consequence.
+•  Analytical shift: IG analysts watch ratios and rating migration; HY analysts model default probability AND loss given default.
+•  Repayment sources differ: BRWA has only operating cash flow, VIVU also has pledged collateral.
+•  Maturity: IG out to 30 years, HY typically 10 or less. Investors will not lend long to weak credits.
+•  Contingency: IG gets a make-whole (rarely exercised); HY gets a fixed-price call schedule (frequently exercised).
+•  Callout: a borrower expecting its credit to improve WANTS the call. That is the intuition, not "HY is expensive".
+FROM THE DESK — The way an HY issuer actually gets out of an expensive coupon is by growing into an upgrade and calling at 103.25 — which is why the call schedule and the deleveraging plan are drafted together, not separately. On the IG side the equivalent conversation is the maturity ladder, and it happens once a year with the treasurer, not once a deal.
+NEXT — That is corporates. The largest borrower in every market is the one we have not covered.</a:t>
             </a:r>
             <a:endParaRPr lang="en-US" dirty="0"/>
           </a:p>
@@ -2473,7 +2635,12 @@
           <a:p>
             <a:r>
               <a:rPr lang="en-US" dirty="0"/>
-              <a:t/>
+              <a:t>ANGLE — These are the five things an exam or an interviewer will actually ask.
+•  Point at objective 4 — repo ownership is the single most-missed fact in this module.
+•  Objective 3 is where credit analysis begins; it recurs in Deck 16.
+•  Tell them objectives 2 and 4 are calculator questions.
+•  Do not read all five aloud — read two, gesture at the rest.
+NEXT — Start where every bond starts: the term sheet.</a:t>
             </a:r>
             <a:endParaRPr lang="en-US" dirty="0"/>
           </a:p>
@@ -2561,7 +2728,11 @@
           <a:p>
             <a:r>
               <a:rPr lang="en-US" dirty="0"/>
-              <a:t/>
+              <a:t>ANGLE — Section 5 of 5. About 20 minutes, then takeaways.
+•  Frame: the sovereign is the largest issuer in almost every domestic market and sets the benchmark for everyone else.
+•  Three ideas: the economic balance sheet, the auction, and the taxonomy of non-sovereign issuers.
+•  Keep energy up — this is the last stretch before lunch.
+NEXT — A government balance sheet does not look like a company's.</a:t>
             </a:r>
             <a:endParaRPr lang="en-US" dirty="0"/>
           </a:p>
@@ -2649,7 +2820,15 @@
           <a:p>
             <a:r>
               <a:rPr lang="en-US" dirty="0"/>
-              <a:t/>
+              <a:t>ANGLE — A government is not a company with a bigger balance sheet. Its main asset is the right to tax, and that never appears in the accounts.
+•  Contrast the two accounting frames: cash-based public accounts vs the economic balance sheet.
+•  Biggest claim on the left is the PV of expected tax revenues. Biggest obligation is the PV of promised spending.
+•  Two policies, two jobs: fiscal sets the LEVEL, debt management sets the COMPOSITION. Do not blur them.
+•  Ricardian equivalence as a thought experiment: if it held, borrow overnight forever. It does not hold — rollover risk.
+•  OECD numbers: 7.6y weighted average maturity in 2021 vs 6.3y in 2007; long-term ≈ 85% of stock; issuance ~50/50.
+•  Explain the split: short-term debt must be reissued more often, so it is a bigger share of FLOW than of STOCK.
+FROM THE DESK — The stock-versus-flow point is where most people misread a debt office. A country can look short-funded on issuance volume and be long-funded on the actual maturity profile. Ask for weighted average maturity of the stock, not the auction calendar.
+NEXT — That describes a developed-market sovereign. Emerging markets have a different set of constraints.</a:t>
             </a:r>
             <a:endParaRPr lang="en-US" dirty="0"/>
           </a:p>
@@ -2737,7 +2916,15 @@
           <a:p>
             <a:r>
               <a:rPr lang="en-US" dirty="0"/>
-              <a:t/>
+              <a:t>ANGLE — Sovereigns default on what they cannot print. Domestic-currency debt is a policy choice; foreign-currency debt is a hard constraint.
+•  Read the table as one distinction repeated: how deep and diversified is the economy behind the tax base.
+•  Domestic vs EXTERNAL debt is the split that matters. External = owed to foreign creditors, usually in FX.
+•  The indirect FX risk point: a USD-denominated EM bond has no currency conversion for the investor, but repayment depends on the issuer earning dollars.
+•  Sri Lanka sequence: debt-financed infrastructure → tourism and remittances collapse → reserves gone → 78m missed.
+•  The creditor split is the whole modern EM story: market bonds 47%, then supranationals, then bilateral lenders.
+FROM THE DESK — The creditor mix is what determines whether a restructuring takes two years or ten. Bonded debt has collective action clauses and a defined process. Bilateral lending — especially where the lender is also a trading partner and a contractor — has no such process, and that is where sovereign workouts now get stuck.
+ASK THE ROOM — Why can a country default on its dollar debt while its own-currency debt is still called risk-free?
+NEXT — However the debt is denominated, sovereigns sell it the same way: at auction.</a:t>
             </a:r>
             <a:endParaRPr lang="en-US" dirty="0"/>
           </a:p>
@@ -2825,7 +3012,17 @@
           <a:p>
             <a:r>
               <a:rPr lang="en-US" dirty="0"/>
-              <a:t/>
+              <a:t>ANGLE — One mechanism choice, and it changes both what the issuer pays and who is willing to bid aggressively.
+•  Competitive bidder names a price and a size and may get nothing. Non-competitive takes the auction price and always gets filled.
+•  Ranking is identical in BOTH formats — lowest yield first. What differs is only what the winners PAY.
+•  The four phases: announce → bids submitted → non-competitive accepted and competitive ranked to the cut-off → settle.
+•  Singapore numbers: cut-off 1.95%, median 1.89%, average 1.84% — the average bidder bid a LOWER yield than the clearing rate and still got the better price. That is uniform pricing.
+•  Coupon is the cut-off rounded DOWN to the nearest 0.125% → 1.875%, so the bond prices at 98.303, below par.
+•  SGD 207m of the SGD 2.6bn went to non-competitive bids. Bids had to come through primary dealers.
+•  Practitioner point, not in the curriculum: the US Treasury has used single-price for all its auctions since 1998.
+FROM THE DESK — Cover ratio is the headline everyone quotes and the tail is what the desk actually watches — the gap between the average and the cut-off yield. A wide tail means the book was thin at the clearing level, and the follow-on trade is short. Singapore's 11 bp tail here is comfortable.
+ASK THE ROOM — Under multiple-price, why might a large investor deliberately bid a worse price than they are willing to pay?
+NEXT — Primary dealers must bid at every auction. But who buys the bonds afterwards, and why?</a:t>
             </a:r>
             <a:endParaRPr lang="en-US" dirty="0"/>
           </a:p>
@@ -2913,7 +3110,15 @@
           <a:p>
             <a:r>
               <a:rPr lang="en-US" dirty="0"/>
-              <a:t/>
+              <a:t>ANGLE — A large share of the demand for government bonds is not a view on value. Once you see that, the shape of the yield curve stops being a pure forecast.
+•  Primary dealer obligation first: they MUST bid competitively at every auction, in exchange for franchise access.
+•  Investors can also bid directly — TreasuryDirect in the US, the UK DMO.
+•  Then the non-economic buyers: policy, reserves, regulation. None of them is optimising return.
+•  For banks and insurers say the mechanism: liquidity requirements and favourable regulatory capital treatment.
+•  On-the-run vs off-the-run: the newest issue is the most liquid, and it is the benchmark for everyone else's spread.
+•  Sovereign secondary trading is OTC like corporates, with exceptions — Australia trades on exchange.
+FROM THE DESK — This is the part of the curve every rates model gets wrong. When you strip a corporate spread off a Treasury yield you are subtracting a number that has a large regulatory and reserve-driven bid inside it. Two credits with identical fundamentals will price differently simply because one benchmarks against a curve that is structurally squeezed.
+NEXT — Last family: everything that is government-adjacent but not the sovereign itself.</a:t>
             </a:r>
             <a:endParaRPr lang="en-US" dirty="0"/>
           </a:p>
@@ -3001,7 +3206,16 @@
           <a:p>
             <a:r>
               <a:rPr lang="en-US" dirty="0"/>
-              <a:t/>
+              <a:t>ANGLE — Three families, one test: what actually pays the coupon, and what stands behind it if that source fails?
+•  Agency: operating cash flows first, sovereign backing second. AAHK is airport revenue; Ginnie Mae is guaranty fees.
+•  GO bond vs revenue bond is the local-authority split — tax base vs one project's tolls.
+•  Revenue bonds are LONGER dated, matched to the life of the project cash flows. Exam point.
+•  Supranationals have the highest credit quality of the three — member states share control and provide support.
+•  The subtle one: agencies borrow near their sovereign's YIELD but do NOT get the full sovereign LIQUIDITY premium.
+•  ADB note: fixed in IDR, paid in USD — the investor keeps the currency risk despite being paid in dollars.
+FROM THE DESK — The SSA market is where a lot of quiet capital markets work actually happens. The credit question is settled in a paragraph; everything else is currency, format and timing. An ADB deal fixed in rupiah and settled in dollars exists because an investor wanted the coupon without opening a local account — that is structuring as distribution, not as credit.
+ASK THE ROOM — Ontario's green bond is a GO bond. If the green projects underperform, does that change who repays it?
+NEXT — That is the whole map. Eight things to leave with.</a:t>
             </a:r>
             <a:endParaRPr lang="en-US" dirty="0"/>
           </a:p>
@@ -3089,7 +3303,13 @@
           <a:p>
             <a:r>
               <a:rPr lang="en-US" dirty="0"/>
-              <a:t/>
+              <a:t>ANGLE — Eight lines. Read four aloud, let them photograph the rest, close on the two direction facts.
+•  If they remember two things: a CALL is the issuer's, and in a repo the SELLER keeps the collateral.
+•  Point at the repo bullet and repeat: divide by the margin, never multiply.
+•  Flag what comes next: Deck 14 prices these instruments, Deck 15 measures their rate risk.
+•  Set the homework: rework the mortgage and the repo Knowledge Check by hand.
+•  Take questions on covenants — that is where the real-world curiosity always is.
+NEXT — Break, then Deck 14 — pricing and the yield curve.</a:t>
             </a:r>
             <a:endParaRPr lang="en-US" dirty="0"/>
           </a:p>
@@ -3177,7 +3397,10 @@
           <a:p>
             <a:r>
               <a:rPr lang="en-US" dirty="0"/>
-              <a:t/>
+              <a:t>ANGLE — Section 1 of 5. Roughly 30 minutes. The contract, before any maths.
+•  One line: "A bond is a contract. Everything else is arithmetic on that contract."
+•  BRWA and VIVU run through the entire deck — introduce them as recurring characters.
+NEXT — The six features.</a:t>
             </a:r>
             <a:endParaRPr lang="en-US" dirty="0"/>
           </a:p>
@@ -3265,7 +3488,15 @@
           <a:p>
             <a:r>
               <a:rPr lang="en-US" dirty="0"/>
-              <a:t/>
+              <a:t>ANGLE — A term sheet is not admin. Six lines fix every cash flow, every risk, and the price.
+•  Walk the table left to right once. Do not linger — it is a checklist, not a lecture.
+•  Seniority: senior is paid before subordinated. That is the whole idea; ranking bites only in liquidation.
+•  Contingency provisions = embedded options. Cannot be traded separately from the bond.
+•  Do the coupon arithmetic out loud: 300 × 3.2% = 9.6, halved = 4.8. Then 304.8 at maturity.
+•  Footnotes: current yield vs YTM. Current yield ignores the pull to par; YTM does not.
+FROM THE DESK — On a live mandate the six features are the easy part — the fight is over three lines that are not on this slide: use of proceeds, change-of-control, and the negative pledge. Those decide whether the deal prices.
+ASK THE ROOM — If BRWA traded at 101 rather than 100, which of the six features changed? None — price is not a feature.
+NEXT — Feature four, the coupon, has three flavours. Take the floating one first.</a:t>
             </a:r>
             <a:endParaRPr lang="en-US" dirty="0"/>
           </a:p>
@@ -3353,7 +3584,15 @@
           <a:p>
             <a:r>
               <a:rPr lang="en-US" dirty="0"/>
-              <a:t/>
+              <a:t>ANGLE — The point is not the arithmetic — it is that ONE of the two components moves and the other never does.
+•  Ask for the coupon rate before revealing it: 0.25 + 2.50. Someone will say 2.75 instantly.
+•  Divide by 4 for quarterly. Trap: they divide the SPREAD by four too. Do not let that pass.
+•  Final payment includes principal — the CFA answer is 251,718,750, not 1,718,750.
+•  Antelas notes are SECURED and unsubordinated — operating cash flow is primary, collateral secondary.
+•  Credit spread widening does NOT change the coupon; it changes the PRICE. Say this twice.
+FROM THE DESK — This is why banks lend floating: their deposits reprice, so floating assets match. It is also why a leveraged loan is quoted "SOFR + 425" and a bond is quoted "T+180" — different reference, same anatomy.
+ASK THE ROOM — Antelas' credit spread widens 25 bps in the market. What happens to the coupon it pays? Nothing.
+NEXT — The coupon is arithmetic. The rest of the contract is law — the indenture.</a:t>
             </a:r>
             <a:endParaRPr lang="en-US" dirty="0"/>
           </a:p>
@@ -3441,7 +3680,15 @@
           <a:p>
             <a:r>
               <a:rPr lang="en-US" dirty="0"/>
-              <a:t/>
+              <a:t>ANGLE — Two columns, one message: covenants are priced. The list length IS the credit spread, written in English.
+•  Affirmative = must do. Negative = must not do. Get that clean before anything else.
+•  TRAP — cross-default is AFFIRMATIVE, not negative. The curriculum tests exactly this.
+•  Pari passu = equal footing with debt of the same seniority; new debt of the same rank does NOT jump the queue.
+•  VIVU has two tests: a maintenance test (5.00× / 2.50×, tested every period) and an incurrence test (4.50× / 3.00×, tested only when it wants to act).
+•  Land the paradox: covenants that are too tight can FORCE a default the issuer could otherwise have avoided.
+FROM THE DESK — What actually gets negotiated is never the ratio — it is the EBITDA definition. Add-backs for synergies, run-rate savings, one-offs. A 5.00× test on adjusted EBITDA can be 6.5× on reported. That is where a covenant package is really won or lost.
+ASK THE ROOM — VIVU is at 4.8× and wants to pay a dividend. Can it? No — the incurrence test at 4.50× blocks it, even though the 5.00× maintenance test is fine.
+NEXT — VIVU's last line was a call schedule. That option is worth talking about properly.</a:t>
             </a:r>
             <a:endParaRPr lang="en-US" dirty="0"/>
           </a:p>
@@ -3529,7 +3776,16 @@
           <a:p>
             <a:r>
               <a:rPr lang="en-US" dirty="0"/>
-              <a:t/>
+              <a:t>ANGLE — The single most inverted fact in fixed income: a CALL is the issuer's option. Fix the direction here or nothing later works.
+•  Say it and make them repeat it: call = issuer's right; put = investor's right.
+•  Issuer calls when rates FALL. That is the only reason it ever calls.
+•  Call protection first — three years here. Then a declining schedule toward par.
+•  The price cap is the investor's real loss, not the early repayment. Draw the flat top on the price/yield curve.
+•  Flag the label: the refinancing arithmetic on the right is MINE, not the curriculum's. Only the schedule is CFA.
+•  Make-whole call: priced off a sovereign yield, so far above market — rarely exercised, common in IG.
+FROM THE DESK — Nobody calls purely on 200 bps of rate move. The real triggers are a ratings upgrade, a refi window before a maturity wall, or an M&amp;A change-of-control. And the call premium is not a cost the CFO frets over — it is a rounding error against the optics of a clean balance sheet at year end.
+ASK THE ROOM — Two identical VIVU bonds, one callable, one not. Which has the higher YTM at issue, and why?
+NEXT — That is the contract. Now the cash flows it produces.</a:t>
             </a:r>
             <a:endParaRPr lang="en-US" dirty="0"/>
           </a:p>
@@ -3617,7 +3873,11 @@
           <a:p>
             <a:r>
               <a:rPr lang="en-US" dirty="0"/>
-              <a:t/>
+              <a:t>ANGLE — Section 2 of 5. About 35 minutes, and the calculator-heavy part of the morning.
+•  Frame it: same issuer, same 300m, same 3.2% — three different shapes of cash flow.
+•  Two worked examples here: the BRWA amortisation and the 30-year mortgage.
+•  Tell them the amortisation equation is the one they must be able to write from memory.
+NEXT — Three shapes: bullet, amortizing, balloon.</a:t>
             </a:r>
             <a:endParaRPr lang="en-US" dirty="0"/>
           </a:p>
@@ -4351,7 +4611,7 @@
                 <a:ea typeface="Trebuchet MS" pitchFamily="34" charset="-122"/>
                 <a:cs typeface="Trebuchet MS" pitchFamily="34" charset="-120"/>
               </a:rPr>
-              <a:t>Bullet, amortizing, and balloon bonds differ entirely in when principal comes back to the investor — the interest is mechanical once that choice is made</a:t>
+              <a:t>Bullet, amortizing, and balloon bonds differ only in WHEN principal comes back — same issuer, same rate, three different cash-flow shapes</a:t>
             </a:r>
             <a:endParaRPr lang="en-US" sz="1600" dirty="0"/>
           </a:p>
@@ -4455,7 +4715,7 @@
                 <a:ea typeface="Calibri" pitchFamily="34" charset="-122"/>
                 <a:cs typeface="Calibri" pitchFamily="34" charset="-120"/>
               </a:rPr>
-              <a:t>Source: CFA Institute, Curriculum Vol 6, Learning Module 2, "Fixed-Income Cash Flow Structures", pp. 27–31.</a:t>
+              <a:t>Source: CFA Institute, Curriculum Vol 6, Learning Module 2, "Fixed-Income Cash Flow Structures", Exhibits 1–4, pp. 27–31.</a:t>
             </a:r>
             <a:endParaRPr lang="en-US" sz="750" dirty="0"/>
           </a:p>
@@ -4497,7 +4757,7 @@
                 <a:ea typeface="Calibri" pitchFamily="34" charset="-122"/>
                 <a:cs typeface="Calibri" pitchFamily="34" charset="-120"/>
               </a:rPr>
-              <a:t>Same 5-year, USD 300m par, 3.2% semi-annual coupon — three completely different cash-flow profiles for the investor.</a:t>
+              <a:t>Same five-year term, USD 300m par, 3.2% semi-annual rate. Only the principal schedule changes — and it changes everything the investor holds.</a:t>
             </a:r>
             <a:endParaRPr lang="en-US" sz="1300" dirty="0"/>
           </a:p>
@@ -4526,10 +4786,10 @@
             <a:tbl>
               <a:tblPr/>
               <a:tblGrid>
-                <a:gridCol w="1005840"/>
-                <a:gridCol w="2286000"/>
-                <a:gridCol w="3017520"/>
-                <a:gridCol w="2194560"/>
+                <a:gridCol w="1554480"/>
+                <a:gridCol w="2011680"/>
+                <a:gridCol w="2926080"/>
+                <a:gridCol w="2011680"/>
               </a:tblGrid>
               <a:tr h="274320">
                 <a:tc>
@@ -4549,7 +4809,7 @@
                           <a:ea typeface="Trebuchet MS" pitchFamily="34" charset="-122"/>
                           <a:cs typeface="Trebuchet MS" pitchFamily="34" charset="-120"/>
                         </a:rPr>
-                        <a:t>Year</a:t>
+                        <a:t>Period (years)</a:t>
                       </a:r>
                       <a:endParaRPr lang="en-US" sz="1100" dirty="0">
                         <a:latin typeface="Trebuchet MS" charset="0"/>
@@ -4599,7 +4859,7 @@
                           <a:ea typeface="Trebuchet MS" pitchFamily="34" charset="-122"/>
                           <a:cs typeface="Trebuchet MS" pitchFamily="34" charset="-120"/>
                         </a:rPr>
-                        <a:t>Bullet (USD m)</a:t>
+                        <a:t>Bullet bond</a:t>
                       </a:r>
                       <a:endParaRPr lang="en-US" sz="1100" dirty="0">
                         <a:latin typeface="Trebuchet MS" charset="0"/>
@@ -4649,7 +4909,7 @@
                           <a:ea typeface="Trebuchet MS" pitchFamily="34" charset="-122"/>
                           <a:cs typeface="Trebuchet MS" pitchFamily="34" charset="-120"/>
                         </a:rPr>
-                        <a:t>Partially amortizing — 150m balloon</a:t>
+                        <a:t>Partial + 150m balloon</a:t>
                       </a:r>
                       <a:endParaRPr lang="en-US" sz="1100" dirty="0">
                         <a:latin typeface="Trebuchet MS" charset="0"/>
@@ -4751,7 +5011,7 @@
                           <a:ea typeface="Calibri" pitchFamily="34" charset="-122"/>
                           <a:cs typeface="Calibri" pitchFamily="34" charset="-120"/>
                         </a:rPr>
-                        <a:t>0</a:t>
+                        <a:t>0 (issue)</a:t>
                       </a:r>
                       <a:endParaRPr lang="en-US" sz="1100" dirty="0">
                         <a:latin typeface="Calibri" charset="0"/>
@@ -5103,7 +5363,7 @@
                           <a:ea typeface="Consolas" pitchFamily="34" charset="-122"/>
                           <a:cs typeface="Consolas" pitchFamily="34" charset="-120"/>
                         </a:rPr>
-                        <a:t>+32.7</a:t>
+                        <a:t>+32.70</a:t>
                       </a:r>
                       <a:endParaRPr lang="en-US" sz="1100" dirty="0">
                         <a:latin typeface="Consolas" charset="0"/>
@@ -5155,7 +5415,7 @@
                           <a:ea typeface="Calibri" pitchFamily="34" charset="-122"/>
                           <a:cs typeface="Calibri" pitchFamily="34" charset="-120"/>
                         </a:rPr>
-                        <a:t>1.0 – 4.5 (each period)</a:t>
+                        <a:t>1.0 – 4.5 each</a:t>
                       </a:r>
                       <a:endParaRPr lang="en-US" sz="1100" dirty="0">
                         <a:latin typeface="Calibri" charset="0"/>
@@ -5305,7 +5565,7 @@
                           <a:ea typeface="Consolas" pitchFamily="34" charset="-122"/>
                           <a:cs typeface="Consolas" pitchFamily="34" charset="-120"/>
                         </a:rPr>
-                        <a:t>+32.7</a:t>
+                        <a:t>+32.70</a:t>
                       </a:r>
                       <a:endParaRPr lang="en-US" sz="1100" dirty="0">
                         <a:latin typeface="Consolas" charset="0"/>
@@ -5507,7 +5767,7 @@
                           <a:ea typeface="Consolas" pitchFamily="34" charset="-122"/>
                           <a:cs typeface="Consolas" pitchFamily="34" charset="-120"/>
                         </a:rPr>
-                        <a:t>+32.7</a:t>
+                        <a:t>+32.70</a:t>
                       </a:r>
                       <a:endParaRPr lang="en-US" sz="1100" dirty="0">
                         <a:latin typeface="Consolas" charset="0"/>
@@ -5559,7 +5819,7 @@
                           <a:ea typeface="Consolas" pitchFamily="34" charset="-122"/>
                           <a:cs typeface="Consolas" pitchFamily="34" charset="-120"/>
                         </a:rPr>
-                        <a:t>Total principal timing</a:t>
+                        <a:t>Principal</a:t>
                       </a:r>
                       <a:endParaRPr lang="en-US" sz="1100" dirty="0">
                         <a:latin typeface="Consolas" charset="0"/>
@@ -5671,7 +5931,7 @@
                           <a:ea typeface="Consolas" pitchFamily="34" charset="-122"/>
                           <a:cs typeface="Consolas" pitchFamily="34" charset="-120"/>
                         </a:rPr>
-                        <a:t>Spread + 150m balloon</a:t>
+                        <a:t>Partly, plus balloon</a:t>
                       </a:r>
                       <a:endParaRPr lang="en-US" sz="1100" dirty="0">
                         <a:latin typeface="Consolas" charset="0"/>
@@ -5727,7 +5987,7 @@
                           <a:ea typeface="Consolas" pitchFamily="34" charset="-122"/>
                           <a:cs typeface="Consolas" pitchFamily="34" charset="-120"/>
                         </a:rPr>
-                        <a:t>Entirely over life</a:t>
+                        <a:t>Over the whole life</a:t>
                       </a:r>
                       <a:endParaRPr lang="en-US" sz="1100" dirty="0">
                         <a:latin typeface="Consolas" charset="0"/>
@@ -5889,7 +6149,7 @@
                 <a:ea typeface="Calibri" pitchFamily="34" charset="-122"/>
                 <a:cs typeface="Calibri" pitchFamily="34" charset="-120"/>
               </a:rPr>
-              <a:t>Standard corporate bond. Interest-only coupons, principal in one lump at maturity. Highest reinvestment risk for investor.</a:t>
+              <a:t>Interest-only coupons, principal in one lump. The standard corporate and government bond. Highest reinvestment risk at maturity.</a:t>
             </a:r>
             <a:endParaRPr lang="en-US" sz="1200" dirty="0"/>
           </a:p>
@@ -6013,7 +6273,7 @@
                 <a:ea typeface="Calibri" pitchFamily="34" charset="-122"/>
                 <a:cs typeface="Calibri" pitchFamily="34" charset="-120"/>
               </a:rPr>
-              <a:t>Each payment = interest + principal. Level cash flow. Lower credit risk, higher reinvestment risk. Typical for mortgage loans.</a:t>
+              <a:t>A = 0.016 × 300 / [1 − 1.016⁻¹⁰] = USD 32.70 each period. Credit risk falls as the balance shrinks; reinvestment risk rises.</a:t>
             </a:r>
             <a:endParaRPr lang="en-US" sz="1200" dirty="0"/>
           </a:p>
@@ -6137,7 +6397,7 @@
                 <a:ea typeface="Calibri" pitchFamily="34" charset="-122"/>
                 <a:cs typeface="Calibri" pitchFamily="34" charset="-120"/>
               </a:rPr>
-              <a:t>Hybrid: partial amortization plus a balloon at maturity. CRE loans often use this structure.</a:t>
+              <a:t>PV of the 150 balloon = 127.98, so 172 amortizes: A = 0.016 × 172 / [1 − 1.016⁻¹⁰] = 18.75. Final payment 18.75 + 150.</a:t>
             </a:r>
             <a:endParaRPr lang="en-US" sz="1200" dirty="0"/>
           </a:p>
@@ -6244,7 +6504,7 @@
                 <a:ea typeface="Trebuchet MS" pitchFamily="34" charset="-122"/>
                 <a:cs typeface="Trebuchet MS" pitchFamily="34" charset="-120"/>
               </a:rPr>
-              <a:t>A fully-amortizing payment is just an annuity solved for PMT — early payments are mostly interest, late payments are mostly principal</a:t>
+              <a:t>A fully-amortizing payment is an annuity solved for PMT — early payments are mostly interest, late payments are almost entirely principal</a:t>
             </a:r>
             <a:endParaRPr lang="en-US" sz="1600" dirty="0"/>
           </a:p>
@@ -6348,7 +6608,7 @@
                 <a:ea typeface="Calibri" pitchFamily="34" charset="-122"/>
                 <a:cs typeface="Calibri" pitchFamily="34" charset="-120"/>
               </a:rPr>
-              <a:t>Source: CFA Institute, Curriculum Vol 6, Learning Module 2, Example 1 — 30-year Fixed-Rate Residential Mortgage, pp. 31–32.</a:t>
+              <a:t>Source: CFA Institute, Curriculum Vol 6, Learning Module 2, Example 1 — 30-Year Fixed-Rate Residential Mortgage Loan, p. 31.</a:t>
             </a:r>
             <a:endParaRPr lang="en-US" sz="750" dirty="0"/>
           </a:p>
@@ -6390,7 +6650,7 @@
                 <a:ea typeface="Calibri" pitchFamily="34" charset="-122"/>
                 <a:cs typeface="Calibri" pitchFamily="34" charset="-120"/>
               </a:rPr>
-              <a:t>Same identity as a PV-of-annuity rearranged: given the loan size, the rate, and the number of periods, solve for the level payment.</a:t>
+              <a:t>Same identity as the PV of an annuity, rearranged: given the loan, the periodic rate, and the number of periods, solve for the level payment.</a:t>
             </a:r>
             <a:endParaRPr lang="en-US" sz="1300" dirty="0"/>
           </a:p>
@@ -6404,8 +6664,8 @@
         </p:nvSpPr>
         <p:spPr>
           <a:xfrm>
-            <a:off x="320040" y="1188720"/>
-            <a:ext cx="8503920" cy="658368"/>
+            <a:off x="320040" y="1133856"/>
+            <a:ext cx="8503920" cy="530352"/>
           </a:xfrm>
           <a:prstGeom prst="rect">
             <a:avLst/>
@@ -6424,8 +6684,8 @@
         </p:nvSpPr>
         <p:spPr>
           <a:xfrm>
-            <a:off x="411480" y="1188720"/>
-            <a:ext cx="8321040" cy="658368"/>
+            <a:off x="411480" y="1133856"/>
+            <a:ext cx="8321040" cy="530352"/>
           </a:xfrm>
           <a:prstGeom prst="rect">
             <a:avLst/>
@@ -6466,7 +6726,7 @@
         </p:nvSpPr>
         <p:spPr>
           <a:xfrm>
-            <a:off x="320040" y="1874520"/>
+            <a:off x="320040" y="1691640"/>
             <a:ext cx="8503920" cy="256032"/>
           </a:xfrm>
           <a:prstGeom prst="rect">
@@ -6494,7 +6754,7 @@
                 <a:ea typeface="Calibri" pitchFamily="34" charset="-122"/>
                 <a:cs typeface="Calibri" pitchFamily="34" charset="-120"/>
               </a:rPr>
-              <a:t>where: A = periodic payment; r = rate per period (monthly here); Principal = loan amount; N = number of payments.</a:t>
+              <a:t>where: A = level payment; r = periodic rate; N = number of payments. Interest each period = r × outstanding balance.</a:t>
             </a:r>
             <a:endParaRPr lang="en-US" sz="1100" dirty="0"/>
           </a:p>
@@ -6508,8 +6768,8 @@
         </p:nvSpPr>
         <p:spPr>
           <a:xfrm>
-            <a:off x="320040" y="2331720"/>
-            <a:ext cx="4937760" cy="1965960"/>
+            <a:off x="320040" y="1938528"/>
+            <a:ext cx="4937760" cy="2313432"/>
           </a:xfrm>
           <a:prstGeom prst="rect">
             <a:avLst/>
@@ -6533,7 +6793,7 @@
         </p:nvSpPr>
         <p:spPr>
           <a:xfrm>
-            <a:off x="457200" y="2377440"/>
+            <a:off x="457200" y="1984248"/>
             <a:ext cx="4663440" cy="256032"/>
           </a:xfrm>
           <a:prstGeom prst="rect">
@@ -6561,7 +6821,7 @@
                 <a:ea typeface="Trebuchet MS" pitchFamily="34" charset="-122"/>
                 <a:cs typeface="Trebuchet MS" pitchFamily="34" charset="-120"/>
               </a:rPr>
-              <a:t>CFA LM 2 — USD 400,000 MORTGAGE · 30Y · 3.50% NOMINAL</a:t>
+              <a:t>CFA LM 2 EXAMPLE 1 — USD 400,000 MORTGAGE</a:t>
             </a:r>
             <a:endParaRPr lang="en-US" sz="1100" dirty="0"/>
           </a:p>
@@ -6575,50 +6835,8 @@
         </p:nvSpPr>
         <p:spPr>
           <a:xfrm>
-            <a:off x="457200" y="2670048"/>
-            <a:ext cx="4663440" cy="457200"/>
-          </a:xfrm>
-          <a:prstGeom prst="rect">
-            <a:avLst/>
-          </a:prstGeom>
-          <a:noFill/>
-          <a:ln/>
-        </p:spPr>
-        <p:txBody>
-          <a:bodyPr wrap="square" lIns="508" tIns="508" rIns="508" bIns="508" rtlCol="0" anchor="t">
-            <a:normAutofit/>
-            <a:spAutoFit/>
-          </a:bodyPr>
-          <a:lstStyle/>
-          <a:p>
-            <a:pPr algn="l" indent="0" marL="0">
-              <a:buNone/>
-            </a:pPr>
-            <a:r>
-              <a:rPr lang="en-US" sz="1200" dirty="0">
-                <a:solidFill>
-                  <a:srgbClr val="334155"/>
-                </a:solidFill>
-                <a:latin typeface="Calibri" pitchFamily="34" charset="0"/>
-                <a:ea typeface="Calibri" pitchFamily="34" charset="-122"/>
-                <a:cs typeface="Calibri" pitchFamily="34" charset="-120"/>
-              </a:rPr>
-              <a:t>Monthly rate = 3.50% / 12 = 0.29167%; N = 360 months.</a:t>
-            </a:r>
-            <a:endParaRPr lang="en-US" sz="1200" dirty="0"/>
-          </a:p>
-        </p:txBody>
-      </p:sp>
-      <p:sp>
-        <p:nvSpPr>
-          <p:cNvPr id="15" name="Text 13"/>
-          <p:cNvSpPr txBox="1"/>
-          <p:nvPr/>
-        </p:nvSpPr>
-        <p:spPr>
-          <a:xfrm>
-            <a:off x="457200" y="3182112"/>
-            <a:ext cx="4663440" cy="603504"/>
+            <a:off x="457200" y="2276856"/>
+            <a:ext cx="4663440" cy="1463040"/>
           </a:xfrm>
           <a:prstGeom prst="rect">
             <a:avLst/>
@@ -6640,7 +6858,7 @@
               <a:buNone/>
             </a:pPr>
             <a:r>
-              <a:rPr lang="en-US" sz="1050" b="1" dirty="0">
+              <a:rPr lang="en-US" sz="1150" b="1" dirty="0">
                 <a:solidFill>
                   <a:srgbClr val="1B2A4A"/>
                 </a:solidFill>
@@ -6657,7 +6875,7 @@
               <a:buNone/>
             </a:pPr>
             <a:r>
-              <a:rPr lang="en-US" sz="1050" dirty="0">
+              <a:rPr lang="en-US" sz="1150" dirty="0">
                 <a:solidFill>
                   <a:srgbClr val="334155"/>
                 </a:solidFill>
@@ -6665,7 +6883,7 @@
                 <a:ea typeface="Calibri" pitchFamily="34" charset="-122"/>
                 <a:cs typeface="Calibri" pitchFamily="34" charset="-120"/>
               </a:rPr>
-              <a:t>r × P = 0.0029167 × 400,000 = 1,166.67
+              <a:t>Loan 400,000 on a 500,000 home; r = 3.50% / 12 = 0.29167%; N = 360 months
 </a:t>
             </a:r>
             <a:pPr indent="0" marL="0">
@@ -6675,7 +6893,7 @@
               <a:buNone/>
             </a:pPr>
             <a:r>
-              <a:rPr lang="en-US" sz="1050" b="1" dirty="0">
+              <a:rPr lang="en-US" sz="1150" b="1" dirty="0">
                 <a:solidFill>
                   <a:srgbClr val="1B2A4A"/>
                 </a:solidFill>
@@ -6692,7 +6910,7 @@
               <a:buNone/>
             </a:pPr>
             <a:r>
-              <a:rPr lang="en-US" sz="1050" dirty="0">
+              <a:rPr lang="en-US" sz="1150" dirty="0">
                 <a:solidFill>
                   <a:srgbClr val="334155"/>
                 </a:solidFill>
@@ -6700,7 +6918,7 @@
                 <a:ea typeface="Calibri" pitchFamily="34" charset="-122"/>
                 <a:cs typeface="Calibri" pitchFamily="34" charset="-120"/>
               </a:rPr>
-              <a:t>Denominator = 1 − (1.0029167)^(−360) = 1 − 0.3499 = 0.6501
+              <a:t>Numerator: r × P = 0.0029167 × 400,000 = 1,166.67
 </a:t>
             </a:r>
             <a:pPr indent="0" marL="0">
@@ -6710,7 +6928,7 @@
               <a:buNone/>
             </a:pPr>
             <a:r>
-              <a:rPr lang="en-US" sz="1050" b="1" dirty="0">
+              <a:rPr lang="en-US" sz="1150" b="1" dirty="0">
                 <a:solidFill>
                   <a:srgbClr val="1B2A4A"/>
                 </a:solidFill>
@@ -6727,7 +6945,7 @@
               <a:buNone/>
             </a:pPr>
             <a:r>
-              <a:rPr lang="en-US" sz="1050" dirty="0">
+              <a:rPr lang="en-US" sz="1150" dirty="0">
                 <a:solidFill>
                   <a:srgbClr val="334155"/>
                 </a:solidFill>
@@ -6735,7 +6953,7 @@
                 <a:ea typeface="Calibri" pitchFamily="34" charset="-122"/>
                 <a:cs typeface="Calibri" pitchFamily="34" charset="-120"/>
               </a:rPr>
-              <a:t>Monthly payment A = 1,166.67 / 0.6501 × (1 / 0.0029167 adj) = USD 1,796.18
+              <a:t>Denominator: 1 − (1.0029167)⁻³⁶⁰ = 1 − 0.35047 = 0.64953
 </a:t>
             </a:r>
             <a:pPr indent="0" marL="0">
@@ -6745,7 +6963,7 @@
               <a:buNone/>
             </a:pPr>
             <a:r>
-              <a:rPr lang="en-US" sz="1050" b="1" dirty="0">
+              <a:rPr lang="en-US" sz="1150" b="1" dirty="0">
                 <a:solidFill>
                   <a:srgbClr val="1B2A4A"/>
                 </a:solidFill>
@@ -6762,7 +6980,7 @@
               <a:buNone/>
             </a:pPr>
             <a:r>
-              <a:rPr lang="en-US" sz="1050" dirty="0">
+              <a:rPr lang="en-US" sz="1150" dirty="0">
                 <a:solidFill>
                   <a:srgbClr val="334155"/>
                 </a:solidFill>
@@ -6770,21 +6988,91 @@
                 <a:ea typeface="Calibri" pitchFamily="34" charset="-122"/>
                 <a:cs typeface="Calibri" pitchFamily="34" charset="-120"/>
               </a:rPr>
-              <a:t>Total paid over 30 years = 1,796.18 × 360 = USD 646,625</a:t>
-            </a:r>
-            <a:endParaRPr lang="en-US" sz="1050" dirty="0"/>
+              <a:t>A = 1,166.67 / 0.64953 = USD 1,796.18 per month
+</a:t>
+            </a:r>
+            <a:pPr indent="0" marL="0">
+              <a:spcAft>
+                <a:spcPts val="200"/>
+              </a:spcAft>
+              <a:buNone/>
+            </a:pPr>
+            <a:r>
+              <a:rPr lang="en-US" sz="1150" b="1" dirty="0">
+                <a:solidFill>
+                  <a:srgbClr val="1B2A4A"/>
+                </a:solidFill>
+                <a:latin typeface="Calibri" pitchFamily="34" charset="0"/>
+                <a:ea typeface="Calibri" pitchFamily="34" charset="-122"/>
+                <a:cs typeface="Calibri" pitchFamily="34" charset="-120"/>
+              </a:rPr>
+              <a:t>5. </a:t>
+            </a:r>
+            <a:pPr indent="0" marL="0">
+              <a:spcAft>
+                <a:spcPts val="200"/>
+              </a:spcAft>
+              <a:buNone/>
+            </a:pPr>
+            <a:r>
+              <a:rPr lang="en-US" sz="1150" dirty="0">
+                <a:solidFill>
+                  <a:srgbClr val="334155"/>
+                </a:solidFill>
+                <a:latin typeface="Calibri" pitchFamily="34" charset="0"/>
+                <a:ea typeface="Calibri" pitchFamily="34" charset="-122"/>
+                <a:cs typeface="Calibri" pitchFamily="34" charset="-120"/>
+              </a:rPr>
+              <a:t>Month 1 = 1,166.67 interest + 629.51 principal — 65% of it is interest
+</a:t>
+            </a:r>
+            <a:pPr indent="0" marL="0">
+              <a:spcAft>
+                <a:spcPts val="200"/>
+              </a:spcAft>
+              <a:buNone/>
+            </a:pPr>
+            <a:r>
+              <a:rPr lang="en-US" sz="1150" b="1" dirty="0">
+                <a:solidFill>
+                  <a:srgbClr val="1B2A4A"/>
+                </a:solidFill>
+                <a:latin typeface="Calibri" pitchFamily="34" charset="0"/>
+                <a:ea typeface="Calibri" pitchFamily="34" charset="-122"/>
+                <a:cs typeface="Calibri" pitchFamily="34" charset="-120"/>
+              </a:rPr>
+              <a:t>6. </a:t>
+            </a:r>
+            <a:pPr indent="0" marL="0">
+              <a:spcAft>
+                <a:spcPts val="200"/>
+              </a:spcAft>
+              <a:buNone/>
+            </a:pPr>
+            <a:r>
+              <a:rPr lang="en-US" sz="1150" dirty="0">
+                <a:solidFill>
+                  <a:srgbClr val="334155"/>
+                </a:solidFill>
+                <a:latin typeface="Calibri" pitchFamily="34" charset="0"/>
+                <a:ea typeface="Calibri" pitchFamily="34" charset="-122"/>
+                <a:cs typeface="Calibri" pitchFamily="34" charset="-120"/>
+              </a:rPr>
+              <a:t>Total paid = 1,796.18 × 360 = USD 646,625</a:t>
+            </a:r>
+            <a:endParaRPr lang="en-US" sz="1150" dirty="0"/>
           </a:p>
         </p:txBody>
       </p:sp>
       <p:sp>
         <p:nvSpPr>
-          <p:cNvPr id="16" name="Shape 14"/>
+          <p:cNvPr id="15" name="Shape 13"/>
           <p:cNvSpPr/>
           <p:nvPr/>
         </p:nvSpPr>
         <p:spPr>
           <a:xfrm>
-            <a:off x="411480" y="3858768"/>
+            <a:off x="411480" y="3813048"/>
             <a:ext cx="4754880" cy="365760"/>
           </a:xfrm>
           <a:prstGeom prst="rect">
@@ -6798,13 +7086,13 @@
       </p:sp>
       <p:sp>
         <p:nvSpPr>
-          <p:cNvPr id="17" name="Text 15"/>
+          <p:cNvPr id="16" name="Text 14"/>
           <p:cNvSpPr txBox="1"/>
           <p:nvPr/>
         </p:nvSpPr>
         <p:spPr>
           <a:xfrm>
-            <a:off x="457200" y="3858768"/>
+            <a:off x="457200" y="3813048"/>
             <a:ext cx="4663440" cy="365760"/>
           </a:xfrm>
           <a:prstGeom prst="rect">
@@ -6832,7 +7120,7 @@
                 <a:ea typeface="Consolas" pitchFamily="34" charset="-122"/>
                 <a:cs typeface="Consolas" pitchFamily="34" charset="-120"/>
               </a:rPr>
-              <a:t>USD 1,796.18 / month  ·  USD 246,625 interest on USD 400,000 principal</a:t>
+              <a:t>USD 1,796.18 / month  ·  USD 246,625 of interest on USD 400,000 borrowed</a:t>
             </a:r>
             <a:endParaRPr lang="en-US" sz="1150" dirty="0"/>
           </a:p>
@@ -6853,7 +7141,7 @@
           </p:nvPr>
         </p:nvGraphicFramePr>
         <p:xfrm>
-          <a:off x="5394960" y="2331720"/>
+          <a:off x="5394960" y="1938528"/>
           <a:ext cx="3429000" cy="914400"/>
         </p:xfrm>
         <a:graphic>
@@ -6861,8 +7149,8 @@
             <a:tbl>
               <a:tblPr/>
               <a:tblGrid>
-                <a:gridCol w="731520"/>
-                <a:gridCol w="868680"/>
+                <a:gridCol w="685800"/>
+                <a:gridCol w="914400"/>
                 <a:gridCol w="914400"/>
                 <a:gridCol w="914400"/>
               </a:tblGrid>
@@ -7034,7 +7322,7 @@
                           <a:ea typeface="Trebuchet MS" pitchFamily="34" charset="-122"/>
                           <a:cs typeface="Trebuchet MS" pitchFamily="34" charset="-120"/>
                         </a:rPr>
-                        <a:t>Remaining</a:t>
+                        <a:t>Balance</a:t>
                       </a:r>
                       <a:endParaRPr lang="en-US" sz="1100" dirty="0">
                         <a:latin typeface="Trebuchet MS" charset="0"/>
@@ -8587,7 +8875,7 @@
                 <a:ea typeface="Trebuchet MS" pitchFamily="34" charset="-122"/>
                 <a:cs typeface="Trebuchet MS" pitchFamily="34" charset="-120"/>
               </a:rPr>
-              <a:t>Sinking funds retire principal through the life of the bond; ABS waterfalls route cash flows through tranches A→B→C in priority order</a:t>
+              <a:t>Sinking funds retire principal through the life of the bond; ABS waterfalls repay principal sequentially A → B → C while interest goes to everyone</a:t>
             </a:r>
             <a:endParaRPr lang="en-US" sz="1600" dirty="0"/>
           </a:p>
@@ -8691,7 +8979,7 @@
                 <a:ea typeface="Calibri" pitchFamily="34" charset="-122"/>
                 <a:cs typeface="Calibri" pitchFamily="34" charset="-120"/>
               </a:rPr>
-              <a:t>Source: CFA Institute, Curriculum Vol 6, Learning Module 2, pp. 32–33.</a:t>
+              <a:t>Source: CFA Institute, Curriculum Vol 6, Learning Module 2, sinking funds and waterfall structures, Exhibit 5, p. 32.</a:t>
             </a:r>
             <a:endParaRPr lang="en-US" sz="750" dirty="0"/>
           </a:p>
@@ -8733,7 +9021,7 @@
                 <a:ea typeface="Calibri" pitchFamily="34" charset="-122"/>
                 <a:cs typeface="Calibri" pitchFamily="34" charset="-120"/>
               </a:rPr>
-              <a:t>Both structures reduce credit risk for senior investors at the cost of reinvestment risk — but through very different mechanisms.</a:t>
+              <a:t>Both cut credit risk for the senior investor and raise reinvestment risk — but by completely different mechanisms: one shrinks the balance, one ranks the claims.</a:t>
             </a:r>
             <a:endParaRPr lang="en-US" sz="1300" dirty="0"/>
           </a:p>
@@ -8857,7 +9145,7 @@
                 <a:ea typeface="Calibri" pitchFamily="34" charset="-122"/>
                 <a:cs typeface="Calibri" pitchFamily="34" charset="-120"/>
               </a:rPr>
-              <a:t>Issuer sets aside cash periodically into an escrow account to retire a predetermined amount of principal early.</a:t>
+              <a:t>The issuer sets funds aside over time in an escrow account to retire a predetermined amount of principal early, on terms agreed at issuance.</a:t>
             </a:r>
             <a:endParaRPr lang="en-US" sz="1200" dirty="0"/>
           </a:p>
@@ -8880,7 +9168,7 @@
                 <a:ea typeface="Calibri" pitchFamily="34" charset="-122"/>
                 <a:cs typeface="Calibri" pitchFamily="34" charset="-120"/>
               </a:rPr>
-              <a:t>Mechanics:</a:t>
+              <a:t>How the bonds are taken out:</a:t>
             </a:r>
             <a:endParaRPr lang="en-US" sz="1200" dirty="0"/>
           </a:p>
@@ -8897,7 +9185,7 @@
                 <a:ea typeface="Calibri" pitchFamily="34" charset="-122"/>
                 <a:cs typeface="Calibri" pitchFamily="34" charset="-120"/>
               </a:rPr>
-              <a:t>  • Trustee selects bonds by random lottery</a:t>
+              <a:t>  • The trustee redeems a set amount, selected from investors at random</a:t>
             </a:r>
             <a:endParaRPr lang="en-US" sz="1200" dirty="0"/>
           </a:p>
@@ -8914,8 +9202,14 @@
                 <a:ea typeface="Calibri" pitchFamily="34" charset="-122"/>
                 <a:cs typeface="Calibri" pitchFamily="34" charset="-120"/>
               </a:rPr>
-              <a:t>  • Or issuer repurchases at a fixed sinking-fund price</a:t>
-            </a:r>
+              <a:t>  • Or the issuer repurchases at a predetermined fixed price</a:t>
+            </a:r>
+            <a:endParaRPr lang="en-US" sz="1200" dirty="0"/>
+          </a:p>
+          <a:p>
+            <a:pPr algn="l" indent="0" marL="0">
+              <a:buNone/>
+            </a:pPr>
             <a:endParaRPr lang="en-US" sz="1200" dirty="0"/>
           </a:p>
           <a:p>
@@ -8931,30 +9225,7 @@
                 <a:ea typeface="Calibri" pitchFamily="34" charset="-122"/>
                 <a:cs typeface="Calibri" pitchFamily="34" charset="-120"/>
               </a:rPr>
-              <a:t>  • Principal outstanding declines each year before maturity</a:t>
-            </a:r>
-            <a:endParaRPr lang="en-US" sz="1200" dirty="0"/>
-          </a:p>
-          <a:p>
-            <a:pPr algn="l" indent="0" marL="0">
-              <a:buNone/>
-            </a:pPr>
-            <a:endParaRPr lang="en-US" sz="1200" dirty="0"/>
-          </a:p>
-          <a:p>
-            <a:pPr algn="l" indent="0" marL="0">
-              <a:buNone/>
-            </a:pPr>
-            <a:r>
-              <a:rPr lang="en-US" sz="1200" dirty="0">
-                <a:solidFill>
-                  <a:srgbClr val="334155"/>
-                </a:solidFill>
-                <a:latin typeface="Calibri" pitchFamily="34" charset="0"/>
-                <a:ea typeface="Calibri" pitchFamily="34" charset="-122"/>
-                <a:cs typeface="Calibri" pitchFamily="34" charset="-120"/>
-              </a:rPr>
-              <a:t>Effect: credit risk falls (smaller outstanding balance), reinvestment risk rises.</a:t>
+              <a:t>Effect: principal outstanding falls before maturity, so credit risk falls and reinvestment risk rises — exactly like amortization.</a:t>
             </a:r>
             <a:endParaRPr lang="en-US" sz="1200" dirty="0"/>
           </a:p>
@@ -9078,7 +9349,7 @@
                 <a:ea typeface="Calibri" pitchFamily="34" charset="-122"/>
                 <a:cs typeface="Calibri" pitchFamily="34" charset="-120"/>
               </a:rPr>
-              <a:t>Cash flows from underlying loans route sequentially through tranches:</a:t>
+              <a:t>INTEREST is paid to all classes with no preference. Only PRINCIPAL is sequential:</a:t>
             </a:r>
             <a:endParaRPr lang="en-US" sz="1200" dirty="0"/>
           </a:p>
@@ -9095,7 +9366,7 @@
                 <a:ea typeface="Calibri" pitchFamily="34" charset="-122"/>
                 <a:cs typeface="Calibri" pitchFamily="34" charset="-120"/>
               </a:rPr>
-              <a:t>  1. Tranche A (senior) gets principal FIRST</a:t>
+              <a:t>  1. Tranche A receives principal first</a:t>
             </a:r>
             <a:endParaRPr lang="en-US" sz="1200" dirty="0"/>
           </a:p>
@@ -9112,7 +9383,7 @@
                 <a:ea typeface="Calibri" pitchFamily="34" charset="-122"/>
                 <a:cs typeface="Calibri" pitchFamily="34" charset="-120"/>
               </a:rPr>
-              <a:t>  2. Tranche B gets principal ONLY after A fully repaid</a:t>
+              <a:t>  2. Tranche B only once A is fully repaid</a:t>
             </a:r>
             <a:endParaRPr lang="en-US" sz="1200" dirty="0"/>
           </a:p>
@@ -9129,7 +9400,7 @@
                 <a:ea typeface="Calibri" pitchFamily="34" charset="-122"/>
                 <a:cs typeface="Calibri" pitchFamily="34" charset="-120"/>
               </a:rPr>
-              <a:t>  3. Tranche C (junior) gets principal ONLY after A &amp; B fully repaid</a:t>
+              <a:t>  3. Tranche C only once A and B are repaid</a:t>
             </a:r>
             <a:endParaRPr lang="en-US" sz="1200" dirty="0"/>
           </a:p>
@@ -9152,7 +9423,7 @@
                 <a:ea typeface="Calibri" pitchFamily="34" charset="-122"/>
                 <a:cs typeface="Calibri" pitchFamily="34" charset="-120"/>
               </a:rPr>
-              <a:t>Payment shortfalls absorbed bottom-up: Tranche C loses first, Tranche A last. Typical in RMBS, CMBS, CLO structures.</a:t>
+              <a:t>Shortfalls are borne bottom-up, so Tranche A faces the lowest credit risk, then B, then C. Standard in RMBS, CMBS and CLO structures.</a:t>
             </a:r>
             <a:endParaRPr lang="en-US" sz="1200" dirty="0"/>
           </a:p>
@@ -9167,7 +9438,7 @@
         <p:spPr>
           <a:xfrm>
             <a:off x="320040" y="4370832"/>
-            <a:ext cx="8503920" cy="274320"/>
+            <a:ext cx="8503920" cy="256032"/>
           </a:xfrm>
           <a:prstGeom prst="rect">
             <a:avLst/>
@@ -9187,7 +9458,7 @@
         <p:spPr>
           <a:xfrm>
             <a:off x="320040" y="4370832"/>
-            <a:ext cx="73152" cy="274320"/>
+            <a:ext cx="73152" cy="256032"/>
           </a:xfrm>
           <a:prstGeom prst="rect">
             <a:avLst/>
@@ -9207,7 +9478,7 @@
         <p:spPr>
           <a:xfrm>
             <a:off x="457200" y="4443984"/>
-            <a:ext cx="8275320" cy="164592"/>
+            <a:ext cx="8275320" cy="146304"/>
           </a:xfrm>
           <a:prstGeom prst="rect">
             <a:avLst/>
@@ -9234,7 +9505,7 @@
                 <a:ea typeface="Calibri" pitchFamily="34" charset="-122"/>
                 <a:cs typeface="Calibri" pitchFamily="34" charset="-120"/>
               </a:rPr>
-              <a:t>Tranche A spread &lt; Tranche B spread &lt; Tranche C spread — higher coupon compensates for higher loss priority.</a:t>
+              <a:t>Tranche A coupon &lt; B &lt; C. The extra coupon is payment for standing further back in the principal queue.</a:t>
             </a:r>
             <a:endParaRPr lang="en-US" sz="1200" dirty="0"/>
           </a:p>
@@ -9341,7 +9612,7 @@
                 <a:ea typeface="Trebuchet MS" pitchFamily="34" charset="-122"/>
                 <a:cs typeface="Trebuchet MS" pitchFamily="34" charset="-120"/>
               </a:rPr>
-              <a:t>Floating-rate, step-up, payment-in-kind, and inflation-linked bonds are all ways to make the coupon stream adaptive rather than fixed</a:t>
+              <a:t>Floating, step-up, credit-linked, payment-in-kind and index-linked coupons are five ways to make the interest stream adapt instead of staying fixed</a:t>
             </a:r>
             <a:endParaRPr lang="en-US" sz="1600" dirty="0"/>
           </a:p>
@@ -9417,6 +9688,61 @@
         </p:nvSpPr>
         <p:spPr>
           <a:xfrm>
+            <a:off x="320040" y="4325112"/>
+            <a:ext cx="8503920" cy="338328"/>
+          </a:xfrm>
+          <a:prstGeom prst="rect">
+            <a:avLst/>
+          </a:prstGeom>
+          <a:noFill/>
+          <a:ln/>
+        </p:spPr>
+        <p:txBody>
+          <a:bodyPr wrap="square" lIns="254" tIns="254" rIns="254" bIns="254" rtlCol="0" anchor="t"/>
+          <a:lstStyle/>
+          <a:p>
+            <a:pPr indent="0" marL="0">
+              <a:buNone/>
+            </a:pPr>
+            <a:r>
+              <a:rPr lang="en-US" sz="1000" dirty="0">
+                <a:solidFill>
+                  <a:srgbClr val="6B7A8D"/>
+                </a:solidFill>
+                <a:latin typeface="Calibri" pitchFamily="34" charset="0"/>
+                <a:ea typeface="Calibri" pitchFamily="34" charset="-122"/>
+                <a:cs typeface="Calibri" pitchFamily="34" charset="-120"/>
+              </a:rPr>
+              <a:t>¹ Capital-indexed (TIPS): principal is CPI-adjusted; at maturity investors usually receive the greater of adjusted principal or par.
+</a:t>
+            </a:r>
+            <a:pPr indent="0" marL="0">
+              <a:buNone/>
+            </a:pPr>
+            <a:r>
+              <a:rPr lang="en-US" sz="1000" dirty="0">
+                <a:solidFill>
+                  <a:srgbClr val="6B7A8D"/>
+                </a:solidFill>
+                <a:latin typeface="Calibri" pitchFamily="34" charset="0"/>
+                <a:ea typeface="Calibri" pitchFamily="34" charset="-122"/>
+                <a:cs typeface="Calibri" pitchFamily="34" charset="-120"/>
+              </a:rPr>
+              <a:t>² Interest-indexed bonds keep nominal principal fixed and index only the coupon — an FRN whose reference rate is inflation.
+</a:t>
+            </a:r>
+            <a:endParaRPr lang="en-US" sz="1000" dirty="0"/>
+          </a:p>
+        </p:txBody>
+      </p:sp>
+      <p:sp>
+        <p:nvSpPr>
+          <p:cNvPr id="8" name="Text 6"/>
+          <p:cNvSpPr txBox="1"/>
+          <p:nvPr/>
+        </p:nvSpPr>
+        <p:spPr>
+          <a:xfrm>
             <a:off x="320040" y="4663440"/>
             <a:ext cx="8503920" cy="201168"/>
           </a:xfrm>
@@ -9445,7 +9771,7 @@
                 <a:ea typeface="Calibri" pitchFamily="34" charset="-122"/>
                 <a:cs typeface="Calibri" pitchFamily="34" charset="-120"/>
               </a:rPr>
-              <a:t>Source: CFA Institute, Curriculum Vol 6, Learning Module 2, pp. 33–37 (incl. Antelas leveraged loan, PPC SLB, TIPS Example 2).</a:t>
+              <a:t>Source: CFA Institute, Curriculum Vol 6, Learning Module 2, variable interest and index-linked structures (Antelas leveraged loan, PPC SLB, TIPS Example 2), pp. 32–36.</a:t>
             </a:r>
             <a:endParaRPr lang="en-US" sz="750" dirty="0"/>
           </a:p>
@@ -9453,7 +9779,7 @@
       </p:sp>
       <p:sp>
         <p:nvSpPr>
-          <p:cNvPr id="8" name="Text 6"/>
+          <p:cNvPr id="9" name="Text 7"/>
           <p:cNvSpPr txBox="1"/>
           <p:nvPr/>
         </p:nvSpPr>
@@ -9487,7 +9813,7 @@
                 <a:ea typeface="Calibri" pitchFamily="34" charset="-122"/>
                 <a:cs typeface="Calibri" pitchFamily="34" charset="-120"/>
               </a:rPr>
-              <a:t>Each mechanism shifts a specific risk — interest rate, ESG, credit deterioration, or inflation — between the issuer and the investor.</a:t>
+              <a:t>Each mechanism moves one specific risk — interest rate, ESG performance, credit deterioration, cash strain or inflation — between issuer and investor.</a:t>
             </a:r>
             <a:endParaRPr lang="en-US" sz="1300" dirty="0"/>
           </a:p>
@@ -9638,7 +9964,7 @@
                           <a:ea typeface="Trebuchet MS" pitchFamily="34" charset="-122"/>
                           <a:cs typeface="Trebuchet MS" pitchFamily="34" charset="-120"/>
                         </a:rPr>
-                        <a:t>Typical use case</a:t>
+                        <a:t>Typical use</a:t>
                       </a:r>
                       <a:endParaRPr lang="en-US" sz="1100" dirty="0">
                         <a:latin typeface="Trebuchet MS" charset="0"/>
@@ -9740,7 +10066,7 @@
                           <a:ea typeface="Consolas" pitchFamily="34" charset="-122"/>
                           <a:cs typeface="Consolas" pitchFamily="34" charset="-120"/>
                         </a:rPr>
-                        <a:t>MRR + fixed spread; resets each period with MRR</a:t>
+                        <a:t>MRR + fixed spread, reset each period</a:t>
                       </a:r>
                       <a:endParaRPr lang="en-US" sz="1100" dirty="0">
                         <a:latin typeface="Consolas" charset="0"/>
@@ -9790,7 +10116,7 @@
                           <a:ea typeface="Consolas" pitchFamily="34" charset="-122"/>
                           <a:cs typeface="Consolas" pitchFamily="34" charset="-120"/>
                         </a:rPr>
-                        <a:t>Bank-funded loans</a:t>
+                        <a:t>Bank loan assets</a:t>
                       </a:r>
                       <a:endParaRPr lang="en-US" sz="1100" dirty="0">
                         <a:latin typeface="Consolas" charset="0"/>
@@ -9892,7 +10218,7 @@
                           <a:ea typeface="Consolas" pitchFamily="34" charset="-122"/>
                           <a:cs typeface="Consolas" pitchFamily="34" charset="-120"/>
                         </a:rPr>
-                        <a:t>Coupon rises by a preset schedule (or on credit-rating trigger)</a:t>
+                        <a:t>Rises by preset margins on preset dates or on a trigger</a:t>
                       </a:r>
                       <a:endParaRPr lang="en-US" sz="1100" dirty="0">
                         <a:latin typeface="Consolas" charset="0"/>
@@ -10044,7 +10370,7 @@
                           <a:ea typeface="Consolas" pitchFamily="34" charset="-122"/>
                           <a:cs typeface="Consolas" pitchFamily="34" charset="-120"/>
                         </a:rPr>
-                        <a:t>Coupon adjusts with leverage / ICR (Antelas: 250→325 bps by TLR)</a:t>
+                        <a:t>Spread steps with leverage: Antelas 250→325 bps</a:t>
                       </a:r>
                       <a:endParaRPr lang="en-US" sz="1100" dirty="0">
                         <a:latin typeface="Consolas" charset="0"/>
@@ -10196,7 +10522,7 @@
                           <a:ea typeface="Consolas" pitchFamily="34" charset="-122"/>
                           <a:cs typeface="Consolas" pitchFamily="34" charset="-120"/>
                         </a:rPr>
-                        <a:t>Interest paid as new principal — no cash outflow</a:t>
+                        <a:t>Interest paid as new principal — no cash out</a:t>
                       </a:r>
                       <a:endParaRPr lang="en-US" sz="1100" dirty="0">
                         <a:latin typeface="Consolas" charset="0"/>
@@ -10246,7 +10572,7 @@
                           <a:ea typeface="Consolas" pitchFamily="34" charset="-122"/>
                           <a:cs typeface="Consolas" pitchFamily="34" charset="-120"/>
                         </a:rPr>
-                        <a:t>Highly levered LBOs</a:t>
+                        <a:t>Levered LBOs</a:t>
                       </a:r>
                       <a:endParaRPr lang="en-US" sz="1100" dirty="0">
                         <a:latin typeface="Consolas" charset="0"/>
@@ -10348,7 +10674,7 @@
                           <a:ea typeface="Consolas" pitchFamily="34" charset="-122"/>
                           <a:cs typeface="Consolas" pitchFamily="34" charset="-120"/>
                         </a:rPr>
-                        <a:t>Principal adjusted by CPI each period; coupon = rate × adj. prin.</a:t>
+                        <a:t>Principal indexed to CPI; coupon on adj. principal</a:t>
                       </a:r>
                       <a:endParaRPr lang="en-US" sz="1100" dirty="0">
                         <a:latin typeface="Consolas" charset="0"/>
@@ -10398,7 +10724,7 @@
                           <a:ea typeface="Consolas" pitchFamily="34" charset="-122"/>
                           <a:cs typeface="Consolas" pitchFamily="34" charset="-120"/>
                         </a:rPr>
-                        <a:t>Sovereign inflation hedge</a:t>
+                        <a:t>Inflation hedge</a:t>
                       </a:r>
                       <a:endParaRPr lang="en-US" sz="1100" dirty="0">
                         <a:latin typeface="Consolas" charset="0"/>
@@ -10438,14 +10764,14 @@
       </p:graphicFrame>
       <p:sp>
         <p:nvSpPr>
-          <p:cNvPr id="10" name="Shape 7"/>
+          <p:cNvPr id="11" name="Shape 8"/>
           <p:cNvSpPr/>
           <p:nvPr/>
         </p:nvSpPr>
         <p:spPr>
           <a:xfrm>
-            <a:off x="320040" y="3291840"/>
-            <a:ext cx="8503920" cy="1051560"/>
+            <a:off x="320040" y="3017520"/>
+            <a:ext cx="8503920" cy="1188720"/>
           </a:xfrm>
           <a:prstGeom prst="rect">
             <a:avLst/>
@@ -10463,13 +10789,13 @@
       </p:sp>
       <p:sp>
         <p:nvSpPr>
-          <p:cNvPr id="11" name="Text 8"/>
+          <p:cNvPr id="12" name="Text 9"/>
           <p:cNvSpPr txBox="1"/>
           <p:nvPr/>
         </p:nvSpPr>
         <p:spPr>
           <a:xfrm>
-            <a:off x="457200" y="3337560"/>
+            <a:off x="457200" y="3063240"/>
             <a:ext cx="8229600" cy="256032"/>
           </a:xfrm>
           <a:prstGeom prst="rect">
@@ -10505,13 +10831,13 @@
       </p:sp>
       <p:sp>
         <p:nvSpPr>
-          <p:cNvPr id="12" name="Text 9"/>
+          <p:cNvPr id="13" name="Text 10"/>
           <p:cNvSpPr txBox="1"/>
           <p:nvPr/>
         </p:nvSpPr>
         <p:spPr>
           <a:xfrm>
-            <a:off x="457200" y="3630168"/>
+            <a:off x="457200" y="3355848"/>
             <a:ext cx="8229600" cy="457200"/>
           </a:xfrm>
           <a:prstGeom prst="rect">
@@ -10539,7 +10865,7 @@
                 <a:ea typeface="Calibri" pitchFamily="34" charset="-122"/>
                 <a:cs typeface="Calibri" pitchFamily="34" charset="-120"/>
               </a:rPr>
-              <a:t>USD 115m principal · 1.00% semi-annual coupon · CPI rises 265.00 → 267.25 (+0.849%)</a:t>
+              <a:t>USD 115m principal · 1.00% p.a. coupon paid semi-annually · CPI rises 265.00 → 267.25, i.e. +0.849%.</a:t>
             </a:r>
             <a:endParaRPr lang="en-US" sz="1200" dirty="0"/>
           </a:p>
@@ -10547,13 +10873,13 @@
       </p:sp>
       <p:sp>
         <p:nvSpPr>
-          <p:cNvPr id="13" name="Shape 10"/>
+          <p:cNvPr id="14" name="Shape 11"/>
           <p:cNvSpPr/>
           <p:nvPr/>
         </p:nvSpPr>
         <p:spPr>
           <a:xfrm>
-            <a:off x="411480" y="3904488"/>
+            <a:off x="411480" y="3767328"/>
             <a:ext cx="8321040" cy="365760"/>
           </a:xfrm>
           <a:prstGeom prst="rect">
@@ -10567,13 +10893,13 @@
       </p:sp>
       <p:sp>
         <p:nvSpPr>
-          <p:cNvPr id="14" name="Text 11"/>
+          <p:cNvPr id="15" name="Text 12"/>
           <p:cNvSpPr txBox="1"/>
           <p:nvPr/>
         </p:nvSpPr>
         <p:spPr>
           <a:xfrm>
-            <a:off x="457200" y="3904488"/>
+            <a:off x="457200" y="3767328"/>
             <a:ext cx="8229600" cy="365760"/>
           </a:xfrm>
           <a:prstGeom prst="rect">
@@ -10601,7 +10927,7 @@
                 <a:ea typeface="Consolas" pitchFamily="34" charset="-122"/>
                 <a:cs typeface="Consolas" pitchFamily="34" charset="-120"/>
               </a:rPr>
-              <a:t>Adjusted principal = 115.976m · Semi-annual coupon = 1.00% × 115.976m / 2 = USD 579,882</a:t>
+              <a:t>Adjusted principal 115,976,350 → annual 1,159,764 → semi-annual coupon USD 579,882</a:t>
             </a:r>
             <a:endParaRPr lang="en-US" sz="1150" dirty="0"/>
           </a:p>
@@ -10700,7 +11026,7 @@
               <a:buNone/>
             </a:pPr>
             <a:r>
-              <a:rPr lang="en-US" sz="1700" b="1" dirty="0">
+              <a:rPr lang="en-US" sz="1600" b="1" dirty="0">
                 <a:solidFill>
                   <a:srgbClr val="FFFFFF"/>
                 </a:solidFill>
@@ -10708,9 +11034,9 @@
                 <a:ea typeface="Trebuchet MS" pitchFamily="34" charset="-122"/>
                 <a:cs typeface="Trebuchet MS" pitchFamily="34" charset="-120"/>
               </a:rPr>
-              <a:t>Zero-coupon bonds replace coupons with a single discount at issuance; deferred-coupon bonds simply push coupons back in time</a:t>
-            </a:r>
-            <a:endParaRPr lang="en-US" sz="1700" dirty="0"/>
+              <a:t>Zero-coupon bonds replace every coupon with a single discount at issuance; deferred-coupon bonds just push the coupons back in time</a:t>
+            </a:r>
+            <a:endParaRPr lang="en-US" sz="1600" dirty="0"/>
           </a:p>
         </p:txBody>
       </p:sp>
@@ -10812,7 +11138,7 @@
                 <a:ea typeface="Calibri" pitchFamily="34" charset="-122"/>
                 <a:cs typeface="Calibri" pitchFamily="34" charset="-120"/>
               </a:rPr>
-              <a:t>Source: CFA Institute, Curriculum Vol 6, Learning Module 2, pp. 37–38.</a:t>
+              <a:t>Source: CFA Institute, Curriculum Vol 6, Learning Module 2, zero-coupon and deferred-coupon structures, Exhibit 8, pp. 36–37.</a:t>
             </a:r>
             <a:endParaRPr lang="en-US" sz="750" dirty="0"/>
           </a:p>
@@ -10854,7 +11180,7 @@
                 <a:ea typeface="Calibri" pitchFamily="34" charset="-122"/>
                 <a:cs typeface="Calibri" pitchFamily="34" charset="-120"/>
               </a:rPr>
-              <a:t>Both pay no periodic interest early on — but their motives, pricing, and risk profiles are different animals.</a:t>
+              <a:t>Both pay nothing early on — but their motives, their pricing and the risks they carry are different animals entirely.</a:t>
             </a:r>
             <a:endParaRPr lang="en-US" sz="1300" dirty="0"/>
           </a:p>
@@ -10978,7 +11304,7 @@
                 <a:ea typeface="Calibri" pitchFamily="34" charset="-122"/>
                 <a:cs typeface="Calibri" pitchFamily="34" charset="-120"/>
               </a:rPr>
-              <a:t>Single cash flow: par at maturity. Priced below par if r &gt; 0 — the implied interest is the discount.</a:t>
+              <a:t>One cash flow: par at maturity. Priced below par whenever rates are positive — the discount IS the cumulative interest.</a:t>
             </a:r>
             <a:endParaRPr lang="en-US" sz="1200" dirty="0"/>
           </a:p>
@@ -11001,7 +11327,7 @@
                 <a:ea typeface="Calibri" pitchFamily="34" charset="-122"/>
                 <a:cs typeface="Calibri" pitchFamily="34" charset="-120"/>
               </a:rPr>
-              <a:t>Why investors love them:</a:t>
+              <a:t>Why investors want them:</a:t>
             </a:r>
             <a:endParaRPr lang="en-US" sz="1200" dirty="0"/>
           </a:p>
@@ -11018,7 +11344,7 @@
                 <a:ea typeface="Calibri" pitchFamily="34" charset="-122"/>
                 <a:cs typeface="Calibri" pitchFamily="34" charset="-120"/>
               </a:rPr>
-              <a:t>  • No coupon-reinvestment risk</a:t>
+              <a:t>  • No coupon to reinvest, so no reinvestment risk</a:t>
             </a:r>
             <a:endParaRPr lang="en-US" sz="1200" dirty="0"/>
           </a:p>
@@ -11035,7 +11361,7 @@
                 <a:ea typeface="Calibri" pitchFamily="34" charset="-122"/>
                 <a:cs typeface="Calibri" pitchFamily="34" charset="-120"/>
               </a:rPr>
-              <a:t>  • Perfect duration matching for fixed future obligations</a:t>
+              <a:t>  • Clean matching of a known future obligation</a:t>
             </a:r>
             <a:endParaRPr lang="en-US" sz="1200" dirty="0"/>
           </a:p>
@@ -11052,7 +11378,7 @@
                 <a:ea typeface="Calibri" pitchFamily="34" charset="-122"/>
                 <a:cs typeface="Calibri" pitchFamily="34" charset="-120"/>
               </a:rPr>
-              <a:t>  • Useful for cash-flow matching in pension/insurance ALM</a:t>
+              <a:t>  • Natural fit for pension and insurance ALM</a:t>
             </a:r>
             <a:endParaRPr lang="en-US" sz="1200" dirty="0"/>
           </a:p>
@@ -11075,7 +11401,7 @@
                 <a:ea typeface="Calibri" pitchFamily="34" charset="-122"/>
                 <a:cs typeface="Calibri" pitchFamily="34" charset="-120"/>
               </a:rPr>
-              <a:t>Sources:</a:t>
+              <a:t>Where they come from:</a:t>
             </a:r>
             <a:endParaRPr lang="en-US" sz="1200" dirty="0"/>
           </a:p>
@@ -11092,7 +11418,7 @@
                 <a:ea typeface="Calibri" pitchFamily="34" charset="-122"/>
                 <a:cs typeface="Calibri" pitchFamily="34" charset="-120"/>
               </a:rPr>
-              <a:t>  • Sovereigns at short tenors (T-bills)</a:t>
+              <a:t>  • Governments at tenors under 12 months (T-bills)</a:t>
             </a:r>
             <a:endParaRPr lang="en-US" sz="1200" dirty="0"/>
           </a:p>
@@ -11109,7 +11435,7 @@
                 <a:ea typeface="Calibri" pitchFamily="34" charset="-122"/>
                 <a:cs typeface="Calibri" pitchFamily="34" charset="-120"/>
               </a:rPr>
-              <a:t>  • Stripped from coupon-bearing sovereigns ("STRIPS")</a:t>
+              <a:t>  • Intermediaries stripping coupon and principal payments off sovereign bullets</a:t>
             </a:r>
             <a:endParaRPr lang="en-US" sz="1200" dirty="0"/>
           </a:p>
@@ -11126,7 +11452,7 @@
                 <a:ea typeface="Calibri" pitchFamily="34" charset="-122"/>
                 <a:cs typeface="Calibri" pitchFamily="34" charset="-120"/>
               </a:rPr>
-              <a:t>  • Long-dated corporate zeros post-2008</a:t>
+              <a:t>  • Longer maturities became common after 2008 as sovereign rates fell to or below zero</a:t>
             </a:r>
             <a:endParaRPr lang="en-US" sz="1200" dirty="0"/>
           </a:p>
@@ -11250,7 +11576,7 @@
                 <a:ea typeface="Calibri" pitchFamily="34" charset="-122"/>
                 <a:cs typeface="Calibri" pitchFamily="34" charset="-120"/>
               </a:rPr>
-              <a:t>Zero coupons for the first few years, then higher coupons through maturity. Extreme case = zero-coupon itself.</a:t>
+              <a:t>No interest for the first few years, then a higher coupon through to maturity. A zero-coupon bond is the extreme case.</a:t>
             </a:r>
             <a:endParaRPr lang="en-US" sz="1200" dirty="0"/>
           </a:p>
@@ -11290,7 +11616,7 @@
                 <a:ea typeface="Calibri" pitchFamily="34" charset="-122"/>
                 <a:cs typeface="Calibri" pitchFamily="34" charset="-120"/>
               </a:rPr>
-              <a:t>  • Conserve cash near issuance</a:t>
+              <a:t>  • Conserve cash immediately after issuance</a:t>
             </a:r>
             <a:endParaRPr lang="en-US" sz="1200" dirty="0"/>
           </a:p>
@@ -11307,7 +11633,7 @@
                 <a:ea typeface="Calibri" pitchFamily="34" charset="-122"/>
                 <a:cs typeface="Calibri" pitchFamily="34" charset="-120"/>
               </a:rPr>
-              <a:t>  • Common where project does not generate income until completion (e.g., construction)</a:t>
+              <a:t>  • Common where a project generates no income until it is finished — construction, infrastructure</a:t>
             </a:r>
             <a:endParaRPr lang="en-US" sz="1200" dirty="0"/>
           </a:p>
@@ -11324,7 +11650,7 @@
                 <a:ea typeface="Calibri" pitchFamily="34" charset="-122"/>
                 <a:cs typeface="Calibri" pitchFamily="34" charset="-120"/>
               </a:rPr>
-              <a:t>  • Signal of lower credit quality</a:t>
+              <a:t>  • Often signals weaker credit quality</a:t>
             </a:r>
             <a:endParaRPr lang="en-US" sz="1200" dirty="0"/>
           </a:p>
@@ -11364,7 +11690,7 @@
                 <a:ea typeface="Calibri" pitchFamily="34" charset="-122"/>
                 <a:cs typeface="Calibri" pitchFamily="34" charset="-120"/>
               </a:rPr>
-              <a:t>  • Usually at a discount to par</a:t>
+              <a:t>  • Typically at a discount to par</a:t>
             </a:r>
             <a:endParaRPr lang="en-US" sz="1200" dirty="0"/>
           </a:p>
@@ -11381,7 +11707,7 @@
                 <a:ea typeface="Calibri" pitchFamily="34" charset="-122"/>
                 <a:cs typeface="Calibri" pitchFamily="34" charset="-120"/>
               </a:rPr>
-              <a:t>  • Higher later coupons do not fully offset zero-coupon years</a:t>
+              <a:t>  • The later, higher coupons do not usually make up for the interest forgone in the early years</a:t>
             </a:r>
             <a:endParaRPr lang="en-US" sz="1200" dirty="0"/>
           </a:p>
@@ -11396,7 +11722,7 @@
         <p:spPr>
           <a:xfrm>
             <a:off x="320040" y="4370832"/>
-            <a:ext cx="8503920" cy="274320"/>
+            <a:ext cx="8503920" cy="256032"/>
           </a:xfrm>
           <a:prstGeom prst="rect">
             <a:avLst/>
@@ -11416,7 +11742,7 @@
         <p:spPr>
           <a:xfrm>
             <a:off x="320040" y="4370832"/>
-            <a:ext cx="73152" cy="274320"/>
+            <a:ext cx="73152" cy="256032"/>
           </a:xfrm>
           <a:prstGeom prst="rect">
             <a:avLst/>
@@ -11436,7 +11762,7 @@
         <p:spPr>
           <a:xfrm>
             <a:off x="457200" y="4443984"/>
-            <a:ext cx="8275320" cy="164592"/>
+            <a:ext cx="8275320" cy="146304"/>
           </a:xfrm>
           <a:prstGeom prst="rect">
             <a:avLst/>
@@ -11463,7 +11789,7 @@
                 <a:ea typeface="Calibri" pitchFamily="34" charset="-122"/>
                 <a:cs typeface="Calibri" pitchFamily="34" charset="-120"/>
               </a:rPr>
-              <a:t>Both are priced today as the PV of known future cash flows — the same bond-math framework from Deck 01.</a:t>
+              <a:t>Both are still priced as the present value of known future cash flows — the same bond maths as Deck 01. Nothing new, only a different schedule.</a:t>
             </a:r>
             <a:endParaRPr lang="en-US" sz="1200" dirty="0"/>
           </a:p>
@@ -11562,7 +11888,7 @@
               <a:buNone/>
             </a:pPr>
             <a:r>
-              <a:rPr lang="en-US" sz="1700" b="1" dirty="0">
+              <a:rPr lang="en-US" sz="1600" b="1" dirty="0">
                 <a:solidFill>
                   <a:srgbClr val="FFFFFF"/>
                 </a:solidFill>
@@ -11570,9 +11896,9 @@
                 <a:ea typeface="Trebuchet MS" pitchFamily="34" charset="-122"/>
                 <a:cs typeface="Trebuchet MS" pitchFamily="34" charset="-120"/>
               </a:rPr>
-              <a:t>Put and conversion provisions hand optionality to the bondholder — puts provide a price floor, conversion trades debt for equity</a:t>
-            </a:r>
-            <a:endParaRPr lang="en-US" sz="1700" dirty="0"/>
+              <a:t>Put and conversion provisions belong to the INVESTOR — a put floors the price, conversion swaps debt for equity, and both cut the yield the issuer pays</a:t>
+            </a:r>
+            <a:endParaRPr lang="en-US" sz="1600" dirty="0"/>
           </a:p>
         </p:txBody>
       </p:sp>
@@ -11674,7 +12000,7 @@
                 <a:ea typeface="Calibri" pitchFamily="34" charset="-122"/>
                 <a:cs typeface="Calibri" pitchFamily="34" charset="-120"/>
               </a:rPr>
-              <a:t>Source: CFA Institute, Curriculum Vol 6, Learning Module 2, Exhibit 10 (ZTG Biotech), pp. 40–43.</a:t>
+              <a:t>Source: CFA Institute, Curriculum Vol 6, Learning Module 2, putable, convertible and contingent convertible bonds, Exhibit 10 (ZTG BioTech), pp. 40–42.</a:t>
             </a:r>
             <a:endParaRPr lang="en-US" sz="750" dirty="0"/>
           </a:p>
@@ -11716,7 +12042,7 @@
                 <a:ea typeface="Calibri" pitchFamily="34" charset="-122"/>
                 <a:cs typeface="Calibri" pitchFamily="34" charset="-120"/>
               </a:rPr>
-              <a:t>These embedded options are priced in at issuance — putable bonds yield less than option-free; convertibles yield even less because conversion adds equity upside.</a:t>
+              <a:t>Options held by the investor are paid for in yield: a putable bond yields LESS than an option-free bond, and a convertible yields less still.</a:t>
             </a:r>
             <a:endParaRPr lang="en-US" sz="1300" dirty="0"/>
           </a:p>
@@ -11730,8 +12056,8 @@
         </p:nvSpPr>
         <p:spPr>
           <a:xfrm>
-            <a:off x="320040" y="1188720"/>
-            <a:ext cx="8503920" cy="1965960"/>
+            <a:off x="320040" y="1170432"/>
+            <a:ext cx="8503920" cy="2057400"/>
           </a:xfrm>
           <a:prstGeom prst="rect">
             <a:avLst/>
@@ -11755,7 +12081,7 @@
         </p:nvSpPr>
         <p:spPr>
           <a:xfrm>
-            <a:off x="457200" y="1234440"/>
+            <a:off x="457200" y="1216152"/>
             <a:ext cx="8229600" cy="256032"/>
           </a:xfrm>
           <a:prstGeom prst="rect">
@@ -11783,7 +12109,7 @@
                 <a:ea typeface="Trebuchet MS" pitchFamily="34" charset="-122"/>
                 <a:cs typeface="Trebuchet MS" pitchFamily="34" charset="-120"/>
               </a:rPr>
-              <a:t>CFA LM 2 — ZTG BIOTECH FIVE-YEAR CONVERTIBLE</a:t>
+              <a:t>CFA LM 2 EXHIBIT 10 — ZTG BIOTECH 1.25% FIVE-YEAR CONVERTIBLE</a:t>
             </a:r>
             <a:endParaRPr lang="en-US" sz="1100" dirty="0"/>
           </a:p>
@@ -11797,7 +12123,7 @@
         </p:nvSpPr>
         <p:spPr>
           <a:xfrm>
-            <a:off x="457200" y="1527048"/>
+            <a:off x="457200" y="1508760"/>
             <a:ext cx="8229600" cy="457200"/>
           </a:xfrm>
           <a:prstGeom prst="rect">
@@ -11825,7 +12151,7 @@
                 <a:ea typeface="Calibri" pitchFamily="34" charset="-122"/>
                 <a:cs typeface="Calibri" pitchFamily="34" charset="-120"/>
               </a:rPr>
-              <a:t>EUR 300m convertible; 1.25% coupon; Face EUR 1,000 per unit; current share EUR 28; conversion price EUR 42.</a:t>
+              <a:t>EUR 300m issue, unsecured, traded in EUR 1,000 units. Share price at issue EUR 28.00; conversion price EUR 42.00.</a:t>
             </a:r>
             <a:endParaRPr lang="en-US" sz="1200" dirty="0"/>
           </a:p>
@@ -11839,8 +12165,8 @@
         </p:nvSpPr>
         <p:spPr>
           <a:xfrm>
-            <a:off x="457200" y="2039112"/>
-            <a:ext cx="8229600" cy="603504"/>
+            <a:off x="457200" y="2020824"/>
+            <a:ext cx="8229600" cy="694944"/>
           </a:xfrm>
           <a:prstGeom prst="rect">
             <a:avLst/>
@@ -11862,7 +12188,7 @@
               <a:buNone/>
             </a:pPr>
             <a:r>
-              <a:rPr lang="en-US" sz="1050" b="1" dirty="0">
+              <a:rPr lang="en-US" sz="1100" b="1" dirty="0">
                 <a:solidFill>
                   <a:srgbClr val="1B2A4A"/>
                 </a:solidFill>
@@ -11879,7 +12205,7 @@
               <a:buNone/>
             </a:pPr>
             <a:r>
-              <a:rPr lang="en-US" sz="1050" dirty="0">
+              <a:rPr lang="en-US" sz="1100" dirty="0">
                 <a:solidFill>
                   <a:srgbClr val="334155"/>
                 </a:solidFill>
@@ -11887,7 +12213,7 @@
                 <a:ea typeface="Calibri" pitchFamily="34" charset="-122"/>
                 <a:cs typeface="Calibri" pitchFamily="34" charset="-120"/>
               </a:rPr>
-              <a:t>Conversion ratio = Face / Conversion price = 1,000 / 42 = 23.81 shares per bond unit
+              <a:t>Conversion ratio = par / conversion price = 1,000 / 42 = 23.81 shares per unit
 </a:t>
             </a:r>
             <a:pPr indent="0" marL="0">
@@ -11897,7 +12223,7 @@
               <a:buNone/>
             </a:pPr>
             <a:r>
-              <a:rPr lang="en-US" sz="1050" b="1" dirty="0">
+              <a:rPr lang="en-US" sz="1100" b="1" dirty="0">
                 <a:solidFill>
                   <a:srgbClr val="1B2A4A"/>
                 </a:solidFill>
@@ -11914,7 +12240,7 @@
               <a:buNone/>
             </a:pPr>
             <a:r>
-              <a:rPr lang="en-US" sz="1050" dirty="0">
+              <a:rPr lang="en-US" sz="1100" dirty="0">
                 <a:solidFill>
                   <a:srgbClr val="334155"/>
                 </a:solidFill>
@@ -11922,7 +12248,7 @@
                 <a:ea typeface="Calibri" pitchFamily="34" charset="-122"/>
                 <a:cs typeface="Calibri" pitchFamily="34" charset="-120"/>
               </a:rPr>
-              <a:t>Conversion premium at issuance = (42 − 28) / 28 = +50.0% over current share price
+              <a:t>Conversion premium = (42 − 28) / 28 = 50.0% over the share price at issue
 </a:t>
             </a:r>
             <a:pPr indent="0" marL="0">
@@ -11932,7 +12258,7 @@
               <a:buNone/>
             </a:pPr>
             <a:r>
-              <a:rPr lang="en-US" sz="1050" b="1" dirty="0">
+              <a:rPr lang="en-US" sz="1100" b="1" dirty="0">
                 <a:solidFill>
                   <a:srgbClr val="1B2A4A"/>
                 </a:solidFill>
@@ -11949,7 +12275,7 @@
               <a:buNone/>
             </a:pPr>
             <a:r>
-              <a:rPr lang="en-US" sz="1050" dirty="0">
+              <a:rPr lang="en-US" sz="1100" dirty="0">
                 <a:solidFill>
                   <a:srgbClr val="334155"/>
                 </a:solidFill>
@@ -11957,7 +12283,7 @@
                 <a:ea typeface="Calibri" pitchFamily="34" charset="-122"/>
                 <a:cs typeface="Calibri" pitchFamily="34" charset="-120"/>
               </a:rPr>
-              <a:t>One year later share price at EUR 35 → Conversion value = 23.81 × 35 = EUR 833.35
+              <a:t>A year later the shares trade at EUR 35 → conversion value = 23.81 × 35 = EUR 833.35
 </a:t>
             </a:r>
             <a:pPr indent="0" marL="0">
@@ -11967,7 +12293,7 @@
               <a:buNone/>
             </a:pPr>
             <a:r>
-              <a:rPr lang="en-US" sz="1050" b="1" dirty="0">
+              <a:rPr lang="en-US" sz="1100" b="1" dirty="0">
                 <a:solidFill>
                   <a:srgbClr val="1B2A4A"/>
                 </a:solidFill>
@@ -11984,7 +12310,7 @@
               <a:buNone/>
             </a:pPr>
             <a:r>
-              <a:rPr lang="en-US" sz="1050" dirty="0">
+              <a:rPr lang="en-US" sz="1100" dirty="0">
                 <a:solidFill>
                   <a:srgbClr val="334155"/>
                 </a:solidFill>
@@ -11992,9 +12318,9 @@
                 <a:ea typeface="Calibri" pitchFamily="34" charset="-122"/>
                 <a:cs typeface="Calibri" pitchFamily="34" charset="-120"/>
               </a:rPr>
-              <a:t>Bond trades at ~EUR 1,000 (par) → investor holds on, collects 1.25% coupon, waits for share to rise above EUR 42.</a:t>
-            </a:r>
-            <a:endParaRPr lang="en-US" sz="1050" dirty="0"/>
+              <a:t>The bond trades near par, so the investor holds, takes the 1.25%, and waits for the shares to clear 42.</a:t>
+            </a:r>
+            <a:endParaRPr lang="en-US" sz="1100" dirty="0"/>
           </a:p>
         </p:txBody>
       </p:sp>
@@ -12006,7 +12332,7 @@
         </p:nvSpPr>
         <p:spPr>
           <a:xfrm>
-            <a:off x="411480" y="2715768"/>
+            <a:off x="411480" y="2788920"/>
             <a:ext cx="8321040" cy="365760"/>
           </a:xfrm>
           <a:prstGeom prst="rect">
@@ -12026,7 +12352,7 @@
         </p:nvSpPr>
         <p:spPr>
           <a:xfrm>
-            <a:off x="457200" y="2715768"/>
+            <a:off x="457200" y="2788920"/>
             <a:ext cx="8229600" cy="365760"/>
           </a:xfrm>
           <a:prstGeom prst="rect">
@@ -12054,7 +12380,7 @@
                 <a:ea typeface="Consolas" pitchFamily="34" charset="-122"/>
                 <a:cs typeface="Consolas" pitchFamily="34" charset="-120"/>
               </a:rPr>
-              <a:t>Convert only when share price &gt; conversion price (EUR 42)</a:t>
+              <a:t>Convert only once the conversion value beats the bond — i.e. share price above EUR 42</a:t>
             </a:r>
             <a:endParaRPr lang="en-US" sz="1150" dirty="0"/>
           </a:p>
@@ -12068,8 +12394,8 @@
         </p:nvSpPr>
         <p:spPr>
           <a:xfrm>
-            <a:off x="320040" y="3291840"/>
-            <a:ext cx="4160520" cy="1051560"/>
+            <a:off x="320040" y="3310128"/>
+            <a:ext cx="4160520" cy="1033272"/>
           </a:xfrm>
           <a:prstGeom prst="rect">
             <a:avLst/>
@@ -12088,8 +12414,8 @@
         </p:nvSpPr>
         <p:spPr>
           <a:xfrm>
-            <a:off x="320040" y="3291840"/>
-            <a:ext cx="73152" cy="1051560"/>
+            <a:off x="320040" y="3310128"/>
+            <a:ext cx="73152" cy="1033272"/>
           </a:xfrm>
           <a:prstGeom prst="rect">
             <a:avLst/>
@@ -12108,7 +12434,7 @@
         </p:nvSpPr>
         <p:spPr>
           <a:xfrm>
-            <a:off x="457200" y="3337560"/>
+            <a:off x="457200" y="3355848"/>
             <a:ext cx="3931920" cy="256032"/>
           </a:xfrm>
           <a:prstGeom prst="rect">
@@ -12150,8 +12476,8 @@
         </p:nvSpPr>
         <p:spPr>
           <a:xfrm>
-            <a:off x="457200" y="3611880"/>
-            <a:ext cx="3931920" cy="685800"/>
+            <a:off x="457200" y="3630168"/>
+            <a:ext cx="3931920" cy="667512"/>
           </a:xfrm>
           <a:prstGeom prst="rect">
             <a:avLst/>
@@ -12178,7 +12504,7 @@
                 <a:ea typeface="Calibri" pitchFamily="34" charset="-122"/>
                 <a:cs typeface="Calibri" pitchFamily="34" charset="-120"/>
               </a:rPr>
-              <a:t>Investor can sell bond back to issuer at par if rates rise → put price is a floor. Issuer pays lower coupon for the privilege.</a:t>
+              <a:t>If rates rise and the price falls, the investor sells the bond back at the put price — usually par. That price is a floor, and the issuer is compensated with a lower coupon.</a:t>
             </a:r>
             <a:endParaRPr lang="en-US" sz="1200" dirty="0"/>
           </a:p>
@@ -12192,8 +12518,8 @@
         </p:nvSpPr>
         <p:spPr>
           <a:xfrm>
-            <a:off x="4663440" y="3291840"/>
-            <a:ext cx="4160520" cy="1051560"/>
+            <a:off x="4663440" y="3310128"/>
+            <a:ext cx="4160520" cy="1033272"/>
           </a:xfrm>
           <a:prstGeom prst="rect">
             <a:avLst/>
@@ -12212,8 +12538,8 @@
         </p:nvSpPr>
         <p:spPr>
           <a:xfrm>
-            <a:off x="4663440" y="3291840"/>
-            <a:ext cx="73152" cy="1051560"/>
+            <a:off x="4663440" y="3310128"/>
+            <a:ext cx="73152" cy="1033272"/>
           </a:xfrm>
           <a:prstGeom prst="rect">
             <a:avLst/>
@@ -12232,7 +12558,7 @@
         </p:nvSpPr>
         <p:spPr>
           <a:xfrm>
-            <a:off x="4800600" y="3337560"/>
+            <a:off x="4800600" y="3355848"/>
             <a:ext cx="3931920" cy="256032"/>
           </a:xfrm>
           <a:prstGeom prst="rect">
@@ -12274,8 +12600,8 @@
         </p:nvSpPr>
         <p:spPr>
           <a:xfrm>
-            <a:off x="4800600" y="3611880"/>
-            <a:ext cx="3931920" cy="685800"/>
+            <a:off x="4800600" y="3630168"/>
+            <a:ext cx="3931920" cy="667512"/>
           </a:xfrm>
           <a:prstGeom prst="rect">
             <a:avLst/>
@@ -12302,7 +12628,7 @@
                 <a:ea typeface="Calibri" pitchFamily="34" charset="-122"/>
                 <a:cs typeface="Calibri" pitchFamily="34" charset="-120"/>
               </a:rPr>
-              <a:t>Bank capital instrument. Automatically converts to equity on trigger (e.g., CET1 ratio breach). Higher yield to compensate for involuntary conversion.</a:t>
+              <a:t>Converts on the DOWNSIDE, automatically, if a bank's core capital ratio breaches its regulatory minimum. Not the investor's choice — hence a higher yield.</a:t>
             </a:r>
             <a:endParaRPr lang="en-US" sz="1200" dirty="0"/>
           </a:p>
@@ -12637,7 +12963,7 @@
                 <a:ea typeface="Trebuchet MS" pitchFamily="34" charset="-122"/>
                 <a:cs typeface="Trebuchet MS" pitchFamily="34" charset="-120"/>
               </a:rPr>
-              <a:t>Fixed-income markets are sliced along three axes at once — issuer type, credit quality, and time to maturity — and every instrument lives in a specific cell</a:t>
+              <a:t>Fixed-income markets are sliced three ways at once — issuer type, credit quality, and time to maturity — and every instrument lives in a specific cell</a:t>
             </a:r>
             <a:endParaRPr lang="en-US" sz="1600" dirty="0"/>
           </a:p>
@@ -12741,7 +13067,7 @@
                 <a:ea typeface="Calibri" pitchFamily="34" charset="-122"/>
                 <a:cs typeface="Calibri" pitchFamily="34" charset="-120"/>
               </a:rPr>
-              <a:t>Source: CFA Institute, Curriculum Vol 6, Learning Module 3, "Fixed-Income Segments, Issuers, Investors", pp. 57–63.</a:t>
+              <a:t>Source: CFA Institute, Curriculum Vol 6, Learning Module 3, "Fixed-Income Segments, Issuers, and Investors", Exhibits 1–2, pp. 57–61.</a:t>
             </a:r>
             <a:endParaRPr lang="en-US" sz="750" dirty="0"/>
           </a:p>
@@ -12783,7 +13109,7 @@
                 <a:ea typeface="Calibri" pitchFamily="34" charset="-122"/>
                 <a:cs typeface="Calibri" pitchFamily="34" charset="-120"/>
               </a:rPr>
-              <a:t>Each cell has a natural issuer and a natural investor. Match mismatches drive alpha — and drive blow-ups when short-term funding meets long-term assets.</a:t>
+              <a:t>Each cell has a natural issuer and a natural investor. Mismatches between the two — short-term funding against long-term assets — are where blow-ups come from.</a:t>
             </a:r>
             <a:endParaRPr lang="en-US" sz="1300" dirty="0"/>
           </a:p>
@@ -12812,10 +13138,10 @@
             <a:tbl>
               <a:tblPr/>
               <a:tblGrid>
+                <a:gridCol w="2011680"/>
+                <a:gridCol w="1920240"/>
+                <a:gridCol w="2377440"/>
                 <a:gridCol w="2194560"/>
-                <a:gridCol w="2286000"/>
-                <a:gridCol w="2011680"/>
-                <a:gridCol w="2011680"/>
               </a:tblGrid>
               <a:tr h="274320">
                 <a:tc>
@@ -13037,7 +13363,7 @@
                           <a:ea typeface="Calibri" pitchFamily="34" charset="-122"/>
                           <a:cs typeface="Calibri" pitchFamily="34" charset="-120"/>
                         </a:rPr>
-                        <a:t>"Default risk-free" (DM sov)</a:t>
+                        <a:t>Default risk-free (DM sov)</a:t>
                       </a:r>
                       <a:endParaRPr lang="en-US" sz="1100" dirty="0">
                         <a:latin typeface="Calibri" charset="0"/>
@@ -13289,7 +13615,7 @@
                           <a:ea typeface="Consolas" pitchFamily="34" charset="-122"/>
                           <a:cs typeface="Consolas" pitchFamily="34" charset="-120"/>
                         </a:rPr>
-                        <a:t>Commercial paper · repo · ABCP</a:t>
+                        <a:t>Repo · CP · ABCP</a:t>
                       </a:r>
                       <a:endParaRPr lang="en-US" sz="1100" dirty="0">
                         <a:latin typeface="Consolas" charset="0"/>
@@ -13339,7 +13665,7 @@
                           <a:ea typeface="Consolas" pitchFamily="34" charset="-122"/>
                           <a:cs typeface="Consolas" pitchFamily="34" charset="-120"/>
                         </a:rPr>
-                        <a:t>Unsecured corporate bonds · ABS</a:t>
+                        <a:t>Unsecured bonds · ABS</a:t>
                       </a:r>
                       <a:endParaRPr lang="en-US" sz="1100" dirty="0">
                         <a:latin typeface="Consolas" charset="0"/>
@@ -13389,7 +13715,7 @@
                           <a:ea typeface="Consolas" pitchFamily="34" charset="-122"/>
                           <a:cs typeface="Consolas" pitchFamily="34" charset="-120"/>
                         </a:rPr>
-                        <a:t>Unsecured corporate bonds · MBS</a:t>
+                        <a:t>Unsecured bonds · MBS</a:t>
                       </a:r>
                       <a:endParaRPr lang="en-US" sz="1100" dirty="0">
                         <a:latin typeface="Consolas" charset="0"/>
@@ -13491,7 +13817,7 @@
                           <a:ea typeface="Consolas" pitchFamily="34" charset="-122"/>
                           <a:cs typeface="Consolas" pitchFamily="34" charset="-120"/>
                         </a:rPr>
-                        <a:t>(limited access)</a:t>
+                        <a:t>— (no access)</a:t>
                       </a:r>
                       <a:endParaRPr lang="en-US" sz="1100" dirty="0">
                         <a:latin typeface="Consolas" charset="0"/>
@@ -13541,7 +13867,7 @@
                           <a:ea typeface="Consolas" pitchFamily="34" charset="-122"/>
                           <a:cs typeface="Consolas" pitchFamily="34" charset="-120"/>
                         </a:rPr>
-                        <a:t>Secured corporate bonds · leveraged loans</a:t>
+                        <a:t>Secured bonds · lev loans</a:t>
                       </a:r>
                       <a:endParaRPr lang="en-US" sz="1100" dirty="0">
                         <a:latin typeface="Consolas" charset="0"/>
@@ -13637,8 +13963,8 @@
         </p:nvSpPr>
         <p:spPr>
           <a:xfrm>
-            <a:off x="320040" y="3017520"/>
-            <a:ext cx="8503920" cy="1325880"/>
+            <a:off x="320040" y="2468880"/>
+            <a:ext cx="8503920" cy="1097280"/>
           </a:xfrm>
           <a:prstGeom prst="rect">
             <a:avLst/>
@@ -13657,8 +13983,8 @@
         </p:nvSpPr>
         <p:spPr>
           <a:xfrm>
-            <a:off x="320040" y="3017520"/>
-            <a:ext cx="73152" cy="1325880"/>
+            <a:off x="320040" y="2468880"/>
+            <a:ext cx="73152" cy="1097280"/>
           </a:xfrm>
           <a:prstGeom prst="rect">
             <a:avLst/>
@@ -13677,7 +14003,7 @@
         </p:nvSpPr>
         <p:spPr>
           <a:xfrm>
-            <a:off x="457200" y="3063240"/>
+            <a:off x="457200" y="2514600"/>
             <a:ext cx="8275320" cy="256032"/>
           </a:xfrm>
           <a:prstGeom prst="rect">
@@ -13705,7 +14031,7 @@
                 <a:ea typeface="Trebuchet MS" pitchFamily="34" charset="-122"/>
                 <a:cs typeface="Trebuchet MS" pitchFamily="34" charset="-120"/>
               </a:rPr>
-              <a:t>NATURAL INVESTORS BY CELL</a:t>
+              <a:t>THE NATURAL INVESTOR IN EACH CELL</a:t>
             </a:r>
             <a:endParaRPr lang="en-US" sz="1100" dirty="0"/>
           </a:p>
@@ -13719,8 +14045,8 @@
         </p:nvSpPr>
         <p:spPr>
           <a:xfrm>
-            <a:off x="457200" y="3337560"/>
-            <a:ext cx="8275320" cy="960120"/>
+            <a:off x="457200" y="2788920"/>
+            <a:ext cx="8275320" cy="731520"/>
           </a:xfrm>
           <a:prstGeom prst="rect">
             <a:avLst/>
@@ -13747,7 +14073,131 @@
                 <a:ea typeface="Calibri" pitchFamily="34" charset="-122"/>
                 <a:cs typeface="Calibri" pitchFamily="34" charset="-120"/>
               </a:rPr>
-              <a:t>Money-market funds → short-term risk-free and IG. Financial intermediaries &amp; central banks → intermediate risk-free. Bond funds &amp; ETFs → intermediate IG. Pension funds &amp; insurers → long-term risk-free and IG (liability matching). Asset managers → long IG. Hedge funds &amp; distressed-debt funds → HY and special situations.</a:t>
+              <a:t>Money-market funds and corporate treasuries → short-dated risk-free and IG. Financial intermediaries and central banks → across the risk-free curve. Bond funds and ETFs → intermediate IG. Pension funds and insurers → long-dated risk-free and IG, matching liabilities. Asset managers → long IG. Hedge funds and distressed funds → high yield.</a:t>
+            </a:r>
+            <a:endParaRPr lang="en-US" sz="1200" dirty="0"/>
+          </a:p>
+        </p:txBody>
+      </p:sp>
+      <p:sp>
+        <p:nvSpPr>
+          <p:cNvPr id="14" name="Shape 11"/>
+          <p:cNvSpPr/>
+          <p:nvPr/>
+        </p:nvSpPr>
+        <p:spPr>
+          <a:xfrm>
+            <a:off x="320040" y="3657600"/>
+            <a:ext cx="8503920" cy="685800"/>
+          </a:xfrm>
+          <a:prstGeom prst="rect">
+            <a:avLst/>
+          </a:prstGeom>
+          <a:solidFill>
+            <a:srgbClr val="F5F7FA"/>
+          </a:solidFill>
+          <a:ln/>
+        </p:spPr>
+      </p:sp>
+      <p:sp>
+        <p:nvSpPr>
+          <p:cNvPr id="15" name="Shape 12"/>
+          <p:cNvSpPr/>
+          <p:nvPr/>
+        </p:nvSpPr>
+        <p:spPr>
+          <a:xfrm>
+            <a:off x="320040" y="3657600"/>
+            <a:ext cx="73152" cy="685800"/>
+          </a:xfrm>
+          <a:prstGeom prst="rect">
+            <a:avLst/>
+          </a:prstGeom>
+          <a:solidFill>
+            <a:srgbClr val="1B2A4A"/>
+          </a:solidFill>
+          <a:ln/>
+        </p:spPr>
+      </p:sp>
+      <p:sp>
+        <p:nvSpPr>
+          <p:cNvPr id="16" name="Text 13"/>
+          <p:cNvSpPr txBox="1"/>
+          <p:nvPr/>
+        </p:nvSpPr>
+        <p:spPr>
+          <a:xfrm>
+            <a:off x="457200" y="3703320"/>
+            <a:ext cx="8275320" cy="256032"/>
+          </a:xfrm>
+          <a:prstGeom prst="rect">
+            <a:avLst/>
+          </a:prstGeom>
+          <a:noFill/>
+          <a:ln/>
+        </p:spPr>
+        <p:txBody>
+          <a:bodyPr wrap="square" lIns="508" tIns="508" rIns="508" bIns="508" rtlCol="0" anchor="ctr">
+            <a:normAutofit/>
+            <a:spAutoFit/>
+          </a:bodyPr>
+          <a:lstStyle/>
+          <a:p>
+            <a:pPr algn="l" indent="0" marL="0">
+              <a:buNone/>
+            </a:pPr>
+            <a:r>
+              <a:rPr lang="en-US" sz="1100" b="1" spc="400" kern="0" dirty="0">
+                <a:solidFill>
+                  <a:srgbClr val="1B2A4A"/>
+                </a:solidFill>
+                <a:latin typeface="Trebuchet MS" pitchFamily="34" charset="0"/>
+                <a:ea typeface="Trebuchet MS" pitchFamily="34" charset="-122"/>
+                <a:cs typeface="Trebuchet MS" pitchFamily="34" charset="-120"/>
+              </a:rPr>
+              <a:t>ONE ISSUER, MANY INSTRUMENTS</a:t>
+            </a:r>
+            <a:endParaRPr lang="en-US" sz="1100" dirty="0"/>
+          </a:p>
+        </p:txBody>
+      </p:sp>
+      <p:sp>
+        <p:nvSpPr>
+          <p:cNvPr id="17" name="Text 14"/>
+          <p:cNvSpPr txBox="1"/>
+          <p:nvPr/>
+        </p:nvSpPr>
+        <p:spPr>
+          <a:xfrm>
+            <a:off x="457200" y="3977640"/>
+            <a:ext cx="8275320" cy="320040"/>
+          </a:xfrm>
+          <a:prstGeom prst="rect">
+            <a:avLst/>
+          </a:prstGeom>
+          <a:noFill/>
+          <a:ln/>
+        </p:spPr>
+        <p:txBody>
+          <a:bodyPr wrap="square" lIns="508" tIns="508" rIns="508" bIns="508" rtlCol="0" anchor="t">
+            <a:normAutofit/>
+            <a:spAutoFit/>
+          </a:bodyPr>
+          <a:lstStyle/>
+          <a:p>
+            <a:pPr algn="l" indent="0" marL="0">
+              <a:buNone/>
+            </a:pPr>
+            <a:r>
+              <a:rPr lang="en-US" sz="1200" dirty="0">
+                <a:solidFill>
+                  <a:srgbClr val="334155"/>
+                </a:solidFill>
+                <a:latin typeface="Calibri" pitchFamily="34" charset="0"/>
+                <a:ea typeface="Calibri" pitchFamily="34" charset="-122"/>
+                <a:cs typeface="Calibri" pitchFamily="34" charset="-120"/>
+              </a:rPr>
+              <a:t>An equity issuer typically has one instrument outstanding. At the end of 2021 Apple had over 80 fixed-income instruments and a single common stock.</a:t>
             </a:r>
             <a:endParaRPr lang="en-US" sz="1200" dirty="0"/>
           </a:p>
@@ -13846,7 +14296,7 @@
               <a:buNone/>
             </a:pPr>
             <a:r>
-              <a:rPr lang="en-US" sz="1700" b="1" dirty="0">
+              <a:rPr lang="en-US" sz="1600" b="1" dirty="0">
                 <a:solidFill>
                   <a:srgbClr val="FFFFFF"/>
                 </a:solidFill>
@@ -13854,9 +14304,9 @@
                 <a:ea typeface="Trebuchet MS" pitchFamily="34" charset="-122"/>
                 <a:cs typeface="Trebuchet MS" pitchFamily="34" charset="-120"/>
               </a:rPr>
-              <a:t>Credit ratings create a bright line at BBB-/Baa3 — below it, "high yield" or "junk"; above it, "investment grade"</a:t>
-            </a:r>
-            <a:endParaRPr lang="en-US" sz="1700" dirty="0"/>
+              <a:t>Credit ratings draw a bright line at BBB-/Baa3 — at or above it, investment grade; at BB+/Ba1 or below, high yield, speculative grade, or junk</a:t>
+            </a:r>
+            <a:endParaRPr lang="en-US" sz="1600" dirty="0"/>
           </a:p>
         </p:txBody>
       </p:sp>
@@ -13958,7 +14408,7 @@
                 <a:ea typeface="Calibri" pitchFamily="34" charset="-122"/>
                 <a:cs typeface="Calibri" pitchFamily="34" charset="-120"/>
               </a:rPr>
-              <a:t>Source: CFA Institute, Curriculum Vol 6, Learning Module 3, S&amp;P Rating Scale, pp. 59–61.</a:t>
+              <a:t>Source: CFA Institute, Curriculum Vol 6, Learning Module 3, S&amp;P credit ratings box and IG / HY definitions, pp. 59–60.</a:t>
             </a:r>
             <a:endParaRPr lang="en-US" sz="750" dirty="0"/>
           </a:p>
@@ -14000,7 +14450,7 @@
                 <a:ea typeface="Calibri" pitchFamily="34" charset="-122"/>
                 <a:cs typeface="Calibri" pitchFamily="34" charset="-120"/>
               </a:rPr>
-              <a:t>Many institutional portfolios are hard-capped at investment-grade ratings — the line is regulatory, contractual, and psychological, all at once.</a:t>
+              <a:t>That line is regulatory, contractual and psychological all at once — many institutional mandates are hard-capped at investment grade, so crossing it forces selling.</a:t>
             </a:r>
             <a:endParaRPr lang="en-US" sz="1300" dirty="0"/>
           </a:p>
@@ -14052,7 +14502,7 @@
                           <a:ea typeface="Trebuchet MS" pitchFamily="34" charset="-122"/>
                           <a:cs typeface="Trebuchet MS" pitchFamily="34" charset="-120"/>
                         </a:rPr>
-                        <a:t>Tier</a:t>
+                        <a:t>Band</a:t>
                       </a:r>
                       <a:endParaRPr lang="en-US" sz="1100" dirty="0">
                         <a:latin typeface="Trebuchet MS" charset="0"/>
@@ -14102,7 +14552,7 @@
                           <a:ea typeface="Trebuchet MS" pitchFamily="34" charset="-122"/>
                           <a:cs typeface="Trebuchet MS" pitchFamily="34" charset="-120"/>
                         </a:rPr>
-                        <a:t>S&amp;P rating</a:t>
+                        <a:t>S&amp;P</a:t>
                       </a:r>
                       <a:endParaRPr lang="en-US" sz="1100" dirty="0">
                         <a:latin typeface="Trebuchet MS" charset="0"/>
@@ -14152,7 +14602,7 @@
                           <a:ea typeface="Trebuchet MS" pitchFamily="34" charset="-122"/>
                           <a:cs typeface="Trebuchet MS" pitchFamily="34" charset="-120"/>
                         </a:rPr>
-                        <a:t>Meaning</a:t>
+                        <a:t>What S&amp;P means by it</a:t>
                       </a:r>
                       <a:endParaRPr lang="en-US" sz="1100" dirty="0">
                         <a:latin typeface="Trebuchet MS" charset="0"/>
@@ -14202,7 +14652,7 @@
                           <a:ea typeface="Trebuchet MS" pitchFamily="34" charset="-122"/>
                           <a:cs typeface="Trebuchet MS" pitchFamily="34" charset="-120"/>
                         </a:rPr>
-                        <a:t>Market share / role</a:t>
+                        <a:t>Who lives there</a:t>
                       </a:r>
                       <a:endParaRPr lang="en-US" sz="1100" dirty="0">
                         <a:latin typeface="Trebuchet MS" charset="0"/>
@@ -14254,7 +14704,7 @@
                           <a:ea typeface="Calibri" pitchFamily="34" charset="-122"/>
                           <a:cs typeface="Calibri" pitchFamily="34" charset="-120"/>
                         </a:rPr>
-                        <a:t>Prime / gilt-edged</a:t>
+                        <a:t>IG — highest</a:t>
                       </a:r>
                       <a:endParaRPr lang="en-US" sz="1100" dirty="0">
                         <a:latin typeface="Calibri" charset="0"/>
@@ -14354,7 +14804,7 @@
                           <a:ea typeface="Consolas" pitchFamily="34" charset="-122"/>
                           <a:cs typeface="Consolas" pitchFamily="34" charset="-120"/>
                         </a:rPr>
-                        <a:t>Extremely strong capacity to meet obligations</a:t>
+                        <a:t>Extremely strong capacity to pay</a:t>
                       </a:r>
                       <a:endParaRPr lang="en-US" sz="1100" dirty="0">
                         <a:latin typeface="Consolas" charset="0"/>
@@ -14404,7 +14854,7 @@
                           <a:ea typeface="Consolas" pitchFamily="34" charset="-122"/>
                           <a:cs typeface="Consolas" pitchFamily="34" charset="-120"/>
                         </a:rPr>
-                        <a:t>Sovereigns, top supranationals</a:t>
+                        <a:t>DM sovereigns, SSAs</a:t>
                       </a:r>
                       <a:endParaRPr lang="en-US" sz="1100" dirty="0">
                         <a:latin typeface="Consolas" charset="0"/>
@@ -14456,7 +14906,7 @@
                           <a:ea typeface="Calibri" pitchFamily="34" charset="-122"/>
                           <a:cs typeface="Calibri" pitchFamily="34" charset="-120"/>
                         </a:rPr>
-                        <a:t>Upper IG</a:t>
+                        <a:t>IG — upper</a:t>
                       </a:r>
                       <a:endParaRPr lang="en-US" sz="1100" dirty="0">
                         <a:latin typeface="Calibri" charset="0"/>
@@ -14556,7 +15006,7 @@
                           <a:ea typeface="Consolas" pitchFamily="34" charset="-122"/>
                           <a:cs typeface="Consolas" pitchFamily="34" charset="-120"/>
                         </a:rPr>
-                        <a:t>Very strong / strong; some sensitivity to adverse conditions</a:t>
+                        <a:t>Very strong / strong; some sensitivity</a:t>
                       </a:r>
                       <a:endParaRPr lang="en-US" sz="1100" dirty="0">
                         <a:latin typeface="Consolas" charset="0"/>
@@ -14658,7 +15108,7 @@
                           <a:ea typeface="Calibri" pitchFamily="34" charset="-122"/>
                           <a:cs typeface="Calibri" pitchFamily="34" charset="-120"/>
                         </a:rPr>
-                        <a:t>Lower IG</a:t>
+                        <a:t>IG — lower</a:t>
                       </a:r>
                       <a:endParaRPr lang="en-US" sz="1100" dirty="0">
                         <a:latin typeface="Calibri" charset="0"/>
@@ -14708,7 +15158,7 @@
                           <a:ea typeface="Consolas" pitchFamily="34" charset="-122"/>
                           <a:cs typeface="Consolas" pitchFamily="34" charset="-120"/>
                         </a:rPr>
-                        <a:t>BBB+ / BBB / BBB-</a:t>
+                        <a:t>BBB+ to BBB-</a:t>
                       </a:r>
                       <a:endParaRPr lang="en-US" sz="1100" dirty="0">
                         <a:latin typeface="Consolas" charset="0"/>
@@ -14758,7 +15208,7 @@
                           <a:ea typeface="Consolas" pitchFamily="34" charset="-122"/>
                           <a:cs typeface="Consolas" pitchFamily="34" charset="-120"/>
                         </a:rPr>
-                        <a:t>Adequate; more vulnerable to downturns</a:t>
+                        <a:t>Adequate; more exposed to downturns</a:t>
                       </a:r>
                       <a:endParaRPr lang="en-US" sz="1100" dirty="0">
                         <a:latin typeface="Consolas" charset="0"/>
@@ -14808,7 +15258,7 @@
                           <a:ea typeface="Consolas" pitchFamily="34" charset="-122"/>
                           <a:cs typeface="Consolas" pitchFamily="34" charset="-120"/>
                         </a:rPr>
-                        <a:t>Mainstream IG bond indices</a:t>
+                        <a:t>Core of IG indices</a:t>
                       </a:r>
                       <a:endParaRPr lang="en-US" sz="1100" dirty="0">
                         <a:latin typeface="Consolas" charset="0"/>
@@ -14860,7 +15310,7 @@
                           <a:ea typeface="Calibri" pitchFamily="34" charset="-122"/>
                           <a:cs typeface="Calibri" pitchFamily="34" charset="-120"/>
                         </a:rPr>
-                        <a:t>Highest HY</a:t>
+                        <a:t>HY — upper</a:t>
                       </a:r>
                       <a:endParaRPr lang="en-US" sz="1100" dirty="0">
                         <a:latin typeface="Calibri" charset="0"/>
@@ -14960,7 +15410,7 @@
                           <a:ea typeface="Consolas" pitchFamily="34" charset="-122"/>
                           <a:cs typeface="Consolas" pitchFamily="34" charset="-120"/>
                         </a:rPr>
-                        <a:t>Uncertainty in meeting obligations; near-term stability OK</a:t>
+                        <a:t>Faces major ongoing uncertainties</a:t>
                       </a:r>
                       <a:endParaRPr lang="en-US" sz="1100" dirty="0">
                         <a:latin typeface="Consolas" charset="0"/>
@@ -15010,7 +15460,7 @@
                           <a:ea typeface="Consolas" pitchFamily="34" charset="-122"/>
                           <a:cs typeface="Consolas" pitchFamily="34" charset="-120"/>
                         </a:rPr>
-                        <a:t>Leveraged finance market</a:t>
+                        <a:t>Leveraged finance</a:t>
                       </a:r>
                       <a:endParaRPr lang="en-US" sz="1100" dirty="0">
                         <a:latin typeface="Consolas" charset="0"/>
@@ -15062,7 +15512,7 @@
                           <a:ea typeface="Calibri" pitchFamily="34" charset="-122"/>
                           <a:cs typeface="Calibri" pitchFamily="34" charset="-120"/>
                         </a:rPr>
-                        <a:t>Deep HY / distressed</a:t>
+                        <a:t>HY — lower</a:t>
                       </a:r>
                       <a:endParaRPr lang="en-US" sz="1100" dirty="0">
                         <a:latin typeface="Calibri" charset="0"/>
@@ -15162,7 +15612,7 @@
                           <a:ea typeface="Consolas" pitchFamily="34" charset="-122"/>
                           <a:cs typeface="Consolas" pitchFamily="34" charset="-120"/>
                         </a:rPr>
-                        <a:t>Currently vulnerable; depends on favorable conditions</a:t>
+                        <a:t>Vulnerable; needs favourable conditions</a:t>
                       </a:r>
                       <a:endParaRPr lang="en-US" sz="1100" dirty="0">
                         <a:latin typeface="Consolas" charset="0"/>
@@ -15212,7 +15662,7 @@
                           <a:ea typeface="Consolas" pitchFamily="34" charset="-122"/>
                           <a:cs typeface="Consolas" pitchFamily="34" charset="-120"/>
                         </a:rPr>
-                        <a:t>Hedge funds, distressed</a:t>
+                        <a:t>Distressed funds</a:t>
                       </a:r>
                       <a:endParaRPr lang="en-US" sz="1100" dirty="0">
                         <a:latin typeface="Consolas" charset="0"/>
@@ -15414,7 +15864,7 @@
                           <a:ea typeface="Consolas" pitchFamily="34" charset="-122"/>
                           <a:cs typeface="Consolas" pitchFamily="34" charset="-120"/>
                         </a:rPr>
-                        <a:t>Restructuring / workout</a:t>
+                        <a:t>Restructuring</a:t>
                       </a:r>
                       <a:endParaRPr lang="en-US" sz="1100" dirty="0">
                         <a:latin typeface="Consolas" charset="0"/>
@@ -15460,8 +15910,8 @@
         </p:nvSpPr>
         <p:spPr>
           <a:xfrm>
-            <a:off x="320040" y="3566160"/>
-            <a:ext cx="8503920" cy="777240"/>
+            <a:off x="320040" y="3246120"/>
+            <a:ext cx="4160520" cy="1097280"/>
           </a:xfrm>
           <a:prstGeom prst="rect">
             <a:avLst/>
@@ -15480,8 +15930,8 @@
         </p:nvSpPr>
         <p:spPr>
           <a:xfrm>
-            <a:off x="320040" y="3566160"/>
-            <a:ext cx="73152" cy="777240"/>
+            <a:off x="320040" y="3246120"/>
+            <a:ext cx="73152" cy="1097280"/>
           </a:xfrm>
           <a:prstGeom prst="rect">
             <a:avLst/>
@@ -15500,8 +15950,8 @@
         </p:nvSpPr>
         <p:spPr>
           <a:xfrm>
-            <a:off x="457200" y="3611880"/>
-            <a:ext cx="8275320" cy="256032"/>
+            <a:off x="457200" y="3291840"/>
+            <a:ext cx="3931920" cy="256032"/>
           </a:xfrm>
           <a:prstGeom prst="rect">
             <a:avLst/>
@@ -15542,8 +15992,8 @@
         </p:nvSpPr>
         <p:spPr>
           <a:xfrm>
-            <a:off x="457200" y="3886200"/>
-            <a:ext cx="8275320" cy="411480"/>
+            <a:off x="457200" y="3566160"/>
+            <a:ext cx="3931920" cy="731520"/>
           </a:xfrm>
           <a:prstGeom prst="rect">
             <a:avLst/>
@@ -15570,7 +16020,131 @@
                 <a:ea typeface="Calibri" pitchFamily="34" charset="-122"/>
                 <a:cs typeface="Calibri" pitchFamily="34" charset="-120"/>
               </a:rPr>
-              <a:t>Former IG issuer downgraded to HY. Outstanding debt carries IG features (long maturity, few covenants, non-callable) — but investors must dump it, pressuring price as HY market is a fraction of IG size.</a:t>
+              <a:t>A former investment-grade issuer downgraded to high yield. Its bonds still carry IG documentation — long maturity, few covenants — but mandate-constrained holders become forced sellers.</a:t>
+            </a:r>
+            <a:endParaRPr lang="en-US" sz="1200" dirty="0"/>
+          </a:p>
+        </p:txBody>
+      </p:sp>
+      <p:sp>
+        <p:nvSpPr>
+          <p:cNvPr id="14" name="Shape 11"/>
+          <p:cNvSpPr/>
+          <p:nvPr/>
+        </p:nvSpPr>
+        <p:spPr>
+          <a:xfrm>
+            <a:off x="4663440" y="3246120"/>
+            <a:ext cx="4160520" cy="1097280"/>
+          </a:xfrm>
+          <a:prstGeom prst="rect">
+            <a:avLst/>
+          </a:prstGeom>
+          <a:solidFill>
+            <a:srgbClr val="F5F7FA"/>
+          </a:solidFill>
+          <a:ln/>
+        </p:spPr>
+      </p:sp>
+      <p:sp>
+        <p:nvSpPr>
+          <p:cNvPr id="15" name="Shape 12"/>
+          <p:cNvSpPr/>
+          <p:nvPr/>
+        </p:nvSpPr>
+        <p:spPr>
+          <a:xfrm>
+            <a:off x="4663440" y="3246120"/>
+            <a:ext cx="73152" cy="1097280"/>
+          </a:xfrm>
+          <a:prstGeom prst="rect">
+            <a:avLst/>
+          </a:prstGeom>
+          <a:solidFill>
+            <a:srgbClr val="1B2A4A"/>
+          </a:solidFill>
+          <a:ln/>
+        </p:spPr>
+      </p:sp>
+      <p:sp>
+        <p:nvSpPr>
+          <p:cNvPr id="16" name="Text 13"/>
+          <p:cNvSpPr txBox="1"/>
+          <p:nvPr/>
+        </p:nvSpPr>
+        <p:spPr>
+          <a:xfrm>
+            <a:off x="4800600" y="3291840"/>
+            <a:ext cx="3931920" cy="256032"/>
+          </a:xfrm>
+          <a:prstGeom prst="rect">
+            <a:avLst/>
+          </a:prstGeom>
+          <a:noFill/>
+          <a:ln/>
+        </p:spPr>
+        <p:txBody>
+          <a:bodyPr wrap="square" lIns="508" tIns="508" rIns="508" bIns="508" rtlCol="0" anchor="ctr">
+            <a:normAutofit/>
+            <a:spAutoFit/>
+          </a:bodyPr>
+          <a:lstStyle/>
+          <a:p>
+            <a:pPr algn="l" indent="0" marL="0">
+              <a:buNone/>
+            </a:pPr>
+            <a:r>
+              <a:rPr lang="en-US" sz="1100" b="1" spc="400" kern="0" dirty="0">
+                <a:solidFill>
+                  <a:srgbClr val="1B2A4A"/>
+                </a:solidFill>
+                <a:latin typeface="Trebuchet MS" pitchFamily="34" charset="0"/>
+                <a:ea typeface="Trebuchet MS" pitchFamily="34" charset="-122"/>
+                <a:cs typeface="Trebuchet MS" pitchFamily="34" charset="-120"/>
+              </a:rPr>
+              <a:t>WHAT A RATING MEASURES</a:t>
+            </a:r>
+            <a:endParaRPr lang="en-US" sz="1100" dirty="0"/>
+          </a:p>
+        </p:txBody>
+      </p:sp>
+      <p:sp>
+        <p:nvSpPr>
+          <p:cNvPr id="17" name="Text 14"/>
+          <p:cNvSpPr txBox="1"/>
+          <p:nvPr/>
+        </p:nvSpPr>
+        <p:spPr>
+          <a:xfrm>
+            <a:off x="4800600" y="3566160"/>
+            <a:ext cx="3931920" cy="731520"/>
+          </a:xfrm>
+          <a:prstGeom prst="rect">
+            <a:avLst/>
+          </a:prstGeom>
+          <a:noFill/>
+          <a:ln/>
+        </p:spPr>
+        <p:txBody>
+          <a:bodyPr wrap="square" lIns="508" tIns="508" rIns="508" bIns="508" rtlCol="0" anchor="t">
+            <a:normAutofit/>
+            <a:spAutoFit/>
+          </a:bodyPr>
+          <a:lstStyle/>
+          <a:p>
+            <a:pPr algn="l" indent="0" marL="0">
+              <a:buNone/>
+            </a:pPr>
+            <a:r>
+              <a:rPr lang="en-US" sz="1200" dirty="0">
+                <a:solidFill>
+                  <a:srgbClr val="334155"/>
+                </a:solidFill>
+                <a:latin typeface="Calibri" pitchFamily="34" charset="0"/>
+                <a:ea typeface="Calibri" pitchFamily="34" charset="-122"/>
+                <a:cs typeface="Calibri" pitchFamily="34" charset="-120"/>
+              </a:rPr>
+              <a:t>Both the probability of default AND the expected loss if default occurs. Agencies rate issuers and individual issues separately, and many mandates cap unrated holdings.</a:t>
             </a:r>
             <a:endParaRPr lang="en-US" sz="1200" dirty="0"/>
           </a:p>
@@ -15677,7 +16251,7 @@
                 <a:ea typeface="Trebuchet MS" pitchFamily="34" charset="-122"/>
                 <a:cs typeface="Trebuchet MS" pitchFamily="34" charset="-120"/>
               </a:rPr>
-              <a:t>Fixed-income indexes have 10×+ more constituents and 10×+ more turnover than equity indexes — market-value weighted, monthly-rebalanced</a:t>
+              <a:t>Bond indexes differ from equity indexes in three ways — far more constituents, far higher turnover, and weighting by market value of debt outstanding</a:t>
             </a:r>
             <a:endParaRPr lang="en-US" sz="1600" dirty="0"/>
           </a:p>
@@ -15781,7 +16355,7 @@
                 <a:ea typeface="Calibri" pitchFamily="34" charset="-122"/>
                 <a:cs typeface="Calibri" pitchFamily="34" charset="-120"/>
               </a:rPr>
-              <a:t>Source: CFA Institute, Curriculum Vol 6, Learning Module 3, "Fixed-Income Indexes", pp. 65–69.</a:t>
+              <a:t>Source: CFA Institute, Curriculum Vol 6, Learning Module 3, "Fixed-Income Indexes", Exhibits 3–5, pp. 65–68.</a:t>
             </a:r>
             <a:endParaRPr lang="en-US" sz="750" dirty="0"/>
           </a:p>
@@ -15823,7 +16397,7 @@
                 <a:ea typeface="Calibri" pitchFamily="34" charset="-122"/>
                 <a:cs typeface="Calibri" pitchFamily="34" charset="-120"/>
               </a:rPr>
-              <a:t>Because bonds mature and issuers refinance, bond indexes churn constantly — funds tracking them hold a representative sample, never the full basket.</a:t>
+              <a:t>One issuer, many eligible bonds — some indexes carry over 10,000 constituents. Bonds mature and get refinanced, so indexes rebalance monthly and funds hold a representative sample, never the full basket.</a:t>
             </a:r>
             <a:endParaRPr lang="en-US" sz="1300" dirty="0"/>
           </a:p>
@@ -15837,8 +16411,8 @@
         </p:nvSpPr>
         <p:spPr>
           <a:xfrm>
-            <a:off x="320040" y="1188720"/>
-            <a:ext cx="2743200" cy="3154680"/>
+            <a:off x="320040" y="1234440"/>
+            <a:ext cx="2743200" cy="3108960"/>
           </a:xfrm>
           <a:prstGeom prst="rect">
             <a:avLst/>
@@ -15857,8 +16431,8 @@
         </p:nvSpPr>
         <p:spPr>
           <a:xfrm>
-            <a:off x="320040" y="1188720"/>
-            <a:ext cx="73152" cy="3154680"/>
+            <a:off x="320040" y="1234440"/>
+            <a:ext cx="73152" cy="3108960"/>
           </a:xfrm>
           <a:prstGeom prst="rect">
             <a:avLst/>
@@ -15877,7 +16451,7 @@
         </p:nvSpPr>
         <p:spPr>
           <a:xfrm>
-            <a:off x="457200" y="1280160"/>
+            <a:off x="457200" y="1325880"/>
             <a:ext cx="2468880" cy="274320"/>
           </a:xfrm>
           <a:prstGeom prst="rect">
@@ -15905,7 +16479,7 @@
                 <a:ea typeface="Trebuchet MS" pitchFamily="34" charset="-122"/>
                 <a:cs typeface="Trebuchet MS" pitchFamily="34" charset="-120"/>
               </a:rPr>
-              <a:t>BLOOMBERG GLOBAL AGGREGATE</a:t>
+              <a:t>GLOBAL AGGREGATE</a:t>
             </a:r>
             <a:endParaRPr lang="en-US" sz="1100" dirty="0"/>
           </a:p>
@@ -15919,8 +16493,8 @@
         </p:nvSpPr>
         <p:spPr>
           <a:xfrm>
-            <a:off x="484632" y="1645920"/>
-            <a:ext cx="2423160" cy="2651760"/>
+            <a:off x="484632" y="1691640"/>
+            <a:ext cx="2423160" cy="2606040"/>
           </a:xfrm>
           <a:prstGeom prst="rect">
             <a:avLst/>
@@ -15947,7 +16521,7 @@
                 <a:ea typeface="Calibri" pitchFamily="34" charset="-122"/>
                 <a:cs typeface="Calibri" pitchFamily="34" charset="-120"/>
               </a:rPr>
-              <a:t>Scope: fixed-rate IG bonds from sovereign, corporate, securitized issuers in 28 developed &amp; emerging markets.</a:t>
+              <a:t>Scope: fixed-rate bonds from sovereign, government, corporate and securitized issuers across 28 developed and emerging markets.</a:t>
             </a:r>
             <a:endParaRPr lang="en-US" sz="1050" dirty="0"/>
           </a:p>
@@ -15970,7 +16544,7 @@
                 <a:ea typeface="Calibri" pitchFamily="34" charset="-122"/>
                 <a:cs typeface="Calibri" pitchFamily="34" charset="-120"/>
               </a:rPr>
-              <a:t>Filters:</a:t>
+              <a:t>Criteria:</a:t>
             </a:r>
             <a:endParaRPr lang="en-US" sz="1050" dirty="0"/>
           </a:p>
@@ -15987,7 +16561,7 @@
                 <a:ea typeface="Calibri" pitchFamily="34" charset="-122"/>
                 <a:cs typeface="Calibri" pitchFamily="34" charset="-120"/>
               </a:rPr>
-              <a:t>  • IG rating</a:t>
+              <a:t>  • Investment-grade rating</a:t>
             </a:r>
             <a:endParaRPr lang="en-US" sz="1050" dirty="0"/>
           </a:p>
@@ -16004,7 +16578,7 @@
                 <a:ea typeface="Calibri" pitchFamily="34" charset="-122"/>
                 <a:cs typeface="Calibri" pitchFamily="34" charset="-120"/>
               </a:rPr>
-              <a:t>  • ≥ 1y to maturity</a:t>
+              <a:t>  • At least 1y to maturity</a:t>
             </a:r>
             <a:endParaRPr lang="en-US" sz="1050" dirty="0"/>
           </a:p>
@@ -16021,14 +16595,8 @@
                 <a:ea typeface="Calibri" pitchFamily="34" charset="-122"/>
                 <a:cs typeface="Calibri" pitchFamily="34" charset="-120"/>
               </a:rPr>
-              <a:t>  • Min issue sizes by market</a:t>
-            </a:r>
-            <a:endParaRPr lang="en-US" sz="1050" dirty="0"/>
-          </a:p>
-          <a:p>
-            <a:pPr algn="l" indent="0" marL="0">
-              <a:buNone/>
-            </a:pPr>
+              <a:t>  • Minimum issue size by market</a:t>
+            </a:r>
             <a:endParaRPr lang="en-US" sz="1050" dirty="0"/>
           </a:p>
           <a:p>
@@ -16044,7 +16612,7 @@
                 <a:ea typeface="Calibri" pitchFamily="34" charset="-122"/>
                 <a:cs typeface="Calibri" pitchFamily="34" charset="-120"/>
               </a:rPr>
-              <a:t>Excludes: HY, unrated, sub-min-size, below-min-maturity.</a:t>
+              <a:t>  • Fully taxable issues only</a:t>
             </a:r>
             <a:endParaRPr lang="en-US" sz="1050" dirty="0"/>
           </a:p>
@@ -16067,7 +16635,30 @@
                 <a:ea typeface="Calibri" pitchFamily="34" charset="-122"/>
                 <a:cs typeface="Calibri" pitchFamily="34" charset="-120"/>
               </a:rPr>
-              <a:t>Monthly rebalance.</a:t>
+              <a:t>Excludes: high yield, unrated, and anything below minimum size.</a:t>
+            </a:r>
+            <a:endParaRPr lang="en-US" sz="1050" dirty="0"/>
+          </a:p>
+          <a:p>
+            <a:pPr algn="l" indent="0" marL="0">
+              <a:buNone/>
+            </a:pPr>
+            <a:endParaRPr lang="en-US" sz="1050" dirty="0"/>
+          </a:p>
+          <a:p>
+            <a:pPr algn="l" indent="0" marL="0">
+              <a:buNone/>
+            </a:pPr>
+            <a:r>
+              <a:rPr lang="en-US" sz="1050" dirty="0">
+                <a:solidFill>
+                  <a:srgbClr val="334155"/>
+                </a:solidFill>
+                <a:latin typeface="Calibri" pitchFamily="34" charset="0"/>
+                <a:ea typeface="Calibri" pitchFamily="34" charset="-122"/>
+                <a:cs typeface="Calibri" pitchFamily="34" charset="-120"/>
+              </a:rPr>
+              <a:t>Rebalanced monthly.</a:t>
             </a:r>
             <a:endParaRPr lang="en-US" sz="1050" dirty="0"/>
           </a:p>
@@ -16081,8 +16672,8 @@
         </p:nvSpPr>
         <p:spPr>
           <a:xfrm>
-            <a:off x="3200400" y="1188720"/>
-            <a:ext cx="2743200" cy="3154680"/>
+            <a:off x="3200400" y="1234440"/>
+            <a:ext cx="2743200" cy="3108960"/>
           </a:xfrm>
           <a:prstGeom prst="rect">
             <a:avLst/>
@@ -16101,8 +16692,8 @@
         </p:nvSpPr>
         <p:spPr>
           <a:xfrm>
-            <a:off x="3200400" y="1188720"/>
-            <a:ext cx="73152" cy="3154680"/>
+            <a:off x="3200400" y="1234440"/>
+            <a:ext cx="73152" cy="3108960"/>
           </a:xfrm>
           <a:prstGeom prst="rect">
             <a:avLst/>
@@ -16121,7 +16712,7 @@
         </p:nvSpPr>
         <p:spPr>
           <a:xfrm>
-            <a:off x="3337560" y="1280160"/>
+            <a:off x="3337560" y="1325880"/>
             <a:ext cx="2468880" cy="274320"/>
           </a:xfrm>
           <a:prstGeom prst="rect">
@@ -16149,7 +16740,7 @@
                 <a:ea typeface="Trebuchet MS" pitchFamily="34" charset="-122"/>
                 <a:cs typeface="Trebuchet MS" pitchFamily="34" charset="-120"/>
               </a:rPr>
-              <a:t>JPM EMBI+ (EM SOVEREIGN)</a:t>
+              <a:t>J.P. MORGAN EMBI+</a:t>
             </a:r>
             <a:endParaRPr lang="en-US" sz="1100" dirty="0"/>
           </a:p>
@@ -16163,8 +16754,8 @@
         </p:nvSpPr>
         <p:spPr>
           <a:xfrm>
-            <a:off x="3364992" y="1645920"/>
-            <a:ext cx="2423160" cy="2651760"/>
+            <a:off x="3364992" y="1691640"/>
+            <a:ext cx="2423160" cy="2606040"/>
           </a:xfrm>
           <a:prstGeom prst="rect">
             <a:avLst/>
@@ -16191,7 +16782,7 @@
                 <a:ea typeface="Calibri" pitchFamily="34" charset="-122"/>
                 <a:cs typeface="Calibri" pitchFamily="34" charset="-120"/>
               </a:rPr>
-              <a:t>Scope: USD-denominated EM sovereign debt.</a:t>
+              <a:t>Scope: USD-denominated debt of emerging market sovereign issuers.</a:t>
             </a:r>
             <a:endParaRPr lang="en-US" sz="1050" dirty="0"/>
           </a:p>
@@ -16214,7 +16805,7 @@
                 <a:ea typeface="Calibri" pitchFamily="34" charset="-122"/>
                 <a:cs typeface="Calibri" pitchFamily="34" charset="-120"/>
               </a:rPr>
-              <a:t>Filters:</a:t>
+              <a:t>Criteria:</a:t>
             </a:r>
             <a:endParaRPr lang="en-US" sz="1050" dirty="0"/>
           </a:p>
@@ -16248,7 +16839,7 @@
                 <a:ea typeface="Calibri" pitchFamily="34" charset="-122"/>
                 <a:cs typeface="Calibri" pitchFamily="34" charset="-120"/>
               </a:rPr>
-              <a:t>  • USD-denom only (no FX-linked)</a:t>
+              <a:t>  • USD only; no FX-linked payments</a:t>
             </a:r>
             <a:endParaRPr lang="en-US" sz="1050" dirty="0"/>
           </a:p>
@@ -16265,7 +16856,7 @@
                 <a:ea typeface="Calibri" pitchFamily="34" charset="-122"/>
                 <a:cs typeface="Calibri" pitchFamily="34" charset="-120"/>
               </a:rPr>
-              <a:t>  • Min USD 500m size</a:t>
+              <a:t>  • USD 500m minimum outstanding</a:t>
             </a:r>
             <a:endParaRPr lang="en-US" sz="1050" dirty="0"/>
           </a:p>
@@ -16282,7 +16873,7 @@
                 <a:ea typeface="Calibri" pitchFamily="34" charset="-122"/>
                 <a:cs typeface="Calibri" pitchFamily="34" charset="-120"/>
               </a:rPr>
-              <a:t>  • ≥ 2.5y to maturity</a:t>
+              <a:t>  • At least 2.5y to maturity</a:t>
             </a:r>
             <a:endParaRPr lang="en-US" sz="1050" dirty="0"/>
           </a:p>
@@ -16305,7 +16896,7 @@
                 <a:ea typeface="Calibri" pitchFamily="34" charset="-122"/>
                 <a:cs typeface="Calibri" pitchFamily="34" charset="-120"/>
               </a:rPr>
-              <a:t>Purpose: dollar-based return premium over DM sovereigns in exchange for EM credit + political risk.</a:t>
+              <a:t>Purpose: a higher dollar return than DM sovereigns, in exchange for the external debt risk of the issuer country.</a:t>
             </a:r>
             <a:endParaRPr lang="en-US" sz="1050" dirty="0"/>
           </a:p>
@@ -16328,7 +16919,7 @@
                 <a:ea typeface="Calibri" pitchFamily="34" charset="-122"/>
                 <a:cs typeface="Calibri" pitchFamily="34" charset="-120"/>
               </a:rPr>
-              <a:t>Monthly rebalance.</a:t>
+              <a:t>Rebalanced monthly.</a:t>
             </a:r>
             <a:endParaRPr lang="en-US" sz="1050" dirty="0"/>
           </a:p>
@@ -16342,8 +16933,8 @@
         </p:nvSpPr>
         <p:spPr>
           <a:xfrm>
-            <a:off x="6080760" y="1188720"/>
-            <a:ext cx="2743200" cy="3154680"/>
+            <a:off x="6080760" y="1234440"/>
+            <a:ext cx="2743200" cy="3108960"/>
           </a:xfrm>
           <a:prstGeom prst="rect">
             <a:avLst/>
@@ -16362,8 +16953,8 @@
         </p:nvSpPr>
         <p:spPr>
           <a:xfrm>
-            <a:off x="6080760" y="1188720"/>
-            <a:ext cx="73152" cy="3154680"/>
+            <a:off x="6080760" y="1234440"/>
+            <a:ext cx="73152" cy="3108960"/>
           </a:xfrm>
           <a:prstGeom prst="rect">
             <a:avLst/>
@@ -16382,7 +16973,7 @@
         </p:nvSpPr>
         <p:spPr>
           <a:xfrm>
-            <a:off x="6217920" y="1280160"/>
+            <a:off x="6217920" y="1325880"/>
             <a:ext cx="2468880" cy="274320"/>
           </a:xfrm>
           <a:prstGeom prst="rect">
@@ -16410,7 +17001,7 @@
                 <a:ea typeface="Trebuchet MS" pitchFamily="34" charset="-122"/>
                 <a:cs typeface="Trebuchet MS" pitchFamily="34" charset="-120"/>
               </a:rPr>
-              <a:t>BLOOMBERG MSCI EUR CORP SRI</a:t>
+              <a:t>MSCI EUR CORP SRI</a:t>
             </a:r>
             <a:endParaRPr lang="en-US" sz="1100" dirty="0"/>
           </a:p>
@@ -16424,8 +17015,8 @@
         </p:nvSpPr>
         <p:spPr>
           <a:xfrm>
-            <a:off x="6245352" y="1645920"/>
-            <a:ext cx="2423160" cy="2651760"/>
+            <a:off x="6245352" y="1691640"/>
+            <a:ext cx="2423160" cy="2606040"/>
           </a:xfrm>
           <a:prstGeom prst="rect">
             <a:avLst/>
@@ -16452,7 +17043,7 @@
                 <a:ea typeface="Calibri" pitchFamily="34" charset="-122"/>
                 <a:cs typeface="Calibri" pitchFamily="34" charset="-120"/>
               </a:rPr>
-              <a:t>Scope: EUR-denominated IG corporate bonds with ESG overlay.</a:t>
+              <a:t>Scope: euro-denominated IG corporate bonds with an ESG overlay.</a:t>
             </a:r>
             <a:endParaRPr lang="en-US" sz="1050" dirty="0"/>
           </a:p>
@@ -16475,7 +17066,7 @@
                 <a:ea typeface="Calibri" pitchFamily="34" charset="-122"/>
                 <a:cs typeface="Calibri" pitchFamily="34" charset="-120"/>
               </a:rPr>
-              <a:t>Filters:</a:t>
+              <a:t>Criteria:</a:t>
             </a:r>
             <a:endParaRPr lang="en-US" sz="1050" dirty="0"/>
           </a:p>
@@ -16492,7 +17083,7 @@
                 <a:ea typeface="Calibri" pitchFamily="34" charset="-122"/>
                 <a:cs typeface="Calibri" pitchFamily="34" charset="-120"/>
               </a:rPr>
-              <a:t>  • IG rating (≥ BBB-)</a:t>
+              <a:t>  • Rated Baa3 / BBB- or above</a:t>
             </a:r>
             <a:endParaRPr lang="en-US" sz="1050" dirty="0"/>
           </a:p>
@@ -16509,7 +17100,7 @@
                 <a:ea typeface="Calibri" pitchFamily="34" charset="-122"/>
                 <a:cs typeface="Calibri" pitchFamily="34" charset="-120"/>
               </a:rPr>
-              <a:t>  • MSCI ESG rating ≥ BBB</a:t>
+              <a:t>  • MSCI ESG rating of BBB or higher</a:t>
             </a:r>
             <a:endParaRPr lang="en-US" sz="1050" dirty="0"/>
           </a:p>
@@ -16526,7 +17117,7 @@
                 <a:ea typeface="Calibri" pitchFamily="34" charset="-122"/>
                 <a:cs typeface="Calibri" pitchFamily="34" charset="-120"/>
               </a:rPr>
-              <a:t>  • EUR 300m min size</a:t>
+              <a:t>  • EUR 300m minimum outstanding</a:t>
             </a:r>
             <a:endParaRPr lang="en-US" sz="1050" dirty="0"/>
           </a:p>
@@ -16543,7 +17134,7 @@
                 <a:ea typeface="Calibri" pitchFamily="34" charset="-122"/>
                 <a:cs typeface="Calibri" pitchFamily="34" charset="-120"/>
               </a:rPr>
-              <a:t>  • ≥ 1y maturity</a:t>
+              <a:t>  • At least 1y to maturity</a:t>
             </a:r>
             <a:endParaRPr lang="en-US" sz="1050" dirty="0"/>
           </a:p>
@@ -16566,7 +17157,7 @@
                 <a:ea typeface="Calibri" pitchFamily="34" charset="-122"/>
                 <a:cs typeface="Calibri" pitchFamily="34" charset="-120"/>
               </a:rPr>
-              <a:t>Exclusions: alcohol, tobacco, gambling, adult entertainment, GMOs, nuclear, firearms, weapons, thermal coal, oil sands, MSCI "Red" controversy score.</a:t>
+              <a:t>Excludes: alcohol, tobacco, gambling, adult entertainment, GMOs, nuclear, firearms, weapons, thermal coal, oil sands — and any issuer with a "Red" MSCI controversy score.</a:t>
             </a:r>
             <a:endParaRPr lang="en-US" sz="1050" dirty="0"/>
           </a:p>
@@ -17714,7 +18305,7 @@
                 <a:ea typeface="Trebuchet MS" pitchFamily="34" charset="-122"/>
                 <a:cs typeface="Trebuchet MS" pitchFamily="34" charset="-120"/>
               </a:rPr>
-              <a:t>Investment-grade corporate issuance compresses into a single trading day — announce at 9:15, price at 3pm, free to trade by next morning</a:t>
+              <a:t>Investment-grade corporate issuance is compressed into a single trading day — announced at 9:15, priced at 3pm, free to trade the same or next day</a:t>
             </a:r>
             <a:endParaRPr lang="en-US" sz="1600" dirty="0"/>
           </a:p>
@@ -17818,7 +18409,7 @@
                 <a:ea typeface="Calibri" pitchFamily="34" charset="-122"/>
                 <a:cs typeface="Calibri" pitchFamily="34" charset="-120"/>
               </a:rPr>
-              <a:t>Source: CFA Institute, Curriculum Vol 6, Learning Module 3, Exhibit 6 (IG Corporate Issuance Timeline), pp. 70–72.</a:t>
+              <a:t>Source: CFA Institute, Curriculum Vol 6, Learning Module 3, "Primary and Secondary Fixed-Income Markets", Exhibit 6, pp. 70–71.</a:t>
             </a:r>
             <a:endParaRPr lang="en-US" sz="750" dirty="0"/>
           </a:p>
@@ -17860,7 +18451,7 @@
                 <a:ea typeface="Calibri" pitchFamily="34" charset="-122"/>
                 <a:cs typeface="Calibri" pitchFamily="34" charset="-120"/>
               </a:rPr>
-              <a:t>Frequent IG issuers operate under a shelf registration and pick the day opportunistically — the entire "roadshow" collapses to a 90-minute investor call.</a:t>
+              <a:t>Frequent issuers work off a shelf registration and pick the day opportunistically. The roadshow is an electronic file released at announcement plus one investor call.</a:t>
             </a:r>
             <a:endParaRPr lang="en-US" sz="1300" dirty="0"/>
           </a:p>
@@ -18011,7 +18602,7 @@
                           <a:ea typeface="Trebuchet MS" pitchFamily="34" charset="-122"/>
                           <a:cs typeface="Trebuchet MS" pitchFamily="34" charset="-120"/>
                         </a:rPr>
-                        <a:t>Market state</a:t>
+                        <a:t>Book status</a:t>
                       </a:r>
                       <a:endParaRPr lang="en-US" sz="1100" dirty="0">
                         <a:latin typeface="Trebuchet MS" charset="0"/>
@@ -18113,7 +18704,7 @@
                           <a:ea typeface="Consolas" pitchFamily="34" charset="-122"/>
                           <a:cs typeface="Consolas" pitchFamily="34" charset="-120"/>
                         </a:rPr>
-                        <a:t>Underwriters and issuer agree to launch transaction</a:t>
+                        <a:t>Underwriters and issuer agree to launch</a:t>
                       </a:r>
                       <a:endParaRPr lang="en-US" sz="1100" dirty="0">
                         <a:latin typeface="Consolas" charset="0"/>
@@ -18163,7 +18754,7 @@
                           <a:ea typeface="Consolas" pitchFamily="34" charset="-122"/>
                           <a:cs typeface="Consolas" pitchFamily="34" charset="-120"/>
                         </a:rPr>
-                        <a:t>Pre-announcement</a:t>
+                        <a:t>Pre-launch</a:t>
                       </a:r>
                       <a:endParaRPr lang="en-US" sz="1100" dirty="0">
                         <a:latin typeface="Consolas" charset="0"/>
@@ -18265,7 +18856,7 @@
                           <a:ea typeface="Consolas" pitchFamily="34" charset="-122"/>
                           <a:cs typeface="Consolas" pitchFamily="34" charset="-120"/>
                         </a:rPr>
-                        <a:t>Transaction announced — size, spread, maturities still TBD</a:t>
+                        <a:t>Announced, size / spread / tenor TBD; e-roadshow</a:t>
                       </a:r>
                       <a:endParaRPr lang="en-US" sz="1100" dirty="0">
                         <a:latin typeface="Consolas" charset="0"/>
@@ -18315,7 +18906,7 @@
                           <a:ea typeface="Consolas" pitchFamily="34" charset="-122"/>
                           <a:cs typeface="Consolas" pitchFamily="34" charset="-120"/>
                         </a:rPr>
-                        <a:t>Order book opens</a:t>
+                        <a:t>Book opens</a:t>
                       </a:r>
                       <a:endParaRPr lang="en-US" sz="1100" dirty="0">
                         <a:latin typeface="Consolas" charset="0"/>
@@ -18417,7 +19008,7 @@
                           <a:ea typeface="Consolas" pitchFamily="34" charset="-122"/>
                           <a:cs typeface="Consolas" pitchFamily="34" charset="-120"/>
                         </a:rPr>
-                        <a:t>Investor conference call with issuer and underwriters</a:t>
+                        <a:t>Investor conference call with issuer + underwriters</a:t>
                       </a:r>
                       <a:endParaRPr lang="en-US" sz="1100" dirty="0">
                         <a:latin typeface="Consolas" charset="0"/>
@@ -18467,7 +19058,7 @@
                           <a:ea typeface="Consolas" pitchFamily="34" charset="-122"/>
                           <a:cs typeface="Consolas" pitchFamily="34" charset="-120"/>
                         </a:rPr>
-                        <a:t>Order book building</a:t>
+                        <a:t>Book building</a:t>
                       </a:r>
                       <a:endParaRPr lang="en-US" sz="1100" dirty="0">
                         <a:latin typeface="Consolas" charset="0"/>
@@ -18519,7 +19110,7 @@
                           <a:ea typeface="Calibri" pitchFamily="34" charset="-122"/>
                           <a:cs typeface="Calibri" pitchFamily="34" charset="-120"/>
                         </a:rPr>
-                        <a:t>1:00 pm</a:t>
+                        <a:t>12:00 noon</a:t>
                       </a:r>
                       <a:endParaRPr lang="en-US" sz="1100" dirty="0">
                         <a:latin typeface="Calibri" charset="0"/>
@@ -18569,7 +19160,7 @@
                           <a:ea typeface="Consolas" pitchFamily="34" charset="-122"/>
                           <a:cs typeface="Consolas" pitchFamily="34" charset="-120"/>
                         </a:rPr>
-                        <a:t>Price guidance published; size and maturities firm up</a:t>
+                        <a:t>Price guidance out; order book CLOSED to investors</a:t>
                       </a:r>
                       <a:endParaRPr lang="en-US" sz="1100" dirty="0">
                         <a:latin typeface="Consolas" charset="0"/>
@@ -18619,7 +19210,7 @@
                           <a:ea typeface="Consolas" pitchFamily="34" charset="-122"/>
                           <a:cs typeface="Consolas" pitchFamily="34" charset="-120"/>
                         </a:rPr>
-                        <a:t>Indications refined</a:t>
+                        <a:t>Book closed</a:t>
                       </a:r>
                       <a:endParaRPr lang="en-US" sz="1100" dirty="0">
                         <a:latin typeface="Consolas" charset="0"/>
@@ -18671,7 +19262,7 @@
                           <a:ea typeface="Calibri" pitchFamily="34" charset="-122"/>
                           <a:cs typeface="Calibri" pitchFamily="34" charset="-120"/>
                         </a:rPr>
-                        <a:t>1:00–3:00 pm</a:t>
+                        <a:t>1:00 pm</a:t>
                       </a:r>
                       <a:endParaRPr lang="en-US" sz="1100" dirty="0">
                         <a:latin typeface="Calibri" charset="0"/>
@@ -18721,7 +19312,7 @@
                           <a:ea typeface="Consolas" pitchFamily="34" charset="-122"/>
                           <a:cs typeface="Consolas" pitchFamily="34" charset="-120"/>
                         </a:rPr>
-                        <a:t>Order book closed; underwriters allocate to institutional investors</a:t>
+                        <a:t>Transaction LAUNCHED — final size, price, tenors</a:t>
                       </a:r>
                       <a:endParaRPr lang="en-US" sz="1100" dirty="0">
                         <a:latin typeface="Consolas" charset="0"/>
@@ -18771,7 +19362,7 @@
                           <a:ea typeface="Consolas" pitchFamily="34" charset="-122"/>
                           <a:cs typeface="Consolas" pitchFamily="34" charset="-120"/>
                         </a:rPr>
-                        <a:t>Allocation</a:t>
+                        <a:t>Launched</a:t>
                       </a:r>
                       <a:endParaRPr lang="en-US" sz="1100" dirty="0">
                         <a:latin typeface="Consolas" charset="0"/>
@@ -18823,7 +19414,7 @@
                           <a:ea typeface="Calibri" pitchFamily="34" charset="-122"/>
                           <a:cs typeface="Calibri" pitchFamily="34" charset="-120"/>
                         </a:rPr>
-                        <a:t>3:00 pm</a:t>
+                        <a:t>1:00–3:00 pm</a:t>
                       </a:r>
                       <a:endParaRPr lang="en-US" sz="1100" dirty="0">
                         <a:latin typeface="Calibri" charset="0"/>
@@ -18873,7 +19464,7 @@
                           <a:ea typeface="Consolas" pitchFamily="34" charset="-122"/>
                           <a:cs typeface="Consolas" pitchFamily="34" charset="-120"/>
                         </a:rPr>
-                        <a:t>Transaction priced; government-benchmark spread and coupon fixed</a:t>
+                        <a:t>Underwriters allocate the transaction to investors</a:t>
                       </a:r>
                       <a:endParaRPr lang="en-US" sz="1100" dirty="0">
                         <a:latin typeface="Consolas" charset="0"/>
@@ -18923,7 +19514,7 @@
                           <a:ea typeface="Consolas" pitchFamily="34" charset="-122"/>
                           <a:cs typeface="Consolas" pitchFamily="34" charset="-120"/>
                         </a:rPr>
-                        <a:t>Priced</a:t>
+                        <a:t>Allocation</a:t>
                       </a:r>
                       <a:endParaRPr lang="en-US" sz="1100" dirty="0">
                         <a:latin typeface="Consolas" charset="0"/>
@@ -18975,7 +19566,7 @@
                           <a:ea typeface="Calibri" pitchFamily="34" charset="-122"/>
                           <a:cs typeface="Calibri" pitchFamily="34" charset="-120"/>
                         </a:rPr>
-                        <a:t>4:00 pm</a:t>
+                        <a:t>3:00 pm</a:t>
                       </a:r>
                       <a:endParaRPr lang="en-US" sz="1100" dirty="0">
                         <a:latin typeface="Calibri" charset="0"/>
@@ -19025,7 +19616,7 @@
                           <a:ea typeface="Consolas" pitchFamily="34" charset="-122"/>
                           <a:cs typeface="Consolas" pitchFamily="34" charset="-120"/>
                         </a:rPr>
-                        <a:t>Final term sheet delivered; bonds free to trade same or next day</a:t>
+                        <a:t>Priced — government benchmark and coupon set</a:t>
                       </a:r>
                       <a:endParaRPr lang="en-US" sz="1100" dirty="0">
                         <a:latin typeface="Consolas" charset="0"/>
@@ -19075,7 +19666,7 @@
                           <a:ea typeface="Consolas" pitchFamily="34" charset="-122"/>
                           <a:cs typeface="Consolas" pitchFamily="34" charset="-120"/>
                         </a:rPr>
-                        <a:t>Secondary</a:t>
+                        <a:t>Priced</a:t>
                       </a:r>
                       <a:endParaRPr lang="en-US" sz="1100" dirty="0">
                         <a:latin typeface="Consolas" charset="0"/>
@@ -19109,6 +19700,158 @@
                   </a:tcPr>
                 </a:tc>
               </a:tr>
+              <a:tr h="274320">
+                <a:tc>
+                  <a:txBody>
+                    <a:bodyPr/>
+                    <a:lstStyle/>
+                    <a:p>
+                      <a:pPr algn="l" indent="0" marL="0">
+                        <a:buNone/>
+                      </a:pPr>
+                      <a:r>
+                        <a:rPr lang="en-US" sz="1100" dirty="0">
+                          <a:solidFill>
+                            <a:srgbClr val="334155"/>
+                          </a:solidFill>
+                          <a:latin typeface="Calibri" pitchFamily="34" charset="0"/>
+                          <a:ea typeface="Calibri" pitchFamily="34" charset="-122"/>
+                          <a:cs typeface="Calibri" pitchFamily="34" charset="-120"/>
+                        </a:rPr>
+                        <a:t>4:00 pm</a:t>
+                      </a:r>
+                      <a:endParaRPr lang="en-US" sz="1100" dirty="0">
+                        <a:latin typeface="Calibri" charset="0"/>
+                        <a:ea typeface="Calibri" charset="0"/>
+                        <a:cs typeface="Calibri" charset="0"/>
+                      </a:endParaRPr>
+                    </a:p>
+                  </a:txBody>
+                  <a:tcPr marL="91440" marR="91440" marT="45720" marB="45720" anchor="ctr">
+                    <a:lnL w="0" cap="flat" cmpd="sng" algn="ctr">
+                      <a:noFill/>
+                    </a:lnL>
+                    <a:lnR w="0" cap="flat" cmpd="sng" algn="ctr">
+                      <a:noFill/>
+                    </a:lnR>
+                    <a:lnT w="0" cap="flat" cmpd="sng" algn="ctr">
+                      <a:noFill/>
+                    </a:lnT>
+                    <a:lnB w="3175" cap="flat" cmpd="sng" algn="ctr">
+                      <a:solidFill>
+                        <a:srgbClr val="D0D8E8"/>
+                      </a:solidFill>
+                      <a:prstDash val="solid"/>
+                      <a:round/>
+                      <a:headEnd type="none" w="med" len="med"/>
+                      <a:tailEnd type="none" w="med" len="med"/>
+                    </a:lnB>
+                    <a:solidFill>
+                      <a:srgbClr val="F5F7FA"/>
+                    </a:solidFill>
+                  </a:tcPr>
+                </a:tc>
+                <a:tc>
+                  <a:txBody>
+                    <a:bodyPr/>
+                    <a:lstStyle/>
+                    <a:p>
+                      <a:pPr algn="ctr" indent="0" marL="0">
+                        <a:buNone/>
+                      </a:pPr>
+                      <a:r>
+                        <a:rPr lang="en-US" sz="1100" dirty="0">
+                          <a:solidFill>
+                            <a:srgbClr val="334155"/>
+                          </a:solidFill>
+                          <a:latin typeface="Consolas" pitchFamily="34" charset="0"/>
+                          <a:ea typeface="Consolas" pitchFamily="34" charset="-122"/>
+                          <a:cs typeface="Consolas" pitchFamily="34" charset="-120"/>
+                        </a:rPr>
+                        <a:t>Final term sheet; bonds free to trade same/next day</a:t>
+                      </a:r>
+                      <a:endParaRPr lang="en-US" sz="1100" dirty="0">
+                        <a:latin typeface="Consolas" charset="0"/>
+                        <a:ea typeface="Consolas" charset="0"/>
+                        <a:cs typeface="Consolas" charset="0"/>
+                      </a:endParaRPr>
+                    </a:p>
+                  </a:txBody>
+                  <a:tcPr marL="91440" marR="91440" marT="45720" marB="45720" anchor="ctr">
+                    <a:lnL w="0" cap="flat" cmpd="sng" algn="ctr">
+                      <a:noFill/>
+                    </a:lnL>
+                    <a:lnR w="0" cap="flat" cmpd="sng" algn="ctr">
+                      <a:noFill/>
+                    </a:lnR>
+                    <a:lnT w="0" cap="flat" cmpd="sng" algn="ctr">
+                      <a:noFill/>
+                    </a:lnT>
+                    <a:lnB w="3175" cap="flat" cmpd="sng" algn="ctr">
+                      <a:solidFill>
+                        <a:srgbClr val="D0D8E8"/>
+                      </a:solidFill>
+                      <a:prstDash val="solid"/>
+                      <a:round/>
+                      <a:headEnd type="none" w="med" len="med"/>
+                      <a:tailEnd type="none" w="med" len="med"/>
+                    </a:lnB>
+                    <a:solidFill>
+                      <a:srgbClr val="F5F7FA"/>
+                    </a:solidFill>
+                  </a:tcPr>
+                </a:tc>
+                <a:tc>
+                  <a:txBody>
+                    <a:bodyPr/>
+                    <a:lstStyle/>
+                    <a:p>
+                      <a:pPr algn="ctr" indent="0" marL="0">
+                        <a:buNone/>
+                      </a:pPr>
+                      <a:r>
+                        <a:rPr lang="en-US" sz="1100" dirty="0">
+                          <a:solidFill>
+                            <a:srgbClr val="334155"/>
+                          </a:solidFill>
+                          <a:latin typeface="Consolas" pitchFamily="34" charset="0"/>
+                          <a:ea typeface="Consolas" pitchFamily="34" charset="-122"/>
+                          <a:cs typeface="Consolas" pitchFamily="34" charset="-120"/>
+                        </a:rPr>
+                        <a:t>Secondary</a:t>
+                      </a:r>
+                      <a:endParaRPr lang="en-US" sz="1100" dirty="0">
+                        <a:latin typeface="Consolas" charset="0"/>
+                        <a:ea typeface="Consolas" charset="0"/>
+                        <a:cs typeface="Consolas" charset="0"/>
+                      </a:endParaRPr>
+                    </a:p>
+                  </a:txBody>
+                  <a:tcPr marL="91440" marR="91440" marT="45720" marB="45720" anchor="ctr">
+                    <a:lnL w="0" cap="flat" cmpd="sng" algn="ctr">
+                      <a:noFill/>
+                    </a:lnL>
+                    <a:lnR w="0" cap="flat" cmpd="sng" algn="ctr">
+                      <a:noFill/>
+                    </a:lnR>
+                    <a:lnT w="0" cap="flat" cmpd="sng" algn="ctr">
+                      <a:noFill/>
+                    </a:lnT>
+                    <a:lnB w="3175" cap="flat" cmpd="sng" algn="ctr">
+                      <a:solidFill>
+                        <a:srgbClr val="D0D8E8"/>
+                      </a:solidFill>
+                      <a:prstDash val="solid"/>
+                      <a:round/>
+                      <a:headEnd type="none" w="med" len="med"/>
+                      <a:tailEnd type="none" w="med" len="med"/>
+                    </a:lnB>
+                    <a:solidFill>
+                      <a:srgbClr val="F5F7FA"/>
+                    </a:solidFill>
+                  </a:tcPr>
+                </a:tc>
+              </a:tr>
             </a:tbl>
           </a:graphicData>
         </a:graphic>
@@ -19121,8 +19864,8 @@
         </p:nvSpPr>
         <p:spPr>
           <a:xfrm>
-            <a:off x="320040" y="3611880"/>
-            <a:ext cx="8503920" cy="731520"/>
+            <a:off x="320040" y="3703320"/>
+            <a:ext cx="8503920" cy="640080"/>
           </a:xfrm>
           <a:prstGeom prst="rect">
             <a:avLst/>
@@ -19141,8 +19884,8 @@
         </p:nvSpPr>
         <p:spPr>
           <a:xfrm>
-            <a:off x="320040" y="3611880"/>
-            <a:ext cx="73152" cy="731520"/>
+            <a:off x="320040" y="3703320"/>
+            <a:ext cx="73152" cy="640080"/>
           </a:xfrm>
           <a:prstGeom prst="rect">
             <a:avLst/>
@@ -19161,7 +19904,7 @@
         </p:nvSpPr>
         <p:spPr>
           <a:xfrm>
-            <a:off x="457200" y="3657600"/>
+            <a:off x="457200" y="3749040"/>
             <a:ext cx="8275320" cy="256032"/>
           </a:xfrm>
           <a:prstGeom prst="rect">
@@ -19189,7 +19932,7 @@
                 <a:ea typeface="Trebuchet MS" pitchFamily="34" charset="-122"/>
                 <a:cs typeface="Trebuchet MS" pitchFamily="34" charset="-120"/>
               </a:rPr>
-              <a:t>CONTRAST — HY &amp; SECURED</a:t>
+              <a:t>THE CONTRAST — HIGH YIELD, SECURED, AND PRIVATE</a:t>
             </a:r>
             <a:endParaRPr lang="en-US" sz="1100" dirty="0"/>
           </a:p>
@@ -19203,8 +19946,8 @@
         </p:nvSpPr>
         <p:spPr>
           <a:xfrm>
-            <a:off x="457200" y="3931920"/>
-            <a:ext cx="8275320" cy="365760"/>
+            <a:off x="457200" y="4023360"/>
+            <a:ext cx="8275320" cy="274320"/>
           </a:xfrm>
           <a:prstGeom prst="rect">
             <a:avLst/>
@@ -19231,7 +19974,7 @@
                 <a:ea typeface="Calibri" pitchFamily="34" charset="-122"/>
                 <a:cs typeface="Calibri" pitchFamily="34" charset="-120"/>
               </a:rPr>
-              <a:t>HY / secured issuance takes weeks: complex covenants, collateral diligence, best-efforts (not underwritten) distribution. Private placements skip the public process entirely for &lt;~30 investors.</a:t>
+              <a:t>HY and secured deals run far longer: complex covenants, collateral diligence, and often a best-efforts sale rather than an underwritten one. A private placement skips the public process entirely, selling to a small group of investors.</a:t>
             </a:r>
             <a:endParaRPr lang="en-US" sz="1200" dirty="0"/>
           </a:p>
@@ -19338,7 +20081,7 @@
                 <a:ea typeface="Trebuchet MS" pitchFamily="34" charset="-122"/>
                 <a:cs typeface="Trebuchet MS" pitchFamily="34" charset="-120"/>
               </a:rPr>
-              <a:t>Secondary bond markets are OTC and quote-driven; liquidity is concentrated in on-the-run sovereigns, and seasoned corporates trade on 10–20bp spreads</a:t>
+              <a:t>Secondary bond markets are quote-driven and over-the-counter; the bid–offer spread is the honest measure of how liquid a line really is</a:t>
             </a:r>
             <a:endParaRPr lang="en-US" sz="1600" dirty="0"/>
           </a:p>
@@ -19442,7 +20185,7 @@
                 <a:ea typeface="Calibri" pitchFamily="34" charset="-122"/>
                 <a:cs typeface="Calibri" pitchFamily="34" charset="-120"/>
               </a:rPr>
-              <a:t>Source: CFA Institute, Curriculum Vol 6, Learning Module 3, "Secondary Fixed-Income Markets", pp. 72–74.</a:t>
+              <a:t>Source: CFA Institute, Curriculum Vol 6, Learning Module 3, "Secondary Fixed-Income Markets" and Example 4 (Hertz), pp. 72–73.</a:t>
             </a:r>
             <a:endParaRPr lang="en-US" sz="750" dirty="0"/>
           </a:p>
@@ -19484,7 +20227,7 @@
                 <a:ea typeface="Calibri" pitchFamily="34" charset="-122"/>
                 <a:cs typeface="Calibri" pitchFamily="34" charset="-120"/>
               </a:rPr>
-              <a:t>Unlike equities, bonds rarely trade on exchanges — price discovery lives at dealer desks, and bid-offer is the honest measure of how liquid a line really is.</a:t>
+              <a:t>Unlike equities, bonds rarely trade on an exchange — price discovery lives at dealer desks, and liquidity varies even between two bonds of the same issuer.</a:t>
             </a:r>
             <a:endParaRPr lang="en-US" sz="1300" dirty="0"/>
           </a:p>
@@ -19585,7 +20328,7 @@
                           <a:ea typeface="Trebuchet MS" pitchFamily="34" charset="-122"/>
                           <a:cs typeface="Trebuchet MS" pitchFamily="34" charset="-120"/>
                         </a:rPr>
-                        <a:t>Typical bid-offer</a:t>
+                        <a:t>Bid–offer spread</a:t>
                       </a:r>
                       <a:endParaRPr lang="en-US" sz="1100" dirty="0">
                         <a:latin typeface="Trebuchet MS" charset="0"/>
@@ -19687,7 +20430,7 @@
                           <a:ea typeface="Calibri" pitchFamily="34" charset="-122"/>
                           <a:cs typeface="Calibri" pitchFamily="34" charset="-120"/>
                         </a:rPr>
-                        <a:t>On-the-run DM sovereign (e.g. latest UST 10y)</a:t>
+                        <a:t>On-the-run DM sovereign (latest UST 10y)</a:t>
                       </a:r>
                       <a:endParaRPr lang="en-US" sz="1100" dirty="0">
                         <a:latin typeface="Calibri" charset="0"/>
@@ -19737,7 +20480,7 @@
                           <a:ea typeface="Consolas" pitchFamily="34" charset="-122"/>
                           <a:cs typeface="Consolas" pitchFamily="34" charset="-120"/>
                         </a:rPr>
-                        <a:t>&lt; 1 bp</a:t>
+                        <a:t>Fraction of 1 bp</a:t>
                       </a:r>
                       <a:endParaRPr lang="en-US" sz="1100" dirty="0">
                         <a:latin typeface="Consolas" charset="0"/>
@@ -19787,7 +20530,7 @@
                           <a:ea typeface="Consolas" pitchFamily="34" charset="-122"/>
                           <a:cs typeface="Consolas" pitchFamily="34" charset="-120"/>
                         </a:rPr>
-                        <a:t>Primary dealers make deep markets</a:t>
+                        <a:t>Primary dealers quote in size</a:t>
                       </a:r>
                       <a:endParaRPr lang="en-US" sz="1100" dirty="0">
                         <a:latin typeface="Consolas" charset="0"/>
@@ -19839,7 +20582,7 @@
                           <a:ea typeface="Calibri" pitchFamily="34" charset="-122"/>
                           <a:cs typeface="Calibri" pitchFamily="34" charset="-120"/>
                         </a:rPr>
-                        <a:t>Recent IG corporate from frequent issuer</a:t>
+                        <a:t>Recent bond, frequent IG issuer</a:t>
                       </a:r>
                       <a:endParaRPr lang="en-US" sz="1100" dirty="0">
                         <a:latin typeface="Calibri" charset="0"/>
@@ -19939,7 +20682,7 @@
                           <a:ea typeface="Consolas" pitchFamily="34" charset="-122"/>
                           <a:cs typeface="Consolas" pitchFamily="34" charset="-120"/>
                         </a:rPr>
-                        <a:t>Dealer inventory; index demand</a:t>
+                        <a:t>Dealers hold trading inventory</a:t>
                       </a:r>
                       <a:endParaRPr lang="en-US" sz="1100" dirty="0">
                         <a:latin typeface="Consolas" charset="0"/>
@@ -19991,7 +20734,7 @@
                           <a:ea typeface="Calibri" pitchFamily="34" charset="-122"/>
                           <a:cs typeface="Calibri" pitchFamily="34" charset="-120"/>
                         </a:rPr>
-                        <a:t>Seasoned IG corporate / infrequent issuer</a:t>
+                        <a:t>Seasoned or infrequent IG corporate</a:t>
                       </a:r>
                       <a:endParaRPr lang="en-US" sz="1100" dirty="0">
                         <a:latin typeface="Calibri" charset="0"/>
@@ -20041,7 +20784,7 @@
                           <a:ea typeface="Consolas" pitchFamily="34" charset="-122"/>
                           <a:cs typeface="Consolas" pitchFamily="34" charset="-120"/>
                         </a:rPr>
-                        <a:t>10–20 bp+</a:t>
+                        <a:t>10–20 bp or more</a:t>
                       </a:r>
                       <a:endParaRPr lang="en-US" sz="1100" dirty="0">
                         <a:latin typeface="Consolas" charset="0"/>
@@ -20091,7 +20834,7 @@
                           <a:ea typeface="Consolas" pitchFamily="34" charset="-122"/>
                           <a:cs typeface="Consolas" pitchFamily="34" charset="-120"/>
                         </a:rPr>
-                        <a:t>Thin dealer inventory</a:t>
+                        <a:t>Rarely traded; small sizes only</a:t>
                       </a:r>
                       <a:endParaRPr lang="en-US" sz="1100" dirty="0">
                         <a:latin typeface="Consolas" charset="0"/>
@@ -20143,7 +20886,7 @@
                           <a:ea typeface="Calibri" pitchFamily="34" charset="-122"/>
                           <a:cs typeface="Calibri" pitchFamily="34" charset="-120"/>
                         </a:rPr>
-                        <a:t>High-yield corporate</a:t>
+                        <a:t>Distressed debt (issuer near bankruptcy)</a:t>
                       </a:r>
                       <a:endParaRPr lang="en-US" sz="1100" dirty="0">
                         <a:latin typeface="Calibri" charset="0"/>
@@ -20193,7 +20936,7 @@
                           <a:ea typeface="Consolas" pitchFamily="34" charset="-122"/>
                           <a:cs typeface="Consolas" pitchFamily="34" charset="-120"/>
                         </a:rPr>
-                        <a:t>25–75 bp</a:t>
+                        <a:t>Wide; price &lt;&lt; par</a:t>
                       </a:r>
                       <a:endParaRPr lang="en-US" sz="1100" dirty="0">
                         <a:latin typeface="Consolas" charset="0"/>
@@ -20243,7 +20986,7 @@
                           <a:ea typeface="Consolas" pitchFamily="34" charset="-122"/>
                           <a:cs typeface="Consolas" pitchFamily="34" charset="-120"/>
                         </a:rPr>
-                        <a:t>Smaller market; wider dispersion</a:t>
+                        <a:t>Forced sellers meet opportunists</a:t>
                       </a:r>
                       <a:endParaRPr lang="en-US" sz="1100" dirty="0">
                         <a:latin typeface="Consolas" charset="0"/>
@@ -20295,7 +21038,7 @@
                           <a:ea typeface="Calibri" pitchFamily="34" charset="-122"/>
                           <a:cs typeface="Calibri" pitchFamily="34" charset="-120"/>
                         </a:rPr>
-                        <a:t>Distressed debt</a:t>
+                        <a:t>Bonds that do not trade at all</a:t>
                       </a:r>
                       <a:endParaRPr lang="en-US" sz="1100" dirty="0">
                         <a:latin typeface="Calibri" charset="0"/>
@@ -20345,7 +21088,7 @@
                           <a:ea typeface="Consolas" pitchFamily="34" charset="-122"/>
                           <a:cs typeface="Consolas" pitchFamily="34" charset="-120"/>
                         </a:rPr>
-                        <a:t>&gt; 100 bp, deep discount</a:t>
+                        <a:t>No live quote</a:t>
                       </a:r>
                       <a:endParaRPr lang="en-US" sz="1100" dirty="0">
                         <a:latin typeface="Consolas" charset="0"/>
@@ -20395,7 +21138,7 @@
                           <a:ea typeface="Consolas" pitchFamily="34" charset="-122"/>
                           <a:cs typeface="Consolas" pitchFamily="34" charset="-120"/>
                         </a:rPr>
-                        <a:t>Specialized hedge-fund buyers</a:t>
+                        <a:t>Priced off comparable liquid bonds</a:t>
                       </a:r>
                       <a:endParaRPr lang="en-US" sz="1100" dirty="0">
                         <a:latin typeface="Consolas" charset="0"/>
@@ -20441,8 +21184,8 @@
         </p:nvSpPr>
         <p:spPr>
           <a:xfrm>
-            <a:off x="320040" y="3337560"/>
-            <a:ext cx="8503920" cy="1005840"/>
+            <a:off x="320040" y="3017520"/>
+            <a:ext cx="8503920" cy="1325880"/>
           </a:xfrm>
           <a:prstGeom prst="rect">
             <a:avLst/>
@@ -20461,8 +21204,8 @@
         </p:nvSpPr>
         <p:spPr>
           <a:xfrm>
-            <a:off x="320040" y="3337560"/>
-            <a:ext cx="73152" cy="1005840"/>
+            <a:off x="320040" y="3017520"/>
+            <a:ext cx="73152" cy="1325880"/>
           </a:xfrm>
           <a:prstGeom prst="rect">
             <a:avLst/>
@@ -20481,7 +21224,7 @@
         </p:nvSpPr>
         <p:spPr>
           <a:xfrm>
-            <a:off x="457200" y="3383280"/>
+            <a:off x="457200" y="3063240"/>
             <a:ext cx="8275320" cy="256032"/>
           </a:xfrm>
           <a:prstGeom prst="rect">
@@ -20509,7 +21252,7 @@
                 <a:ea typeface="Trebuchet MS" pitchFamily="34" charset="-122"/>
                 <a:cs typeface="Trebuchet MS" pitchFamily="34" charset="-120"/>
               </a:rPr>
-              <a:t>HERTZ 2020 — HOW DISTRESS LOOKS IN THE TAPE</a:t>
+              <a:t>HERTZ 2020 — WHAT DISTRESS LOOKS LIKE IN THE TAPE</a:t>
             </a:r>
             <a:endParaRPr lang="en-US" sz="1100" dirty="0"/>
           </a:p>
@@ -20523,8 +21266,8 @@
         </p:nvSpPr>
         <p:spPr>
           <a:xfrm>
-            <a:off x="457200" y="3657600"/>
-            <a:ext cx="8275320" cy="640080"/>
+            <a:off x="457200" y="3337560"/>
+            <a:ext cx="8275320" cy="960120"/>
           </a:xfrm>
           <a:prstGeom prst="rect">
             <a:avLst/>
@@ -20551,7 +21294,7 @@
                 <a:ea typeface="Calibri" pitchFamily="34" charset="-122"/>
                 <a:cs typeface="Calibri" pitchFamily="34" charset="-120"/>
               </a:rPr>
-              <a:t>May 2020: Hertz filed Chapter 11 as COVID wiped out car-rental cash flows. 2022 and 2028 Hertz bonds traded &lt; 10 cents on the dollar — a &gt; 90% drop in 3 months. One year later those same bonds recovered to pre-pandemic levels after a restructuring left them intact. Meanwhile Hertz equity had been delisted months earlier.</a:t>
+              <a:t>Hertz filed for Chapter 11 in May 2020 as COVID hit car rental. Its 2022 and 2028 bonds traded below 10% of par, down more than 90% in three months — then recovered to pre-pandemic prices a year later, when a reorganisation with outside investors left them intact. The curriculum's general point: distressed bonds keep trading until the issuer liquidates or restructures, whereas by that stage the equity has usually already been delisted.</a:t>
             </a:r>
             <a:endParaRPr lang="en-US" sz="1200" dirty="0"/>
           </a:p>
@@ -20886,7 +21629,7 @@
                 <a:ea typeface="Trebuchet MS" pitchFamily="34" charset="-122"/>
                 <a:cs typeface="Trebuchet MS" pitchFamily="34" charset="-120"/>
               </a:rPr>
-              <a:t>Corporate short-term funding ranges from cheap-and-uncommitted bank lines up to firm multi-year revolvers with full covenants — reliability trades against cost</a:t>
+              <a:t>Short-term corporate funding runs from cheap-and-uncommitted bank lines up to binding multi-year revolvers with covenants — reliability is bought with cost</a:t>
             </a:r>
             <a:endParaRPr lang="en-US" sz="1600" dirty="0"/>
           </a:p>
@@ -20990,7 +21733,7 @@
                 <a:ea typeface="Calibri" pitchFamily="34" charset="-122"/>
                 <a:cs typeface="Calibri" pitchFamily="34" charset="-120"/>
               </a:rPr>
-              <a:t>Source: CFA Institute, Curriculum Vol 6, Learning Module 4, "Short-Term Funding Alternatives", pp. 80–82.</a:t>
+              <a:t>Source: CFA Institute, Curriculum Vol 6, Learning Module 4, "Short-Term Funding Alternatives", Exhibit 1, pp. 80–82.</a:t>
             </a:r>
             <a:endParaRPr lang="en-US" sz="750" dirty="0"/>
           </a:p>
@@ -21032,7 +21775,7 @@
                 <a:ea typeface="Calibri" pitchFamily="34" charset="-122"/>
                 <a:cs typeface="Calibri" pitchFamily="34" charset="-120"/>
               </a:rPr>
-              <a:t>As you climb the reliability ladder, the bank asks for upfront commitment fees and covenants in exchange for legally binding liquidity.</a:t>
+              <a:t>Climb the reliability ladder and the bank starts asking for an upfront fee and covenants in exchange for liquidity it is legally bound to provide.</a:t>
             </a:r>
             <a:endParaRPr lang="en-US" sz="1300" dirty="0"/>
           </a:p>
@@ -21437,7 +22180,7 @@
                           <a:ea typeface="Consolas" pitchFamily="34" charset="-122"/>
                           <a:cs typeface="Consolas" pitchFamily="34" charset="-120"/>
                         </a:rPr>
-                        <a:t>Revocable at bank's discretion</a:t>
+                        <a:t>Bank may decline</a:t>
                       </a:r>
                       <a:endParaRPr lang="en-US" sz="1100" dirty="0">
                         <a:latin typeface="Consolas" charset="0"/>
@@ -21487,7 +22230,7 @@
                           <a:ea typeface="Consolas" pitchFamily="34" charset="-122"/>
                           <a:cs typeface="Consolas" pitchFamily="34" charset="-120"/>
                         </a:rPr>
-                        <a:t>MRR + spread on drawn only</a:t>
+                        <a:t>MRR + spread, drawn</a:t>
                       </a:r>
                       <a:endParaRPr lang="en-US" sz="1100" dirty="0">
                         <a:latin typeface="Consolas" charset="0"/>
@@ -21689,7 +22432,7 @@
                           <a:ea typeface="Consolas" pitchFamily="34" charset="-122"/>
                           <a:cs typeface="Consolas" pitchFamily="34" charset="-120"/>
                         </a:rPr>
-                        <a:t>Formal written commitment</a:t>
+                        <a:t>Written commitment</a:t>
                       </a:r>
                       <a:endParaRPr lang="en-US" sz="1100" dirty="0">
                         <a:latin typeface="Consolas" charset="0"/>
@@ -21739,7 +22482,7 @@
                           <a:ea typeface="Consolas" pitchFamily="34" charset="-122"/>
                           <a:cs typeface="Consolas" pitchFamily="34" charset="-120"/>
                         </a:rPr>
-                        <a:t>+ commitment fee (e.g. 50bp)</a:t>
+                        <a:t>+ fee, e.g. 0.50%</a:t>
                       </a:r>
                       <a:endParaRPr lang="en-US" sz="1100" dirty="0">
                         <a:latin typeface="Consolas" charset="0"/>
@@ -21789,7 +22532,7 @@
                           <a:ea typeface="Consolas" pitchFamily="34" charset="-122"/>
                           <a:cs typeface="Consolas" pitchFamily="34" charset="-120"/>
                         </a:rPr>
-                        <a:t>Light</a:t>
+                        <a:t>Rare</a:t>
                       </a:r>
                       <a:endParaRPr lang="en-US" sz="1100" dirty="0">
                         <a:latin typeface="Consolas" charset="0"/>
@@ -21841,7 +22584,7 @@
                           <a:ea typeface="Calibri" pitchFamily="34" charset="-122"/>
                           <a:cs typeface="Calibri" pitchFamily="34" charset="-120"/>
                         </a:rPr>
-                        <a:t>Revolving credit ("revolver")</a:t>
+                        <a:t>Revolver (multi-year)</a:t>
                       </a:r>
                       <a:endParaRPr lang="en-US" sz="1100" dirty="0">
                         <a:latin typeface="Calibri" charset="0"/>
@@ -21941,7 +22684,7 @@
                           <a:ea typeface="Consolas" pitchFamily="34" charset="-122"/>
                           <a:cs typeface="Consolas" pitchFamily="34" charset="-120"/>
                         </a:rPr>
-                        <a:t>Multi-year binding commitment</a:t>
+                        <a:t>Binding, multi-year</a:t>
                       </a:r>
                       <a:endParaRPr lang="en-US" sz="1100" dirty="0">
                         <a:latin typeface="Consolas" charset="0"/>
@@ -21991,7 +22734,7 @@
                           <a:ea typeface="Consolas" pitchFamily="34" charset="-122"/>
                           <a:cs typeface="Consolas" pitchFamily="34" charset="-120"/>
                         </a:rPr>
-                        <a:t>+ commitment fee + covenants</a:t>
+                        <a:t>+ fee + covenants</a:t>
                       </a:r>
                       <a:endParaRPr lang="en-US" sz="1100" dirty="0">
                         <a:latin typeface="Consolas" charset="0"/>
@@ -22093,7 +22836,7 @@
                           <a:ea typeface="Calibri" pitchFamily="34" charset="-122"/>
                           <a:cs typeface="Calibri" pitchFamily="34" charset="-120"/>
                         </a:rPr>
-                        <a:t>Secured loan / asset-based</a:t>
+                        <a:t>Secured / asset-based loan</a:t>
                       </a:r>
                       <a:endParaRPr lang="en-US" sz="1100" dirty="0">
                         <a:latin typeface="Calibri" charset="0"/>
@@ -22193,7 +22936,7 @@
                           <a:ea typeface="Consolas" pitchFamily="34" charset="-122"/>
                           <a:cs typeface="Consolas" pitchFamily="34" charset="-120"/>
                         </a:rPr>
-                        <a:t>Backed by pledged collateral</a:t>
+                        <a:t>Collateral pledged</a:t>
                       </a:r>
                       <a:endParaRPr lang="en-US" sz="1100" dirty="0">
                         <a:latin typeface="Consolas" charset="0"/>
@@ -22243,7 +22986,7 @@
                           <a:ea typeface="Consolas" pitchFamily="34" charset="-122"/>
                           <a:cs typeface="Consolas" pitchFamily="34" charset="-120"/>
                         </a:rPr>
-                        <a:t>Lower rate vs unsecured</a:t>
+                        <a:t>Rate reflects lien</a:t>
                       </a:r>
                       <a:endParaRPr lang="en-US" sz="1100" dirty="0">
                         <a:latin typeface="Consolas" charset="0"/>
@@ -22395,7 +23138,7 @@
                           <a:ea typeface="Consolas" pitchFamily="34" charset="-122"/>
                           <a:cs typeface="Consolas" pitchFamily="34" charset="-120"/>
                         </a:rPr>
-                        <a:t>n/a</a:t>
+                        <a:t>Not a facility</a:t>
                       </a:r>
                       <a:endParaRPr lang="en-US" sz="1100" dirty="0">
                         <a:latin typeface="Consolas" charset="0"/>
@@ -22445,7 +23188,7 @@
                           <a:ea typeface="Consolas" pitchFamily="34" charset="-122"/>
                           <a:cs typeface="Consolas" pitchFamily="34" charset="-120"/>
                         </a:rPr>
-                        <a:t>Sale of receivables to factor</a:t>
+                        <a:t>Receivables sold</a:t>
                       </a:r>
                       <a:endParaRPr lang="en-US" sz="1100" dirty="0">
                         <a:latin typeface="Consolas" charset="0"/>
@@ -22495,7 +23238,7 @@
                           <a:ea typeface="Consolas" pitchFamily="34" charset="-122"/>
                           <a:cs typeface="Consolas" pitchFamily="34" charset="-120"/>
                         </a:rPr>
-                        <a:t>Discount on face value</a:t>
+                        <a:t>Discount to face</a:t>
                       </a:r>
                       <a:endParaRPr lang="en-US" sz="1100" dirty="0">
                         <a:latin typeface="Consolas" charset="0"/>
@@ -22591,8 +23334,8 @@
         </p:nvSpPr>
         <p:spPr>
           <a:xfrm>
-            <a:off x="320040" y="3520440"/>
-            <a:ext cx="8503920" cy="822960"/>
+            <a:off x="320040" y="3017520"/>
+            <a:ext cx="4160520" cy="1325880"/>
           </a:xfrm>
           <a:prstGeom prst="rect">
             <a:avLst/>
@@ -22611,8 +23354,8 @@
         </p:nvSpPr>
         <p:spPr>
           <a:xfrm>
-            <a:off x="320040" y="3520440"/>
-            <a:ext cx="73152" cy="822960"/>
+            <a:off x="320040" y="3017520"/>
+            <a:ext cx="73152" cy="1325880"/>
           </a:xfrm>
           <a:prstGeom prst="rect">
             <a:avLst/>
@@ -22631,8 +23374,8 @@
         </p:nvSpPr>
         <p:spPr>
           <a:xfrm>
-            <a:off x="457200" y="3566160"/>
-            <a:ext cx="8275320" cy="256032"/>
+            <a:off x="457200" y="3063240"/>
+            <a:ext cx="3931920" cy="256032"/>
           </a:xfrm>
           <a:prstGeom prst="rect">
             <a:avLst/>
@@ -22673,8 +23416,8 @@
         </p:nvSpPr>
         <p:spPr>
           <a:xfrm>
-            <a:off x="457200" y="3840480"/>
-            <a:ext cx="8275320" cy="457200"/>
+            <a:off x="457200" y="3337560"/>
+            <a:ext cx="3931920" cy="960120"/>
           </a:xfrm>
           <a:prstGeom prst="rect">
             <a:avLst/>
@@ -22701,7 +23444,131 @@
                 <a:ea typeface="Calibri" pitchFamily="34" charset="-122"/>
                 <a:cs typeface="Calibri" pitchFamily="34" charset="-120"/>
               </a:rPr>
-              <a:t>Strong IG borrowers with stable deposits at the bank prefer uncommitted lines (no fee). HY borrowers need revolvers (binding liquidity + covenant monitoring). Revolvers typically backstop a commercial-paper programme.</a:t>
+              <a:t>A strong IG borrower with stable deposits at the bank takes an uncommitted line — no fee. A weaker borrower needs a revolver: binding liquidity, paid for with a fee and covenants. Revolvers also backstop commercial-paper programmes.</a:t>
+            </a:r>
+            <a:endParaRPr lang="en-US" sz="1200" dirty="0"/>
+          </a:p>
+        </p:txBody>
+      </p:sp>
+      <p:sp>
+        <p:nvSpPr>
+          <p:cNvPr id="14" name="Shape 11"/>
+          <p:cNvSpPr/>
+          <p:nvPr/>
+        </p:nvSpPr>
+        <p:spPr>
+          <a:xfrm>
+            <a:off x="4663440" y="3017520"/>
+            <a:ext cx="4160520" cy="1325880"/>
+          </a:xfrm>
+          <a:prstGeom prst="rect">
+            <a:avLst/>
+          </a:prstGeom>
+          <a:solidFill>
+            <a:srgbClr val="F5F7FA"/>
+          </a:solidFill>
+          <a:ln/>
+        </p:spPr>
+      </p:sp>
+      <p:sp>
+        <p:nvSpPr>
+          <p:cNvPr id="15" name="Shape 12"/>
+          <p:cNvSpPr/>
+          <p:nvPr/>
+        </p:nvSpPr>
+        <p:spPr>
+          <a:xfrm>
+            <a:off x="4663440" y="3017520"/>
+            <a:ext cx="73152" cy="1325880"/>
+          </a:xfrm>
+          <a:prstGeom prst="rect">
+            <a:avLst/>
+          </a:prstGeom>
+          <a:solidFill>
+            <a:srgbClr val="1B2A4A"/>
+          </a:solidFill>
+          <a:ln/>
+        </p:spPr>
+      </p:sp>
+      <p:sp>
+        <p:nvSpPr>
+          <p:cNvPr id="16" name="Text 13"/>
+          <p:cNvSpPr txBox="1"/>
+          <p:nvPr/>
+        </p:nvSpPr>
+        <p:spPr>
+          <a:xfrm>
+            <a:off x="4800600" y="3063240"/>
+            <a:ext cx="3931920" cy="256032"/>
+          </a:xfrm>
+          <a:prstGeom prst="rect">
+            <a:avLst/>
+          </a:prstGeom>
+          <a:noFill/>
+          <a:ln/>
+        </p:spPr>
+        <p:txBody>
+          <a:bodyPr wrap="square" lIns="508" tIns="508" rIns="508" bIns="508" rtlCol="0" anchor="ctr">
+            <a:normAutofit/>
+            <a:spAutoFit/>
+          </a:bodyPr>
+          <a:lstStyle/>
+          <a:p>
+            <a:pPr algn="l" indent="0" marL="0">
+              <a:buNone/>
+            </a:pPr>
+            <a:r>
+              <a:rPr lang="en-US" sz="1100" b="1" spc="400" kern="0" dirty="0">
+                <a:solidFill>
+                  <a:srgbClr val="1B2A4A"/>
+                </a:solidFill>
+                <a:latin typeface="Trebuchet MS" pitchFamily="34" charset="0"/>
+                <a:ea typeface="Trebuchet MS" pitchFamily="34" charset="-122"/>
+                <a:cs typeface="Trebuchet MS" pitchFamily="34" charset="-120"/>
+              </a:rPr>
+              <a:t>ASSIGNMENT vs FACTORING</a:t>
+            </a:r>
+            <a:endParaRPr lang="en-US" sz="1100" dirty="0"/>
+          </a:p>
+        </p:txBody>
+      </p:sp>
+      <p:sp>
+        <p:nvSpPr>
+          <p:cNvPr id="17" name="Text 14"/>
+          <p:cNvSpPr txBox="1"/>
+          <p:nvPr/>
+        </p:nvSpPr>
+        <p:spPr>
+          <a:xfrm>
+            <a:off x="4800600" y="3337560"/>
+            <a:ext cx="3931920" cy="960120"/>
+          </a:xfrm>
+          <a:prstGeom prst="rect">
+            <a:avLst/>
+          </a:prstGeom>
+          <a:noFill/>
+          <a:ln/>
+        </p:spPr>
+        <p:txBody>
+          <a:bodyPr wrap="square" lIns="508" tIns="508" rIns="508" bIns="508" rtlCol="0" anchor="t">
+            <a:normAutofit/>
+            <a:spAutoFit/>
+          </a:bodyPr>
+          <a:lstStyle/>
+          <a:p>
+            <a:pPr algn="l" indent="0" marL="0">
+              <a:buNone/>
+            </a:pPr>
+            <a:r>
+              <a:rPr lang="en-US" sz="1200" dirty="0">
+                <a:solidFill>
+                  <a:srgbClr val="334155"/>
+                </a:solidFill>
+                <a:latin typeface="Calibri" pitchFamily="34" charset="0"/>
+                <a:ea typeface="Calibri" pitchFamily="34" charset="-122"/>
+                <a:cs typeface="Calibri" pitchFamily="34" charset="-120"/>
+              </a:rPr>
+              <a:t>Assignment pledges receivables as collateral and the company still does the collecting. Factoring SELLS them at a discount, and the factor takes over credit granting and collection.</a:t>
             </a:r>
             <a:endParaRPr lang="en-US" sz="1200" dirty="0"/>
           </a:p>
@@ -22808,7 +23675,7 @@
                 <a:ea typeface="Trebuchet MS" pitchFamily="34" charset="-122"/>
                 <a:cs typeface="Trebuchet MS" pitchFamily="34" charset="-120"/>
               </a:rPr>
-              <a:t>Commercial paper is unsecured, &lt;90-day, and rolled over constantly — the rollover risk is plugged by a committed backup liquidity line</a:t>
+              <a:t>Commercial paper is unsecured, typically under three months, and rolled over constantly — the rollover risk is plugged by a committed backup liquidity line</a:t>
             </a:r>
             <a:endParaRPr lang="en-US" sz="1600" dirty="0"/>
           </a:p>
@@ -22912,7 +23779,7 @@
                 <a:ea typeface="Calibri" pitchFamily="34" charset="-122"/>
                 <a:cs typeface="Calibri" pitchFamily="34" charset="-120"/>
               </a:rPr>
-              <a:t>Source: CFA Institute, Curriculum Vol 6, Learning Module 4, "External, Security-Based Financing" and ABCP, pp. 82–85.</a:t>
+              <a:t>Source: CFA Institute, Curriculum Vol 6, Learning Module 4, external security-based financing, bank funding, ABCP (Exhibit 3), pp. 82–85.</a:t>
             </a:r>
             <a:endParaRPr lang="en-US" sz="750" dirty="0"/>
           </a:p>
@@ -22954,7 +23821,7 @@
                 <a:ea typeface="Calibri" pitchFamily="34" charset="-122"/>
                 <a:cs typeface="Calibri" pitchFamily="34" charset="-120"/>
               </a:rPr>
-              <a:t>About 60% of annual CP issuance is by financial institutions; ABCP wraps short-term loans into an SPE and keeps the loans off the bank's balance sheet.</a:t>
+              <a:t>Roughly 60% of annual CP issuance comes from financial institutions. ABCP wraps short-term loans into an SPE and keeps them off the sponsoring bank's balance sheet.</a:t>
             </a:r>
             <a:endParaRPr lang="en-US" sz="1300" dirty="0"/>
           </a:p>
@@ -23036,7 +23903,7 @@
                 <a:ea typeface="Trebuchet MS" pitchFamily="34" charset="-122"/>
                 <a:cs typeface="Trebuchet MS" pitchFamily="34" charset="-120"/>
               </a:rPr>
-              <a:t>CP (UNSECURED)</a:t>
+              <a:t>CP — UNSECURED</a:t>
             </a:r>
             <a:endParaRPr lang="en-US" sz="1100" dirty="0"/>
           </a:p>
@@ -23078,7 +23945,7 @@
                 <a:ea typeface="Calibri" pitchFamily="34" charset="-122"/>
                 <a:cs typeface="Calibri" pitchFamily="34" charset="-120"/>
               </a:rPr>
-              <a:t>Issued by IG corporates and financial institutions.</a:t>
+              <a:t>Issued by large, highly rated corporates and financial institutions, publicly or by private placement.</a:t>
             </a:r>
             <a:endParaRPr lang="en-US" sz="1200" dirty="0"/>
           </a:p>
@@ -23101,7 +23968,7 @@
                 <a:ea typeface="Calibri" pitchFamily="34" charset="-122"/>
                 <a:cs typeface="Calibri" pitchFamily="34" charset="-120"/>
               </a:rPr>
-              <a:t>• Usually &lt; 3 months maturity</a:t>
+              <a:t>• Usually under three months</a:t>
             </a:r>
             <a:endParaRPr lang="en-US" sz="1200" dirty="0"/>
           </a:p>
@@ -23118,7 +23985,7 @@
                 <a:ea typeface="Calibri" pitchFamily="34" charset="-122"/>
                 <a:cs typeface="Calibri" pitchFamily="34" charset="-120"/>
               </a:rPr>
-              <a:t>• Unsecured promissory note</a:t>
+              <a:t>• An unsecured promissory note</a:t>
             </a:r>
             <a:endParaRPr lang="en-US" sz="1200" dirty="0"/>
           </a:p>
@@ -23135,7 +24002,7 @@
                 <a:ea typeface="Calibri" pitchFamily="34" charset="-122"/>
                 <a:cs typeface="Calibri" pitchFamily="34" charset="-120"/>
               </a:rPr>
-              <a:t>• Rolled over at maturity with newly issued CP</a:t>
+              <a:t>• Repaid at maturity with newly issued CP — "rolled over"</a:t>
             </a:r>
             <a:endParaRPr lang="en-US" sz="1200" dirty="0"/>
           </a:p>
@@ -23169,7 +24036,24 @@
                 <a:ea typeface="Calibri" pitchFamily="34" charset="-122"/>
                 <a:cs typeface="Calibri" pitchFamily="34" charset="-120"/>
               </a:rPr>
-              <a:t>• Eurocommercial paper = USCP's international cousin, smaller trade size, less liquid</a:t>
+              <a:t>• Eurocommercial paper is the international cousin: smaller tickets, less liquid than USCP</a:t>
+            </a:r>
+            <a:endParaRPr lang="en-US" sz="1200" dirty="0"/>
+          </a:p>
+          <a:p>
+            <a:pPr algn="l" indent="0" marL="0">
+              <a:buNone/>
+            </a:pPr>
+            <a:r>
+              <a:rPr lang="en-US" sz="1200" dirty="0">
+                <a:solidFill>
+                  <a:srgbClr val="334155"/>
+                </a:solidFill>
+                <a:latin typeface="Calibri" pitchFamily="34" charset="0"/>
+                <a:ea typeface="Calibri" pitchFamily="34" charset="-122"/>
+                <a:cs typeface="Calibri" pitchFamily="34" charset="-120"/>
+              </a:rPr>
+              <a:t>• Short maturity means the market reprices fast; defaults are rare</a:t>
             </a:r>
             <a:endParaRPr lang="en-US" sz="1200" dirty="0"/>
           </a:p>
@@ -23251,7 +24135,7 @@
                 <a:ea typeface="Trebuchet MS" pitchFamily="34" charset="-122"/>
                 <a:cs typeface="Trebuchet MS" pitchFamily="34" charset="-120"/>
               </a:rPr>
-              <a:t>ABCP (SECURED)</a:t>
+              <a:t>ABCP — SECURED</a:t>
             </a:r>
             <a:endParaRPr lang="en-US" sz="1100" dirty="0"/>
           </a:p>
@@ -23293,7 +24177,7 @@
                 <a:ea typeface="Calibri" pitchFamily="34" charset="-122"/>
                 <a:cs typeface="Calibri" pitchFamily="34" charset="-120"/>
               </a:rPr>
-              <a:t>Bank transfers short-term loans / receivables to an SPE.</a:t>
+              <a:t>A bank transfers short-term loans or receivables to a special purpose entity.</a:t>
             </a:r>
             <a:endParaRPr lang="en-US" sz="1200" dirty="0"/>
           </a:p>
@@ -23316,7 +24200,7 @@
                 <a:ea typeface="Calibri" pitchFamily="34" charset="-122"/>
                 <a:cs typeface="Calibri" pitchFamily="34" charset="-120"/>
               </a:rPr>
-              <a:t>• SPE issues CP backed by those assets</a:t>
+              <a:t>• The SPE — not the bank — issues the CP, backed by those assets</a:t>
             </a:r>
             <a:endParaRPr lang="en-US" sz="1200" dirty="0"/>
           </a:p>
@@ -23333,7 +24217,7 @@
                 <a:ea typeface="Calibri" pitchFamily="34" charset="-122"/>
                 <a:cs typeface="Calibri" pitchFamily="34" charset="-120"/>
               </a:rPr>
-              <a:t>• Bank provides a backup liquidity line (not a guarantee)</a:t>
+              <a:t>• The bank provides a backup liquidity line, not a guarantee</a:t>
             </a:r>
             <a:endParaRPr lang="en-US" sz="1200" dirty="0"/>
           </a:p>
@@ -23350,7 +24234,7 @@
                 <a:ea typeface="Calibri" pitchFamily="34" charset="-122"/>
                 <a:cs typeface="Calibri" pitchFamily="34" charset="-120"/>
               </a:rPr>
-              <a:t>• Off-balance-sheet for the bank → reduced capital charge</a:t>
+              <a:t>• Off balance sheet for the bank, so lower capital cost</a:t>
             </a:r>
             <a:endParaRPr lang="en-US" sz="1200" dirty="0"/>
           </a:p>
@@ -23367,7 +24251,7 @@
                 <a:ea typeface="Calibri" pitchFamily="34" charset="-122"/>
                 <a:cs typeface="Calibri" pitchFamily="34" charset="-120"/>
               </a:rPr>
-              <a:t>• Investors get exposure to a loan pool they could not access directly</a:t>
+              <a:t>• Investors buy exposure to a loan pool they could not otherwise reach</a:t>
             </a:r>
             <a:endParaRPr lang="en-US" sz="1200" dirty="0"/>
           </a:p>
@@ -23384,7 +24268,7 @@
                 <a:ea typeface="Calibri" pitchFamily="34" charset="-122"/>
                 <a:cs typeface="Calibri" pitchFamily="34" charset="-120"/>
               </a:rPr>
-              <a:t>• Nearly collapsed 2007–2008 under rollover pressure</a:t>
+              <a:t>• Grew fast pre-2008; when issuers could not roll, numerous SPEs failed</a:t>
             </a:r>
             <a:endParaRPr lang="en-US" sz="1200" dirty="0"/>
           </a:p>
@@ -23466,7 +24350,7 @@
                 <a:ea typeface="Trebuchet MS" pitchFamily="34" charset="-122"/>
                 <a:cs typeface="Trebuchet MS" pitchFamily="34" charset="-120"/>
               </a:rPr>
-              <a:t>ALSO — INTERBANK &amp; CDs</a:t>
+              <a:t>CDs &amp; INTERBANK</a:t>
             </a:r>
             <a:endParaRPr lang="en-US" sz="1100" dirty="0"/>
           </a:p>
@@ -23495,29 +24379,6 @@
             <a:spAutoFit/>
           </a:bodyPr>
           <a:lstStyle/>
-          <a:p>
-            <a:pPr algn="l" indent="0" marL="0">
-              <a:buNone/>
-            </a:pPr>
-            <a:r>
-              <a:rPr lang="en-US" sz="1200" dirty="0">
-                <a:solidFill>
-                  <a:srgbClr val="334155"/>
-                </a:solidFill>
-                <a:latin typeface="Calibri" pitchFamily="34" charset="0"/>
-                <a:ea typeface="Calibri" pitchFamily="34" charset="-122"/>
-                <a:cs typeface="Calibri" pitchFamily="34" charset="-120"/>
-              </a:rPr>
-              <a:t>Financial institutions borrow from each other overnight to ~1y at rates tied to the MRR.</a:t>
-            </a:r>
-            <a:endParaRPr lang="en-US" sz="1200" dirty="0"/>
-          </a:p>
-          <a:p>
-            <a:pPr algn="l" indent="0" marL="0">
-              <a:buNone/>
-            </a:pPr>
-            <a:endParaRPr lang="en-US" sz="1200" dirty="0"/>
-          </a:p>
           <a:p>
             <a:pPr algn="l" indent="0" marL="0">
               <a:buNone/>
@@ -23548,7 +24409,7 @@
                 <a:ea typeface="Calibri" pitchFamily="34" charset="-122"/>
                 <a:cs typeface="Calibri" pitchFamily="34" charset="-120"/>
               </a:rPr>
-              <a:t>  • &lt; 1 year, pay interest at maturity</a:t>
+              <a:t>  • Non-negotiable — early withdrawal carries a penalty</a:t>
             </a:r>
             <a:endParaRPr lang="en-US" sz="1200" dirty="0"/>
           </a:p>
@@ -23565,7 +24426,7 @@
                 <a:ea typeface="Calibri" pitchFamily="34" charset="-122"/>
                 <a:cs typeface="Calibri" pitchFamily="34" charset="-120"/>
               </a:rPr>
-              <a:t>  • Non-negotiable → early-withdrawal penalty</a:t>
+              <a:t>  • Negotiable — sold in the market before maturity</a:t>
             </a:r>
             <a:endParaRPr lang="en-US" sz="1200" dirty="0"/>
           </a:p>
@@ -23582,8 +24443,14 @@
                 <a:ea typeface="Calibri" pitchFamily="34" charset="-122"/>
                 <a:cs typeface="Calibri" pitchFamily="34" charset="-120"/>
               </a:rPr>
-              <a:t>  • Negotiable → tradeable pre-maturity</a:t>
-            </a:r>
+              <a:t>  • Large-denomination CDs are core wholesale funding</a:t>
+            </a:r>
+            <a:endParaRPr lang="en-US" sz="1200" dirty="0"/>
+          </a:p>
+          <a:p>
+            <a:pPr algn="l" indent="0" marL="0">
+              <a:buNone/>
+            </a:pPr>
             <a:endParaRPr lang="en-US" sz="1200" dirty="0"/>
           </a:p>
           <a:p>
@@ -23599,7 +24466,30 @@
                 <a:ea typeface="Calibri" pitchFamily="34" charset="-122"/>
                 <a:cs typeface="Calibri" pitchFamily="34" charset="-120"/>
               </a:rPr>
-              <a:t>  • Large-denom CDs = major wholesale bank funding source</a:t>
+              <a:t>Interbank market: secured or unsecured, overnight out to a year, priced off the MRR.</a:t>
+            </a:r>
+            <a:endParaRPr lang="en-US" sz="1200" dirty="0"/>
+          </a:p>
+          <a:p>
+            <a:pPr algn="l" indent="0" marL="0">
+              <a:buNone/>
+            </a:pPr>
+            <a:endParaRPr lang="en-US" sz="1200" dirty="0"/>
+          </a:p>
+          <a:p>
+            <a:pPr algn="l" indent="0" marL="0">
+              <a:buNone/>
+            </a:pPr>
+            <a:r>
+              <a:rPr lang="en-US" sz="1200" dirty="0">
+                <a:solidFill>
+                  <a:srgbClr val="334155"/>
+                </a:solidFill>
+                <a:latin typeface="Calibri" pitchFamily="34" charset="0"/>
+                <a:ea typeface="Calibri" pitchFamily="34" charset="-122"/>
+                <a:cs typeface="Calibri" pitchFamily="34" charset="-120"/>
+              </a:rPr>
+              <a:t>Central bank funds market moves reserves between banks at the central bank funds rate. The discount window is the last resort — collateralised, dearer, and it invites supervision.</a:t>
             </a:r>
             <a:endParaRPr lang="en-US" sz="1200" dirty="0"/>
           </a:p>
@@ -23706,7 +24596,7 @@
                 <a:ea typeface="Trebuchet MS" pitchFamily="34" charset="-122"/>
                 <a:cs typeface="Trebuchet MS" pitchFamily="34" charset="-120"/>
               </a:rPr>
-              <a:t>A repurchase agreement is a collateralised loan dressed as a sale — the repo rate is the interest, the haircut is the overcollateralisation</a:t>
+              <a:t>A repo is a collateralised loan dressed as a sale — the repo rate is the interest, the haircut is the overcollateralisation, and the SELLER keeps ownership</a:t>
             </a:r>
             <a:endParaRPr lang="en-US" sz="1600" dirty="0"/>
           </a:p>
@@ -23782,6 +24672,61 @@
         </p:nvSpPr>
         <p:spPr>
           <a:xfrm>
+            <a:off x="320040" y="4325112"/>
+            <a:ext cx="8503920" cy="338328"/>
+          </a:xfrm>
+          <a:prstGeom prst="rect">
+            <a:avLst/>
+          </a:prstGeom>
+          <a:noFill/>
+          <a:ln/>
+        </p:spPr>
+        <p:txBody>
+          <a:bodyPr wrap="square" lIns="254" tIns="254" rIns="254" bIns="254" rtlCol="0" anchor="t"/>
+          <a:lstStyle/>
+          <a:p>
+            <a:pPr indent="0" marL="0">
+              <a:buNone/>
+            </a:pPr>
+            <a:r>
+              <a:rPr lang="en-US" sz="1000" dirty="0">
+                <a:solidFill>
+                  <a:srgbClr val="6B7A8D"/>
+                </a:solidFill>
+                <a:latin typeface="Calibri" pitchFamily="34" charset="0"/>
+                <a:ea typeface="Calibri" pitchFamily="34" charset="-122"/>
+                <a:cs typeface="Calibri" pitchFamily="34" charset="-120"/>
+              </a:rPr>
+              <a:t>¹ The cash borrower (security seller) keeps ownership of the collateral and its coupons; the cash lender receives only the repo rate.
+</a:t>
+            </a:r>
+            <a:pPr indent="0" marL="0">
+              <a:buNone/>
+            </a:pPr>
+            <a:r>
+              <a:rPr lang="en-US" sz="1000" dirty="0">
+                <a:solidFill>
+                  <a:srgbClr val="6B7A8D"/>
+                </a:solidFill>
+                <a:latin typeface="Calibri" pitchFamily="34" charset="0"/>
+                <a:ea typeface="Calibri" pitchFamily="34" charset="-122"/>
+                <a:cs typeface="Calibri" pitchFamily="34" charset="-120"/>
+              </a:rPr>
+              <a:t>² General collateral repo references a pool of eligible bonds; a special trade names one security and prices off the special rate.
+</a:t>
+            </a:r>
+            <a:endParaRPr lang="en-US" sz="1000" dirty="0"/>
+          </a:p>
+        </p:txBody>
+      </p:sp>
+      <p:sp>
+        <p:nvSpPr>
+          <p:cNvPr id="8" name="Text 6"/>
+          <p:cNvSpPr txBox="1"/>
+          <p:nvPr/>
+        </p:nvSpPr>
+        <p:spPr>
+          <a:xfrm>
             <a:off x="320040" y="4663440"/>
             <a:ext cx="8503920" cy="201168"/>
           </a:xfrm>
@@ -23810,7 +24755,7 @@
                 <a:ea typeface="Calibri" pitchFamily="34" charset="-122"/>
                 <a:cs typeface="Calibri" pitchFamily="34" charset="-120"/>
               </a:rPr>
-              <a:t>Source: CFA Institute, Curriculum Vol 6, Learning Module 4, "Repurchase Agreements" Knowledge Check, pp. 86–89.</a:t>
+              <a:t>Source: CFA Institute, Curriculum Vol 6, Learning Module 4, "Repurchase Agreements", Exhibit 4 and Knowledge Checks, pp. 86–89.</a:t>
             </a:r>
             <a:endParaRPr lang="en-US" sz="750" dirty="0"/>
           </a:p>
@@ -23818,7 +24763,7 @@
       </p:sp>
       <p:sp>
         <p:nvSpPr>
-          <p:cNvPr id="8" name="Text 6"/>
+          <p:cNvPr id="9" name="Text 7"/>
           <p:cNvSpPr txBox="1"/>
           <p:nvPr/>
         </p:nvSpPr>
@@ -23852,7 +24797,7 @@
                 <a:ea typeface="Calibri" pitchFamily="34" charset="-122"/>
                 <a:cs typeface="Calibri" pitchFamily="34" charset="-120"/>
               </a:rPr>
-              <a:t>Legally a sale + forward repurchase; economically a secured loan. Initial margin &gt; 100% means the cash lender is overcollateralised; the haircut is the borrower's skin in the game.</a:t>
+              <a:t>Legally a sale plus a forward repurchase; economically a secured loan. Initial margin above 100% means the cash lender is overcollateralised — the haircut is the borrower's own money.</a:t>
             </a:r>
             <a:endParaRPr lang="en-US" sz="1300" dirty="0"/>
           </a:p>
@@ -23860,14 +24805,14 @@
       </p:sp>
       <p:sp>
         <p:nvSpPr>
-          <p:cNvPr id="9" name="Shape 7"/>
+          <p:cNvPr id="10" name="Shape 8"/>
           <p:cNvSpPr/>
           <p:nvPr/>
         </p:nvSpPr>
         <p:spPr>
           <a:xfrm>
-            <a:off x="320040" y="1188720"/>
-            <a:ext cx="8503920" cy="658368"/>
+            <a:off x="320040" y="1133856"/>
+            <a:ext cx="8503920" cy="530352"/>
           </a:xfrm>
           <a:prstGeom prst="rect">
             <a:avLst/>
@@ -23880,14 +24825,14 @@
       </p:sp>
       <p:sp>
         <p:nvSpPr>
-          <p:cNvPr id="10" name="Text 8"/>
+          <p:cNvPr id="11" name="Text 9"/>
           <p:cNvSpPr txBox="1"/>
           <p:nvPr/>
         </p:nvSpPr>
         <p:spPr>
           <a:xfrm>
-            <a:off x="411480" y="1188720"/>
-            <a:ext cx="8321040" cy="658368"/>
+            <a:off x="411480" y="1133856"/>
+            <a:ext cx="8321040" cy="530352"/>
           </a:xfrm>
           <a:prstGeom prst="rect">
             <a:avLst/>
@@ -23914,7 +24859,7 @@
                 <a:ea typeface="Consolas" pitchFamily="34" charset="-122"/>
                 <a:cs typeface="Consolas" pitchFamily="34" charset="-120"/>
               </a:rPr>
-              <a:t>Initial margin  =  Security price / Purchase price        Haircut  =  (Sec px − Purchase px) / Sec px        Repurchase px  =  Purchase px × [1 + r × d/360]</a:t>
+              <a:t>Initial margin = Sec price / Purchase price      Haircut = (Sec price − Purchase price) / Sec price</a:t>
             </a:r>
             <a:endParaRPr lang="en-US" sz="1800" dirty="0"/>
           </a:p>
@@ -23922,13 +24867,13 @@
       </p:sp>
       <p:sp>
         <p:nvSpPr>
-          <p:cNvPr id="11" name="Text 9"/>
+          <p:cNvPr id="12" name="Text 10"/>
           <p:cNvSpPr txBox="1"/>
           <p:nvPr/>
         </p:nvSpPr>
         <p:spPr>
           <a:xfrm>
-            <a:off x="320040" y="1874520"/>
+            <a:off x="320040" y="1691640"/>
             <a:ext cx="8503920" cy="256032"/>
           </a:xfrm>
           <a:prstGeom prst="rect">
@@ -23956,7 +24901,7 @@
                 <a:ea typeface="Calibri" pitchFamily="34" charset="-122"/>
                 <a:cs typeface="Calibri" pitchFamily="34" charset="-120"/>
               </a:rPr>
-              <a:t>where: r = repo rate (annualized); d = days to repo maturity; variation margin = (Initial margin × Purchase pxₜ) − Security pxₜ, transferred to restore original margin.</a:t>
+              <a:t>where: Repurchase price = Purchase price × [1 + r × d/360]. Variation margin = (Initial margin × Purchase priceₜ) − Security priceₜ.</a:t>
             </a:r>
             <a:endParaRPr lang="en-US" sz="1100" dirty="0"/>
           </a:p>
@@ -23964,14 +24909,14 @@
       </p:sp>
       <p:sp>
         <p:nvSpPr>
-          <p:cNvPr id="12" name="Shape 10"/>
+          <p:cNvPr id="13" name="Shape 11"/>
           <p:cNvSpPr/>
           <p:nvPr/>
         </p:nvSpPr>
         <p:spPr>
           <a:xfrm>
-            <a:off x="320040" y="2331720"/>
-            <a:ext cx="8503920" cy="1965960"/>
+            <a:off x="320040" y="1993392"/>
+            <a:ext cx="8503920" cy="2212848"/>
           </a:xfrm>
           <a:prstGeom prst="rect">
             <a:avLst/>
@@ -23989,13 +24934,13 @@
       </p:sp>
       <p:sp>
         <p:nvSpPr>
-          <p:cNvPr id="13" name="Text 11"/>
+          <p:cNvPr id="14" name="Text 12"/>
           <p:cNvSpPr txBox="1"/>
           <p:nvPr/>
         </p:nvSpPr>
         <p:spPr>
           <a:xfrm>
-            <a:off x="457200" y="2377440"/>
+            <a:off x="457200" y="2039112"/>
             <a:ext cx="8229600" cy="256032"/>
           </a:xfrm>
           <a:prstGeom prst="rect">
@@ -24023,51 +24968,9 @@
                 <a:ea typeface="Trebuchet MS" pitchFamily="34" charset="-122"/>
                 <a:cs typeface="Trebuchet MS" pitchFamily="34" charset="-120"/>
               </a:rPr>
-              <a:t>CFA LM 4 — 30-DAY REPO ON USD 100m US 5y TREASURY · REPO RATE 0.25% · INITIAL MARGIN 102%</a:t>
+              <a:t>CFA LM 4 KNOWLEDGE CHECK — 30-DAY REPO ON USD 100m UST</a:t>
             </a:r>
             <a:endParaRPr lang="en-US" sz="1100" dirty="0"/>
-          </a:p>
-        </p:txBody>
-      </p:sp>
-      <p:sp>
-        <p:nvSpPr>
-          <p:cNvPr id="14" name="Text 12"/>
-          <p:cNvSpPr txBox="1"/>
-          <p:nvPr/>
-        </p:nvSpPr>
-        <p:spPr>
-          <a:xfrm>
-            <a:off x="457200" y="2670048"/>
-            <a:ext cx="8229600" cy="457200"/>
-          </a:xfrm>
-          <a:prstGeom prst="rect">
-            <a:avLst/>
-          </a:prstGeom>
-          <a:noFill/>
-          <a:ln/>
-        </p:spPr>
-        <p:txBody>
-          <a:bodyPr wrap="square" lIns="508" tIns="508" rIns="508" bIns="508" rtlCol="0" anchor="t">
-            <a:normAutofit/>
-            <a:spAutoFit/>
-          </a:bodyPr>
-          <a:lstStyle/>
-          <a:p>
-            <a:pPr algn="l" indent="0" marL="0">
-              <a:buNone/>
-            </a:pPr>
-            <a:r>
-              <a:rPr lang="en-US" sz="1200" dirty="0">
-                <a:solidFill>
-                  <a:srgbClr val="334155"/>
-                </a:solidFill>
-                <a:latin typeface="Calibri" pitchFamily="34" charset="0"/>
-                <a:ea typeface="Calibri" pitchFamily="34" charset="-122"/>
-                <a:cs typeface="Calibri" pitchFamily="34" charset="-120"/>
-              </a:rPr>
-              <a:t>Seller (cash borrower) delivers USD 100m of Treasuries as collateral to buyer (cash lender).</a:t>
-            </a:r>
-            <a:endParaRPr lang="en-US" sz="1200" dirty="0"/>
           </a:p>
         </p:txBody>
       </p:sp>
@@ -24079,8 +24982,8 @@
         </p:nvSpPr>
         <p:spPr>
           <a:xfrm>
-            <a:off x="457200" y="3182112"/>
-            <a:ext cx="8229600" cy="603504"/>
+            <a:off x="457200" y="2331720"/>
+            <a:ext cx="8229600" cy="1362456"/>
           </a:xfrm>
           <a:prstGeom prst="rect">
             <a:avLst/>
@@ -24102,7 +25005,7 @@
               <a:buNone/>
             </a:pPr>
             <a:r>
-              <a:rPr lang="en-US" sz="1050" b="1" dirty="0">
+              <a:rPr lang="en-US" sz="1150" b="1" dirty="0">
                 <a:solidFill>
                   <a:srgbClr val="1B2A4A"/>
                 </a:solidFill>
@@ -24119,7 +25022,7 @@
               <a:buNone/>
             </a:pPr>
             <a:r>
-              <a:rPr lang="en-US" sz="1050" dirty="0">
+              <a:rPr lang="en-US" sz="1150" dirty="0">
                 <a:solidFill>
                   <a:srgbClr val="334155"/>
                 </a:solidFill>
@@ -24127,7 +25030,7 @@
                 <a:ea typeface="Calibri" pitchFamily="34" charset="-122"/>
                 <a:cs typeface="Calibri" pitchFamily="34" charset="-120"/>
               </a:rPr>
-              <a:t>Purchase price (loan amount) = Security price / Initial margin = 100,000,000 / 1.02 = USD 98,039,216
+              <a:t>Terms: USD 100m 5y UST, 30-day repo, 0.25% repo rate, 102% initial margin.
 </a:t>
             </a:r>
             <a:pPr indent="0" marL="0">
@@ -24137,7 +25040,7 @@
               <a:buNone/>
             </a:pPr>
             <a:r>
-              <a:rPr lang="en-US" sz="1050" b="1" dirty="0">
+              <a:rPr lang="en-US" sz="1150" b="1" dirty="0">
                 <a:solidFill>
                   <a:srgbClr val="1B2A4A"/>
                 </a:solidFill>
@@ -24154,7 +25057,7 @@
               <a:buNone/>
             </a:pPr>
             <a:r>
-              <a:rPr lang="en-US" sz="1050" dirty="0">
+              <a:rPr lang="en-US" sz="1150" dirty="0">
                 <a:solidFill>
                   <a:srgbClr val="334155"/>
                 </a:solidFill>
@@ -24162,7 +25065,7 @@
                 <a:ea typeface="Calibri" pitchFamily="34" charset="-122"/>
                 <a:cs typeface="Calibri" pitchFamily="34" charset="-120"/>
               </a:rPr>
-              <a:t>Haircut = (100,000,000 − 98,039,216) / 100,000,000 = 1.96% — seller funds remaining 1,960,784 elsewhere
+              <a:t>Seller (cash borrower) delivers the Treasuries; buyer (cash lender) sends the cash.
 </a:t>
             </a:r>
             <a:pPr indent="0" marL="0">
@@ -24172,7 +25075,7 @@
               <a:buNone/>
             </a:pPr>
             <a:r>
-              <a:rPr lang="en-US" sz="1050" b="1" dirty="0">
+              <a:rPr lang="en-US" sz="1150" b="1" dirty="0">
                 <a:solidFill>
                   <a:srgbClr val="1B2A4A"/>
                 </a:solidFill>
@@ -24189,7 +25092,77 @@
               <a:buNone/>
             </a:pPr>
             <a:r>
-              <a:rPr lang="en-US" sz="1050" dirty="0">
+              <a:rPr lang="en-US" sz="1150" dirty="0">
+                <a:solidFill>
+                  <a:srgbClr val="334155"/>
+                </a:solidFill>
+                <a:latin typeface="Calibri" pitchFamily="34" charset="0"/>
+                <a:ea typeface="Calibri" pitchFamily="34" charset="-122"/>
+                <a:cs typeface="Calibri" pitchFamily="34" charset="-120"/>
+              </a:rPr>
+              <a:t>Purchase price = Security price / Initial margin = 100,000,000 / 1.02 = USD 98,039,216
+</a:t>
+            </a:r>
+            <a:pPr indent="0" marL="0">
+              <a:spcAft>
+                <a:spcPts val="200"/>
+              </a:spcAft>
+              <a:buNone/>
+            </a:pPr>
+            <a:r>
+              <a:rPr lang="en-US" sz="1150" b="1" dirty="0">
+                <a:solidFill>
+                  <a:srgbClr val="1B2A4A"/>
+                </a:solidFill>
+                <a:latin typeface="Calibri" pitchFamily="34" charset="0"/>
+                <a:ea typeface="Calibri" pitchFamily="34" charset="-122"/>
+                <a:cs typeface="Calibri" pitchFamily="34" charset="-120"/>
+              </a:rPr>
+              <a:t>4. </a:t>
+            </a:r>
+            <a:pPr indent="0" marL="0">
+              <a:spcAft>
+                <a:spcPts val="200"/>
+              </a:spcAft>
+              <a:buNone/>
+            </a:pPr>
+            <a:r>
+              <a:rPr lang="en-US" sz="1150" dirty="0">
+                <a:solidFill>
+                  <a:srgbClr val="334155"/>
+                </a:solidFill>
+                <a:latin typeface="Calibri" pitchFamily="34" charset="0"/>
+                <a:ea typeface="Calibri" pitchFamily="34" charset="-122"/>
+                <a:cs typeface="Calibri" pitchFamily="34" charset="-120"/>
+              </a:rPr>
+              <a:t>Haircut = (100,000,000 − 98,039,216) / 100,000,000 = 1.96%; the seller funds 1,960,784 elsewhere
+</a:t>
+            </a:r>
+            <a:pPr indent="0" marL="0">
+              <a:spcAft>
+                <a:spcPts val="200"/>
+              </a:spcAft>
+              <a:buNone/>
+            </a:pPr>
+            <a:r>
+              <a:rPr lang="en-US" sz="1150" b="1" dirty="0">
+                <a:solidFill>
+                  <a:srgbClr val="1B2A4A"/>
+                </a:solidFill>
+                <a:latin typeface="Calibri" pitchFamily="34" charset="0"/>
+                <a:ea typeface="Calibri" pitchFamily="34" charset="-122"/>
+                <a:cs typeface="Calibri" pitchFamily="34" charset="-120"/>
+              </a:rPr>
+              <a:t>5. </a:t>
+            </a:r>
+            <a:pPr indent="0" marL="0">
+              <a:spcAft>
+                <a:spcPts val="200"/>
+              </a:spcAft>
+              <a:buNone/>
+            </a:pPr>
+            <a:r>
+              <a:rPr lang="en-US" sz="1150" dirty="0">
                 <a:solidFill>
                   <a:srgbClr val="334155"/>
                 </a:solidFill>
@@ -24207,7 +25180,7 @@
               <a:buNone/>
             </a:pPr>
             <a:r>
-              <a:rPr lang="en-US" sz="1050" b="1" dirty="0">
+              <a:rPr lang="en-US" sz="1150" b="1" dirty="0">
                 <a:solidFill>
                   <a:srgbClr val="1B2A4A"/>
                 </a:solidFill>
@@ -24215,7 +25188,7 @@
                 <a:ea typeface="Calibri" pitchFamily="34" charset="-122"/>
                 <a:cs typeface="Calibri" pitchFamily="34" charset="-120"/>
               </a:rPr>
-              <a:t>4. </a:t>
+              <a:t>6. </a:t>
             </a:r>
             <a:pPr indent="0" marL="0">
               <a:spcAft>
@@ -24224,7 +25197,7 @@
               <a:buNone/>
             </a:pPr>
             <a:r>
-              <a:rPr lang="en-US" sz="1050" dirty="0">
+              <a:rPr lang="en-US" sz="1150" dirty="0">
                 <a:solidFill>
                   <a:srgbClr val="334155"/>
                 </a:solidFill>
@@ -24232,9 +25205,9 @@
                 <a:ea typeface="Calibri" pitchFamily="34" charset="-122"/>
                 <a:cs typeface="Calibri" pitchFamily="34" charset="-120"/>
               </a:rPr>
-              <a:t>Repo interest earned by cash lender = 98,059,641 − 98,039,216 = USD 20,425</a:t>
-            </a:r>
-            <a:endParaRPr lang="en-US" sz="1050" dirty="0"/>
+              <a:t>Repo interest to the cash lender = 98,059,641 − 98,039,216 = USD 20,425</a:t>
+            </a:r>
+            <a:endParaRPr lang="en-US" sz="1150" dirty="0"/>
           </a:p>
         </p:txBody>
       </p:sp>
@@ -24246,7 +25219,7 @@
         </p:nvSpPr>
         <p:spPr>
           <a:xfrm>
-            <a:off x="411480" y="3858768"/>
+            <a:off x="411480" y="3767328"/>
             <a:ext cx="8321040" cy="365760"/>
           </a:xfrm>
           <a:prstGeom prst="rect">
@@ -24266,7 +25239,7 @@
         </p:nvSpPr>
         <p:spPr>
           <a:xfrm>
-            <a:off x="457200" y="3858768"/>
+            <a:off x="457200" y="3767328"/>
             <a:ext cx="8229600" cy="365760"/>
           </a:xfrm>
           <a:prstGeom prst="rect">
@@ -24294,7 +25267,7 @@
                 <a:ea typeface="Consolas" pitchFamily="34" charset="-122"/>
                 <a:cs typeface="Consolas" pitchFamily="34" charset="-120"/>
               </a:rPr>
-              <a:t>Lender lends 98.04m against 100m UST for 30 days → earns 20,425 of repo interest (haircut 1.96%)</a:t>
+              <a:t>Lends 98.04m against 100m of UST for 30 days · haircut 1.96% · repo interest 20,425</a:t>
             </a:r>
             <a:endParaRPr lang="en-US" sz="1150" dirty="0"/>
           </a:p>
@@ -24393,7 +25366,7 @@
               <a:buNone/>
             </a:pPr>
             <a:r>
-              <a:rPr lang="en-US" sz="1600" b="1" dirty="0">
+              <a:rPr lang="en-US" sz="1700" b="1" dirty="0">
                 <a:solidFill>
                   <a:srgbClr val="FFFFFF"/>
                 </a:solidFill>
@@ -24401,9 +25374,9 @@
                 <a:ea typeface="Trebuchet MS" pitchFamily="34" charset="-122"/>
                 <a:cs typeface="Trebuchet MS" pitchFamily="34" charset="-120"/>
               </a:rPr>
-              <a:t>Reverse repos let hedge funds short bonds — borrow the security, sell it, wait for the price to fall, buy it back cheaper, return it</a:t>
-            </a:r>
-            <a:endParaRPr lang="en-US" sz="1600" dirty="0"/>
+              <a:t>Seen from the cash lender's side the same trade is a reverse repo — and it is how a hedge fund borrows a bond in order to short it</a:t>
+            </a:r>
+            <a:endParaRPr lang="en-US" sz="1700" dirty="0"/>
           </a:p>
         </p:txBody>
       </p:sp>
@@ -24505,7 +25478,7 @@
                 <a:ea typeface="Calibri" pitchFamily="34" charset="-122"/>
                 <a:cs typeface="Calibri" pitchFamily="34" charset="-120"/>
               </a:rPr>
-              <a:t>Source: CFA Institute, Curriculum Vol 6, Learning Module 4, Exhibit 5 + Knowledge Check, pp. 90–91.</a:t>
+              <a:t>Source: CFA Institute, Curriculum Vol 6, Learning Module 4, Exhibit 5 and the reverse repo Knowledge Check, pp. 90–91.</a:t>
             </a:r>
             <a:endParaRPr lang="en-US" sz="750" dirty="0"/>
           </a:p>
@@ -24547,7 +25520,7 @@
                 <a:ea typeface="Calibri" pitchFamily="34" charset="-122"/>
                 <a:cs typeface="Calibri" pitchFamily="34" charset="-120"/>
               </a:rPr>
-              <a:t>From the cash lender's point of view the trade is a reverse repo — but the real motive may be renting the specific security to support a short.</a:t>
+              <a:t>Here the hedge fund is the security BUYER and cash LENDER — so it earns the repo rate. Its motive is not the interest; it is renting the specific bond.</a:t>
             </a:r>
             <a:endParaRPr lang="en-US" sz="1300" dirty="0"/>
           </a:p>
@@ -24749,7 +25722,7 @@
                           <a:ea typeface="Trebuchet MS" pitchFamily="34" charset="-122"/>
                           <a:cs typeface="Trebuchet MS" pitchFamily="34" charset="-120"/>
                         </a:rPr>
-                        <a:t>Cash flow / P&amp;L</a:t>
+                        <a:t>Cash flow</a:t>
                       </a:r>
                       <a:endParaRPr lang="en-US" sz="1100" dirty="0">
                         <a:latin typeface="Trebuchet MS" charset="0"/>
@@ -24901,7 +25874,7 @@
                           <a:ea typeface="Consolas" pitchFamily="34" charset="-122"/>
                           <a:cs typeface="Consolas" pitchFamily="34" charset="-120"/>
                         </a:rPr>
-                        <a:t>Borrow USD 100m 5y UST in repo market; deliver USD 100m cash</a:t>
+                        <a:t>Borrow USD 100m 5y UST in repo; deliver 100m of cash</a:t>
                       </a:r>
                       <a:endParaRPr lang="en-US" sz="1100" dirty="0">
                         <a:latin typeface="Consolas" charset="0"/>
@@ -25507,7 +26480,7 @@
                           <a:ea typeface="Consolas" pitchFamily="34" charset="-122"/>
                           <a:cs typeface="Consolas" pitchFamily="34" charset="-120"/>
                         </a:rPr>
-                        <a:t>Deliver UST back to repo counterparty, receive repurchase price USD 100.02m</a:t>
+                        <a:t>Deliver the UST back; receive repurchase price 100.02m</a:t>
                       </a:r>
                       <a:endParaRPr lang="en-US" sz="1100" dirty="0">
                         <a:latin typeface="Consolas" charset="0"/>
@@ -25665,7 +26638,7 @@
                           <a:ea typeface="Consolas" pitchFamily="34" charset="-122"/>
                           <a:cs typeface="Consolas" pitchFamily="34" charset="-120"/>
                         </a:rPr>
-                        <a:t>Over 30 days</a:t>
+                        <a:t>30 days</a:t>
                       </a:r>
                       <a:endParaRPr lang="en-US" sz="1100" dirty="0">
                         <a:latin typeface="Consolas" charset="0"/>
@@ -25721,7 +26694,7 @@
                           <a:ea typeface="Consolas" pitchFamily="34" charset="-122"/>
                           <a:cs typeface="Consolas" pitchFamily="34" charset="-120"/>
                         </a:rPr>
-                        <a:t>Short works if price falls more than repo cost</a:t>
+                        <a:t>Price gain 1.00m + repo interest 0.02m received</a:t>
                       </a:r>
                       <a:endParaRPr lang="en-US" sz="1100" dirty="0">
                         <a:latin typeface="Consolas" charset="0"/>
@@ -25777,7 +26750,7 @@
                           <a:ea typeface="Consolas" pitchFamily="34" charset="-122"/>
                           <a:cs typeface="Consolas" pitchFamily="34" charset="-120"/>
                         </a:rPr>
-                        <a:t>Profit  USD 1.02m</a:t>
+                        <a:t>USD 1,020,833</a:t>
                       </a:r>
                       <a:endParaRPr lang="en-US" sz="1100" dirty="0">
                         <a:latin typeface="Consolas" charset="0"/>
@@ -25829,8 +26802,8 @@
         </p:nvSpPr>
         <p:spPr>
           <a:xfrm>
-            <a:off x="320040" y="3246120"/>
-            <a:ext cx="8503920" cy="1097280"/>
+            <a:off x="320040" y="2971800"/>
+            <a:ext cx="4160520" cy="1371600"/>
           </a:xfrm>
           <a:prstGeom prst="rect">
             <a:avLst/>
@@ -25849,8 +26822,8 @@
         </p:nvSpPr>
         <p:spPr>
           <a:xfrm>
-            <a:off x="320040" y="3246120"/>
-            <a:ext cx="73152" cy="1097280"/>
+            <a:off x="320040" y="2971800"/>
+            <a:ext cx="73152" cy="1371600"/>
           </a:xfrm>
           <a:prstGeom prst="rect">
             <a:avLst/>
@@ -25869,8 +26842,8 @@
         </p:nvSpPr>
         <p:spPr>
           <a:xfrm>
-            <a:off x="457200" y="3291840"/>
-            <a:ext cx="8275320" cy="256032"/>
+            <a:off x="457200" y="3017520"/>
+            <a:ext cx="3931920" cy="256032"/>
           </a:xfrm>
           <a:prstGeom prst="rect">
             <a:avLst/>
@@ -25897,7 +26870,7 @@
                 <a:ea typeface="Trebuchet MS" pitchFamily="34" charset="-122"/>
                 <a:cs typeface="Trebuchet MS" pitchFamily="34" charset="-120"/>
               </a:rPr>
-              <a:t>SPECIAL COLLATERAL RATES — WHEN SHORT DEMAND MEETS SUPPLY</a:t>
+              <a:t>SPECIAL COLLATERAL</a:t>
             </a:r>
             <a:endParaRPr lang="en-US" sz="1100" dirty="0"/>
           </a:p>
@@ -25911,8 +26884,8 @@
         </p:nvSpPr>
         <p:spPr>
           <a:xfrm>
-            <a:off x="457200" y="3566160"/>
-            <a:ext cx="8275320" cy="731520"/>
+            <a:off x="457200" y="3291840"/>
+            <a:ext cx="3931920" cy="1005840"/>
           </a:xfrm>
           <a:prstGeom prst="rect">
             <a:avLst/>
@@ -25939,7 +26912,131 @@
                 <a:ea typeface="Calibri" pitchFamily="34" charset="-122"/>
                 <a:cs typeface="Calibri" pitchFamily="34" charset="-120"/>
               </a:rPr>
-              <a:t>When one specific security (e.g. the latest on-the-run UST) is in heavy short demand, the repo rate on that specific collateral can fall sharply below the general-collateral rate — sometimes even below zero. A negative repo rate means the cash lender PAYS the borrower for the privilege of renting out a scarce security.</a:t>
+              <a:t>A trade that names one specific security is a "special". Heavy short demand pushes its repo rate below the general-collateral rate — sometimes below zero, in which case the cash lender pays interest to the cash borrower.</a:t>
+            </a:r>
+            <a:endParaRPr lang="en-US" sz="1200" dirty="0"/>
+          </a:p>
+        </p:txBody>
+      </p:sp>
+      <p:sp>
+        <p:nvSpPr>
+          <p:cNvPr id="14" name="Shape 11"/>
+          <p:cNvSpPr/>
+          <p:nvPr/>
+        </p:nvSpPr>
+        <p:spPr>
+          <a:xfrm>
+            <a:off x="4663440" y="2971800"/>
+            <a:ext cx="4160520" cy="1371600"/>
+          </a:xfrm>
+          <a:prstGeom prst="rect">
+            <a:avLst/>
+          </a:prstGeom>
+          <a:solidFill>
+            <a:srgbClr val="F5F7FA"/>
+          </a:solidFill>
+          <a:ln/>
+        </p:spPr>
+      </p:sp>
+      <p:sp>
+        <p:nvSpPr>
+          <p:cNvPr id="15" name="Shape 12"/>
+          <p:cNvSpPr/>
+          <p:nvPr/>
+        </p:nvSpPr>
+        <p:spPr>
+          <a:xfrm>
+            <a:off x="4663440" y="2971800"/>
+            <a:ext cx="73152" cy="1371600"/>
+          </a:xfrm>
+          <a:prstGeom prst="rect">
+            <a:avLst/>
+          </a:prstGeom>
+          <a:solidFill>
+            <a:srgbClr val="1B2A4A"/>
+          </a:solidFill>
+          <a:ln/>
+        </p:spPr>
+      </p:sp>
+      <p:sp>
+        <p:nvSpPr>
+          <p:cNvPr id="16" name="Text 13"/>
+          <p:cNvSpPr txBox="1"/>
+          <p:nvPr/>
+        </p:nvSpPr>
+        <p:spPr>
+          <a:xfrm>
+            <a:off x="4800600" y="3017520"/>
+            <a:ext cx="3931920" cy="256032"/>
+          </a:xfrm>
+          <a:prstGeom prst="rect">
+            <a:avLst/>
+          </a:prstGeom>
+          <a:noFill/>
+          <a:ln/>
+        </p:spPr>
+        <p:txBody>
+          <a:bodyPr wrap="square" lIns="508" tIns="508" rIns="508" bIns="508" rtlCol="0" anchor="ctr">
+            <a:normAutofit/>
+            <a:spAutoFit/>
+          </a:bodyPr>
+          <a:lstStyle/>
+          <a:p>
+            <a:pPr algn="l" indent="0" marL="0">
+              <a:buNone/>
+            </a:pPr>
+            <a:r>
+              <a:rPr lang="en-US" sz="1100" b="1" spc="400" kern="0" dirty="0">
+                <a:solidFill>
+                  <a:srgbClr val="1B2A4A"/>
+                </a:solidFill>
+                <a:latin typeface="Trebuchet MS" pitchFamily="34" charset="0"/>
+                <a:ea typeface="Trebuchet MS" pitchFamily="34" charset="-122"/>
+                <a:cs typeface="Trebuchet MS" pitchFamily="34" charset="-120"/>
+              </a:rPr>
+              <a:t>BILATERAL vs TRIPARTY</a:t>
+            </a:r>
+            <a:endParaRPr lang="en-US" sz="1100" dirty="0"/>
+          </a:p>
+        </p:txBody>
+      </p:sp>
+      <p:sp>
+        <p:nvSpPr>
+          <p:cNvPr id="17" name="Text 14"/>
+          <p:cNvSpPr txBox="1"/>
+          <p:nvPr/>
+        </p:nvSpPr>
+        <p:spPr>
+          <a:xfrm>
+            <a:off x="4800600" y="3291840"/>
+            <a:ext cx="3931920" cy="1005840"/>
+          </a:xfrm>
+          <a:prstGeom prst="rect">
+            <a:avLst/>
+          </a:prstGeom>
+          <a:noFill/>
+          <a:ln/>
+        </p:spPr>
+        <p:txBody>
+          <a:bodyPr wrap="square" lIns="508" tIns="508" rIns="508" bIns="508" rtlCol="0" anchor="t">
+            <a:normAutofit/>
+            <a:spAutoFit/>
+          </a:bodyPr>
+          <a:lstStyle/>
+          <a:p>
+            <a:pPr algn="l" indent="0" marL="0">
+              <a:buNone/>
+            </a:pPr>
+            <a:r>
+              <a:rPr lang="en-US" sz="1200" dirty="0">
+                <a:solidFill>
+                  <a:srgbClr val="334155"/>
+                </a:solidFill>
+                <a:latin typeface="Calibri" pitchFamily="34" charset="0"/>
+                <a:ea typeface="Calibri" pitchFamily="34" charset="-122"/>
+                <a:cs typeface="Calibri" pitchFamily="34" charset="-120"/>
+              </a:rPr>
+              <a:t>Bilateral repo settles directly between the two parties. Under triparty, a custodian holds cash and collateral and handles valuation — cheaper and safer operationally, but the credit risk between the parties is unchanged.</a:t>
             </a:r>
             <a:endParaRPr lang="en-US" sz="1200" dirty="0"/>
           </a:p>
@@ -26038,7 +27135,7 @@
               <a:buNone/>
             </a:pPr>
             <a:r>
-              <a:rPr lang="en-US" sz="1700" b="1" dirty="0">
+              <a:rPr lang="en-US" sz="1600" b="1" dirty="0">
                 <a:solidFill>
                   <a:srgbClr val="FFFFFF"/>
                 </a:solidFill>
@@ -26046,9 +27143,9 @@
                 <a:ea typeface="Trebuchet MS" pitchFamily="34" charset="-122"/>
                 <a:cs typeface="Trebuchet MS" pitchFamily="34" charset="-120"/>
               </a:rPr>
-              <a:t>Repos caused Bear Stearns to fail — USD 18bn cash became USD 2bn in two days when counterparties refused to roll</a:t>
-            </a:r>
-            <a:endParaRPr lang="en-US" sz="1700" dirty="0"/>
+              <a:t>Heavy reliance on repo funding killed Bear Stearns — USD 18bn of cash became USD 2bn in two days when counterparties simply declined to roll</a:t>
+            </a:r>
+            <a:endParaRPr lang="en-US" sz="1600" dirty="0"/>
           </a:p>
         </p:txBody>
       </p:sp>
@@ -26147,7 +27244,7 @@
                 <a:ea typeface="Calibri" pitchFamily="34" charset="-122"/>
                 <a:cs typeface="Calibri" pitchFamily="34" charset="-120"/>
               </a:rPr>
-              <a:t>¹ Repos are uncommitted: the cash lender has no obligation to roll. Loss of market confidence + short-term funding = instant liquidity crisis.
+              <a:t>¹ Repo is uncommitted and mostly overnight: the cash lender need not roll. Collateral does not save a firm that has lost market confidence.
 </a:t>
             </a:r>
             <a:pPr indent="0" marL="0">
@@ -26162,7 +27259,7 @@
                 <a:ea typeface="Calibri" pitchFamily="34" charset="-122"/>
                 <a:cs typeface="Calibri" pitchFamily="34" charset="-120"/>
               </a:rPr>
-              <a:t>² Post-crisis reforms tightened triparty repo clearing, intraday margining, and Fed standing repo facility to reduce systemic vulnerability.
+              <a:t>² Repo risks the curriculum names: default, collateral, margining, legal, and netting / settlement — plus rollover and liquidity risk.
 </a:t>
             </a:r>
             <a:endParaRPr lang="en-US" sz="1000" dirty="0"/>
@@ -26205,7 +27302,7 @@
                 <a:ea typeface="Calibri" pitchFamily="34" charset="-122"/>
                 <a:cs typeface="Calibri" pitchFamily="34" charset="-120"/>
               </a:rPr>
-              <a:t>Source: CFA Institute, Curriculum Vol 6, Learning Module 4, "The Fall of Bear Stearns" box, pp. 93–94.</a:t>
+              <a:t>Source: CFA Institute, Curriculum Vol 6, Learning Module 4, repo risks, triparty repo, and "The Fall of Bear Stearns and the Repo Market", pp. 92–94.</a:t>
             </a:r>
             <a:endParaRPr lang="en-US" sz="750" dirty="0"/>
           </a:p>
@@ -26247,7 +27344,7 @@
                 <a:ea typeface="Calibri" pitchFamily="34" charset="-122"/>
                 <a:cs typeface="Calibri" pitchFamily="34" charset="-120"/>
               </a:rPr>
-              <a:t>The lesson is structural: repo is cheap for a reason — it's the first funding source to vanish when the firm becomes untrustworthy, and the collateralised nature does not save you.</a:t>
+              <a:t>The lesson is structural, not moral: repo is cheap because it is uncommitted, and being collateralised does not stop the funding from vanishing.</a:t>
             </a:r>
             <a:endParaRPr lang="en-US" sz="1300" dirty="0"/>
           </a:p>
@@ -26348,7 +27445,7 @@
                           <a:ea typeface="Trebuchet MS" pitchFamily="34" charset="-122"/>
                           <a:cs typeface="Trebuchet MS" pitchFamily="34" charset="-120"/>
                         </a:rPr>
-                        <a:t>Event</a:t>
+                        <a:t>What happened</a:t>
                       </a:r>
                       <a:endParaRPr lang="en-US" sz="1100" dirty="0">
                         <a:latin typeface="Trebuchet MS" charset="0"/>
@@ -26500,7 +27597,7 @@
                           <a:ea typeface="Consolas" pitchFamily="34" charset="-122"/>
                           <a:cs typeface="Consolas" pitchFamily="34" charset="-120"/>
                         </a:rPr>
-                        <a:t>Bear Stearns: USD 350bn assets, USD 9bn revenue — 5th-largest US broker-dealer</a:t>
+                        <a:t>USD 350bn assets, USD 9bn revenue — 5th-largest US IB</a:t>
                       </a:r>
                       <a:endParaRPr lang="en-US" sz="1100" dirty="0">
                         <a:latin typeface="Consolas" charset="0"/>
@@ -26602,7 +27699,7 @@
                           <a:ea typeface="Calibri" pitchFamily="34" charset="-122"/>
                           <a:cs typeface="Calibri" pitchFamily="34" charset="-120"/>
                         </a:rPr>
-                        <a:t>2007</a:t>
+                        <a:t>July 2007</a:t>
                       </a:r>
                       <a:endParaRPr lang="en-US" sz="1100" dirty="0">
                         <a:latin typeface="Calibri" charset="0"/>
@@ -26652,7 +27749,7 @@
                           <a:ea typeface="Consolas" pitchFamily="34" charset="-122"/>
                           <a:cs typeface="Consolas" pitchFamily="34" charset="-120"/>
                         </a:rPr>
-                        <a:t>Subprime MBS market deteriorates; two Bear hedge funds fail in July</a:t>
+                        <a:t>MBS market deteriorates; sponsored subprime funds fail</a:t>
                       </a:r>
                       <a:endParaRPr lang="en-US" sz="1100" dirty="0">
                         <a:latin typeface="Consolas" charset="0"/>
@@ -26804,7 +27901,7 @@
                           <a:ea typeface="Consolas" pitchFamily="34" charset="-122"/>
                           <a:cs typeface="Consolas" pitchFamily="34" charset="-120"/>
                         </a:rPr>
-                        <a:t>First quarterly loss ever; USD 2bn MBS writedown; credit downgrade</a:t>
+                        <a:t>First ever quarterly loss; &gt;USD 2bn writedown; downgrade</a:t>
                       </a:r>
                       <a:endParaRPr lang="en-US" sz="1100" dirty="0">
                         <a:latin typeface="Consolas" charset="0"/>
@@ -26906,7 +28003,7 @@
                           <a:ea typeface="Calibri" pitchFamily="34" charset="-122"/>
                           <a:cs typeface="Calibri" pitchFamily="34" charset="-120"/>
                         </a:rPr>
-                        <a:t>2006→2007</a:t>
+                        <a:t>2006 → 2007</a:t>
                       </a:r>
                       <a:endParaRPr lang="en-US" sz="1100" dirty="0">
                         <a:latin typeface="Calibri" charset="0"/>
@@ -26956,7 +28053,7 @@
                           <a:ea typeface="Consolas" pitchFamily="34" charset="-122"/>
                           <a:cs typeface="Consolas" pitchFamily="34" charset="-120"/>
                         </a:rPr>
-                        <a:t>CP cut from USD 20.7bn → USD 3.9bn; shift into repo funding</a:t>
+                        <a:t>Unsecured ST funding 25.8→11.6bn; CP 20.7→3.9bn</a:t>
                       </a:r>
                       <a:endParaRPr lang="en-US" sz="1100" dirty="0">
                         <a:latin typeface="Consolas" charset="0"/>
@@ -27108,7 +28205,7 @@
                           <a:ea typeface="Consolas" pitchFamily="34" charset="-122"/>
                           <a:cs typeface="Consolas" pitchFamily="34" charset="-120"/>
                         </a:rPr>
-                        <a:t>USD 18bn cash position</a:t>
+                        <a:t>Cash position of USD 18bn</a:t>
                       </a:r>
                       <a:endParaRPr lang="en-US" sz="1100" dirty="0">
                         <a:latin typeface="Consolas" charset="0"/>
@@ -27260,7 +28357,7 @@
                           <a:ea typeface="Consolas" pitchFamily="34" charset="-122"/>
                           <a:cs typeface="Consolas" pitchFamily="34" charset="-120"/>
                         </a:rPr>
-                        <a:t>Cash down to USD 2bn — repo counterparties refuse to roll; prime-broker runs</a:t>
+                        <a:t>Cash USD 2bn — repo lenders will not roll; PB clients flee</a:t>
                       </a:r>
                       <a:endParaRPr lang="en-US" sz="1100" dirty="0">
                         <a:latin typeface="Consolas" charset="0"/>
@@ -27412,7 +28509,7 @@
                           <a:ea typeface="Consolas" pitchFamily="34" charset="-122"/>
                           <a:cs typeface="Consolas" pitchFamily="34" charset="-120"/>
                         </a:rPr>
-                        <a:t>Fed emergency loan against securities collateral</a:t>
+                        <a:t>Emergency Fed loan against securities collateral</a:t>
                       </a:r>
                       <a:endParaRPr lang="en-US" sz="1100" dirty="0">
                         <a:latin typeface="Consolas" charset="0"/>
@@ -27564,7 +28661,7 @@
                           <a:ea typeface="Consolas" pitchFamily="34" charset="-122"/>
                           <a:cs typeface="Consolas" pitchFamily="34" charset="-120"/>
                         </a:rPr>
-                        <a:t>Bear Stearns sold to JPMorgan (USD 10/share final) with Fed backstop</a:t>
+                        <a:t>Agrees to be bought by JPMorgan, which takes a Fed loan</a:t>
                       </a:r>
                       <a:endParaRPr lang="en-US" sz="1100" dirty="0">
                         <a:latin typeface="Consolas" charset="0"/>
@@ -27745,7 +28842,7 @@
               <a:buNone/>
             </a:pPr>
             <a:r>
-              <a:rPr lang="en-US" sz="1700" b="1" dirty="0">
+              <a:rPr lang="en-US" sz="1600" b="1" dirty="0">
                 <a:solidFill>
                   <a:srgbClr val="FFFFFF"/>
                 </a:solidFill>
@@ -27753,9 +28850,9 @@
                 <a:ea typeface="Trebuchet MS" pitchFamily="34" charset="-122"/>
                 <a:cs typeface="Trebuchet MS" pitchFamily="34" charset="-120"/>
               </a:rPr>
-              <a:t>Longer maturities mean higher rates AND higher spreads for the same issuer — the credit premium itself widens with time</a:t>
-            </a:r>
-            <a:endParaRPr lang="en-US" sz="1700" dirty="0"/>
+              <a:t>Under normal conditions a longer maturity means a higher benchmark yield AND a wider credit spread for the same issuer — the credit premium widens with time</a:t>
+            </a:r>
+            <a:endParaRPr lang="en-US" sz="1600" dirty="0"/>
           </a:p>
         </p:txBody>
       </p:sp>
@@ -27829,6 +28926,46 @@
         </p:nvSpPr>
         <p:spPr>
           <a:xfrm>
+            <a:off x="320040" y="4471416"/>
+            <a:ext cx="8503920" cy="192024"/>
+          </a:xfrm>
+          <a:prstGeom prst="rect">
+            <a:avLst/>
+          </a:prstGeom>
+          <a:noFill/>
+          <a:ln/>
+        </p:spPr>
+        <p:txBody>
+          <a:bodyPr wrap="square" lIns="254" tIns="254" rIns="254" bIns="254" rtlCol="0" anchor="t"/>
+          <a:lstStyle/>
+          <a:p>
+            <a:pPr indent="0" marL="0">
+              <a:buNone/>
+            </a:pPr>
+            <a:r>
+              <a:rPr lang="en-US" sz="1000" dirty="0">
+                <a:solidFill>
+                  <a:srgbClr val="6B7A8D"/>
+                </a:solidFill>
+                <a:latin typeface="Calibri" pitchFamily="34" charset="0"/>
+                <a:ea typeface="Calibri" pitchFamily="34" charset="-122"/>
+                <a:cs typeface="Calibri" pitchFamily="34" charset="-120"/>
+              </a:rPr>
+              <a:t>¹ Only the five-year point is numeric in Exhibit 7. The 3y and 7y entries are directional — curve and spread both rise with maturity.
+</a:t>
+            </a:r>
+            <a:endParaRPr lang="en-US" sz="1000" dirty="0"/>
+          </a:p>
+        </p:txBody>
+      </p:sp>
+      <p:sp>
+        <p:nvSpPr>
+          <p:cNvPr id="8" name="Text 6"/>
+          <p:cNvSpPr txBox="1"/>
+          <p:nvPr/>
+        </p:nvSpPr>
+        <p:spPr>
+          <a:xfrm>
             <a:off x="320040" y="4663440"/>
             <a:ext cx="8503920" cy="201168"/>
           </a:xfrm>
@@ -27857,7 +28994,7 @@
                 <a:ea typeface="Calibri" pitchFamily="34" charset="-122"/>
                 <a:cs typeface="Calibri" pitchFamily="34" charset="-120"/>
               </a:rPr>
-              <a:t>Source: CFA Institute, Curriculum Vol 6, Learning Module 4, "Long-Term Corporate Debt", Exhibit 7 (BRWA), pp. 95–96.</a:t>
+              <a:t>Source: CFA Institute, Curriculum Vol 6, Learning Module 4, "Long-Term Corporate Debt", Exhibit 7 (BRWA maturity choices), pp. 95–96.</a:t>
             </a:r>
             <a:endParaRPr lang="en-US" sz="750" dirty="0"/>
           </a:p>
@@ -27865,7 +29002,7 @@
       </p:sp>
       <p:sp>
         <p:nvSpPr>
-          <p:cNvPr id="8" name="Text 6"/>
+          <p:cNvPr id="9" name="Text 7"/>
           <p:cNvSpPr txBox="1"/>
           <p:nvPr/>
         </p:nvSpPr>
@@ -27899,7 +29036,7 @@
                 <a:ea typeface="Calibri" pitchFamily="34" charset="-122"/>
                 <a:cs typeface="Calibri" pitchFamily="34" charset="-120"/>
               </a:rPr>
-              <a:t>Investor and issuer sit on opposite sides of the same trade-off. The investor faces price and reinvestment risk; the issuer faces rollover risk and refinancing cost.</a:t>
+              <a:t>Issuer and investor sit on opposite sides of the same trade-off, and both errors have names: price risk and reinvestment risk for one, rollover risk for the other.</a:t>
             </a:r>
             <a:endParaRPr lang="en-US" sz="1300" dirty="0"/>
           </a:p>
@@ -27928,10 +29065,10 @@
             <a:tbl>
               <a:tblPr/>
               <a:tblGrid>
-                <a:gridCol w="1828800"/>
+                <a:gridCol w="1645920"/>
                 <a:gridCol w="2286000"/>
                 <a:gridCol w="2194560"/>
-                <a:gridCol w="2194560"/>
+                <a:gridCol w="2377440"/>
               </a:tblGrid>
               <a:tr h="274320">
                 <a:tc>
@@ -28001,7 +29138,7 @@
                           <a:ea typeface="Trebuchet MS" pitchFamily="34" charset="-122"/>
                           <a:cs typeface="Trebuchet MS" pitchFamily="34" charset="-120"/>
                         </a:rPr>
-                        <a:t>BRWA yield</a:t>
+                        <a:t>Government YTM</a:t>
                       </a:r>
                       <a:endParaRPr lang="en-US" sz="1100" dirty="0">
                         <a:latin typeface="Trebuchet MS" charset="0"/>
@@ -28051,7 +29188,7 @@
                           <a:ea typeface="Trebuchet MS" pitchFamily="34" charset="-122"/>
                           <a:cs typeface="Trebuchet MS" pitchFamily="34" charset="-120"/>
                         </a:rPr>
-                        <a:t>Government yield</a:t>
+                        <a:t>BRWA YTM</a:t>
                       </a:r>
                       <a:endParaRPr lang="en-US" sz="1100" dirty="0">
                         <a:latin typeface="Trebuchet MS" charset="0"/>
@@ -28101,7 +29238,7 @@
                           <a:ea typeface="Trebuchet MS" pitchFamily="34" charset="-122"/>
                           <a:cs typeface="Trebuchet MS" pitchFamily="34" charset="-120"/>
                         </a:rPr>
-                        <a:t>Credit spread</a:t>
+                        <a:t>BRWA credit spread</a:t>
                       </a:r>
                       <a:endParaRPr lang="en-US" sz="1100" dirty="0">
                         <a:latin typeface="Trebuchet MS" charset="0"/>
@@ -28203,57 +29340,7 @@
                           <a:ea typeface="Consolas" pitchFamily="34" charset="-122"/>
                           <a:cs typeface="Consolas" pitchFamily="34" charset="-120"/>
                         </a:rPr>
-                        <a:t>~2.4%</a:t>
-                      </a:r>
-                      <a:endParaRPr lang="en-US" sz="1100" dirty="0">
-                        <a:latin typeface="Consolas" charset="0"/>
-                        <a:ea typeface="Consolas" charset="0"/>
-                        <a:cs typeface="Consolas" charset="0"/>
-                      </a:endParaRPr>
-                    </a:p>
-                  </a:txBody>
-                  <a:tcPr marL="91440" marR="91440" marT="45720" marB="45720" anchor="ctr">
-                    <a:lnL w="0" cap="flat" cmpd="sng" algn="ctr">
-                      <a:noFill/>
-                    </a:lnL>
-                    <a:lnR w="0" cap="flat" cmpd="sng" algn="ctr">
-                      <a:noFill/>
-                    </a:lnR>
-                    <a:lnT w="0" cap="flat" cmpd="sng" algn="ctr">
-                      <a:noFill/>
-                    </a:lnT>
-                    <a:lnB w="3175" cap="flat" cmpd="sng" algn="ctr">
-                      <a:solidFill>
-                        <a:srgbClr val="D0D8E8"/>
-                      </a:solidFill>
-                      <a:prstDash val="solid"/>
-                      <a:round/>
-                      <a:headEnd type="none" w="med" len="med"/>
-                      <a:tailEnd type="none" w="med" len="med"/>
-                    </a:lnB>
-                    <a:solidFill>
-                      <a:srgbClr val="FFFFFF"/>
-                    </a:solidFill>
-                  </a:tcPr>
-                </a:tc>
-                <a:tc>
-                  <a:txBody>
-                    <a:bodyPr/>
-                    <a:lstStyle/>
-                    <a:p>
-                      <a:pPr algn="r" indent="0" marL="0">
-                        <a:buNone/>
-                      </a:pPr>
-                      <a:r>
-                        <a:rPr lang="en-US" sz="1100" dirty="0">
-                          <a:solidFill>
-                            <a:srgbClr val="334155"/>
-                          </a:solidFill>
-                          <a:latin typeface="Consolas" pitchFamily="34" charset="0"/>
-                          <a:ea typeface="Consolas" pitchFamily="34" charset="-122"/>
-                          <a:cs typeface="Consolas" pitchFamily="34" charset="-120"/>
-                        </a:rPr>
-                        <a:t>1.5%</a:t>
+                        <a:t>Below the 5y point</a:t>
                       </a:r>
                       <a:endParaRPr lang="en-US" sz="1100" dirty="0">
                         <a:latin typeface="Consolas" charset="0"/>
@@ -28303,7 +29390,57 @@
                           <a:ea typeface="Consolas" pitchFamily="34" charset="-122"/>
                           <a:cs typeface="Consolas" pitchFamily="34" charset="-120"/>
                         </a:rPr>
-                        <a:t>~90 bps</a:t>
+                        <a:t>Below the 5y point</a:t>
+                      </a:r>
+                      <a:endParaRPr lang="en-US" sz="1100" dirty="0">
+                        <a:latin typeface="Consolas" charset="0"/>
+                        <a:ea typeface="Consolas" charset="0"/>
+                        <a:cs typeface="Consolas" charset="0"/>
+                      </a:endParaRPr>
+                    </a:p>
+                  </a:txBody>
+                  <a:tcPr marL="91440" marR="91440" marT="45720" marB="45720" anchor="ctr">
+                    <a:lnL w="0" cap="flat" cmpd="sng" algn="ctr">
+                      <a:noFill/>
+                    </a:lnL>
+                    <a:lnR w="0" cap="flat" cmpd="sng" algn="ctr">
+                      <a:noFill/>
+                    </a:lnR>
+                    <a:lnT w="0" cap="flat" cmpd="sng" algn="ctr">
+                      <a:noFill/>
+                    </a:lnT>
+                    <a:lnB w="3175" cap="flat" cmpd="sng" algn="ctr">
+                      <a:solidFill>
+                        <a:srgbClr val="D0D8E8"/>
+                      </a:solidFill>
+                      <a:prstDash val="solid"/>
+                      <a:round/>
+                      <a:headEnd type="none" w="med" len="med"/>
+                      <a:tailEnd type="none" w="med" len="med"/>
+                    </a:lnB>
+                    <a:solidFill>
+                      <a:srgbClr val="FFFFFF"/>
+                    </a:solidFill>
+                  </a:tcPr>
+                </a:tc>
+                <a:tc>
+                  <a:txBody>
+                    <a:bodyPr/>
+                    <a:lstStyle/>
+                    <a:p>
+                      <a:pPr algn="ctr" indent="0" marL="0">
+                        <a:buNone/>
+                      </a:pPr>
+                      <a:r>
+                        <a:rPr lang="en-US" sz="1100" dirty="0">
+                          <a:solidFill>
+                            <a:srgbClr val="334155"/>
+                          </a:solidFill>
+                          <a:latin typeface="Consolas" pitchFamily="34" charset="0"/>
+                          <a:ea typeface="Consolas" pitchFamily="34" charset="-122"/>
+                          <a:cs typeface="Consolas" pitchFamily="34" charset="-120"/>
+                        </a:rPr>
+                        <a:t>Narrower than 90 bps</a:t>
                       </a:r>
                       <a:endParaRPr lang="en-US" sz="1100" dirty="0">
                         <a:latin typeface="Consolas" charset="0"/>
@@ -28405,7 +29542,7 @@
                           <a:ea typeface="Consolas" pitchFamily="34" charset="-122"/>
                           <a:cs typeface="Consolas" pitchFamily="34" charset="-120"/>
                         </a:rPr>
-                        <a:t>3.20%</a:t>
+                        <a:t>2.30%</a:t>
                       </a:r>
                       <a:endParaRPr lang="en-US" sz="1100" dirty="0">
                         <a:latin typeface="Consolas" charset="0"/>
@@ -28455,7 +29592,7 @@
                           <a:ea typeface="Consolas" pitchFamily="34" charset="-122"/>
                           <a:cs typeface="Consolas" pitchFamily="34" charset="-120"/>
                         </a:rPr>
-                        <a:t>2.30%</a:t>
+                        <a:t>3.20%</a:t>
                       </a:r>
                       <a:endParaRPr lang="en-US" sz="1100" dirty="0">
                         <a:latin typeface="Consolas" charset="0"/>
@@ -28607,7 +29744,7 @@
                           <a:ea typeface="Consolas" pitchFamily="34" charset="-122"/>
                           <a:cs typeface="Consolas" pitchFamily="34" charset="-120"/>
                         </a:rPr>
-                        <a:t>~3.7%</a:t>
+                        <a:t>Above the 5y point</a:t>
                       </a:r>
                       <a:endParaRPr lang="en-US" sz="1100" dirty="0">
                         <a:latin typeface="Consolas" charset="0"/>
@@ -28657,7 +29794,7 @@
                           <a:ea typeface="Consolas" pitchFamily="34" charset="-122"/>
                           <a:cs typeface="Consolas" pitchFamily="34" charset="-120"/>
                         </a:rPr>
-                        <a:t>~2.6%</a:t>
+                        <a:t>Above the 5y point</a:t>
                       </a:r>
                       <a:endParaRPr lang="en-US" sz="1100" dirty="0">
                         <a:latin typeface="Consolas" charset="0"/>
@@ -28707,7 +29844,7 @@
                           <a:ea typeface="Consolas" pitchFamily="34" charset="-122"/>
                           <a:cs typeface="Consolas" pitchFamily="34" charset="-120"/>
                         </a:rPr>
-                        <a:t>~110 bps</a:t>
+                        <a:t>Wider than 90 bps</a:t>
                       </a:r>
                       <a:endParaRPr lang="en-US" sz="1100" dirty="0">
                         <a:latin typeface="Consolas" charset="0"/>
@@ -28747,14 +29884,14 @@
       </p:graphicFrame>
       <p:sp>
         <p:nvSpPr>
-          <p:cNvPr id="10" name="Shape 7"/>
+          <p:cNvPr id="11" name="Shape 8"/>
           <p:cNvSpPr/>
           <p:nvPr/>
         </p:nvSpPr>
         <p:spPr>
           <a:xfrm>
-            <a:off x="320040" y="2560320"/>
-            <a:ext cx="4160520" cy="1783080"/>
+            <a:off x="320040" y="2423160"/>
+            <a:ext cx="4160520" cy="1691640"/>
           </a:xfrm>
           <a:prstGeom prst="rect">
             <a:avLst/>
@@ -28767,14 +29904,14 @@
       </p:sp>
       <p:sp>
         <p:nvSpPr>
-          <p:cNvPr id="11" name="Shape 8"/>
+          <p:cNvPr id="12" name="Shape 9"/>
           <p:cNvSpPr/>
           <p:nvPr/>
         </p:nvSpPr>
         <p:spPr>
           <a:xfrm>
-            <a:off x="320040" y="2560320"/>
-            <a:ext cx="73152" cy="1783080"/>
+            <a:off x="320040" y="2423160"/>
+            <a:ext cx="73152" cy="1691640"/>
           </a:xfrm>
           <a:prstGeom prst="rect">
             <a:avLst/>
@@ -28787,13 +29924,13 @@
       </p:sp>
       <p:sp>
         <p:nvSpPr>
-          <p:cNvPr id="12" name="Text 9"/>
+          <p:cNvPr id="13" name="Text 10"/>
           <p:cNvSpPr txBox="1"/>
           <p:nvPr/>
         </p:nvSpPr>
         <p:spPr>
           <a:xfrm>
-            <a:off x="457200" y="2606040"/>
+            <a:off x="457200" y="2468880"/>
             <a:ext cx="3931920" cy="256032"/>
           </a:xfrm>
           <a:prstGeom prst="rect">
@@ -28821,7 +29958,7 @@
                 <a:ea typeface="Trebuchet MS" pitchFamily="34" charset="-122"/>
                 <a:cs typeface="Trebuchet MS" pitchFamily="34" charset="-120"/>
               </a:rPr>
-              <a:t>INVESTOR VIEW</a:t>
+              <a:t>INVESTOR WITH A FIVE-YEAR HORIZON</a:t>
             </a:r>
             <a:endParaRPr lang="en-US" sz="1100" dirty="0"/>
           </a:p>
@@ -28829,14 +29966,14 @@
       </p:sp>
       <p:sp>
         <p:nvSpPr>
-          <p:cNvPr id="13" name="Text 10"/>
+          <p:cNvPr id="14" name="Text 11"/>
           <p:cNvSpPr txBox="1"/>
           <p:nvPr/>
         </p:nvSpPr>
         <p:spPr>
           <a:xfrm>
-            <a:off x="457200" y="2880360"/>
-            <a:ext cx="3931920" cy="1417320"/>
+            <a:off x="457200" y="2743200"/>
+            <a:ext cx="3931920" cy="1325880"/>
           </a:xfrm>
           <a:prstGeom prst="rect">
             <a:avLst/>
@@ -28863,7 +30000,7 @@
                 <a:ea typeface="Calibri" pitchFamily="34" charset="-122"/>
                 <a:cs typeface="Calibri" pitchFamily="34" charset="-120"/>
               </a:rPr>
-              <a:t>Extending maturity beyond horizon → price risk (must sell before maturity at uncertain price).</a:t>
+              <a:t>Buys the 7-year for its higher YTM → price risk: it must sell what will then be a two-year bond, at an unknown price.</a:t>
             </a:r>
             <a:endParaRPr lang="en-US" sz="1200" dirty="0"/>
           </a:p>
@@ -28886,7 +30023,7 @@
                 <a:ea typeface="Calibri" pitchFamily="34" charset="-122"/>
                 <a:cs typeface="Calibri" pitchFamily="34" charset="-120"/>
               </a:rPr>
-              <a:t>Shortening maturity below horizon → reinvestment risk (coupons and principal reinvest at unknown future rates).</a:t>
+              <a:t>Buys the 3-year instead → reinvestment risk: coupons and principal come back early and must be reinvested at unknown rates.</a:t>
             </a:r>
             <a:endParaRPr lang="en-US" sz="1200" dirty="0"/>
           </a:p>
@@ -28894,14 +30031,14 @@
       </p:sp>
       <p:sp>
         <p:nvSpPr>
-          <p:cNvPr id="14" name="Shape 11"/>
+          <p:cNvPr id="15" name="Shape 12"/>
           <p:cNvSpPr/>
           <p:nvPr/>
         </p:nvSpPr>
         <p:spPr>
           <a:xfrm>
-            <a:off x="4663440" y="2560320"/>
-            <a:ext cx="4160520" cy="1783080"/>
+            <a:off x="4663440" y="2423160"/>
+            <a:ext cx="4160520" cy="1691640"/>
           </a:xfrm>
           <a:prstGeom prst="rect">
             <a:avLst/>
@@ -28914,14 +30051,14 @@
       </p:sp>
       <p:sp>
         <p:nvSpPr>
-          <p:cNvPr id="15" name="Shape 12"/>
+          <p:cNvPr id="16" name="Shape 13"/>
           <p:cNvSpPr/>
           <p:nvPr/>
         </p:nvSpPr>
         <p:spPr>
           <a:xfrm>
-            <a:off x="4663440" y="2560320"/>
-            <a:ext cx="73152" cy="1783080"/>
+            <a:off x="4663440" y="2423160"/>
+            <a:ext cx="73152" cy="1691640"/>
           </a:xfrm>
           <a:prstGeom prst="rect">
             <a:avLst/>
@@ -28934,13 +30071,13 @@
       </p:sp>
       <p:sp>
         <p:nvSpPr>
-          <p:cNvPr id="16" name="Text 13"/>
+          <p:cNvPr id="17" name="Text 14"/>
           <p:cNvSpPr txBox="1"/>
           <p:nvPr/>
         </p:nvSpPr>
         <p:spPr>
           <a:xfrm>
-            <a:off x="4800600" y="2606040"/>
+            <a:off x="4800600" y="2468880"/>
             <a:ext cx="3931920" cy="256032"/>
           </a:xfrm>
           <a:prstGeom prst="rect">
@@ -28968,7 +30105,7 @@
                 <a:ea typeface="Trebuchet MS" pitchFamily="34" charset="-122"/>
                 <a:cs typeface="Trebuchet MS" pitchFamily="34" charset="-120"/>
               </a:rPr>
-              <a:t>ISSUER VIEW</a:t>
+              <a:t>ISSUER WITH A FIVE-YEAR PROJECT</a:t>
             </a:r>
             <a:endParaRPr lang="en-US" sz="1100" dirty="0"/>
           </a:p>
@@ -28976,14 +30113,14 @@
       </p:sp>
       <p:sp>
         <p:nvSpPr>
-          <p:cNvPr id="17" name="Text 14"/>
+          <p:cNvPr id="18" name="Text 15"/>
           <p:cNvSpPr txBox="1"/>
           <p:nvPr/>
         </p:nvSpPr>
         <p:spPr>
           <a:xfrm>
-            <a:off x="4800600" y="2880360"/>
-            <a:ext cx="3931920" cy="1417320"/>
+            <a:off x="4800600" y="2743200"/>
+            <a:ext cx="3931920" cy="1325880"/>
           </a:xfrm>
           <a:prstGeom prst="rect">
             <a:avLst/>
@@ -29010,7 +30147,7 @@
                 <a:ea typeface="Calibri" pitchFamily="34" charset="-122"/>
                 <a:cs typeface="Calibri" pitchFamily="34" charset="-120"/>
               </a:rPr>
-              <a:t>Short debt for a long project → rollover risk (refinance at higher rates).</a:t>
+              <a:t>Issues 3-year for the lower YTM → rollover risk: BRWA must refinance in three years at whatever the market then charges.</a:t>
             </a:r>
             <a:endParaRPr lang="en-US" sz="1200" dirty="0"/>
           </a:p>
@@ -29033,7 +30170,7 @@
                 <a:ea typeface="Calibri" pitchFamily="34" charset="-122"/>
                 <a:cs typeface="Calibri" pitchFamily="34" charset="-120"/>
               </a:rPr>
-              <a:t>Long debt for short project → locked-in high rate; prepayment penalties; suboptimal capital structure.</a:t>
+              <a:t>Issues 7-year → pays the term premium and the wider spread for two years longer than it needs the money.</a:t>
             </a:r>
             <a:endParaRPr lang="en-US" sz="1200" dirty="0"/>
           </a:p>
@@ -29140,7 +30277,7 @@
                 <a:ea typeface="Trebuchet MS" pitchFamily="34" charset="-122"/>
                 <a:cs typeface="Trebuchet MS" pitchFamily="34" charset="-120"/>
               </a:rPr>
-              <a:t>Investment-grade bonds ride the government benchmark with thin spreads and minimal covenants; high-yield bonds wear equity-like cash flows and tight leash of covenants</a:t>
+              <a:t>Investment grade rides the government benchmark with a thin spread and light covenants; high yield has equity-like cash flows and a full covenant leash</a:t>
             </a:r>
             <a:endParaRPr lang="en-US" sz="1600" dirty="0"/>
           </a:p>
@@ -29244,7 +30381,7 @@
                 <a:ea typeface="Calibri" pitchFamily="34" charset="-122"/>
                 <a:cs typeface="Calibri" pitchFamily="34" charset="-120"/>
               </a:rPr>
-              <a:t>Source: CFA Institute, Curriculum Vol 6, Learning Module 4, "Long-Term Corporate Debt", Exhibits 8–10, pp. 96–101.</a:t>
+              <a:t>Source: CFA Institute, Curriculum Vol 6, Learning Module 4, "Long-Term Corporate Debt", Exhibits 8–10 (BRWA vs VIVU), pp. 96–99.</a:t>
             </a:r>
             <a:endParaRPr lang="en-US" sz="750" dirty="0"/>
           </a:p>
@@ -29286,7 +30423,7 @@
                 <a:ea typeface="Calibri" pitchFamily="34" charset="-122"/>
                 <a:cs typeface="Calibri" pitchFamily="34" charset="-120"/>
               </a:rPr>
-              <a:t>The YTM gap isn't just "more default risk" — it reflects a completely different contractual, analytical, and behavioural regime.</a:t>
+              <a:t>The YTM gap is not just "more default risk" — it marks a completely different contractual, analytical and behavioural regime.</a:t>
             </a:r>
             <a:endParaRPr lang="en-US" sz="1300" dirty="0"/>
           </a:p>
@@ -29539,7 +30676,7 @@
                           <a:ea typeface="Consolas" pitchFamily="34" charset="-122"/>
                           <a:cs typeface="Consolas" pitchFamily="34" charset="-120"/>
                         </a:rPr>
-                        <a:t>Mostly government benchmark; thin credit spread</a:t>
+                        <a:t>Mostly the benchmark; thin spread</a:t>
                       </a:r>
                       <a:endParaRPr lang="en-US" sz="1100" dirty="0">
                         <a:latin typeface="Consolas" charset="0"/>
@@ -29589,7 +30726,7 @@
                           <a:ea typeface="Consolas" pitchFamily="34" charset="-122"/>
                           <a:cs typeface="Consolas" pitchFamily="34" charset="-120"/>
                         </a:rPr>
-                        <a:t>Benchmark + wide issuer-specific spread</a:t>
+                        <a:t>Wide issuer-specific spread</a:t>
                       </a:r>
                       <a:endParaRPr lang="en-US" sz="1100" dirty="0">
                         <a:latin typeface="Consolas" charset="0"/>
@@ -29691,7 +30828,7 @@
                           <a:ea typeface="Consolas" pitchFamily="34" charset="-122"/>
                           <a:cs typeface="Consolas" pitchFamily="34" charset="-120"/>
                         </a:rPr>
-                        <a:t>Bond-like — high probability of scheduled payments</a:t>
+                        <a:t>Bond-like — payments highly likely</a:t>
                       </a:r>
                       <a:endParaRPr lang="en-US" sz="1100" dirty="0">
                         <a:latin typeface="Consolas" charset="0"/>
@@ -29741,7 +30878,7 @@
                           <a:ea typeface="Consolas" pitchFamily="34" charset="-122"/>
                           <a:cs typeface="Consolas" pitchFamily="34" charset="-120"/>
                         </a:rPr>
-                        <a:t>Equity-like — payment uncertain, recovery analysis</a:t>
+                        <a:t>Equity-like — cash flows uncertain</a:t>
                       </a:r>
                       <a:endParaRPr lang="en-US" sz="1100" dirty="0">
                         <a:latin typeface="Consolas" charset="0"/>
@@ -29843,7 +30980,7 @@
                           <a:ea typeface="Consolas" pitchFamily="34" charset="-122"/>
                           <a:cs typeface="Consolas" pitchFamily="34" charset="-120"/>
                         </a:rPr>
-                        <a:t>Financial ratios, credit-rating migration</a:t>
+                        <a:t>Ratios and rating migration</a:t>
                       </a:r>
                       <a:endParaRPr lang="en-US" sz="1100" dirty="0">
                         <a:latin typeface="Consolas" charset="0"/>
@@ -29893,7 +31030,7 @@
                           <a:ea typeface="Consolas" pitchFamily="34" charset="-122"/>
                           <a:cs typeface="Consolas" pitchFamily="34" charset="-120"/>
                         </a:rPr>
-                        <a:t>PD × LGD; covenant tests; collateral value</a:t>
+                        <a:t>PD, loss given default, collateral</a:t>
                       </a:r>
                       <a:endParaRPr lang="en-US" sz="1100" dirty="0">
                         <a:latin typeface="Consolas" charset="0"/>
@@ -29995,7 +31132,7 @@
                           <a:ea typeface="Consolas" pitchFamily="34" charset="-122"/>
                           <a:cs typeface="Consolas" pitchFamily="34" charset="-120"/>
                         </a:rPr>
-                        <a:t>Light (pari passu, liens, M&amp;A limits)</a:t>
+                        <a:t>Light — liens, leaseback, M&amp;A</a:t>
                       </a:r>
                       <a:endParaRPr lang="en-US" sz="1100" dirty="0">
                         <a:latin typeface="Consolas" charset="0"/>
@@ -30045,7 +31182,7 @@
                           <a:ea typeface="Consolas" pitchFamily="34" charset="-122"/>
                           <a:cs typeface="Consolas" pitchFamily="34" charset="-120"/>
                         </a:rPr>
-                        <a:t>Heavy (leverage, coverage, dividend blocks)</a:t>
+                        <a:t>Heavy — leverage, coverage, payouts</a:t>
                       </a:r>
                       <a:endParaRPr lang="en-US" sz="1100" dirty="0">
                         <a:latin typeface="Consolas" charset="0"/>
@@ -30097,7 +31234,7 @@
                           <a:ea typeface="Calibri" pitchFamily="34" charset="-122"/>
                           <a:cs typeface="Calibri" pitchFamily="34" charset="-120"/>
                         </a:rPr>
-                        <a:t>Maturity range available</a:t>
+                        <a:t>Repayment sources</a:t>
                       </a:r>
                       <a:endParaRPr lang="en-US" sz="1100" dirty="0">
                         <a:latin typeface="Calibri" charset="0"/>
@@ -30147,7 +31284,7 @@
                           <a:ea typeface="Consolas" pitchFamily="34" charset="-122"/>
                           <a:cs typeface="Consolas" pitchFamily="34" charset="-120"/>
                         </a:rPr>
-                        <a:t>Up to 30 years</a:t>
+                        <a:t>Operating cash flow only</a:t>
                       </a:r>
                       <a:endParaRPr lang="en-US" sz="1100" dirty="0">
                         <a:latin typeface="Consolas" charset="0"/>
@@ -30197,7 +31334,7 @@
                           <a:ea typeface="Consolas" pitchFamily="34" charset="-122"/>
                           <a:cs typeface="Consolas" pitchFamily="34" charset="-120"/>
                         </a:rPr>
-                        <a:t>Typically ≤ 10 years</a:t>
+                        <a:t>Cash flow plus pledged assets</a:t>
                       </a:r>
                       <a:endParaRPr lang="en-US" sz="1100" dirty="0">
                         <a:latin typeface="Consolas" charset="0"/>
@@ -30249,7 +31386,7 @@
                           <a:ea typeface="Calibri" pitchFamily="34" charset="-122"/>
                           <a:cs typeface="Calibri" pitchFamily="34" charset="-120"/>
                         </a:rPr>
-                        <a:t>Typical contingency features</a:t>
+                        <a:t>Maturity range</a:t>
                       </a:r>
                       <a:endParaRPr lang="en-US" sz="1100" dirty="0">
                         <a:latin typeface="Calibri" charset="0"/>
@@ -30299,7 +31436,7 @@
                           <a:ea typeface="Consolas" pitchFamily="34" charset="-122"/>
                           <a:cs typeface="Consolas" pitchFamily="34" charset="-120"/>
                         </a:rPr>
-                        <a:t>Non-callable or make-whole call only</a:t>
+                        <a:t>Up to 30 years</a:t>
                       </a:r>
                       <a:endParaRPr lang="en-US" sz="1100" dirty="0">
                         <a:latin typeface="Consolas" charset="0"/>
@@ -30349,7 +31486,7 @@
                           <a:ea typeface="Consolas" pitchFamily="34" charset="-122"/>
                           <a:cs typeface="Consolas" pitchFamily="34" charset="-120"/>
                         </a:rPr>
-                        <a:t>Fixed-price callable — issuer retains flexibility</a:t>
+                        <a:t>Typically 10 years or less</a:t>
                       </a:r>
                       <a:endParaRPr lang="en-US" sz="1100" dirty="0">
                         <a:latin typeface="Consolas" charset="0"/>
@@ -30401,7 +31538,7 @@
                           <a:ea typeface="Calibri" pitchFamily="34" charset="-122"/>
                           <a:cs typeface="Calibri" pitchFamily="34" charset="-120"/>
                         </a:rPr>
-                        <a:t>Market access</a:t>
+                        <a:t>Contingency features</a:t>
                       </a:r>
                       <a:endParaRPr lang="en-US" sz="1100" dirty="0">
                         <a:latin typeface="Calibri" charset="0"/>
@@ -30451,7 +31588,7 @@
                           <a:ea typeface="Consolas" pitchFamily="34" charset="-122"/>
                           <a:cs typeface="Consolas" pitchFamily="34" charset="-120"/>
                         </a:rPr>
-                        <a:t>Always open; opportunistic refi</a:t>
+                        <a:t>Make-whole call, or none</a:t>
                       </a:r>
                       <a:endParaRPr lang="en-US" sz="1100" dirty="0">
                         <a:latin typeface="Consolas" charset="0"/>
@@ -30501,7 +31638,7 @@
                           <a:ea typeface="Consolas" pitchFamily="34" charset="-122"/>
                           <a:cs typeface="Consolas" pitchFamily="34" charset="-120"/>
                         </a:rPr>
-                        <a:t>Cyclical; restructuring / renegotiation needed</a:t>
+                        <a:t>Fixed-price call schedule</a:t>
                       </a:r>
                       <a:endParaRPr lang="en-US" sz="1100" dirty="0">
                         <a:latin typeface="Consolas" charset="0"/>
@@ -30535,10 +31672,286 @@
                   </a:tcPr>
                 </a:tc>
               </a:tr>
+              <a:tr h="274320">
+                <a:tc>
+                  <a:txBody>
+                    <a:bodyPr/>
+                    <a:lstStyle/>
+                    <a:p>
+                      <a:pPr algn="l" indent="0" marL="0">
+                        <a:buNone/>
+                      </a:pPr>
+                      <a:r>
+                        <a:rPr lang="en-US" sz="1100" dirty="0">
+                          <a:solidFill>
+                            <a:srgbClr val="334155"/>
+                          </a:solidFill>
+                          <a:latin typeface="Calibri" pitchFamily="34" charset="0"/>
+                          <a:ea typeface="Calibri" pitchFamily="34" charset="-122"/>
+                          <a:cs typeface="Calibri" pitchFamily="34" charset="-120"/>
+                        </a:rPr>
+                        <a:t>Market access</a:t>
+                      </a:r>
+                      <a:endParaRPr lang="en-US" sz="1100" dirty="0">
+                        <a:latin typeface="Calibri" charset="0"/>
+                        <a:ea typeface="Calibri" charset="0"/>
+                        <a:cs typeface="Calibri" charset="0"/>
+                      </a:endParaRPr>
+                    </a:p>
+                  </a:txBody>
+                  <a:tcPr marL="91440" marR="91440" marT="45720" marB="45720" anchor="ctr">
+                    <a:lnL w="0" cap="flat" cmpd="sng" algn="ctr">
+                      <a:noFill/>
+                    </a:lnL>
+                    <a:lnR w="0" cap="flat" cmpd="sng" algn="ctr">
+                      <a:noFill/>
+                    </a:lnR>
+                    <a:lnT w="0" cap="flat" cmpd="sng" algn="ctr">
+                      <a:noFill/>
+                    </a:lnT>
+                    <a:lnB w="3175" cap="flat" cmpd="sng" algn="ctr">
+                      <a:solidFill>
+                        <a:srgbClr val="D0D8E8"/>
+                      </a:solidFill>
+                      <a:prstDash val="solid"/>
+                      <a:round/>
+                      <a:headEnd type="none" w="med" len="med"/>
+                      <a:tailEnd type="none" w="med" len="med"/>
+                    </a:lnB>
+                    <a:solidFill>
+                      <a:srgbClr val="F5F7FA"/>
+                    </a:solidFill>
+                  </a:tcPr>
+                </a:tc>
+                <a:tc>
+                  <a:txBody>
+                    <a:bodyPr/>
+                    <a:lstStyle/>
+                    <a:p>
+                      <a:pPr algn="ctr" indent="0" marL="0">
+                        <a:buNone/>
+                      </a:pPr>
+                      <a:r>
+                        <a:rPr lang="en-US" sz="1100" dirty="0">
+                          <a:solidFill>
+                            <a:srgbClr val="334155"/>
+                          </a:solidFill>
+                          <a:latin typeface="Consolas" pitchFamily="34" charset="0"/>
+                          <a:ea typeface="Consolas" pitchFamily="34" charset="-122"/>
+                          <a:cs typeface="Consolas" pitchFamily="34" charset="-120"/>
+                        </a:rPr>
+                        <a:t>Always open; opportunistic refi</a:t>
+                      </a:r>
+                      <a:endParaRPr lang="en-US" sz="1100" dirty="0">
+                        <a:latin typeface="Consolas" charset="0"/>
+                        <a:ea typeface="Consolas" charset="0"/>
+                        <a:cs typeface="Consolas" charset="0"/>
+                      </a:endParaRPr>
+                    </a:p>
+                  </a:txBody>
+                  <a:tcPr marL="91440" marR="91440" marT="45720" marB="45720" anchor="ctr">
+                    <a:lnL w="0" cap="flat" cmpd="sng" algn="ctr">
+                      <a:noFill/>
+                    </a:lnL>
+                    <a:lnR w="0" cap="flat" cmpd="sng" algn="ctr">
+                      <a:noFill/>
+                    </a:lnR>
+                    <a:lnT w="0" cap="flat" cmpd="sng" algn="ctr">
+                      <a:noFill/>
+                    </a:lnT>
+                    <a:lnB w="3175" cap="flat" cmpd="sng" algn="ctr">
+                      <a:solidFill>
+                        <a:srgbClr val="D0D8E8"/>
+                      </a:solidFill>
+                      <a:prstDash val="solid"/>
+                      <a:round/>
+                      <a:headEnd type="none" w="med" len="med"/>
+                      <a:tailEnd type="none" w="med" len="med"/>
+                    </a:lnB>
+                    <a:solidFill>
+                      <a:srgbClr val="F5F7FA"/>
+                    </a:solidFill>
+                  </a:tcPr>
+                </a:tc>
+                <a:tc>
+                  <a:txBody>
+                    <a:bodyPr/>
+                    <a:lstStyle/>
+                    <a:p>
+                      <a:pPr algn="ctr" indent="0" marL="0">
+                        <a:buNone/>
+                      </a:pPr>
+                      <a:r>
+                        <a:rPr lang="en-US" sz="1100" dirty="0">
+                          <a:solidFill>
+                            <a:srgbClr val="334155"/>
+                          </a:solidFill>
+                          <a:latin typeface="Consolas" pitchFamily="34" charset="0"/>
+                          <a:ea typeface="Consolas" pitchFamily="34" charset="-122"/>
+                          <a:cs typeface="Consolas" pitchFamily="34" charset="-120"/>
+                        </a:rPr>
+                        <a:t>Cyclical; restructure to refinance</a:t>
+                      </a:r>
+                      <a:endParaRPr lang="en-US" sz="1100" dirty="0">
+                        <a:latin typeface="Consolas" charset="0"/>
+                        <a:ea typeface="Consolas" charset="0"/>
+                        <a:cs typeface="Consolas" charset="0"/>
+                      </a:endParaRPr>
+                    </a:p>
+                  </a:txBody>
+                  <a:tcPr marL="91440" marR="91440" marT="45720" marB="45720" anchor="ctr">
+                    <a:lnL w="0" cap="flat" cmpd="sng" algn="ctr">
+                      <a:noFill/>
+                    </a:lnL>
+                    <a:lnR w="0" cap="flat" cmpd="sng" algn="ctr">
+                      <a:noFill/>
+                    </a:lnR>
+                    <a:lnT w="0" cap="flat" cmpd="sng" algn="ctr">
+                      <a:noFill/>
+                    </a:lnT>
+                    <a:lnB w="3175" cap="flat" cmpd="sng" algn="ctr">
+                      <a:solidFill>
+                        <a:srgbClr val="D0D8E8"/>
+                      </a:solidFill>
+                      <a:prstDash val="solid"/>
+                      <a:round/>
+                      <a:headEnd type="none" w="med" len="med"/>
+                      <a:tailEnd type="none" w="med" len="med"/>
+                    </a:lnB>
+                    <a:solidFill>
+                      <a:srgbClr val="F5F7FA"/>
+                    </a:solidFill>
+                  </a:tcPr>
+                </a:tc>
+              </a:tr>
             </a:tbl>
           </a:graphicData>
         </a:graphic>
       </p:graphicFrame>
+      <p:sp>
+        <p:nvSpPr>
+          <p:cNvPr id="10" name="Shape 7"/>
+          <p:cNvSpPr/>
+          <p:nvPr/>
+        </p:nvSpPr>
+        <p:spPr>
+          <a:xfrm>
+            <a:off x="320040" y="3703320"/>
+            <a:ext cx="8503920" cy="640080"/>
+          </a:xfrm>
+          <a:prstGeom prst="rect">
+            <a:avLst/>
+          </a:prstGeom>
+          <a:solidFill>
+            <a:srgbClr val="FEF0E7"/>
+          </a:solidFill>
+          <a:ln/>
+        </p:spPr>
+      </p:sp>
+      <p:sp>
+        <p:nvSpPr>
+          <p:cNvPr id="11" name="Shape 8"/>
+          <p:cNvSpPr/>
+          <p:nvPr/>
+        </p:nvSpPr>
+        <p:spPr>
+          <a:xfrm>
+            <a:off x="320040" y="3703320"/>
+            <a:ext cx="73152" cy="640080"/>
+          </a:xfrm>
+          <a:prstGeom prst="rect">
+            <a:avLst/>
+          </a:prstGeom>
+          <a:solidFill>
+            <a:srgbClr val="E8600A"/>
+          </a:solidFill>
+          <a:ln/>
+        </p:spPr>
+      </p:sp>
+      <p:sp>
+        <p:nvSpPr>
+          <p:cNvPr id="12" name="Text 9"/>
+          <p:cNvSpPr txBox="1"/>
+          <p:nvPr/>
+        </p:nvSpPr>
+        <p:spPr>
+          <a:xfrm>
+            <a:off x="457200" y="3749040"/>
+            <a:ext cx="8275320" cy="256032"/>
+          </a:xfrm>
+          <a:prstGeom prst="rect">
+            <a:avLst/>
+          </a:prstGeom>
+          <a:noFill/>
+          <a:ln/>
+        </p:spPr>
+        <p:txBody>
+          <a:bodyPr wrap="square" lIns="508" tIns="508" rIns="508" bIns="508" rtlCol="0" anchor="ctr">
+            <a:normAutofit/>
+            <a:spAutoFit/>
+          </a:bodyPr>
+          <a:lstStyle/>
+          <a:p>
+            <a:pPr algn="l" indent="0" marL="0">
+              <a:buNone/>
+            </a:pPr>
+            <a:r>
+              <a:rPr lang="en-US" sz="1100" b="1" spc="400" kern="0" dirty="0">
+                <a:solidFill>
+                  <a:srgbClr val="E8600A"/>
+                </a:solidFill>
+                <a:latin typeface="Trebuchet MS" pitchFamily="34" charset="0"/>
+                <a:ea typeface="Trebuchet MS" pitchFamily="34" charset="-122"/>
+                <a:cs typeface="Trebuchet MS" pitchFamily="34" charset="-120"/>
+              </a:rPr>
+              <a:t>WHY HIGH-YIELD ISSUERS PAY FOR THE CALL</a:t>
+            </a:r>
+            <a:endParaRPr lang="en-US" sz="1100" dirty="0"/>
+          </a:p>
+        </p:txBody>
+      </p:sp>
+      <p:sp>
+        <p:nvSpPr>
+          <p:cNvPr id="13" name="Text 10"/>
+          <p:cNvSpPr txBox="1"/>
+          <p:nvPr/>
+        </p:nvSpPr>
+        <p:spPr>
+          <a:xfrm>
+            <a:off x="457200" y="4023360"/>
+            <a:ext cx="8275320" cy="274320"/>
+          </a:xfrm>
+          <a:prstGeom prst="rect">
+            <a:avLst/>
+          </a:prstGeom>
+          <a:noFill/>
+          <a:ln/>
+        </p:spPr>
+        <p:txBody>
+          <a:bodyPr wrap="square" lIns="508" tIns="508" rIns="508" bIns="508" rtlCol="0" anchor="t">
+            <a:normAutofit/>
+            <a:spAutoFit/>
+          </a:bodyPr>
+          <a:lstStyle/>
+          <a:p>
+            <a:pPr algn="l" indent="0" marL="0">
+              <a:buNone/>
+            </a:pPr>
+            <a:r>
+              <a:rPr lang="en-US" sz="1200" dirty="0">
+                <a:solidFill>
+                  <a:srgbClr val="334155"/>
+                </a:solidFill>
+                <a:latin typeface="Calibri" pitchFamily="34" charset="0"/>
+                <a:ea typeface="Calibri" pitchFamily="34" charset="-122"/>
+                <a:cs typeface="Calibri" pitchFamily="34" charset="-120"/>
+              </a:rPr>
+              <a:t>An issuer that expects its own credit to improve buys the call: the option gains value exactly as its borrowing cost falls. IG issuers stagger maturities instead — the same problem, solved with a ladder rather than an option.</a:t>
+            </a:r>
+            <a:endParaRPr lang="en-US" sz="1200" dirty="0"/>
+          </a:p>
+        </p:txBody>
+      </p:sp>
     </p:spTree>
   </p:cSld>
   <p:clrMapOvr>
@@ -30797,7 +32210,7 @@
                 <a:ea typeface="Calibri" pitchFamily="34" charset="-122"/>
                 <a:cs typeface="Calibri" pitchFamily="34" charset="-120"/>
               </a:rPr>
-              <a:t>Describe the six features of a fixed-income security (issuer, maturity, principal, coupon, seniority, contingency provisions) and reproduce them from a prospectus summary.
+              <a:t>Describe the six features of a fixed-income security (issuer, maturity, principal, coupon, seniority, contingency provisions) and read them off a prospectus summary.
 </a:t>
             </a:r>
             <a:pPr indent="0" marL="0">
@@ -30826,7 +32239,7 @@
                 <a:ea typeface="Calibri" pitchFamily="34" charset="-122"/>
                 <a:cs typeface="Calibri" pitchFamily="34" charset="-120"/>
               </a:rPr>
-              <a:t>Distinguish bullet, amortizing, and balloon cash-flow structures; compute the periodic payment of a fully amortizing mortgage and decompose each payment into interest and principal.
+              <a:t>Distinguish bullet, amortizing, and balloon cash-flow structures; compute the level payment of a fully amortizing loan and split it into interest and principal.
 </a:t>
             </a:r>
             <a:pPr indent="0" marL="0">
@@ -30884,7 +32297,7 @@
                 <a:ea typeface="Calibri" pitchFamily="34" charset="-122"/>
                 <a:cs typeface="Calibri" pitchFamily="34" charset="-120"/>
               </a:rPr>
-              <a:t>Compute the purchase price, repurchase price, and haircut of a repurchase agreement given an initial margin, and explain why repos are a short-term funding lifeline and a systemic vulnerability.
+              <a:t>Compute the purchase price, haircut, and repurchase price of a repo given an initial margin, and say who keeps ownership of the collateral.
 </a:t>
             </a:r>
             <a:pPr indent="0" marL="0">
@@ -30913,7 +32326,7 @@
                 <a:ea typeface="Calibri" pitchFamily="34" charset="-122"/>
                 <a:cs typeface="Calibri" pitchFamily="34" charset="-120"/>
               </a:rPr>
-              <a:t>Compare single-price and multiple-price sovereign auctions; explain the role of primary dealers and the "non-economic" demand that compresses sovereign yields below corporate curves.
+              <a:t>Compare single-price and multiple-price sovereign auctions; explain primary-dealer obligations and the "non-economic" demand that compresses sovereign yields.
 </a:t>
             </a:r>
             <a:endParaRPr lang="en-US" sz="1200" dirty="0"/>
@@ -31249,7 +32662,7 @@
                 <a:ea typeface="Trebuchet MS" pitchFamily="34" charset="-122"/>
                 <a:cs typeface="Trebuchet MS" pitchFamily="34" charset="-120"/>
               </a:rPr>
-              <a:t>A sovereign's economic balance sheet is expected tax revenues vs promised expenditures — not depreciation and accruals; fiscal policy sets level, debt-management sets composition</a:t>
+              <a:t>A sovereign's economic balance sheet is the PV of expected tax revenues against promised expenditures — fiscal policy sets the level of debt, debt management sets its composition</a:t>
             </a:r>
             <a:endParaRPr lang="en-US" sz="1600" dirty="0"/>
           </a:p>
@@ -31353,7 +32766,7 @@
                 <a:ea typeface="Calibri" pitchFamily="34" charset="-122"/>
                 <a:cs typeface="Calibri" pitchFamily="34" charset="-120"/>
               </a:rPr>
-              <a:t>Source: CFA Institute, Curriculum Vol 6, Learning Module 5, "Sovereign Debt", pp. 107–113.</a:t>
+              <a:t>Source: CFA Institute, Curriculum Vol 6, Learning Module 5, "Sovereign Debt", Exhibit 1 and OECD maturity data, pp. 107–112.</a:t>
             </a:r>
             <a:endParaRPr lang="en-US" sz="750" dirty="0"/>
           </a:p>
@@ -31395,7 +32808,7 @@
                 <a:ea typeface="Calibri" pitchFamily="34" charset="-122"/>
                 <a:cs typeface="Calibri" pitchFamily="34" charset="-120"/>
               </a:rPr>
-              <a:t>The "default-risk-free" label is the endpoint of two facts: the sovereign can tax the entire economy, and it can print its own currency (for domestic-currency debt).</a:t>
+              <a:t>Public accounting is usually cash-based: it leaves out depreciation on public assets and unfunded pension accruals. The economic balance sheet puts expected future claims and obligations back in.</a:t>
             </a:r>
             <a:endParaRPr lang="en-US" sz="1300" dirty="0"/>
           </a:p>
@@ -31477,7 +32890,7 @@
                 <a:ea typeface="Trebuchet MS" pitchFamily="34" charset="-122"/>
                 <a:cs typeface="Trebuchet MS" pitchFamily="34" charset="-120"/>
               </a:rPr>
-              <a:t>ECONOMIC BALANCE SHEET</a:t>
+              <a:t>THE ECONOMIC BALANCE SHEET</a:t>
             </a:r>
             <a:endParaRPr lang="en-US" sz="1100" dirty="0"/>
           </a:p>
@@ -31519,7 +32932,7 @@
                 <a:ea typeface="Calibri" pitchFamily="34" charset="-122"/>
                 <a:cs typeface="Calibri" pitchFamily="34" charset="-120"/>
               </a:rPr>
-              <a:t>CLAIMS (assets)</a:t>
+              <a:t>CLAIMS</a:t>
             </a:r>
             <a:endParaRPr lang="en-US" sz="1050" dirty="0"/>
           </a:p>
@@ -31536,7 +32949,7 @@
                 <a:ea typeface="Calibri" pitchFamily="34" charset="-122"/>
                 <a:cs typeface="Calibri" pitchFamily="34" charset="-120"/>
               </a:rPr>
-              <a:t>  • Short-term &amp; long-term financial claims</a:t>
+              <a:t>  • Short-term financial claims and assets</a:t>
             </a:r>
             <a:endParaRPr lang="en-US" sz="1050" dirty="0"/>
           </a:p>
@@ -31570,7 +32983,7 @@
                 <a:ea typeface="Calibri" pitchFamily="34" charset="-122"/>
                 <a:cs typeface="Calibri" pitchFamily="34" charset="-120"/>
               </a:rPr>
-              <a:t>  • FX + commodity reserves</a:t>
+              <a:t>  • FX, commodity and other reserves</a:t>
             </a:r>
             <a:endParaRPr lang="en-US" sz="1050" dirty="0"/>
           </a:p>
@@ -31610,7 +33023,7 @@
                 <a:ea typeface="Calibri" pitchFamily="34" charset="-122"/>
                 <a:cs typeface="Calibri" pitchFamily="34" charset="-120"/>
               </a:rPr>
-              <a:t>OBLIGATIONS (liabilities)</a:t>
+              <a:t>OBLIGATIONS</a:t>
             </a:r>
             <a:endParaRPr lang="en-US" sz="1050" dirty="0"/>
           </a:p>
@@ -31627,7 +33040,7 @@
                 <a:ea typeface="Calibri" pitchFamily="34" charset="-122"/>
                 <a:cs typeface="Calibri" pitchFamily="34" charset="-120"/>
               </a:rPr>
-              <a:t>  • Currency outstanding</a:t>
+              <a:t>  • Domestic currency outstanding</a:t>
             </a:r>
             <a:endParaRPr lang="en-US" sz="1050" dirty="0"/>
           </a:p>
@@ -31644,7 +33057,7 @@
                 <a:ea typeface="Calibri" pitchFamily="34" charset="-122"/>
                 <a:cs typeface="Calibri" pitchFamily="34" charset="-120"/>
               </a:rPr>
-              <a:t>  • Short- and long-term debt (domestic &amp; FX)</a:t>
+              <a:t>  • Short- and long-term debt, domestic and FX</a:t>
             </a:r>
             <a:endParaRPr lang="en-US" sz="1050" dirty="0"/>
           </a:p>
@@ -31661,7 +33074,7 @@
                 <a:ea typeface="Calibri" pitchFamily="34" charset="-122"/>
                 <a:cs typeface="Calibri" pitchFamily="34" charset="-120"/>
               </a:rPr>
-              <a:t>  • Pension &amp; other domestic obligations</a:t>
+              <a:t>  • Pension and other domestic obligations</a:t>
             </a:r>
             <a:endParaRPr lang="en-US" sz="1050" dirty="0"/>
           </a:p>
@@ -31678,7 +33091,7 @@
                 <a:ea typeface="Calibri" pitchFamily="34" charset="-122"/>
                 <a:cs typeface="Calibri" pitchFamily="34" charset="-120"/>
               </a:rPr>
-              <a:t>  • Supranational / external obligations</a:t>
+              <a:t>  • Supranational and external obligations</a:t>
             </a:r>
             <a:endParaRPr lang="en-US" sz="1050" dirty="0"/>
           </a:p>
@@ -31777,7 +33190,7 @@
                 <a:ea typeface="Trebuchet MS" pitchFamily="34" charset="-122"/>
                 <a:cs typeface="Trebuchet MS" pitchFamily="34" charset="-120"/>
               </a:rPr>
-              <a:t>FISCAL vs DEBT-MANAGEMENT</a:t>
+              <a:t>LEVEL vs COMPOSITION</a:t>
             </a:r>
             <a:endParaRPr lang="en-US" sz="1100" dirty="0"/>
           </a:p>
@@ -31819,7 +33232,7 @@
                 <a:ea typeface="Calibri" pitchFamily="34" charset="-122"/>
                 <a:cs typeface="Calibri" pitchFamily="34" charset="-120"/>
               </a:rPr>
-              <a:t>FISCAL POLICY — sets the LEVEL of debt.</a:t>
+              <a:t>FISCAL POLICY sets the LEVEL of debt.</a:t>
             </a:r>
             <a:endParaRPr lang="en-US" sz="1050" dirty="0"/>
           </a:p>
@@ -31836,7 +33249,7 @@
                 <a:ea typeface="Calibri" pitchFamily="34" charset="-122"/>
                 <a:cs typeface="Calibri" pitchFamily="34" charset="-120"/>
               </a:rPr>
-              <a:t>  • Budget deficits → more borrowing</a:t>
+              <a:t>  • Deficits raise borrowing; surpluses cut it</a:t>
             </a:r>
             <a:endParaRPr lang="en-US" sz="1050" dirty="0"/>
           </a:p>
@@ -31853,8 +33266,14 @@
                 <a:ea typeface="Calibri" pitchFamily="34" charset="-122"/>
                 <a:cs typeface="Calibri" pitchFamily="34" charset="-120"/>
               </a:rPr>
-              <a:t>  • Budget surpluses → less</a:t>
-            </a:r>
+              <a:t>  • Sensitive to growth and inflation forecasts</a:t>
+            </a:r>
+            <a:endParaRPr lang="en-US" sz="1050" dirty="0"/>
+          </a:p>
+          <a:p>
+            <a:pPr algn="l" indent="0" marL="0">
+              <a:buNone/>
+            </a:pPr>
             <a:endParaRPr lang="en-US" sz="1050" dirty="0"/>
           </a:p>
           <a:p>
@@ -31870,14 +33289,8 @@
                 <a:ea typeface="Calibri" pitchFamily="34" charset="-122"/>
                 <a:cs typeface="Calibri" pitchFamily="34" charset="-120"/>
               </a:rPr>
-              <a:t>  • Sensitivity to growth and inflation forecasts</a:t>
-            </a:r>
-            <a:endParaRPr lang="en-US" sz="1050" dirty="0"/>
-          </a:p>
-          <a:p>
-            <a:pPr algn="l" indent="0" marL="0">
-              <a:buNone/>
-            </a:pPr>
+              <a:t>DEBT MANAGEMENT sets the COMPOSITION.</a:t>
+            </a:r>
             <a:endParaRPr lang="en-US" sz="1050" dirty="0"/>
           </a:p>
           <a:p>
@@ -31893,41 +33306,7 @@
                 <a:ea typeface="Calibri" pitchFamily="34" charset="-122"/>
                 <a:cs typeface="Calibri" pitchFamily="34" charset="-120"/>
               </a:rPr>
-              <a:t>DEBT-MANAGEMENT POLICY — sets the COMPOSITION.</a:t>
-            </a:r>
-            <a:endParaRPr lang="en-US" sz="1050" dirty="0"/>
-          </a:p>
-          <a:p>
-            <a:pPr algn="l" indent="0" marL="0">
-              <a:buNone/>
-            </a:pPr>
-            <a:r>
-              <a:rPr lang="en-US" sz="1050" dirty="0">
-                <a:solidFill>
-                  <a:srgbClr val="334155"/>
-                </a:solidFill>
-                <a:latin typeface="Calibri" pitchFamily="34" charset="0"/>
-                <a:ea typeface="Calibri" pitchFamily="34" charset="-122"/>
-                <a:cs typeface="Calibri" pitchFamily="34" charset="-120"/>
-              </a:rPr>
-              <a:t>  • Short vs long maturity</a:t>
-            </a:r>
-            <a:endParaRPr lang="en-US" sz="1050" dirty="0"/>
-          </a:p>
-          <a:p>
-            <a:pPr algn="l" indent="0" marL="0">
-              <a:buNone/>
-            </a:pPr>
-            <a:r>
-              <a:rPr lang="en-US" sz="1050" dirty="0">
-                <a:solidFill>
-                  <a:srgbClr val="334155"/>
-                </a:solidFill>
-                <a:latin typeface="Calibri" pitchFamily="34" charset="0"/>
-                <a:ea typeface="Calibri" pitchFamily="34" charset="-122"/>
-                <a:cs typeface="Calibri" pitchFamily="34" charset="-120"/>
-              </a:rPr>
-              <a:t>  • Fixed vs floating vs linker</a:t>
+              <a:t>  • Short vs long; fixed, floating or linker</a:t>
             </a:r>
             <a:endParaRPr lang="en-US" sz="1050" dirty="0"/>
           </a:p>
@@ -31967,8 +33346,14 @@
                 <a:ea typeface="Calibri" pitchFamily="34" charset="-122"/>
                 <a:cs typeface="Calibri" pitchFamily="34" charset="-120"/>
               </a:rPr>
-              <a:t>OECD data (2021):</a:t>
-            </a:r>
+              <a:t>RICARDIAN EQUIVALENCE, taken strictly, says fund as short as possible and pay no term premium. In practice that is rollover risk — so governments spread maturities and issue on a predictable calendar.</a:t>
+            </a:r>
+            <a:endParaRPr lang="en-US" sz="1050" dirty="0"/>
+          </a:p>
+          <a:p>
+            <a:pPr algn="l" indent="0" marL="0">
+              <a:buNone/>
+            </a:pPr>
             <a:endParaRPr lang="en-US" sz="1050" dirty="0"/>
           </a:p>
           <a:p>
@@ -31984,41 +33369,7 @@
                 <a:ea typeface="Calibri" pitchFamily="34" charset="-122"/>
                 <a:cs typeface="Calibri" pitchFamily="34" charset="-120"/>
               </a:rPr>
-              <a:t>  • Weighted avg maturity ≈ 7.6y (vs 6.3y 2007)</a:t>
-            </a:r>
-            <a:endParaRPr lang="en-US" sz="1050" dirty="0"/>
-          </a:p>
-          <a:p>
-            <a:pPr algn="l" indent="0" marL="0">
-              <a:buNone/>
-            </a:pPr>
-            <a:r>
-              <a:rPr lang="en-US" sz="1050" dirty="0">
-                <a:solidFill>
-                  <a:srgbClr val="334155"/>
-                </a:solidFill>
-                <a:latin typeface="Calibri" pitchFamily="34" charset="0"/>
-                <a:ea typeface="Calibri" pitchFamily="34" charset="-122"/>
-                <a:cs typeface="Calibri" pitchFamily="34" charset="-120"/>
-              </a:rPr>
-              <a:t>  • Long-term debt ≈ 86% of total outstanding</a:t>
-            </a:r>
-            <a:endParaRPr lang="en-US" sz="1050" dirty="0"/>
-          </a:p>
-          <a:p>
-            <a:pPr algn="l" indent="0" marL="0">
-              <a:buNone/>
-            </a:pPr>
-            <a:r>
-              <a:rPr lang="en-US" sz="1050" dirty="0">
-                <a:solidFill>
-                  <a:srgbClr val="334155"/>
-                </a:solidFill>
-                <a:latin typeface="Calibri" pitchFamily="34" charset="0"/>
-                <a:ea typeface="Calibri" pitchFamily="34" charset="-122"/>
-                <a:cs typeface="Calibri" pitchFamily="34" charset="-120"/>
-              </a:rPr>
-              <a:t>  • Annual issuance ~50/50 short vs long</a:t>
+              <a:t>OECD (38 members), end-2021: weighted average maturity 7.6y against 6.3y in 2007; long-term ≈ 85% of debt outstanding; annual issuance split evenly short vs long.</a:t>
             </a:r>
             <a:endParaRPr lang="en-US" sz="1050" dirty="0"/>
           </a:p>
@@ -32229,7 +33580,7 @@
                 <a:ea typeface="Calibri" pitchFamily="34" charset="-122"/>
                 <a:cs typeface="Calibri" pitchFamily="34" charset="-120"/>
               </a:rPr>
-              <a:t>Source: CFA Institute, Curriculum Vol 6, Learning Module 5, pp. 108–110; Sri Lanka case study p. 109.</a:t>
+              <a:t>Source: CFA Institute, Curriculum Vol 6, Learning Module 5, DM vs EM sovereign issuers and the Government of Sri Lanka external debt box, pp. 108–110.</a:t>
             </a:r>
             <a:endParaRPr lang="en-US" sz="750" dirty="0"/>
           </a:p>
@@ -32271,7 +33622,7 @@
                 <a:ea typeface="Calibri" pitchFamily="34" charset="-122"/>
                 <a:cs typeface="Calibri" pitchFamily="34" charset="-120"/>
               </a:rPr>
-              <a:t>EM external debt is particularly fragile: investors face indirect FX risk because the issuer needs foreign-currency revenues to service the debt.</a:t>
+              <a:t>A DM investor buying EM external debt has no direct FX exposure — but plenty of indirect exposure, because repayment depends on the issuer earning foreign currency.</a:t>
             </a:r>
             <a:endParaRPr lang="en-US" sz="1300" dirty="0"/>
           </a:p>
@@ -32474,7 +33825,7 @@
                           <a:ea typeface="Calibri" pitchFamily="34" charset="-122"/>
                           <a:cs typeface="Calibri" pitchFamily="34" charset="-120"/>
                         </a:rPr>
-                        <a:t>Currency of issuance</a:t>
+                        <a:t>Economic base</a:t>
                       </a:r>
                       <a:endParaRPr lang="en-US" sz="1100" dirty="0">
                         <a:latin typeface="Calibri" charset="0"/>
@@ -32524,7 +33875,7 @@
                           <a:ea typeface="Consolas" pitchFamily="34" charset="-122"/>
                           <a:cs typeface="Consolas" pitchFamily="34" charset="-120"/>
                         </a:rPr>
-                        <a:t>Reserve currency (USD, EUR, JPY, GBP, CHF, AUD, CNY)</a:t>
+                        <a:t>Strong, stable, well-diversified</a:t>
                       </a:r>
                       <a:endParaRPr lang="en-US" sz="1100" dirty="0">
                         <a:latin typeface="Consolas" charset="0"/>
@@ -32574,7 +33925,7 @@
                           <a:ea typeface="Consolas" pitchFamily="34" charset="-122"/>
                           <a:cs typeface="Consolas" pitchFamily="34" charset="-120"/>
                         </a:rPr>
-                        <a:t>Restricted domestic currency + external USD/EUR</a:t>
+                        <a:t>Higher growth, less diversified</a:t>
                       </a:r>
                       <a:endParaRPr lang="en-US" sz="1100" dirty="0">
                         <a:latin typeface="Consolas" charset="0"/>
@@ -32626,7 +33977,7 @@
                           <a:ea typeface="Calibri" pitchFamily="34" charset="-122"/>
                           <a:cs typeface="Calibri" pitchFamily="34" charset="-120"/>
                         </a:rPr>
-                        <a:t>Maturity access</a:t>
+                        <a:t>Currency of issuance</a:t>
                       </a:r>
                       <a:endParaRPr lang="en-US" sz="1100" dirty="0">
                         <a:latin typeface="Calibri" charset="0"/>
@@ -32676,7 +34027,7 @@
                           <a:ea typeface="Consolas" pitchFamily="34" charset="-122"/>
                           <a:cs typeface="Consolas" pitchFamily="34" charset="-120"/>
                         </a:rPr>
-                        <a:t>Unconstrained — full curve to 30y+</a:t>
+                        <a:t>Reserve currency (USD, EUR, JPY, GBP…)</a:t>
                       </a:r>
                       <a:endParaRPr lang="en-US" sz="1100" dirty="0">
                         <a:latin typeface="Consolas" charset="0"/>
@@ -32726,7 +34077,7 @@
                           <a:ea typeface="Consolas" pitchFamily="34" charset="-122"/>
                           <a:cs typeface="Consolas" pitchFamily="34" charset="-120"/>
                         </a:rPr>
-                        <a:t>Often capped by domestic-currency depth</a:t>
+                        <a:t>Restricted ccy; external FX debt</a:t>
                       </a:r>
                       <a:endParaRPr lang="en-US" sz="1100" dirty="0">
                         <a:latin typeface="Consolas" charset="0"/>
@@ -32778,7 +34129,7 @@
                           <a:ea typeface="Calibri" pitchFamily="34" charset="-122"/>
                           <a:cs typeface="Calibri" pitchFamily="34" charset="-120"/>
                         </a:rPr>
-                        <a:t>Tax base</a:t>
+                        <a:t>Maturity access</a:t>
                       </a:r>
                       <a:endParaRPr lang="en-US" sz="1100" dirty="0">
                         <a:latin typeface="Calibri" charset="0"/>
@@ -32828,7 +34179,7 @@
                           <a:ea typeface="Consolas" pitchFamily="34" charset="-122"/>
                           <a:cs typeface="Consolas" pitchFamily="34" charset="-120"/>
                         </a:rPr>
-                        <a:t>Broad, diversified, stable</a:t>
+                        <a:t>Unconstrained across the curve</a:t>
                       </a:r>
                       <a:endParaRPr lang="en-US" sz="1100" dirty="0">
                         <a:latin typeface="Consolas" charset="0"/>
@@ -32878,7 +34229,7 @@
                           <a:ea typeface="Consolas" pitchFamily="34" charset="-122"/>
                           <a:cs typeface="Consolas" pitchFamily="34" charset="-120"/>
                         </a:rPr>
-                        <a:t>Commodity-concentrated, cyclical</a:t>
+                        <a:t>Capped by domestic-ccy depth</a:t>
                       </a:r>
                       <a:endParaRPr lang="en-US" sz="1100" dirty="0">
                         <a:latin typeface="Consolas" charset="0"/>
@@ -32930,7 +34281,7 @@
                           <a:ea typeface="Calibri" pitchFamily="34" charset="-122"/>
                           <a:cs typeface="Calibri" pitchFamily="34" charset="-120"/>
                         </a:rPr>
-                        <a:t>Default risk</a:t>
+                        <a:t>Tax base</a:t>
                       </a:r>
                       <a:endParaRPr lang="en-US" sz="1100" dirty="0">
                         <a:latin typeface="Calibri" charset="0"/>
@@ -32980,7 +34331,7 @@
                           <a:ea typeface="Consolas" pitchFamily="34" charset="-122"/>
                           <a:cs typeface="Consolas" pitchFamily="34" charset="-120"/>
                         </a:rPr>
-                        <a:t>Effectively zero for domestic-currency debt</a:t>
+                        <a:t>Broad and recurrent</a:t>
                       </a:r>
                       <a:endParaRPr lang="en-US" sz="1100" dirty="0">
                         <a:latin typeface="Consolas" charset="0"/>
@@ -33030,7 +34381,7 @@
                           <a:ea typeface="Consolas" pitchFamily="34" charset="-122"/>
                           <a:cs typeface="Consolas" pitchFamily="34" charset="-120"/>
                         </a:rPr>
-                        <a:t>Material, especially on external debt</a:t>
+                        <a:t>Often commodity-concentrated</a:t>
                       </a:r>
                       <a:endParaRPr lang="en-US" sz="1100" dirty="0">
                         <a:latin typeface="Consolas" charset="0"/>
@@ -33082,7 +34433,7 @@
                           <a:ea typeface="Calibri" pitchFamily="34" charset="-122"/>
                           <a:cs typeface="Calibri" pitchFamily="34" charset="-120"/>
                         </a:rPr>
-                        <a:t>Fiscal-policy transparency</a:t>
+                        <a:t>Default risk</a:t>
                       </a:r>
                       <a:endParaRPr lang="en-US" sz="1100" dirty="0">
                         <a:latin typeface="Calibri" charset="0"/>
@@ -33132,7 +34483,7 @@
                           <a:ea typeface="Consolas" pitchFamily="34" charset="-122"/>
                           <a:cs typeface="Consolas" pitchFamily="34" charset="-120"/>
                         </a:rPr>
-                        <a:t>High — steady rules, published accounts</a:t>
+                        <a:t>Near zero in domestic currency</a:t>
                       </a:r>
                       <a:endParaRPr lang="en-US" sz="1100" dirty="0">
                         <a:latin typeface="Consolas" charset="0"/>
@@ -33182,7 +34533,7 @@
                           <a:ea typeface="Consolas" pitchFamily="34" charset="-122"/>
                           <a:cs typeface="Consolas" pitchFamily="34" charset="-120"/>
                         </a:rPr>
-                        <a:t>Variable — higher sensitivity to politics</a:t>
+                        <a:t>Material on external debt</a:t>
                       </a:r>
                       <a:endParaRPr lang="en-US" sz="1100" dirty="0">
                         <a:latin typeface="Consolas" charset="0"/>
@@ -33216,6 +34567,158 @@
                   </a:tcPr>
                 </a:tc>
               </a:tr>
+              <a:tr h="274320">
+                <a:tc>
+                  <a:txBody>
+                    <a:bodyPr/>
+                    <a:lstStyle/>
+                    <a:p>
+                      <a:pPr algn="l" indent="0" marL="0">
+                        <a:buNone/>
+                      </a:pPr>
+                      <a:r>
+                        <a:rPr lang="en-US" sz="1100" dirty="0">
+                          <a:solidFill>
+                            <a:srgbClr val="334155"/>
+                          </a:solidFill>
+                          <a:latin typeface="Calibri" pitchFamily="34" charset="0"/>
+                          <a:ea typeface="Calibri" pitchFamily="34" charset="-122"/>
+                          <a:cs typeface="Calibri" pitchFamily="34" charset="-120"/>
+                        </a:rPr>
+                        <a:t>Fiscal transparency</a:t>
+                      </a:r>
+                      <a:endParaRPr lang="en-US" sz="1100" dirty="0">
+                        <a:latin typeface="Calibri" charset="0"/>
+                        <a:ea typeface="Calibri" charset="0"/>
+                        <a:cs typeface="Calibri" charset="0"/>
+                      </a:endParaRPr>
+                    </a:p>
+                  </a:txBody>
+                  <a:tcPr marL="91440" marR="91440" marT="45720" marB="45720" anchor="ctr">
+                    <a:lnL w="0" cap="flat" cmpd="sng" algn="ctr">
+                      <a:noFill/>
+                    </a:lnL>
+                    <a:lnR w="0" cap="flat" cmpd="sng" algn="ctr">
+                      <a:noFill/>
+                    </a:lnR>
+                    <a:lnT w="0" cap="flat" cmpd="sng" algn="ctr">
+                      <a:noFill/>
+                    </a:lnT>
+                    <a:lnB w="3175" cap="flat" cmpd="sng" algn="ctr">
+                      <a:solidFill>
+                        <a:srgbClr val="D0D8E8"/>
+                      </a:solidFill>
+                      <a:prstDash val="solid"/>
+                      <a:round/>
+                      <a:headEnd type="none" w="med" len="med"/>
+                      <a:tailEnd type="none" w="med" len="med"/>
+                    </a:lnB>
+                    <a:solidFill>
+                      <a:srgbClr val="F5F7FA"/>
+                    </a:solidFill>
+                  </a:tcPr>
+                </a:tc>
+                <a:tc>
+                  <a:txBody>
+                    <a:bodyPr/>
+                    <a:lstStyle/>
+                    <a:p>
+                      <a:pPr algn="ctr" indent="0" marL="0">
+                        <a:buNone/>
+                      </a:pPr>
+                      <a:r>
+                        <a:rPr lang="en-US" sz="1100" dirty="0">
+                          <a:solidFill>
+                            <a:srgbClr val="334155"/>
+                          </a:solidFill>
+                          <a:latin typeface="Consolas" pitchFamily="34" charset="0"/>
+                          <a:ea typeface="Consolas" pitchFamily="34" charset="-122"/>
+                          <a:cs typeface="Consolas" pitchFamily="34" charset="-120"/>
+                        </a:rPr>
+                        <a:t>High — stable, published, rule-based</a:t>
+                      </a:r>
+                      <a:endParaRPr lang="en-US" sz="1100" dirty="0">
+                        <a:latin typeface="Consolas" charset="0"/>
+                        <a:ea typeface="Consolas" charset="0"/>
+                        <a:cs typeface="Consolas" charset="0"/>
+                      </a:endParaRPr>
+                    </a:p>
+                  </a:txBody>
+                  <a:tcPr marL="91440" marR="91440" marT="45720" marB="45720" anchor="ctr">
+                    <a:lnL w="0" cap="flat" cmpd="sng" algn="ctr">
+                      <a:noFill/>
+                    </a:lnL>
+                    <a:lnR w="0" cap="flat" cmpd="sng" algn="ctr">
+                      <a:noFill/>
+                    </a:lnR>
+                    <a:lnT w="0" cap="flat" cmpd="sng" algn="ctr">
+                      <a:noFill/>
+                    </a:lnT>
+                    <a:lnB w="3175" cap="flat" cmpd="sng" algn="ctr">
+                      <a:solidFill>
+                        <a:srgbClr val="D0D8E8"/>
+                      </a:solidFill>
+                      <a:prstDash val="solid"/>
+                      <a:round/>
+                      <a:headEnd type="none" w="med" len="med"/>
+                      <a:tailEnd type="none" w="med" len="med"/>
+                    </a:lnB>
+                    <a:solidFill>
+                      <a:srgbClr val="F5F7FA"/>
+                    </a:solidFill>
+                  </a:tcPr>
+                </a:tc>
+                <a:tc>
+                  <a:txBody>
+                    <a:bodyPr/>
+                    <a:lstStyle/>
+                    <a:p>
+                      <a:pPr algn="ctr" indent="0" marL="0">
+                        <a:buNone/>
+                      </a:pPr>
+                      <a:r>
+                        <a:rPr lang="en-US" sz="1100" dirty="0">
+                          <a:solidFill>
+                            <a:srgbClr val="334155"/>
+                          </a:solidFill>
+                          <a:latin typeface="Consolas" pitchFamily="34" charset="0"/>
+                          <a:ea typeface="Consolas" pitchFamily="34" charset="-122"/>
+                          <a:cs typeface="Consolas" pitchFamily="34" charset="-120"/>
+                        </a:rPr>
+                        <a:t>Less stable, more political</a:t>
+                      </a:r>
+                      <a:endParaRPr lang="en-US" sz="1100" dirty="0">
+                        <a:latin typeface="Consolas" charset="0"/>
+                        <a:ea typeface="Consolas" charset="0"/>
+                        <a:cs typeface="Consolas" charset="0"/>
+                      </a:endParaRPr>
+                    </a:p>
+                  </a:txBody>
+                  <a:tcPr marL="91440" marR="91440" marT="45720" marB="45720" anchor="ctr">
+                    <a:lnL w="0" cap="flat" cmpd="sng" algn="ctr">
+                      <a:noFill/>
+                    </a:lnL>
+                    <a:lnR w="0" cap="flat" cmpd="sng" algn="ctr">
+                      <a:noFill/>
+                    </a:lnR>
+                    <a:lnT w="0" cap="flat" cmpd="sng" algn="ctr">
+                      <a:noFill/>
+                    </a:lnT>
+                    <a:lnB w="3175" cap="flat" cmpd="sng" algn="ctr">
+                      <a:solidFill>
+                        <a:srgbClr val="D0D8E8"/>
+                      </a:solidFill>
+                      <a:prstDash val="solid"/>
+                      <a:round/>
+                      <a:headEnd type="none" w="med" len="med"/>
+                      <a:tailEnd type="none" w="med" len="med"/>
+                    </a:lnB>
+                    <a:solidFill>
+                      <a:srgbClr val="F5F7FA"/>
+                    </a:solidFill>
+                  </a:tcPr>
+                </a:tc>
+              </a:tr>
             </a:tbl>
           </a:graphicData>
         </a:graphic>
@@ -33228,8 +34731,8 @@
         </p:nvSpPr>
         <p:spPr>
           <a:xfrm>
-            <a:off x="320040" y="3383280"/>
-            <a:ext cx="8503920" cy="960120"/>
+            <a:off x="320040" y="3246120"/>
+            <a:ext cx="8503920" cy="1097280"/>
           </a:xfrm>
           <a:prstGeom prst="rect">
             <a:avLst/>
@@ -33248,8 +34751,8 @@
         </p:nvSpPr>
         <p:spPr>
           <a:xfrm>
-            <a:off x="320040" y="3383280"/>
-            <a:ext cx="73152" cy="960120"/>
+            <a:off x="320040" y="3246120"/>
+            <a:ext cx="73152" cy="1097280"/>
           </a:xfrm>
           <a:prstGeom prst="rect">
             <a:avLst/>
@@ -33268,7 +34771,7 @@
         </p:nvSpPr>
         <p:spPr>
           <a:xfrm>
-            <a:off x="457200" y="3429000"/>
+            <a:off x="457200" y="3291840"/>
             <a:ext cx="8275320" cy="256032"/>
           </a:xfrm>
           <a:prstGeom prst="rect">
@@ -33296,7 +34799,7 @@
                 <a:ea typeface="Trebuchet MS" pitchFamily="34" charset="-122"/>
                 <a:cs typeface="Trebuchet MS" pitchFamily="34" charset="-120"/>
               </a:rPr>
-              <a:t>SRI LANKA EXTERNAL-DEBT DEFAULT — MAY 2022</a:t>
+              <a:t>SRI LANKA — FIRST ASIA-PACIFIC EXTERNAL DEFAULT IN MANY YEARS, MAY 2022</a:t>
             </a:r>
             <a:endParaRPr lang="en-US" sz="1100" dirty="0"/>
           </a:p>
@@ -33310,8 +34813,8 @@
         </p:nvSpPr>
         <p:spPr>
           <a:xfrm>
-            <a:off x="457200" y="3703320"/>
-            <a:ext cx="8275320" cy="594360"/>
+            <a:off x="457200" y="3566160"/>
+            <a:ext cx="8275320" cy="731520"/>
           </a:xfrm>
           <a:prstGeom prst="rect">
             <a:avLst/>
@@ -33338,7 +34841,7 @@
                 <a:ea typeface="Calibri" pitchFamily="34" charset="-122"/>
                 <a:cs typeface="Calibri" pitchFamily="34" charset="-120"/>
               </a:rPr>
-              <a:t>First Asia-Pacific default in many years. Govt debt/GDP jumped 87% → 100%+ by 2020 as infrastructure spending was financed by USD bonds, World Bank, ADB, and major trading partners (Japan, China). Tourism + remittances collapse + 2022 inflation/commodity spike → foreign-currency reserves ran out. Missed USD 78m coupon → 30-day cure → default. External bond creditor split: market bonds 47%, ADB 13%, Japan 10%, China 10%, World Bank 9%, India 2%, other 9%.</a:t>
+              <a:t>Debt rose from 87% to over 100% of GDP by 2020 as infrastructure was financed by global markets, supranationals and trading partners. Tourism and remittances collapsed that year; the 2022 inflation and commodity shock finished it. A missed USD 78m foreign-currency interest payment, after a 30-day grace period, was the default. 2021 external debt: market bonds 47%, ADB 13%, Japan 10%, China 10%, World Bank 9%, other 9%, India 2%.</a:t>
             </a:r>
             <a:endParaRPr lang="en-US" sz="1200" dirty="0"/>
           </a:p>
@@ -33445,7 +34948,7 @@
                 <a:ea typeface="Trebuchet MS" pitchFamily="34" charset="-122"/>
                 <a:cs typeface="Trebuchet MS" pitchFamily="34" charset="-120"/>
               </a:rPr>
-              <a:t>Sovereign debt is sold at public auction — single-price auctions give everyone the same yield; multiple-price auctions pay each winner their bid</a:t>
+              <a:t>Sovereign debt is sold at public auction — a single-price auction gives every winner the cut-off yield, a multiple-price auction pays each winner their own bid</a:t>
             </a:r>
             <a:endParaRPr lang="en-US" sz="1600" dirty="0"/>
           </a:p>
@@ -33549,7 +35052,7 @@
                 <a:ea typeface="Calibri" pitchFamily="34" charset="-122"/>
                 <a:cs typeface="Calibri" pitchFamily="34" charset="-120"/>
               </a:rPr>
-              <a:t>Source: CFA Institute, Curriculum Vol 6, Learning Module 5, Exhibit 2 Singapore 30y + Reserve Bank of India box, pp. 115–117.</a:t>
+              <a:t>Source: CFA Institute, Curriculum Vol 6, Learning Module 5, "Sovereign Debt Issuance and Trading", Exhibit 2 (Singapore) and the Reserve Bank of India box, pp. 115–116.</a:t>
             </a:r>
             <a:endParaRPr lang="en-US" sz="750" dirty="0"/>
           </a:p>
@@ -33591,7 +35094,7 @@
                 <a:ea typeface="Calibri" pitchFamily="34" charset="-122"/>
                 <a:cs typeface="Calibri" pitchFamily="34" charset="-120"/>
               </a:rPr>
-              <a:t>Single-price auctions reduce yield volatility and "winner's-curse" fear — which is why the RBI switched in 2021 after a series of partially failed auctions.</a:t>
+              <a:t>Single-price cuts yield volatility and the fear of the winner's curse — which is why the RBI moved most of its tenors to single-price in July 2021 after a run of partially failed auctions.</a:t>
             </a:r>
             <a:endParaRPr lang="en-US" sz="1300" dirty="0"/>
           </a:p>
@@ -33692,7 +35195,7 @@
                           <a:ea typeface="Trebuchet MS" pitchFamily="34" charset="-122"/>
                           <a:cs typeface="Trebuchet MS" pitchFamily="34" charset="-120"/>
                         </a:rPr>
-                        <a:t>Single-price (Dutch) auction</a:t>
+                        <a:t>Single-price (uniform-price)</a:t>
                       </a:r>
                       <a:endParaRPr lang="en-US" sz="1100" dirty="0">
                         <a:latin typeface="Trebuchet MS" charset="0"/>
@@ -33844,7 +35347,7 @@
                           <a:ea typeface="Consolas" pitchFamily="34" charset="-122"/>
                           <a:cs typeface="Consolas" pitchFamily="34" charset="-120"/>
                         </a:rPr>
-                        <a:t>All winners pay the same — the stop/clearing price</a:t>
+                        <a:t>All winners pay the cut-off price</a:t>
                       </a:r>
                       <a:endParaRPr lang="en-US" sz="1100" dirty="0">
                         <a:latin typeface="Consolas" charset="0"/>
@@ -33946,7 +35449,7 @@
                           <a:ea typeface="Calibri" pitchFamily="34" charset="-122"/>
                           <a:cs typeface="Calibri" pitchFamily="34" charset="-120"/>
                         </a:rPr>
-                        <a:t>Ranking logic</a:t>
+                        <a:t>Ranking of competitive bids</a:t>
                       </a:r>
                       <a:endParaRPr lang="en-US" sz="1100" dirty="0">
                         <a:latin typeface="Calibri" charset="0"/>
@@ -33996,7 +35499,7 @@
                           <a:ea typeface="Consolas" pitchFamily="34" charset="-122"/>
                           <a:cs typeface="Consolas" pitchFamily="34" charset="-120"/>
                         </a:rPr>
-                        <a:t>Bids ranked low-yield → high-yield until size filled</a:t>
+                        <a:t>Ranked from the lowest yield up</a:t>
                       </a:r>
                       <a:endParaRPr lang="en-US" sz="1100" dirty="0">
                         <a:latin typeface="Consolas" charset="0"/>
@@ -34046,7 +35549,311 @@
                           <a:ea typeface="Consolas" pitchFamily="34" charset="-122"/>
                           <a:cs typeface="Consolas" pitchFamily="34" charset="-120"/>
                         </a:rPr>
-                        <a:t>Same ranking; different pricing</a:t>
+                        <a:t>Same ranking, different pricing</a:t>
+                      </a:r>
+                      <a:endParaRPr lang="en-US" sz="1100" dirty="0">
+                        <a:latin typeface="Consolas" charset="0"/>
+                        <a:ea typeface="Consolas" charset="0"/>
+                        <a:cs typeface="Consolas" charset="0"/>
+                      </a:endParaRPr>
+                    </a:p>
+                  </a:txBody>
+                  <a:tcPr marL="91440" marR="91440" marT="45720" marB="45720" anchor="ctr">
+                    <a:lnL w="0" cap="flat" cmpd="sng" algn="ctr">
+                      <a:noFill/>
+                    </a:lnL>
+                    <a:lnR w="0" cap="flat" cmpd="sng" algn="ctr">
+                      <a:noFill/>
+                    </a:lnR>
+                    <a:lnT w="0" cap="flat" cmpd="sng" algn="ctr">
+                      <a:noFill/>
+                    </a:lnT>
+                    <a:lnB w="3175" cap="flat" cmpd="sng" algn="ctr">
+                      <a:solidFill>
+                        <a:srgbClr val="D0D8E8"/>
+                      </a:solidFill>
+                      <a:prstDash val="solid"/>
+                      <a:round/>
+                      <a:headEnd type="none" w="med" len="med"/>
+                      <a:tailEnd type="none" w="med" len="med"/>
+                    </a:lnB>
+                    <a:solidFill>
+                      <a:srgbClr val="F5F7FA"/>
+                    </a:solidFill>
+                  </a:tcPr>
+                </a:tc>
+              </a:tr>
+              <a:tr h="274320">
+                <a:tc>
+                  <a:txBody>
+                    <a:bodyPr/>
+                    <a:lstStyle/>
+                    <a:p>
+                      <a:pPr algn="l" indent="0" marL="0">
+                        <a:buNone/>
+                      </a:pPr>
+                      <a:r>
+                        <a:rPr lang="en-US" sz="1100" dirty="0">
+                          <a:solidFill>
+                            <a:srgbClr val="334155"/>
+                          </a:solidFill>
+                          <a:latin typeface="Calibri" pitchFamily="34" charset="0"/>
+                          <a:ea typeface="Calibri" pitchFamily="34" charset="-122"/>
+                          <a:cs typeface="Calibri" pitchFamily="34" charset="-120"/>
+                        </a:rPr>
+                        <a:t>Cut-off ("stop") yield</a:t>
+                      </a:r>
+                      <a:endParaRPr lang="en-US" sz="1100" dirty="0">
+                        <a:latin typeface="Calibri" charset="0"/>
+                        <a:ea typeface="Calibri" charset="0"/>
+                        <a:cs typeface="Calibri" charset="0"/>
+                      </a:endParaRPr>
+                    </a:p>
+                  </a:txBody>
+                  <a:tcPr marL="91440" marR="91440" marT="45720" marB="45720" anchor="ctr">
+                    <a:lnL w="0" cap="flat" cmpd="sng" algn="ctr">
+                      <a:noFill/>
+                    </a:lnL>
+                    <a:lnR w="0" cap="flat" cmpd="sng" algn="ctr">
+                      <a:noFill/>
+                    </a:lnR>
+                    <a:lnT w="0" cap="flat" cmpd="sng" algn="ctr">
+                      <a:noFill/>
+                    </a:lnT>
+                    <a:lnB w="3175" cap="flat" cmpd="sng" algn="ctr">
+                      <a:solidFill>
+                        <a:srgbClr val="D0D8E8"/>
+                      </a:solidFill>
+                      <a:prstDash val="solid"/>
+                      <a:round/>
+                      <a:headEnd type="none" w="med" len="med"/>
+                      <a:tailEnd type="none" w="med" len="med"/>
+                    </a:lnB>
+                    <a:solidFill>
+                      <a:srgbClr val="FFFFFF"/>
+                    </a:solidFill>
+                  </a:tcPr>
+                </a:tc>
+                <a:tc>
+                  <a:txBody>
+                    <a:bodyPr/>
+                    <a:lstStyle/>
+                    <a:p>
+                      <a:pPr algn="ctr" indent="0" marL="0">
+                        <a:buNone/>
+                      </a:pPr>
+                      <a:r>
+                        <a:rPr lang="en-US" sz="1100" dirty="0">
+                          <a:solidFill>
+                            <a:srgbClr val="334155"/>
+                          </a:solidFill>
+                          <a:latin typeface="Consolas" pitchFamily="34" charset="0"/>
+                          <a:ea typeface="Consolas" pitchFamily="34" charset="-122"/>
+                          <a:cs typeface="Consolas" pitchFamily="34" charset="-120"/>
+                        </a:rPr>
+                        <a:t>Highest yield that fills the offer</a:t>
+                      </a:r>
+                      <a:endParaRPr lang="en-US" sz="1100" dirty="0">
+                        <a:latin typeface="Consolas" charset="0"/>
+                        <a:ea typeface="Consolas" charset="0"/>
+                        <a:cs typeface="Consolas" charset="0"/>
+                      </a:endParaRPr>
+                    </a:p>
+                  </a:txBody>
+                  <a:tcPr marL="91440" marR="91440" marT="45720" marB="45720" anchor="ctr">
+                    <a:lnL w="0" cap="flat" cmpd="sng" algn="ctr">
+                      <a:noFill/>
+                    </a:lnL>
+                    <a:lnR w="0" cap="flat" cmpd="sng" algn="ctr">
+                      <a:noFill/>
+                    </a:lnR>
+                    <a:lnT w="0" cap="flat" cmpd="sng" algn="ctr">
+                      <a:noFill/>
+                    </a:lnT>
+                    <a:lnB w="3175" cap="flat" cmpd="sng" algn="ctr">
+                      <a:solidFill>
+                        <a:srgbClr val="D0D8E8"/>
+                      </a:solidFill>
+                      <a:prstDash val="solid"/>
+                      <a:round/>
+                      <a:headEnd type="none" w="med" len="med"/>
+                      <a:tailEnd type="none" w="med" len="med"/>
+                    </a:lnB>
+                    <a:solidFill>
+                      <a:srgbClr val="FFFFFF"/>
+                    </a:solidFill>
+                  </a:tcPr>
+                </a:tc>
+                <a:tc>
+                  <a:txBody>
+                    <a:bodyPr/>
+                    <a:lstStyle/>
+                    <a:p>
+                      <a:pPr algn="ctr" indent="0" marL="0">
+                        <a:buNone/>
+                      </a:pPr>
+                      <a:r>
+                        <a:rPr lang="en-US" sz="1100" dirty="0">
+                          <a:solidFill>
+                            <a:srgbClr val="334155"/>
+                          </a:solidFill>
+                          <a:latin typeface="Consolas" pitchFamily="34" charset="0"/>
+                          <a:ea typeface="Consolas" pitchFamily="34" charset="-122"/>
+                          <a:cs typeface="Consolas" pitchFamily="34" charset="-120"/>
+                        </a:rPr>
+                        <a:t>Same cut-off defines who wins</a:t>
+                      </a:r>
+                      <a:endParaRPr lang="en-US" sz="1100" dirty="0">
+                        <a:latin typeface="Consolas" charset="0"/>
+                        <a:ea typeface="Consolas" charset="0"/>
+                        <a:cs typeface="Consolas" charset="0"/>
+                      </a:endParaRPr>
+                    </a:p>
+                  </a:txBody>
+                  <a:tcPr marL="91440" marR="91440" marT="45720" marB="45720" anchor="ctr">
+                    <a:lnL w="0" cap="flat" cmpd="sng" algn="ctr">
+                      <a:noFill/>
+                    </a:lnL>
+                    <a:lnR w="0" cap="flat" cmpd="sng" algn="ctr">
+                      <a:noFill/>
+                    </a:lnR>
+                    <a:lnT w="0" cap="flat" cmpd="sng" algn="ctr">
+                      <a:noFill/>
+                    </a:lnT>
+                    <a:lnB w="3175" cap="flat" cmpd="sng" algn="ctr">
+                      <a:solidFill>
+                        <a:srgbClr val="D0D8E8"/>
+                      </a:solidFill>
+                      <a:prstDash val="solid"/>
+                      <a:round/>
+                      <a:headEnd type="none" w="med" len="med"/>
+                      <a:tailEnd type="none" w="med" len="med"/>
+                    </a:lnB>
+                    <a:solidFill>
+                      <a:srgbClr val="FFFFFF"/>
+                    </a:solidFill>
+                  </a:tcPr>
+                </a:tc>
+              </a:tr>
+              <a:tr h="274320">
+                <a:tc>
+                  <a:txBody>
+                    <a:bodyPr/>
+                    <a:lstStyle/>
+                    <a:p>
+                      <a:pPr algn="l" indent="0" marL="0">
+                        <a:buNone/>
+                      </a:pPr>
+                      <a:r>
+                        <a:rPr lang="en-US" sz="1100" dirty="0">
+                          <a:solidFill>
+                            <a:srgbClr val="334155"/>
+                          </a:solidFill>
+                          <a:latin typeface="Calibri" pitchFamily="34" charset="0"/>
+                          <a:ea typeface="Calibri" pitchFamily="34" charset="-122"/>
+                          <a:cs typeface="Calibri" pitchFamily="34" charset="-120"/>
+                        </a:rPr>
+                        <a:t>Non-competitive bids</a:t>
+                      </a:r>
+                      <a:endParaRPr lang="en-US" sz="1100" dirty="0">
+                        <a:latin typeface="Calibri" charset="0"/>
+                        <a:ea typeface="Calibri" charset="0"/>
+                        <a:cs typeface="Calibri" charset="0"/>
+                      </a:endParaRPr>
+                    </a:p>
+                  </a:txBody>
+                  <a:tcPr marL="91440" marR="91440" marT="45720" marB="45720" anchor="ctr">
+                    <a:lnL w="0" cap="flat" cmpd="sng" algn="ctr">
+                      <a:noFill/>
+                    </a:lnL>
+                    <a:lnR w="0" cap="flat" cmpd="sng" algn="ctr">
+                      <a:noFill/>
+                    </a:lnR>
+                    <a:lnT w="0" cap="flat" cmpd="sng" algn="ctr">
+                      <a:noFill/>
+                    </a:lnT>
+                    <a:lnB w="3175" cap="flat" cmpd="sng" algn="ctr">
+                      <a:solidFill>
+                        <a:srgbClr val="D0D8E8"/>
+                      </a:solidFill>
+                      <a:prstDash val="solid"/>
+                      <a:round/>
+                      <a:headEnd type="none" w="med" len="med"/>
+                      <a:tailEnd type="none" w="med" len="med"/>
+                    </a:lnB>
+                    <a:solidFill>
+                      <a:srgbClr val="F5F7FA"/>
+                    </a:solidFill>
+                  </a:tcPr>
+                </a:tc>
+                <a:tc>
+                  <a:txBody>
+                    <a:bodyPr/>
+                    <a:lstStyle/>
+                    <a:p>
+                      <a:pPr algn="ctr" indent="0" marL="0">
+                        <a:buNone/>
+                      </a:pPr>
+                      <a:r>
+                        <a:rPr lang="en-US" sz="1100" dirty="0">
+                          <a:solidFill>
+                            <a:srgbClr val="334155"/>
+                          </a:solidFill>
+                          <a:latin typeface="Consolas" pitchFamily="34" charset="0"/>
+                          <a:ea typeface="Consolas" pitchFamily="34" charset="-122"/>
+                          <a:cs typeface="Consolas" pitchFamily="34" charset="-120"/>
+                        </a:rPr>
+                        <a:t>Accepted in full at the auction price</a:t>
+                      </a:r>
+                      <a:endParaRPr lang="en-US" sz="1100" dirty="0">
+                        <a:latin typeface="Consolas" charset="0"/>
+                        <a:ea typeface="Consolas" charset="0"/>
+                        <a:cs typeface="Consolas" charset="0"/>
+                      </a:endParaRPr>
+                    </a:p>
+                  </a:txBody>
+                  <a:tcPr marL="91440" marR="91440" marT="45720" marB="45720" anchor="ctr">
+                    <a:lnL w="0" cap="flat" cmpd="sng" algn="ctr">
+                      <a:noFill/>
+                    </a:lnL>
+                    <a:lnR w="0" cap="flat" cmpd="sng" algn="ctr">
+                      <a:noFill/>
+                    </a:lnR>
+                    <a:lnT w="0" cap="flat" cmpd="sng" algn="ctr">
+                      <a:noFill/>
+                    </a:lnT>
+                    <a:lnB w="3175" cap="flat" cmpd="sng" algn="ctr">
+                      <a:solidFill>
+                        <a:srgbClr val="D0D8E8"/>
+                      </a:solidFill>
+                      <a:prstDash val="solid"/>
+                      <a:round/>
+                      <a:headEnd type="none" w="med" len="med"/>
+                      <a:tailEnd type="none" w="med" len="med"/>
+                    </a:lnB>
+                    <a:solidFill>
+                      <a:srgbClr val="F5F7FA"/>
+                    </a:solidFill>
+                  </a:tcPr>
+                </a:tc>
+                <a:tc>
+                  <a:txBody>
+                    <a:bodyPr/>
+                    <a:lstStyle/>
+                    <a:p>
+                      <a:pPr algn="ctr" indent="0" marL="0">
+                        <a:buNone/>
+                      </a:pPr>
+                      <a:r>
+                        <a:rPr lang="en-US" sz="1100" dirty="0">
+                          <a:solidFill>
+                            <a:srgbClr val="334155"/>
+                          </a:solidFill>
+                          <a:latin typeface="Consolas" pitchFamily="34" charset="0"/>
+                          <a:ea typeface="Consolas" pitchFamily="34" charset="-122"/>
+                          <a:cs typeface="Consolas" pitchFamily="34" charset="-120"/>
+                        </a:rPr>
+                        <a:t>Accepted in full; auction price</a:t>
                       </a:r>
                       <a:endParaRPr lang="en-US" sz="1100" dirty="0">
                         <a:latin typeface="Consolas" charset="0"/>
@@ -34148,7 +35955,7 @@
                           <a:ea typeface="Consolas" pitchFamily="34" charset="-122"/>
                           <a:cs typeface="Consolas" pitchFamily="34" charset="-120"/>
                         </a:rPr>
-                        <a:t>Lower — no winner's curse</a:t>
+                        <a:t>Lower — one rate for all winners</a:t>
                       </a:r>
                       <a:endParaRPr lang="en-US" sz="1100" dirty="0">
                         <a:latin typeface="Consolas" charset="0"/>
@@ -34198,7 +36005,7 @@
                           <a:ea typeface="Consolas" pitchFamily="34" charset="-122"/>
                           <a:cs typeface="Consolas" pitchFamily="34" charset="-120"/>
                         </a:rPr>
-                        <a:t>Higher dispersion of winning prices</a:t>
+                        <a:t>Higher spread of winning prices</a:t>
                       </a:r>
                       <a:endParaRPr lang="en-US" sz="1100" dirty="0">
                         <a:latin typeface="Consolas" charset="0"/>
@@ -34250,7 +36057,7 @@
                           <a:ea typeface="Calibri" pitchFamily="34" charset="-122"/>
                           <a:cs typeface="Calibri" pitchFamily="34" charset="-120"/>
                         </a:rPr>
-                        <a:t>Distribution of allocation</a:t>
+                        <a:t>Distribution and cost</a:t>
                       </a:r>
                       <a:endParaRPr lang="en-US" sz="1100" dirty="0">
                         <a:latin typeface="Calibri" charset="0"/>
@@ -34300,7 +36107,7 @@
                           <a:ea typeface="Consolas" pitchFamily="34" charset="-122"/>
                           <a:cs typeface="Consolas" pitchFamily="34" charset="-120"/>
                         </a:rPr>
-                        <a:t>Broader — encourages aggressive bids</a:t>
+                        <a:t>Broader; may lower the cost of funds</a:t>
                       </a:r>
                       <a:endParaRPr lang="en-US" sz="1100" dirty="0">
                         <a:latin typeface="Consolas" charset="0"/>
@@ -34350,311 +36157,7 @@
                           <a:ea typeface="Consolas" pitchFamily="34" charset="-122"/>
                           <a:cs typeface="Consolas" pitchFamily="34" charset="-120"/>
                         </a:rPr>
-                        <a:t>Narrower — large bidders win at bid</a:t>
-                      </a:r>
-                      <a:endParaRPr lang="en-US" sz="1100" dirty="0">
-                        <a:latin typeface="Consolas" charset="0"/>
-                        <a:ea typeface="Consolas" charset="0"/>
-                        <a:cs typeface="Consolas" charset="0"/>
-                      </a:endParaRPr>
-                    </a:p>
-                  </a:txBody>
-                  <a:tcPr marL="91440" marR="91440" marT="45720" marB="45720" anchor="ctr">
-                    <a:lnL w="0" cap="flat" cmpd="sng" algn="ctr">
-                      <a:noFill/>
-                    </a:lnL>
-                    <a:lnR w="0" cap="flat" cmpd="sng" algn="ctr">
-                      <a:noFill/>
-                    </a:lnR>
-                    <a:lnT w="0" cap="flat" cmpd="sng" algn="ctr">
-                      <a:noFill/>
-                    </a:lnT>
-                    <a:lnB w="3175" cap="flat" cmpd="sng" algn="ctr">
-                      <a:solidFill>
-                        <a:srgbClr val="D0D8E8"/>
-                      </a:solidFill>
-                      <a:prstDash val="solid"/>
-                      <a:round/>
-                      <a:headEnd type="none" w="med" len="med"/>
-                      <a:tailEnd type="none" w="med" len="med"/>
-                    </a:lnB>
-                    <a:solidFill>
-                      <a:srgbClr val="F5F7FA"/>
-                    </a:solidFill>
-                  </a:tcPr>
-                </a:tc>
-              </a:tr>
-              <a:tr h="274320">
-                <a:tc>
-                  <a:txBody>
-                    <a:bodyPr/>
-                    <a:lstStyle/>
-                    <a:p>
-                      <a:pPr algn="l" indent="0" marL="0">
-                        <a:buNone/>
-                      </a:pPr>
-                      <a:r>
-                        <a:rPr lang="en-US" sz="1100" dirty="0">
-                          <a:solidFill>
-                            <a:srgbClr val="334155"/>
-                          </a:solidFill>
-                          <a:latin typeface="Calibri" pitchFamily="34" charset="0"/>
-                          <a:ea typeface="Calibri" pitchFamily="34" charset="-122"/>
-                          <a:cs typeface="Calibri" pitchFamily="34" charset="-120"/>
-                        </a:rPr>
-                        <a:t>Non-competitive bids</a:t>
-                      </a:r>
-                      <a:endParaRPr lang="en-US" sz="1100" dirty="0">
-                        <a:latin typeface="Calibri" charset="0"/>
-                        <a:ea typeface="Calibri" charset="0"/>
-                        <a:cs typeface="Calibri" charset="0"/>
-                      </a:endParaRPr>
-                    </a:p>
-                  </a:txBody>
-                  <a:tcPr marL="91440" marR="91440" marT="45720" marB="45720" anchor="ctr">
-                    <a:lnL w="0" cap="flat" cmpd="sng" algn="ctr">
-                      <a:noFill/>
-                    </a:lnL>
-                    <a:lnR w="0" cap="flat" cmpd="sng" algn="ctr">
-                      <a:noFill/>
-                    </a:lnR>
-                    <a:lnT w="0" cap="flat" cmpd="sng" algn="ctr">
-                      <a:noFill/>
-                    </a:lnT>
-                    <a:lnB w="3175" cap="flat" cmpd="sng" algn="ctr">
-                      <a:solidFill>
-                        <a:srgbClr val="D0D8E8"/>
-                      </a:solidFill>
-                      <a:prstDash val="solid"/>
-                      <a:round/>
-                      <a:headEnd type="none" w="med" len="med"/>
-                      <a:tailEnd type="none" w="med" len="med"/>
-                    </a:lnB>
-                    <a:solidFill>
-                      <a:srgbClr val="FFFFFF"/>
-                    </a:solidFill>
-                  </a:tcPr>
-                </a:tc>
-                <a:tc>
-                  <a:txBody>
-                    <a:bodyPr/>
-                    <a:lstStyle/>
-                    <a:p>
-                      <a:pPr algn="ctr" indent="0" marL="0">
-                        <a:buNone/>
-                      </a:pPr>
-                      <a:r>
-                        <a:rPr lang="en-US" sz="1100" dirty="0">
-                          <a:solidFill>
-                            <a:srgbClr val="334155"/>
-                          </a:solidFill>
-                          <a:latin typeface="Consolas" pitchFamily="34" charset="0"/>
-                          <a:ea typeface="Consolas" pitchFamily="34" charset="-122"/>
-                          <a:cs typeface="Consolas" pitchFamily="34" charset="-120"/>
-                        </a:rPr>
-                        <a:t>Always accepted at clearing price</a:t>
-                      </a:r>
-                      <a:endParaRPr lang="en-US" sz="1100" dirty="0">
-                        <a:latin typeface="Consolas" charset="0"/>
-                        <a:ea typeface="Consolas" charset="0"/>
-                        <a:cs typeface="Consolas" charset="0"/>
-                      </a:endParaRPr>
-                    </a:p>
-                  </a:txBody>
-                  <a:tcPr marL="91440" marR="91440" marT="45720" marB="45720" anchor="ctr">
-                    <a:lnL w="0" cap="flat" cmpd="sng" algn="ctr">
-                      <a:noFill/>
-                    </a:lnL>
-                    <a:lnR w="0" cap="flat" cmpd="sng" algn="ctr">
-                      <a:noFill/>
-                    </a:lnR>
-                    <a:lnT w="0" cap="flat" cmpd="sng" algn="ctr">
-                      <a:noFill/>
-                    </a:lnT>
-                    <a:lnB w="3175" cap="flat" cmpd="sng" algn="ctr">
-                      <a:solidFill>
-                        <a:srgbClr val="D0D8E8"/>
-                      </a:solidFill>
-                      <a:prstDash val="solid"/>
-                      <a:round/>
-                      <a:headEnd type="none" w="med" len="med"/>
-                      <a:tailEnd type="none" w="med" len="med"/>
-                    </a:lnB>
-                    <a:solidFill>
-                      <a:srgbClr val="FFFFFF"/>
-                    </a:solidFill>
-                  </a:tcPr>
-                </a:tc>
-                <a:tc>
-                  <a:txBody>
-                    <a:bodyPr/>
-                    <a:lstStyle/>
-                    <a:p>
-                      <a:pPr algn="ctr" indent="0" marL="0">
-                        <a:buNone/>
-                      </a:pPr>
-                      <a:r>
-                        <a:rPr lang="en-US" sz="1100" dirty="0">
-                          <a:solidFill>
-                            <a:srgbClr val="334155"/>
-                          </a:solidFill>
-                          <a:latin typeface="Consolas" pitchFamily="34" charset="0"/>
-                          <a:ea typeface="Consolas" pitchFamily="34" charset="-122"/>
-                          <a:cs typeface="Consolas" pitchFamily="34" charset="-120"/>
-                        </a:rPr>
-                        <a:t>Always accepted at average price</a:t>
-                      </a:r>
-                      <a:endParaRPr lang="en-US" sz="1100" dirty="0">
-                        <a:latin typeface="Consolas" charset="0"/>
-                        <a:ea typeface="Consolas" charset="0"/>
-                        <a:cs typeface="Consolas" charset="0"/>
-                      </a:endParaRPr>
-                    </a:p>
-                  </a:txBody>
-                  <a:tcPr marL="91440" marR="91440" marT="45720" marB="45720" anchor="ctr">
-                    <a:lnL w="0" cap="flat" cmpd="sng" algn="ctr">
-                      <a:noFill/>
-                    </a:lnL>
-                    <a:lnR w="0" cap="flat" cmpd="sng" algn="ctr">
-                      <a:noFill/>
-                    </a:lnR>
-                    <a:lnT w="0" cap="flat" cmpd="sng" algn="ctr">
-                      <a:noFill/>
-                    </a:lnT>
-                    <a:lnB w="3175" cap="flat" cmpd="sng" algn="ctr">
-                      <a:solidFill>
-                        <a:srgbClr val="D0D8E8"/>
-                      </a:solidFill>
-                      <a:prstDash val="solid"/>
-                      <a:round/>
-                      <a:headEnd type="none" w="med" len="med"/>
-                      <a:tailEnd type="none" w="med" len="med"/>
-                    </a:lnB>
-                    <a:solidFill>
-                      <a:srgbClr val="FFFFFF"/>
-                    </a:solidFill>
-                  </a:tcPr>
-                </a:tc>
-              </a:tr>
-              <a:tr h="274320">
-                <a:tc>
-                  <a:txBody>
-                    <a:bodyPr/>
-                    <a:lstStyle/>
-                    <a:p>
-                      <a:pPr algn="l" indent="0" marL="0">
-                        <a:buNone/>
-                      </a:pPr>
-                      <a:r>
-                        <a:rPr lang="en-US" sz="1100" dirty="0">
-                          <a:solidFill>
-                            <a:srgbClr val="334155"/>
-                          </a:solidFill>
-                          <a:latin typeface="Calibri" pitchFamily="34" charset="0"/>
-                          <a:ea typeface="Calibri" pitchFamily="34" charset="-122"/>
-                          <a:cs typeface="Calibri" pitchFamily="34" charset="-120"/>
-                        </a:rPr>
-                        <a:t>Role of primary dealers</a:t>
-                      </a:r>
-                      <a:endParaRPr lang="en-US" sz="1100" dirty="0">
-                        <a:latin typeface="Calibri" charset="0"/>
-                        <a:ea typeface="Calibri" charset="0"/>
-                        <a:cs typeface="Calibri" charset="0"/>
-                      </a:endParaRPr>
-                    </a:p>
-                  </a:txBody>
-                  <a:tcPr marL="91440" marR="91440" marT="45720" marB="45720" anchor="ctr">
-                    <a:lnL w="0" cap="flat" cmpd="sng" algn="ctr">
-                      <a:noFill/>
-                    </a:lnL>
-                    <a:lnR w="0" cap="flat" cmpd="sng" algn="ctr">
-                      <a:noFill/>
-                    </a:lnR>
-                    <a:lnT w="0" cap="flat" cmpd="sng" algn="ctr">
-                      <a:noFill/>
-                    </a:lnT>
-                    <a:lnB w="3175" cap="flat" cmpd="sng" algn="ctr">
-                      <a:solidFill>
-                        <a:srgbClr val="D0D8E8"/>
-                      </a:solidFill>
-                      <a:prstDash val="solid"/>
-                      <a:round/>
-                      <a:headEnd type="none" w="med" len="med"/>
-                      <a:tailEnd type="none" w="med" len="med"/>
-                    </a:lnB>
-                    <a:solidFill>
-                      <a:srgbClr val="F5F7FA"/>
-                    </a:solidFill>
-                  </a:tcPr>
-                </a:tc>
-                <a:tc>
-                  <a:txBody>
-                    <a:bodyPr/>
-                    <a:lstStyle/>
-                    <a:p>
-                      <a:pPr algn="ctr" indent="0" marL="0">
-                        <a:buNone/>
-                      </a:pPr>
-                      <a:r>
-                        <a:rPr lang="en-US" sz="1100" dirty="0">
-                          <a:solidFill>
-                            <a:srgbClr val="334155"/>
-                          </a:solidFill>
-                          <a:latin typeface="Consolas" pitchFamily="34" charset="0"/>
-                          <a:ea typeface="Consolas" pitchFamily="34" charset="-122"/>
-                          <a:cs typeface="Consolas" pitchFamily="34" charset="-120"/>
-                        </a:rPr>
-                        <a:t>Required to bid competitively in all auctions</a:t>
-                      </a:r>
-                      <a:endParaRPr lang="en-US" sz="1100" dirty="0">
-                        <a:latin typeface="Consolas" charset="0"/>
-                        <a:ea typeface="Consolas" charset="0"/>
-                        <a:cs typeface="Consolas" charset="0"/>
-                      </a:endParaRPr>
-                    </a:p>
-                  </a:txBody>
-                  <a:tcPr marL="91440" marR="91440" marT="45720" marB="45720" anchor="ctr">
-                    <a:lnL w="0" cap="flat" cmpd="sng" algn="ctr">
-                      <a:noFill/>
-                    </a:lnL>
-                    <a:lnR w="0" cap="flat" cmpd="sng" algn="ctr">
-                      <a:noFill/>
-                    </a:lnR>
-                    <a:lnT w="0" cap="flat" cmpd="sng" algn="ctr">
-                      <a:noFill/>
-                    </a:lnT>
-                    <a:lnB w="3175" cap="flat" cmpd="sng" algn="ctr">
-                      <a:solidFill>
-                        <a:srgbClr val="D0D8E8"/>
-                      </a:solidFill>
-                      <a:prstDash val="solid"/>
-                      <a:round/>
-                      <a:headEnd type="none" w="med" len="med"/>
-                      <a:tailEnd type="none" w="med" len="med"/>
-                    </a:lnB>
-                    <a:solidFill>
-                      <a:srgbClr val="F5F7FA"/>
-                    </a:solidFill>
-                  </a:tcPr>
-                </a:tc>
-                <a:tc>
-                  <a:txBody>
-                    <a:bodyPr/>
-                    <a:lstStyle/>
-                    <a:p>
-                      <a:pPr algn="ctr" indent="0" marL="0">
-                        <a:buNone/>
-                      </a:pPr>
-                      <a:r>
-                        <a:rPr lang="en-US" sz="1100" dirty="0">
-                          <a:solidFill>
-                            <a:srgbClr val="334155"/>
-                          </a:solidFill>
-                          <a:latin typeface="Consolas" pitchFamily="34" charset="0"/>
-                          <a:ea typeface="Consolas" pitchFamily="34" charset="-122"/>
-                          <a:cs typeface="Consolas" pitchFamily="34" charset="-120"/>
-                        </a:rPr>
-                        <a:t>Same — required competitive participation</a:t>
+                        <a:t>Narrower — large bids win at bid</a:t>
                       </a:r>
                       <a:endParaRPr lang="en-US" sz="1100" dirty="0">
                         <a:latin typeface="Consolas" charset="0"/>
@@ -34700,8 +36203,8 @@
         </p:nvSpPr>
         <p:spPr>
           <a:xfrm>
-            <a:off x="320040" y="3566160"/>
-            <a:ext cx="8503920" cy="777240"/>
+            <a:off x="320040" y="3246120"/>
+            <a:ext cx="8503920" cy="1097280"/>
           </a:xfrm>
           <a:prstGeom prst="rect">
             <a:avLst/>
@@ -34725,7 +36228,7 @@
         </p:nvSpPr>
         <p:spPr>
           <a:xfrm>
-            <a:off x="457200" y="3611880"/>
+            <a:off x="457200" y="3291840"/>
             <a:ext cx="8229600" cy="256032"/>
           </a:xfrm>
           <a:prstGeom prst="rect">
@@ -34753,7 +36256,7 @@
                 <a:ea typeface="Trebuchet MS" pitchFamily="34" charset="-122"/>
                 <a:cs typeface="Trebuchet MS" pitchFamily="34" charset="-120"/>
               </a:rPr>
-              <a:t>CFA LM 5 — MAS 30-YEAR SGS AUCTION · 21 SEP 2021</a:t>
+              <a:t>CFA LM 5 EXHIBIT 2 — MAS 30-YEAR SGS AUCTION, 21 SEP 2021</a:t>
             </a:r>
             <a:endParaRPr lang="en-US" sz="1100" dirty="0"/>
           </a:p>
@@ -34767,7 +36270,7 @@
         </p:nvSpPr>
         <p:spPr>
           <a:xfrm>
-            <a:off x="457200" y="3904488"/>
+            <a:off x="457200" y="3584448"/>
             <a:ext cx="8229600" cy="457200"/>
           </a:xfrm>
           <a:prstGeom prst="rect">
@@ -34795,7 +36298,7 @@
                 <a:ea typeface="Calibri" pitchFamily="34" charset="-122"/>
                 <a:cs typeface="Calibri" pitchFamily="34" charset="-120"/>
               </a:rPr>
-              <a:t>SGD 2.6bn offered; SGD 4.1bn of bids received (1.58× cover). Cut-off yield 1.95%, median 1.89%, average 1.84%.</a:t>
+              <a:t>SGD 2.6bn offered, SGD 4.1bn bid (1.58× cover). Cut-off 1.95% / 98.303; median 1.89%; average 1.84%.</a:t>
             </a:r>
             <a:endParaRPr lang="en-US" sz="1200" dirty="0"/>
           </a:p>
@@ -34857,7 +36360,7 @@
                 <a:ea typeface="Consolas" pitchFamily="34" charset="-122"/>
                 <a:cs typeface="Consolas" pitchFamily="34" charset="-120"/>
               </a:rPr>
-              <a:t>Coupon set at cut-off rounded DOWN to nearest 0.125% → 1.875%. Cut-off price 98.303 → all winning bidders pay this.</a:t>
+              <a:t>Coupon = cut-off rounded down to nearest 0.125% = 1.875%; all winners pay 98.303</a:t>
             </a:r>
             <a:endParaRPr lang="en-US" sz="1150" dirty="0"/>
           </a:p>
@@ -34964,7 +36467,7 @@
                 <a:ea typeface="Trebuchet MS" pitchFamily="34" charset="-122"/>
                 <a:cs typeface="Trebuchet MS" pitchFamily="34" charset="-120"/>
               </a:rPr>
-              <a:t>Primary dealers win the auction; central banks, foreign reserves, and regulated institutions buy "non-economically" in the secondary market — it's why Treasury yields sit below credit curves</a:t>
+              <a:t>Primary dealers must bid competitively at every auction, and much of the demand behind them is "non-economic" — which is why sovereign yields sit below credit curves</a:t>
             </a:r>
             <a:endParaRPr lang="en-US" sz="1600" dirty="0"/>
           </a:p>
@@ -35068,7 +36571,7 @@
                 <a:ea typeface="Calibri" pitchFamily="34" charset="-122"/>
                 <a:cs typeface="Calibri" pitchFamily="34" charset="-120"/>
               </a:rPr>
-              <a:t>Source: CFA Institute, Curriculum Vol 6, Learning Module 5, "Sovereign Debt Issuance and Trading", pp. 117–118.</a:t>
+              <a:t>Source: CFA Institute, Curriculum Vol 6, Learning Module 5, primary dealers, secondary sovereign trading and reserve currencies, p. 117.</a:t>
             </a:r>
             <a:endParaRPr lang="en-US" sz="750" dirty="0"/>
           </a:p>
@@ -35110,7 +36613,7 @@
                 <a:ea typeface="Calibri" pitchFamily="34" charset="-122"/>
                 <a:cs typeface="Calibri" pitchFamily="34" charset="-120"/>
               </a:rPr>
-              <a:t>The non-economic bid is structurally large and persistent — it is part of what makes the "default-risk-free" yield genuinely low, and drives the liquidity premium of on-the-run sovereigns.</a:t>
+              <a:t>This bid is structural and persistent. It is a large part of why the "default-risk-free" yield is genuinely low, and why on-the-run issues carry a liquidity premium.</a:t>
             </a:r>
             <a:endParaRPr lang="en-US" sz="1300" dirty="0"/>
           </a:p>
@@ -35211,7 +36714,7 @@
                           <a:ea typeface="Trebuchet MS" pitchFamily="34" charset="-122"/>
                           <a:cs typeface="Trebuchet MS" pitchFamily="34" charset="-120"/>
                         </a:rPr>
-                        <a:t>Motive</a:t>
+                        <a:t>Why they hold it</a:t>
                       </a:r>
                       <a:endParaRPr lang="en-US" sz="1100" dirty="0">
                         <a:latin typeface="Trebuchet MS" charset="0"/>
@@ -35261,7 +36764,7 @@
                           <a:ea typeface="Trebuchet MS" pitchFamily="34" charset="-122"/>
                           <a:cs typeface="Trebuchet MS" pitchFamily="34" charset="-120"/>
                         </a:rPr>
-                        <a:t>Why "non-economic"</a:t>
+                        <a:t>Nature of the bid</a:t>
                       </a:r>
                       <a:endParaRPr lang="en-US" sz="1100" dirty="0">
                         <a:latin typeface="Trebuchet MS" charset="0"/>
@@ -35313,7 +36816,7 @@
                           <a:ea typeface="Calibri" pitchFamily="34" charset="-122"/>
                           <a:cs typeface="Calibri" pitchFamily="34" charset="-120"/>
                         </a:rPr>
-                        <a:t>Central bank (domestic)</a:t>
+                        <a:t>Primary dealers</a:t>
                       </a:r>
                       <a:endParaRPr lang="en-US" sz="1100" dirty="0">
                         <a:latin typeface="Calibri" charset="0"/>
@@ -35363,7 +36866,7 @@
                           <a:ea typeface="Consolas" pitchFamily="34" charset="-122"/>
                           <a:cs typeface="Consolas" pitchFamily="34" charset="-120"/>
                         </a:rPr>
-                        <a:t>Conduct monetary policy; OMO, repo, QE</a:t>
+                        <a:t>Must bid in every auction; the CB's OMO counterparty</a:t>
                       </a:r>
                       <a:endParaRPr lang="en-US" sz="1100" dirty="0">
                         <a:latin typeface="Consolas" charset="0"/>
@@ -35413,7 +36916,7 @@
                           <a:ea typeface="Consolas" pitchFamily="34" charset="-122"/>
                           <a:cs typeface="Consolas" pitchFamily="34" charset="-120"/>
                         </a:rPr>
-                        <a:t>Policy target not return</a:t>
+                        <a:t>Obligation</a:t>
                       </a:r>
                       <a:endParaRPr lang="en-US" sz="1100" dirty="0">
                         <a:latin typeface="Consolas" charset="0"/>
@@ -35465,7 +36968,7 @@
                           <a:ea typeface="Calibri" pitchFamily="34" charset="-122"/>
                           <a:cs typeface="Calibri" pitchFamily="34" charset="-120"/>
                         </a:rPr>
-                        <a:t>Foreign central banks</a:t>
+                        <a:t>Domestic central bank</a:t>
                       </a:r>
                       <a:endParaRPr lang="en-US" sz="1100" dirty="0">
                         <a:latin typeface="Calibri" charset="0"/>
@@ -35515,7 +37018,7 @@
                           <a:ea typeface="Consolas" pitchFamily="34" charset="-122"/>
                           <a:cs typeface="Consolas" pitchFamily="34" charset="-120"/>
                         </a:rPr>
-                        <a:t>Hold FX reserves in reserve-currency sovereigns</a:t>
+                        <a:t>Conducts monetary policy — outright buys, repo, QE</a:t>
                       </a:r>
                       <a:endParaRPr lang="en-US" sz="1100" dirty="0">
                         <a:latin typeface="Consolas" charset="0"/>
@@ -35565,7 +37068,7 @@
                           <a:ea typeface="Consolas" pitchFamily="34" charset="-122"/>
                           <a:cs typeface="Consolas" pitchFamily="34" charset="-120"/>
                         </a:rPr>
-                        <a:t>Reserve asset not trade</a:t>
+                        <a:t>Policy, not return</a:t>
                       </a:r>
                       <a:endParaRPr lang="en-US" sz="1100" dirty="0">
                         <a:latin typeface="Consolas" charset="0"/>
@@ -35617,7 +37120,7 @@
                           <a:ea typeface="Calibri" pitchFamily="34" charset="-122"/>
                           <a:cs typeface="Calibri" pitchFamily="34" charset="-120"/>
                         </a:rPr>
-                        <a:t>State &amp; local governments</a:t>
+                        <a:t>Foreign central banks</a:t>
                       </a:r>
                       <a:endParaRPr lang="en-US" sz="1100" dirty="0">
                         <a:latin typeface="Calibri" charset="0"/>
@@ -35667,7 +37170,7 @@
                           <a:ea typeface="Consolas" pitchFamily="34" charset="-122"/>
                           <a:cs typeface="Consolas" pitchFamily="34" charset="-120"/>
                         </a:rPr>
-                        <a:t>Investment-policy restrictions favour sovereigns</a:t>
+                        <a:t>Hold FX reserves in reserve-currency sovereigns</a:t>
                       </a:r>
                       <a:endParaRPr lang="en-US" sz="1100" dirty="0">
                         <a:latin typeface="Consolas" charset="0"/>
@@ -35717,7 +37220,7 @@
                           <a:ea typeface="Consolas" pitchFamily="34" charset="-122"/>
                           <a:cs typeface="Consolas" pitchFamily="34" charset="-120"/>
                         </a:rPr>
-                        <a:t>Regulatory constraint</a:t>
+                        <a:t>Reserve holding</a:t>
                       </a:r>
                       <a:endParaRPr lang="en-US" sz="1100" dirty="0">
                         <a:latin typeface="Consolas" charset="0"/>
@@ -35769,7 +37272,7 @@
                           <a:ea typeface="Calibri" pitchFamily="34" charset="-122"/>
                           <a:cs typeface="Calibri" pitchFamily="34" charset="-120"/>
                         </a:rPr>
-                        <a:t>Banks</a:t>
+                        <a:t>State and local governments</a:t>
                       </a:r>
                       <a:endParaRPr lang="en-US" sz="1100" dirty="0">
                         <a:latin typeface="Calibri" charset="0"/>
@@ -35819,7 +37322,7 @@
                           <a:ea typeface="Consolas" pitchFamily="34" charset="-122"/>
                           <a:cs typeface="Consolas" pitchFamily="34" charset="-120"/>
                         </a:rPr>
-                        <a:t>Meet LCR / HQLA; capital charge 0% under Basel</a:t>
+                        <a:t>Face restrictions on holding other securities</a:t>
                       </a:r>
                       <a:endParaRPr lang="en-US" sz="1100" dirty="0">
                         <a:latin typeface="Consolas" charset="0"/>
@@ -35869,7 +37372,7 @@
                           <a:ea typeface="Consolas" pitchFamily="34" charset="-122"/>
                           <a:cs typeface="Consolas" pitchFamily="34" charset="-120"/>
                         </a:rPr>
-                        <a:t>Regulatory preference</a:t>
+                        <a:t>Rule-constrained</a:t>
                       </a:r>
                       <a:endParaRPr lang="en-US" sz="1100" dirty="0">
                         <a:latin typeface="Consolas" charset="0"/>
@@ -35921,7 +37424,7 @@
                           <a:ea typeface="Calibri" pitchFamily="34" charset="-122"/>
                           <a:cs typeface="Calibri" pitchFamily="34" charset="-120"/>
                         </a:rPr>
-                        <a:t>Insurance companies</a:t>
+                        <a:t>Banks</a:t>
                       </a:r>
                       <a:endParaRPr lang="en-US" sz="1100" dirty="0">
                         <a:latin typeface="Calibri" charset="0"/>
@@ -35971,7 +37474,7 @@
                           <a:ea typeface="Consolas" pitchFamily="34" charset="-122"/>
                           <a:cs typeface="Consolas" pitchFamily="34" charset="-120"/>
                         </a:rPr>
-                        <a:t>ALM liability matching; capital relief on sovereigns</a:t>
+                        <a:t>Must hold, or are incentivised to hold, for regulation</a:t>
                       </a:r>
                       <a:endParaRPr lang="en-US" sz="1100" dirty="0">
                         <a:latin typeface="Consolas" charset="0"/>
@@ -36021,7 +37524,7 @@
                           <a:ea typeface="Consolas" pitchFamily="34" charset="-122"/>
                           <a:cs typeface="Consolas" pitchFamily="34" charset="-120"/>
                         </a:rPr>
-                        <a:t>Regulatory incentive</a:t>
+                        <a:t>Regulation</a:t>
                       </a:r>
                       <a:endParaRPr lang="en-US" sz="1100" dirty="0">
                         <a:latin typeface="Consolas" charset="0"/>
@@ -36055,6 +37558,158 @@
                   </a:tcPr>
                 </a:tc>
               </a:tr>
+              <a:tr h="274320">
+                <a:tc>
+                  <a:txBody>
+                    <a:bodyPr/>
+                    <a:lstStyle/>
+                    <a:p>
+                      <a:pPr algn="l" indent="0" marL="0">
+                        <a:buNone/>
+                      </a:pPr>
+                      <a:r>
+                        <a:rPr lang="en-US" sz="1100" dirty="0">
+                          <a:solidFill>
+                            <a:srgbClr val="334155"/>
+                          </a:solidFill>
+                          <a:latin typeface="Calibri" pitchFamily="34" charset="0"/>
+                          <a:ea typeface="Calibri" pitchFamily="34" charset="-122"/>
+                          <a:cs typeface="Calibri" pitchFamily="34" charset="-120"/>
+                        </a:rPr>
+                        <a:t>Insurance companies</a:t>
+                      </a:r>
+                      <a:endParaRPr lang="en-US" sz="1100" dirty="0">
+                        <a:latin typeface="Calibri" charset="0"/>
+                        <a:ea typeface="Calibri" charset="0"/>
+                        <a:cs typeface="Calibri" charset="0"/>
+                      </a:endParaRPr>
+                    </a:p>
+                  </a:txBody>
+                  <a:tcPr marL="91440" marR="91440" marT="45720" marB="45720" anchor="ctr">
+                    <a:lnL w="0" cap="flat" cmpd="sng" algn="ctr">
+                      <a:noFill/>
+                    </a:lnL>
+                    <a:lnR w="0" cap="flat" cmpd="sng" algn="ctr">
+                      <a:noFill/>
+                    </a:lnR>
+                    <a:lnT w="0" cap="flat" cmpd="sng" algn="ctr">
+                      <a:noFill/>
+                    </a:lnT>
+                    <a:lnB w="3175" cap="flat" cmpd="sng" algn="ctr">
+                      <a:solidFill>
+                        <a:srgbClr val="D0D8E8"/>
+                      </a:solidFill>
+                      <a:prstDash val="solid"/>
+                      <a:round/>
+                      <a:headEnd type="none" w="med" len="med"/>
+                      <a:tailEnd type="none" w="med" len="med"/>
+                    </a:lnB>
+                    <a:solidFill>
+                      <a:srgbClr val="F5F7FA"/>
+                    </a:solidFill>
+                  </a:tcPr>
+                </a:tc>
+                <a:tc>
+                  <a:txBody>
+                    <a:bodyPr/>
+                    <a:lstStyle/>
+                    <a:p>
+                      <a:pPr algn="ctr" indent="0" marL="0">
+                        <a:buNone/>
+                      </a:pPr>
+                      <a:r>
+                        <a:rPr lang="en-US" sz="1100" dirty="0">
+                          <a:solidFill>
+                            <a:srgbClr val="334155"/>
+                          </a:solidFill>
+                          <a:latin typeface="Consolas" pitchFamily="34" charset="0"/>
+                          <a:ea typeface="Consolas" pitchFamily="34" charset="-122"/>
+                          <a:cs typeface="Consolas" pitchFamily="34" charset="-120"/>
+                        </a:rPr>
+                        <a:t>Same regulatory pull, plus liability matching</a:t>
+                      </a:r>
+                      <a:endParaRPr lang="en-US" sz="1100" dirty="0">
+                        <a:latin typeface="Consolas" charset="0"/>
+                        <a:ea typeface="Consolas" charset="0"/>
+                        <a:cs typeface="Consolas" charset="0"/>
+                      </a:endParaRPr>
+                    </a:p>
+                  </a:txBody>
+                  <a:tcPr marL="91440" marR="91440" marT="45720" marB="45720" anchor="ctr">
+                    <a:lnL w="0" cap="flat" cmpd="sng" algn="ctr">
+                      <a:noFill/>
+                    </a:lnL>
+                    <a:lnR w="0" cap="flat" cmpd="sng" algn="ctr">
+                      <a:noFill/>
+                    </a:lnR>
+                    <a:lnT w="0" cap="flat" cmpd="sng" algn="ctr">
+                      <a:noFill/>
+                    </a:lnT>
+                    <a:lnB w="3175" cap="flat" cmpd="sng" algn="ctr">
+                      <a:solidFill>
+                        <a:srgbClr val="D0D8E8"/>
+                      </a:solidFill>
+                      <a:prstDash val="solid"/>
+                      <a:round/>
+                      <a:headEnd type="none" w="med" len="med"/>
+                      <a:tailEnd type="none" w="med" len="med"/>
+                    </a:lnB>
+                    <a:solidFill>
+                      <a:srgbClr val="F5F7FA"/>
+                    </a:solidFill>
+                  </a:tcPr>
+                </a:tc>
+                <a:tc>
+                  <a:txBody>
+                    <a:bodyPr/>
+                    <a:lstStyle/>
+                    <a:p>
+                      <a:pPr algn="ctr" indent="0" marL="0">
+                        <a:buNone/>
+                      </a:pPr>
+                      <a:r>
+                        <a:rPr lang="en-US" sz="1100" dirty="0">
+                          <a:solidFill>
+                            <a:srgbClr val="334155"/>
+                          </a:solidFill>
+                          <a:latin typeface="Consolas" pitchFamily="34" charset="0"/>
+                          <a:ea typeface="Consolas" pitchFamily="34" charset="-122"/>
+                          <a:cs typeface="Consolas" pitchFamily="34" charset="-120"/>
+                        </a:rPr>
+                        <a:t>Regulation + ALM</a:t>
+                      </a:r>
+                      <a:endParaRPr lang="en-US" sz="1100" dirty="0">
+                        <a:latin typeface="Consolas" charset="0"/>
+                        <a:ea typeface="Consolas" charset="0"/>
+                        <a:cs typeface="Consolas" charset="0"/>
+                      </a:endParaRPr>
+                    </a:p>
+                  </a:txBody>
+                  <a:tcPr marL="91440" marR="91440" marT="45720" marB="45720" anchor="ctr">
+                    <a:lnL w="0" cap="flat" cmpd="sng" algn="ctr">
+                      <a:noFill/>
+                    </a:lnL>
+                    <a:lnR w="0" cap="flat" cmpd="sng" algn="ctr">
+                      <a:noFill/>
+                    </a:lnR>
+                    <a:lnT w="0" cap="flat" cmpd="sng" algn="ctr">
+                      <a:noFill/>
+                    </a:lnT>
+                    <a:lnB w="3175" cap="flat" cmpd="sng" algn="ctr">
+                      <a:solidFill>
+                        <a:srgbClr val="D0D8E8"/>
+                      </a:solidFill>
+                      <a:prstDash val="solid"/>
+                      <a:round/>
+                      <a:headEnd type="none" w="med" len="med"/>
+                      <a:tailEnd type="none" w="med" len="med"/>
+                    </a:lnB>
+                    <a:solidFill>
+                      <a:srgbClr val="F5F7FA"/>
+                    </a:solidFill>
+                  </a:tcPr>
+                </a:tc>
+              </a:tr>
             </a:tbl>
           </a:graphicData>
         </a:graphic>
@@ -36067,8 +37722,8 @@
         </p:nvSpPr>
         <p:spPr>
           <a:xfrm>
-            <a:off x="320040" y="3429000"/>
-            <a:ext cx="8503920" cy="914400"/>
+            <a:off x="320040" y="3246120"/>
+            <a:ext cx="8503920" cy="1097280"/>
           </a:xfrm>
           <a:prstGeom prst="rect">
             <a:avLst/>
@@ -36087,8 +37742,8 @@
         </p:nvSpPr>
         <p:spPr>
           <a:xfrm>
-            <a:off x="320040" y="3429000"/>
-            <a:ext cx="73152" cy="914400"/>
+            <a:off x="320040" y="3246120"/>
+            <a:ext cx="73152" cy="1097280"/>
           </a:xfrm>
           <a:prstGeom prst="rect">
             <a:avLst/>
@@ -36107,7 +37762,7 @@
         </p:nvSpPr>
         <p:spPr>
           <a:xfrm>
-            <a:off x="457200" y="3474720"/>
+            <a:off x="457200" y="3291840"/>
             <a:ext cx="8275320" cy="256032"/>
           </a:xfrm>
           <a:prstGeom prst="rect">
@@ -36135,7 +37790,7 @@
                 <a:ea typeface="Trebuchet MS" pitchFamily="34" charset="-122"/>
                 <a:cs typeface="Trebuchet MS" pitchFamily="34" charset="-120"/>
               </a:rPr>
-              <a:t>USD AS GLOBAL RESERVE CURRENCY</a:t>
+              <a:t>THE DOLLAR'S SHARE OF THE SYSTEM</a:t>
             </a:r>
             <a:endParaRPr lang="en-US" sz="1100" dirty="0"/>
           </a:p>
@@ -36149,8 +37804,8 @@
         </p:nvSpPr>
         <p:spPr>
           <a:xfrm>
-            <a:off x="457200" y="3749040"/>
-            <a:ext cx="8275320" cy="548640"/>
+            <a:off x="457200" y="3566160"/>
+            <a:ext cx="8275320" cy="731520"/>
           </a:xfrm>
           <a:prstGeom prst="rect">
             <a:avLst/>
@@ -36177,7 +37832,7 @@
                 <a:ea typeface="Calibri" pitchFamily="34" charset="-122"/>
                 <a:cs typeface="Calibri" pitchFamily="34" charset="-120"/>
               </a:rPr>
-              <a:t>USD ≈ 60% of global FX reserves · ≈ 50% of international trade · ≈ 50% of global debt securities · ≈ 90% of FX-market transactions. EUR, JPY, GBP, CHF, AUD, CNY also serve as reserve currencies. This structural demand compresses US Treasury yields below where they would trade on pure credit/rate fundamentals — the "exorbitant privilege".</a:t>
+              <a:t>The US dollar is about 60% of global FX reserves and roughly half of international trade, international loans and global debt securities, and is on one side of nearly 90% of FX transactions. The euro, yen, sterling, Swiss franc, Australian dollar and renminbi are also reserve currencies. This structural demand pulls sovereign yields below where credit and rate fundamentals alone would put them.</a:t>
             </a:r>
             <a:endParaRPr lang="en-US" sz="1200" dirty="0"/>
           </a:p>
@@ -36284,7 +37939,7 @@
                 <a:ea typeface="Trebuchet MS" pitchFamily="34" charset="-122"/>
                 <a:cs typeface="Trebuchet MS" pitchFamily="34" charset="-120"/>
               </a:rPr>
-              <a:t>Non-sovereign issuers split cleanly into three families — agencies backed by sovereigns, local authorities backed by taxes/revenues, and supranationals backed by member states</a:t>
+              <a:t>Non-sovereign issuers fall into three families — agencies backed by a sovereign, local authorities backed by taxes or project revenues, and supranationals backed by member states</a:t>
             </a:r>
             <a:endParaRPr lang="en-US" sz="1600" dirty="0"/>
           </a:p>
@@ -36388,7 +38043,7 @@
                 <a:ea typeface="Calibri" pitchFamily="34" charset="-122"/>
                 <a:cs typeface="Calibri" pitchFamily="34" charset="-120"/>
               </a:rPr>
-              <a:t>Source: CFA Institute, Curriculum Vol 6, Learning Module 5, "Non-Sovereign, Quasi-Government, Supranational Agency Debt", pp. 118–122.</a:t>
+              <a:t>Source: CFA Institute, Curriculum Vol 6, Learning Module 5, "Non-Sovereign, Quasi-Government, and Supranational Agency Debt", pp. 118–121.</a:t>
             </a:r>
             <a:endParaRPr lang="en-US" sz="750" dirty="0"/>
           </a:p>
@@ -36430,7 +38085,7 @@
                 <a:ea typeface="Calibri" pitchFamily="34" charset="-122"/>
                 <a:cs typeface="Calibri" pitchFamily="34" charset="-120"/>
               </a:rPr>
-              <a:t>All three sit between pure sovereign and pure corporate credit — with very different primary and secondary repayment sources.</a:t>
+              <a:t>All three sit between pure sovereign and pure corporate credit — and their credit quality is driven entirely by how predictable and stable the repayment source is.</a:t>
             </a:r>
             <a:endParaRPr lang="en-US" sz="1300" dirty="0"/>
           </a:p>
@@ -36459,10 +38114,10 @@
             <a:tbl>
               <a:tblPr/>
               <a:tblGrid>
-                <a:gridCol w="2103120"/>
-                <a:gridCol w="3017520"/>
-                <a:gridCol w="1920240"/>
-                <a:gridCol w="1463040"/>
+                <a:gridCol w="2011680"/>
+                <a:gridCol w="2926080"/>
+                <a:gridCol w="2011680"/>
+                <a:gridCol w="1554480"/>
               </a:tblGrid>
               <a:tr h="274320">
                 <a:tc>
@@ -36582,7 +38237,7 @@
                           <a:ea typeface="Trebuchet MS" pitchFamily="34" charset="-122"/>
                           <a:cs typeface="Trebuchet MS" pitchFamily="34" charset="-120"/>
                         </a:rPr>
-                        <a:t>Secondary source</a:t>
+                        <a:t>Support behind it</a:t>
                       </a:r>
                       <a:endParaRPr lang="en-US" sz="1100" dirty="0">
                         <a:latin typeface="Trebuchet MS" charset="0"/>
@@ -36734,7 +38389,7 @@
                           <a:ea typeface="Consolas" pitchFamily="34" charset="-122"/>
                           <a:cs typeface="Consolas" pitchFamily="34" charset="-120"/>
                         </a:rPr>
-                        <a:t>Cash flows from agency operations / guaranty fees</a:t>
+                        <a:t>Agency operations / guaranty fees</a:t>
                       </a:r>
                       <a:endParaRPr lang="en-US" sz="1100" dirty="0">
                         <a:latin typeface="Consolas" charset="0"/>
@@ -36784,7 +38439,7 @@
                           <a:ea typeface="Consolas" pitchFamily="34" charset="-122"/>
                           <a:cs typeface="Consolas" pitchFamily="34" charset="-120"/>
                         </a:rPr>
-                        <a:t>Sovereign government backing</a:t>
+                        <a:t>Sovereign backing</a:t>
                       </a:r>
                       <a:endParaRPr lang="en-US" sz="1100" dirty="0">
                         <a:latin typeface="Consolas" charset="0"/>
@@ -36986,7 +38641,7 @@
                           <a:ea typeface="Consolas" pitchFamily="34" charset="-122"/>
                           <a:cs typeface="Consolas" pitchFamily="34" charset="-120"/>
                         </a:rPr>
-                        <a:t>Broader regional tax base</a:t>
+                        <a:t>Tax base only</a:t>
                       </a:r>
                       <a:endParaRPr lang="en-US" sz="1100" dirty="0">
                         <a:latin typeface="Consolas" charset="0"/>
@@ -37036,7 +38691,7 @@
                           <a:ea typeface="Consolas" pitchFamily="34" charset="-122"/>
                           <a:cs typeface="Consolas" pitchFamily="34" charset="-120"/>
                         </a:rPr>
-                        <a:t>Province of Ontario</a:t>
+                        <a:t>Ontario</a:t>
                       </a:r>
                       <a:endParaRPr lang="en-US" sz="1100" dirty="0">
                         <a:latin typeface="Consolas" charset="0"/>
@@ -37138,7 +38793,7 @@
                           <a:ea typeface="Consolas" pitchFamily="34" charset="-122"/>
                           <a:cs typeface="Consolas" pitchFamily="34" charset="-120"/>
                         </a:rPr>
-                        <a:t>User fees / tolls from a specific project</a:t>
+                        <a:t>User fees / tolls from the project</a:t>
                       </a:r>
                       <a:endParaRPr lang="en-US" sz="1100" dirty="0">
                         <a:latin typeface="Consolas" charset="0"/>
@@ -37188,7 +38843,7 @@
                           <a:ea typeface="Consolas" pitchFamily="34" charset="-122"/>
                           <a:cs typeface="Consolas" pitchFamily="34" charset="-120"/>
                         </a:rPr>
-                        <a:t>Project-level reserves</a:t>
+                        <a:t>Project only</a:t>
                       </a:r>
                       <a:endParaRPr lang="en-US" sz="1100" dirty="0">
                         <a:latin typeface="Consolas" charset="0"/>
@@ -37238,7 +38893,7 @@
                           <a:ea typeface="Consolas" pitchFamily="34" charset="-122"/>
                           <a:cs typeface="Consolas" pitchFamily="34" charset="-120"/>
                         </a:rPr>
-                        <a:t>Toll-road authority</a:t>
+                        <a:t>Toll authority</a:t>
                       </a:r>
                       <a:endParaRPr lang="en-US" sz="1100" dirty="0">
                         <a:latin typeface="Consolas" charset="0"/>
@@ -37290,7 +38945,7 @@
                           <a:ea typeface="Calibri" pitchFamily="34" charset="-122"/>
                           <a:cs typeface="Calibri" pitchFamily="34" charset="-120"/>
                         </a:rPr>
-                        <a:t>Supranational</a:t>
+                        <a:t>Quasi-gov / supra JV</a:t>
                       </a:r>
                       <a:endParaRPr lang="en-US" sz="1100" dirty="0">
                         <a:latin typeface="Calibri" charset="0"/>
@@ -37340,7 +38995,7 @@
                           <a:ea typeface="Consolas" pitchFamily="34" charset="-122"/>
                           <a:cs typeface="Consolas" pitchFamily="34" charset="-120"/>
                         </a:rPr>
-                        <a:t>Member-state capital + loan repayments</a:t>
+                        <a:t>Project cash flows</a:t>
                       </a:r>
                       <a:endParaRPr lang="en-US" sz="1100" dirty="0">
                         <a:latin typeface="Consolas" charset="0"/>
@@ -37390,7 +39045,7 @@
                           <a:ea typeface="Consolas" pitchFamily="34" charset="-122"/>
                           <a:cs typeface="Consolas" pitchFamily="34" charset="-120"/>
                         </a:rPr>
-                        <a:t>Implicit/explicit state backing</a:t>
+                        <a:t>Sponsor consortium</a:t>
                       </a:r>
                       <a:endParaRPr lang="en-US" sz="1100" dirty="0">
                         <a:latin typeface="Consolas" charset="0"/>
@@ -37440,7 +39095,7 @@
                           <a:ea typeface="Consolas" pitchFamily="34" charset="-122"/>
                           <a:cs typeface="Consolas" pitchFamily="34" charset="-120"/>
                         </a:rPr>
-                        <a:t>World Bank, IMF, ADB</a:t>
+                        <a:t>PT IIF</a:t>
                       </a:r>
                       <a:endParaRPr lang="en-US" sz="1100" dirty="0">
                         <a:latin typeface="Consolas" charset="0"/>
@@ -37474,6 +39129,208 @@
                   </a:tcPr>
                 </a:tc>
               </a:tr>
+              <a:tr h="274320">
+                <a:tc>
+                  <a:txBody>
+                    <a:bodyPr/>
+                    <a:lstStyle/>
+                    <a:p>
+                      <a:pPr algn="l" indent="0" marL="0">
+                        <a:buNone/>
+                      </a:pPr>
+                      <a:r>
+                        <a:rPr lang="en-US" sz="1100" dirty="0">
+                          <a:solidFill>
+                            <a:srgbClr val="334155"/>
+                          </a:solidFill>
+                          <a:latin typeface="Calibri" pitchFamily="34" charset="0"/>
+                          <a:ea typeface="Calibri" pitchFamily="34" charset="-122"/>
+                          <a:cs typeface="Calibri" pitchFamily="34" charset="-120"/>
+                        </a:rPr>
+                        <a:t>Supranational</a:t>
+                      </a:r>
+                      <a:endParaRPr lang="en-US" sz="1100" dirty="0">
+                        <a:latin typeface="Calibri" charset="0"/>
+                        <a:ea typeface="Calibri" charset="0"/>
+                        <a:cs typeface="Calibri" charset="0"/>
+                      </a:endParaRPr>
+                    </a:p>
+                  </a:txBody>
+                  <a:tcPr marL="91440" marR="91440" marT="45720" marB="45720" anchor="ctr">
+                    <a:lnL w="0" cap="flat" cmpd="sng" algn="ctr">
+                      <a:noFill/>
+                    </a:lnL>
+                    <a:lnR w="0" cap="flat" cmpd="sng" algn="ctr">
+                      <a:noFill/>
+                    </a:lnR>
+                    <a:lnT w="0" cap="flat" cmpd="sng" algn="ctr">
+                      <a:noFill/>
+                    </a:lnT>
+                    <a:lnB w="3175" cap="flat" cmpd="sng" algn="ctr">
+                      <a:solidFill>
+                        <a:srgbClr val="D0D8E8"/>
+                      </a:solidFill>
+                      <a:prstDash val="solid"/>
+                      <a:round/>
+                      <a:headEnd type="none" w="med" len="med"/>
+                      <a:tailEnd type="none" w="med" len="med"/>
+                    </a:lnB>
+                    <a:solidFill>
+                      <a:srgbClr val="FFFFFF"/>
+                    </a:solidFill>
+                  </a:tcPr>
+                </a:tc>
+                <a:tc>
+                  <a:txBody>
+                    <a:bodyPr/>
+                    <a:lstStyle/>
+                    <a:p>
+                      <a:pPr algn="ctr" indent="0" marL="0">
+                        <a:buNone/>
+                      </a:pPr>
+                      <a:r>
+                        <a:rPr lang="en-US" sz="1100" dirty="0">
+                          <a:solidFill>
+                            <a:srgbClr val="334155"/>
+                          </a:solidFill>
+                          <a:latin typeface="Consolas" pitchFamily="34" charset="0"/>
+                          <a:ea typeface="Consolas" pitchFamily="34" charset="-122"/>
+                          <a:cs typeface="Consolas" pitchFamily="34" charset="-120"/>
+                        </a:rPr>
+                        <a:t>Member capital and loan repayments</a:t>
+                      </a:r>
+                      <a:endParaRPr lang="en-US" sz="1100" dirty="0">
+                        <a:latin typeface="Consolas" charset="0"/>
+                        <a:ea typeface="Consolas" charset="0"/>
+                        <a:cs typeface="Consolas" charset="0"/>
+                      </a:endParaRPr>
+                    </a:p>
+                  </a:txBody>
+                  <a:tcPr marL="91440" marR="91440" marT="45720" marB="45720" anchor="ctr">
+                    <a:lnL w="0" cap="flat" cmpd="sng" algn="ctr">
+                      <a:noFill/>
+                    </a:lnL>
+                    <a:lnR w="0" cap="flat" cmpd="sng" algn="ctr">
+                      <a:noFill/>
+                    </a:lnR>
+                    <a:lnT w="0" cap="flat" cmpd="sng" algn="ctr">
+                      <a:noFill/>
+                    </a:lnT>
+                    <a:lnB w="3175" cap="flat" cmpd="sng" algn="ctr">
+                      <a:solidFill>
+                        <a:srgbClr val="D0D8E8"/>
+                      </a:solidFill>
+                      <a:prstDash val="solid"/>
+                      <a:round/>
+                      <a:headEnd type="none" w="med" len="med"/>
+                      <a:tailEnd type="none" w="med" len="med"/>
+                    </a:lnB>
+                    <a:solidFill>
+                      <a:srgbClr val="FFFFFF"/>
+                    </a:solidFill>
+                  </a:tcPr>
+                </a:tc>
+                <a:tc>
+                  <a:txBody>
+                    <a:bodyPr/>
+                    <a:lstStyle/>
+                    <a:p>
+                      <a:pPr algn="ctr" indent="0" marL="0">
+                        <a:buNone/>
+                      </a:pPr>
+                      <a:r>
+                        <a:rPr lang="en-US" sz="1100" dirty="0">
+                          <a:solidFill>
+                            <a:srgbClr val="334155"/>
+                          </a:solidFill>
+                          <a:latin typeface="Consolas" pitchFamily="34" charset="0"/>
+                          <a:ea typeface="Consolas" pitchFamily="34" charset="-122"/>
+                          <a:cs typeface="Consolas" pitchFamily="34" charset="-120"/>
+                        </a:rPr>
+                        <a:t>Member-state support</a:t>
+                      </a:r>
+                      <a:endParaRPr lang="en-US" sz="1100" dirty="0">
+                        <a:latin typeface="Consolas" charset="0"/>
+                        <a:ea typeface="Consolas" charset="0"/>
+                        <a:cs typeface="Consolas" charset="0"/>
+                      </a:endParaRPr>
+                    </a:p>
+                  </a:txBody>
+                  <a:tcPr marL="91440" marR="91440" marT="45720" marB="45720" anchor="ctr">
+                    <a:lnL w="0" cap="flat" cmpd="sng" algn="ctr">
+                      <a:noFill/>
+                    </a:lnL>
+                    <a:lnR w="0" cap="flat" cmpd="sng" algn="ctr">
+                      <a:noFill/>
+                    </a:lnR>
+                    <a:lnT w="0" cap="flat" cmpd="sng" algn="ctr">
+                      <a:noFill/>
+                    </a:lnT>
+                    <a:lnB w="3175" cap="flat" cmpd="sng" algn="ctr">
+                      <a:solidFill>
+                        <a:srgbClr val="D0D8E8"/>
+                      </a:solidFill>
+                      <a:prstDash val="solid"/>
+                      <a:round/>
+                      <a:headEnd type="none" w="med" len="med"/>
+                      <a:tailEnd type="none" w="med" len="med"/>
+                    </a:lnB>
+                    <a:solidFill>
+                      <a:srgbClr val="FFFFFF"/>
+                    </a:solidFill>
+                  </a:tcPr>
+                </a:tc>
+                <a:tc>
+                  <a:txBody>
+                    <a:bodyPr/>
+                    <a:lstStyle/>
+                    <a:p>
+                      <a:pPr algn="ctr" indent="0" marL="0">
+                        <a:buNone/>
+                      </a:pPr>
+                      <a:r>
+                        <a:rPr lang="en-US" sz="1100" dirty="0">
+                          <a:solidFill>
+                            <a:srgbClr val="334155"/>
+                          </a:solidFill>
+                          <a:latin typeface="Consolas" pitchFamily="34" charset="0"/>
+                          <a:ea typeface="Consolas" pitchFamily="34" charset="-122"/>
+                          <a:cs typeface="Consolas" pitchFamily="34" charset="-120"/>
+                        </a:rPr>
+                        <a:t>World Bank, ADB</a:t>
+                      </a:r>
+                      <a:endParaRPr lang="en-US" sz="1100" dirty="0">
+                        <a:latin typeface="Consolas" charset="0"/>
+                        <a:ea typeface="Consolas" charset="0"/>
+                        <a:cs typeface="Consolas" charset="0"/>
+                      </a:endParaRPr>
+                    </a:p>
+                  </a:txBody>
+                  <a:tcPr marL="91440" marR="91440" marT="45720" marB="45720" anchor="ctr">
+                    <a:lnL w="0" cap="flat" cmpd="sng" algn="ctr">
+                      <a:noFill/>
+                    </a:lnL>
+                    <a:lnR w="0" cap="flat" cmpd="sng" algn="ctr">
+                      <a:noFill/>
+                    </a:lnR>
+                    <a:lnT w="0" cap="flat" cmpd="sng" algn="ctr">
+                      <a:noFill/>
+                    </a:lnT>
+                    <a:lnB w="3175" cap="flat" cmpd="sng" algn="ctr">
+                      <a:solidFill>
+                        <a:srgbClr val="D0D8E8"/>
+                      </a:solidFill>
+                      <a:prstDash val="solid"/>
+                      <a:round/>
+                      <a:headEnd type="none" w="med" len="med"/>
+                      <a:tailEnd type="none" w="med" len="med"/>
+                    </a:lnB>
+                    <a:solidFill>
+                      <a:srgbClr val="FFFFFF"/>
+                    </a:solidFill>
+                  </a:tcPr>
+                </a:tc>
+              </a:tr>
             </a:tbl>
           </a:graphicData>
         </a:graphic>
@@ -37486,8 +39343,8 @@
         </p:nvSpPr>
         <p:spPr>
           <a:xfrm>
-            <a:off x="320040" y="3337560"/>
-            <a:ext cx="8503920" cy="1005840"/>
+            <a:off x="320040" y="3017520"/>
+            <a:ext cx="8503920" cy="1325880"/>
           </a:xfrm>
           <a:prstGeom prst="rect">
             <a:avLst/>
@@ -37506,8 +39363,8 @@
         </p:nvSpPr>
         <p:spPr>
           <a:xfrm>
-            <a:off x="320040" y="3337560"/>
-            <a:ext cx="73152" cy="1005840"/>
+            <a:off x="320040" y="3017520"/>
+            <a:ext cx="73152" cy="1325880"/>
           </a:xfrm>
           <a:prstGeom prst="rect">
             <a:avLst/>
@@ -37526,7 +39383,7 @@
         </p:nvSpPr>
         <p:spPr>
           <a:xfrm>
-            <a:off x="457200" y="3383280"/>
+            <a:off x="457200" y="3063240"/>
             <a:ext cx="8275320" cy="256032"/>
           </a:xfrm>
           <a:prstGeom prst="rect">
@@ -37554,7 +39411,7 @@
                 <a:ea typeface="Trebuchet MS" pitchFamily="34" charset="-122"/>
                 <a:cs typeface="Trebuchet MS" pitchFamily="34" charset="-120"/>
               </a:rPr>
-              <a:t>TWO WORKED EXAMPLES — ONTARIO GREEN BOND vs ADB GMTN</a:t>
+              <a:t>RANKING, AND TWO ISSUES WORTH KNOWING</a:t>
             </a:r>
             <a:endParaRPr lang="en-US" sz="1100" dirty="0"/>
           </a:p>
@@ -37568,8 +39425,8 @@
         </p:nvSpPr>
         <p:spPr>
           <a:xfrm>
-            <a:off x="457200" y="3657600"/>
-            <a:ext cx="8275320" cy="640080"/>
+            <a:off x="457200" y="3337560"/>
+            <a:ext cx="8275320" cy="960120"/>
           </a:xfrm>
           <a:prstGeom prst="rect">
             <a:avLst/>
@@ -37596,7 +39453,7 @@
                 <a:ea typeface="Calibri" pitchFamily="34" charset="-122"/>
                 <a:cs typeface="Calibri" pitchFamily="34" charset="-120"/>
               </a:rPr>
-              <a:t>Province of Ontario 1.55% 2029 CAD 2.75bn Global Green Bond — GO bond, repaid from Ontario taxes, proceeds ring-fenced to eligible green projects (clean transport, renewables, etc.).</a:t>
+              <a:t>Supranationals carry the HIGHEST credit quality of the three: member states share control and provide implicit and explicit support. Agencies borrow at a yield close to their sovereign guarantor, but neither AAHK nor Ginnie Mae gets the full sovereign liquidity premium.</a:t>
             </a:r>
             <a:endParaRPr lang="en-US" sz="1200" dirty="0"/>
           </a:p>
@@ -37619,7 +39476,7 @@
                 <a:ea typeface="Calibri" pitchFamily="34" charset="-122"/>
                 <a:cs typeface="Calibri" pitchFamily="34" charset="-120"/>
               </a:rPr>
-              <a:t>Asian Development Bank 7.80% 2034 Global MTN — supranational issued in IDR but payable in USD at spot FX on each payment date; investor assumes IDR risk in exchange for high IDR coupon.</a:t>
+              <a:t>Ontario 1.55% 2029, CAD 2.75bn Global Green Bond — a GO bond repaid from provincial taxes, with proceeds tracked to five eligible green sectors. ADB 7.80% 2034 Global MTN — principal fixed in IDR but paid in USD at a rate set two days before each payment date, so the investor keeps the currency risk.</a:t>
             </a:r>
             <a:endParaRPr lang="en-US" sz="1200" dirty="0"/>
           </a:p>
@@ -37850,7 +39707,7 @@
                 <a:ea typeface="Calibri" pitchFamily="34" charset="-122"/>
                 <a:cs typeface="Calibri" pitchFamily="34" charset="-120"/>
               </a:rPr>
-              <a:t>Six bond features fully specify any bond: issuer, maturity, principal, coupon (fixed / floating / zero), seniority, and contingency provisions. Annual coupon = par × rate.</a:t>
+              <a:t>Six features specify any bond: issuer, maturity, principal, coupon, seniority, contingency provisions. Annual coupon = par × rate.</a:t>
             </a:r>
             <a:endParaRPr lang="en-US" sz="1150" dirty="0"/>
           </a:p>
@@ -37932,7 +39789,7 @@
                 <a:ea typeface="Calibri" pitchFamily="34" charset="-122"/>
                 <a:cs typeface="Calibri" pitchFamily="34" charset="-120"/>
               </a:rPr>
-              <a:t>FRN coupon = MRR + fixed issuer spread. Antelas EUR 250m @ MRR +250bps, MRR 0.25% → quarterly interest EUR 1,718,750.</a:t>
+              <a:t>FRN coupon = MRR + a spread fixed at issuance. Antelas EUR 250m at MRR+250bps, MRR 0.25% → EUR 1,718,750 a quarter.</a:t>
             </a:r>
             <a:endParaRPr lang="en-US" sz="1150" dirty="0"/>
           </a:p>
@@ -38014,7 +39871,7 @@
                 <a:ea typeface="Calibri" pitchFamily="34" charset="-122"/>
                 <a:cs typeface="Calibri" pitchFamily="34" charset="-120"/>
               </a:rPr>
-              <a:t>Bullet, amortizing, and balloon differ only in when principal is returned. Fully amortizing payment = PMT of annuity; early payments mostly interest, later mostly principal.</a:t>
+              <a:t>Bullet, amortizing and balloon differ only in when principal returns. A = rP / [1 − (1+r)⁻ᴺ]; the interest share falls over time.</a:t>
             </a:r>
             <a:endParaRPr lang="en-US" sz="1150" dirty="0"/>
           </a:p>
@@ -38096,7 +39953,7 @@
                 <a:ea typeface="Calibri" pitchFamily="34" charset="-122"/>
                 <a:cs typeface="Calibri" pitchFamily="34" charset="-120"/>
               </a:rPr>
-              <a:t>Covenants tighten as credit quality falls: BRWA (IG) has light affirmative and 3 negatives; VIVU (HY) adds leverage tests, dividend blocks, and a fixed-price call schedule.</a:t>
+              <a:t>Cross-default is affirmative; leverage and dividend tests are negative. BRWA (IG) has three negatives; VIVU (HY) adds an incurrence test.</a:t>
             </a:r>
             <a:endParaRPr lang="en-US" sz="1150" dirty="0"/>
           </a:p>
@@ -38178,7 +40035,7 @@
                 <a:ea typeface="Calibri" pitchFamily="34" charset="-122"/>
                 <a:cs typeface="Calibri" pitchFamily="34" charset="-120"/>
               </a:rPr>
-              <a:t>Credit-rating cut-off BBB-/Baa3 is the legal + contractual line between IG and HY. Fallen angels get dumped because institutional mandates force it.</a:t>
+              <a:t>A call belongs to the ISSUER and caps the price; a put belongs to the INVESTOR and floors it. Callables yield more, putables less.</a:t>
             </a:r>
             <a:endParaRPr lang="en-US" sz="1150" dirty="0"/>
           </a:p>
@@ -38260,7 +40117,7 @@
                 <a:ea typeface="Calibri" pitchFamily="34" charset="-122"/>
                 <a:cs typeface="Calibri" pitchFamily="34" charset="-120"/>
               </a:rPr>
-              <a:t>Repo math: Initial margin 102% on USD 100m UST → purchase price 98.04m (haircut 1.96%); 30-day repo at 0.25% → repurchase 98.06m. Bear Stearns died because counterparties refused to roll.</a:t>
+              <a:t>Repo: the seller keeps ownership and the coupons, the lender earns the rate. 102% margin on 100m UST → 98.04m loan, 1.96% haircut.</a:t>
             </a:r>
             <a:endParaRPr lang="en-US" sz="1150" dirty="0"/>
           </a:p>
@@ -38342,7 +40199,7 @@
                 <a:ea typeface="Calibri" pitchFamily="34" charset="-122"/>
                 <a:cs typeface="Calibri" pitchFamily="34" charset="-120"/>
               </a:rPr>
-              <a:t>Sovereign auctions: single-price gives all winners the same yield (Singapore cut-off 1.95% → coupon 1.875%); multiple-price pays each winner their bid. RBI switched to single-price in 2021.</a:t>
+              <a:t>Single-price auctions give every winner the cut-off yield: Singapore 1.95% → coupon 1.875%. Multiple-price pays each winner their bid.</a:t>
             </a:r>
             <a:endParaRPr lang="en-US" sz="1150" dirty="0"/>
           </a:p>
@@ -38424,7 +40281,7 @@
                 <a:ea typeface="Calibri" pitchFamily="34" charset="-122"/>
                 <a:cs typeface="Calibri" pitchFamily="34" charset="-120"/>
               </a:rPr>
-              <a:t>Non-economic demand (central banks, foreign reserves, regulated institutions) compresses sovereign yields — the USD "exorbitant privilege" is structural, not transient.</a:t>
+              <a:t>Non-economic demand — central banks, FX reserves, regulated holders — pulls sovereign yields below pure credit fundamentals.</a:t>
             </a:r>
             <a:endParaRPr lang="en-US" sz="1150" dirty="0"/>
           </a:p>
@@ -38877,6 +40734,61 @@
         </p:nvSpPr>
         <p:spPr>
           <a:xfrm>
+            <a:off x="320040" y="4325112"/>
+            <a:ext cx="8503920" cy="338328"/>
+          </a:xfrm>
+          <a:prstGeom prst="rect">
+            <a:avLst/>
+          </a:prstGeom>
+          <a:noFill/>
+          <a:ln/>
+        </p:spPr>
+        <p:txBody>
+          <a:bodyPr wrap="square" lIns="254" tIns="254" rIns="254" bIns="254" rtlCol="0" anchor="t"/>
+          <a:lstStyle/>
+          <a:p>
+            <a:pPr indent="0" marL="0">
+              <a:buNone/>
+            </a:pPr>
+            <a:r>
+              <a:rPr lang="en-US" sz="1000" dirty="0">
+                <a:solidFill>
+                  <a:srgbClr val="6B7A8D"/>
+                </a:solidFill>
+                <a:latin typeface="Calibri" pitchFamily="34" charset="0"/>
+                <a:ea typeface="Calibri" pitchFamily="34" charset="-122"/>
+                <a:cs typeface="Calibri" pitchFamily="34" charset="-120"/>
+              </a:rPr>
+              <a:t>¹ Current yield = annual coupon / price. At USD 101 per 100 of face, BRWA's current yield is 3.2% / 1.01 = 3.168%.
+</a:t>
+            </a:r>
+            <a:pPr indent="0" marL="0">
+              <a:buNone/>
+            </a:pPr>
+            <a:r>
+              <a:rPr lang="en-US" sz="1000" dirty="0">
+                <a:solidFill>
+                  <a:srgbClr val="6B7A8D"/>
+                </a:solidFill>
+                <a:latin typeface="Calibri" pitchFamily="34" charset="0"/>
+                <a:ea typeface="Calibri" pitchFamily="34" charset="-122"/>
+                <a:cs typeface="Calibri" pitchFamily="34" charset="-120"/>
+              </a:rPr>
+              <a:t>² YTM is the IRR of price against promised cash flows: at 101, r = 1.49% semi-annually, or 2.98% annualised.
+</a:t>
+            </a:r>
+            <a:endParaRPr lang="en-US" sz="1000" dirty="0"/>
+          </a:p>
+        </p:txBody>
+      </p:sp>
+      <p:sp>
+        <p:nvSpPr>
+          <p:cNvPr id="8" name="Text 6"/>
+          <p:cNvSpPr txBox="1"/>
+          <p:nvPr/>
+        </p:nvSpPr>
+        <p:spPr>
+          <a:xfrm>
             <a:off x="320040" y="4663440"/>
             <a:ext cx="8503920" cy="201168"/>
           </a:xfrm>
@@ -38905,7 +40817,7 @@
                 <a:ea typeface="Calibri" pitchFamily="34" charset="-122"/>
                 <a:cs typeface="Calibri" pitchFamily="34" charset="-120"/>
               </a:rPr>
-              <a:t>Source: CFA Institute, Curriculum Vol 6, Learning Module 1, "Features of Fixed-Income Securities", pp. 7–12.</a:t>
+              <a:t>Source: CFA Institute, Curriculum Vol 6, Learning Module 1, "Features of Fixed-Income Securities" and "Yield Measures", pp. 7–13.</a:t>
             </a:r>
             <a:endParaRPr lang="en-US" sz="750" dirty="0"/>
           </a:p>
@@ -38913,7 +40825,7 @@
       </p:sp>
       <p:sp>
         <p:nvSpPr>
-          <p:cNvPr id="8" name="Text 6"/>
+          <p:cNvPr id="9" name="Text 7"/>
           <p:cNvSpPr txBox="1"/>
           <p:nvPr/>
         </p:nvSpPr>
@@ -39250,7 +41162,7 @@
                           <a:ea typeface="Consolas" pitchFamily="34" charset="-122"/>
                           <a:cs typeface="Consolas" pitchFamily="34" charset="-120"/>
                         </a:rPr>
-                        <a:t>Bright Wheels Automotive Corp.</a:t>
+                        <a:t>Bright Wheels Automotive</a:t>
                       </a:r>
                       <a:endParaRPr lang="en-US" sz="1100" dirty="0">
                         <a:latin typeface="Consolas" charset="0"/>
@@ -39858,7 +41770,7 @@
                           <a:ea typeface="Consolas" pitchFamily="34" charset="-122"/>
                           <a:cs typeface="Consolas" pitchFamily="34" charset="-120"/>
                         </a:rPr>
-                        <a:t>Unsecured &amp; unsubordinated</a:t>
+                        <a:t>Senior unsecured</a:t>
                       </a:r>
                       <a:endParaRPr lang="en-US" sz="1100" dirty="0">
                         <a:latin typeface="Consolas" charset="0"/>
@@ -40050,14 +41962,14 @@
       </p:graphicFrame>
       <p:sp>
         <p:nvSpPr>
-          <p:cNvPr id="10" name="Shape 7"/>
+          <p:cNvPr id="11" name="Shape 8"/>
           <p:cNvSpPr/>
           <p:nvPr/>
         </p:nvSpPr>
         <p:spPr>
           <a:xfrm>
-            <a:off x="320040" y="3337560"/>
-            <a:ext cx="8503920" cy="960120"/>
+            <a:off x="320040" y="3246120"/>
+            <a:ext cx="8503920" cy="1005840"/>
           </a:xfrm>
           <a:prstGeom prst="rect">
             <a:avLst/>
@@ -40070,14 +41982,14 @@
       </p:sp>
       <p:sp>
         <p:nvSpPr>
-          <p:cNvPr id="11" name="Shape 8"/>
+          <p:cNvPr id="12" name="Shape 9"/>
           <p:cNvSpPr/>
           <p:nvPr/>
         </p:nvSpPr>
         <p:spPr>
           <a:xfrm>
-            <a:off x="320040" y="3337560"/>
-            <a:ext cx="73152" cy="960120"/>
+            <a:off x="320040" y="3246120"/>
+            <a:ext cx="73152" cy="1005840"/>
           </a:xfrm>
           <a:prstGeom prst="rect">
             <a:avLst/>
@@ -40090,13 +42002,13 @@
       </p:sp>
       <p:sp>
         <p:nvSpPr>
-          <p:cNvPr id="12" name="Text 9"/>
+          <p:cNvPr id="13" name="Text 10"/>
           <p:cNvSpPr txBox="1"/>
           <p:nvPr/>
         </p:nvSpPr>
         <p:spPr>
           <a:xfrm>
-            <a:off x="457200" y="3383280"/>
+            <a:off x="457200" y="3291840"/>
             <a:ext cx="8275320" cy="256032"/>
           </a:xfrm>
           <a:prstGeom prst="rect">
@@ -40132,14 +42044,14 @@
       </p:sp>
       <p:sp>
         <p:nvSpPr>
-          <p:cNvPr id="13" name="Text 10"/>
+          <p:cNvPr id="14" name="Text 11"/>
           <p:cNvSpPr txBox="1"/>
           <p:nvPr/>
         </p:nvSpPr>
         <p:spPr>
           <a:xfrm>
-            <a:off x="457200" y="3657600"/>
-            <a:ext cx="8275320" cy="594360"/>
+            <a:off x="457200" y="3566160"/>
+            <a:ext cx="8275320" cy="640080"/>
           </a:xfrm>
           <a:prstGeom prst="rect">
             <a:avLst/>
@@ -40166,7 +42078,7 @@
                 <a:ea typeface="Calibri" pitchFamily="34" charset="-122"/>
                 <a:cs typeface="Calibri" pitchFamily="34" charset="-120"/>
               </a:rPr>
-              <a:t>USD 300m × 3.2% = USD 9.6m per year, paid semi-annually as USD 4.8m. At maturity, the investor receives the final USD 4.8m coupon PLUS the USD 300m principal for a total USD 304.8m.</a:t>
+              <a:t>USD 300m × 3.2% = USD 9.6m per year, paid semi-annually as USD 4.8m. At maturity the investor receives the final USD 4.8m coupon PLUS the USD 300m principal, for a total of USD 304.8m — the one cash flow that is not level.</a:t>
             </a:r>
             <a:endParaRPr lang="en-US" sz="1200" dirty="0"/>
           </a:p>
@@ -40273,7 +42185,7 @@
                 <a:ea typeface="Trebuchet MS" pitchFamily="34" charset="-122"/>
                 <a:cs typeface="Trebuchet MS" pitchFamily="34" charset="-120"/>
               </a:rPr>
-              <a:t>Coupons come in three flavours — fixed, floating, or zero — and a floater's rate is always MRR plus a fixed issuer spread</a:t>
+              <a:t>Coupons come in three flavours — fixed, floating, or zero — and a floater's rate is always MRR plus a spread fixed at issuance</a:t>
             </a:r>
             <a:endParaRPr lang="en-US" sz="1700" dirty="0"/>
           </a:p>
@@ -40377,7 +42289,7 @@
                 <a:ea typeface="Calibri" pitchFamily="34" charset="-122"/>
                 <a:cs typeface="Calibri" pitchFamily="34" charset="-120"/>
               </a:rPr>
-              <a:t>Source: CFA Institute, Curriculum Vol 6, Learning Module 1, p. 9 (FRN); LM 2 Example on Antelas, p. 33.</a:t>
+              <a:t>Source: CFA Institute, Curriculum Vol 6, Learning Module 1 Practice Problems (Antelas AG FRN), pp. 20–22; Learning Module 2, Exhibit 6, p. 33.</a:t>
             </a:r>
             <a:endParaRPr lang="en-US" sz="750" dirty="0"/>
           </a:p>
@@ -40419,7 +42331,7 @@
                 <a:ea typeface="Calibri" pitchFamily="34" charset="-122"/>
                 <a:cs typeface="Calibri" pitchFamily="34" charset="-120"/>
               </a:rPr>
-              <a:t>The credit spread is set at issuance and stays constant; only the MRR moves — so an FRN's coupon tracks short-term rates but keeps a fixed credit cushion.</a:t>
+              <a:t>The credit spread is set at issuance and never moves; only the MRR resets. So an FRN tracks short-term rates while keeping a fixed credit cushion.</a:t>
             </a:r>
             <a:endParaRPr lang="en-US" sz="1300" dirty="0"/>
           </a:p>
@@ -40433,8 +42345,8 @@
         </p:nvSpPr>
         <p:spPr>
           <a:xfrm>
-            <a:off x="320040" y="1234440"/>
-            <a:ext cx="8503920" cy="658368"/>
+            <a:off x="320040" y="1188720"/>
+            <a:ext cx="8503920" cy="603504"/>
           </a:xfrm>
           <a:prstGeom prst="rect">
             <a:avLst/>
@@ -40453,8 +42365,8 @@
         </p:nvSpPr>
         <p:spPr>
           <a:xfrm>
-            <a:off x="411480" y="1234440"/>
-            <a:ext cx="8321040" cy="658368"/>
+            <a:off x="411480" y="1188720"/>
+            <a:ext cx="8321040" cy="603504"/>
           </a:xfrm>
           <a:prstGeom prst="rect">
             <a:avLst/>
@@ -40481,7 +42393,7 @@
                 <a:ea typeface="Consolas" pitchFamily="34" charset="-122"/>
                 <a:cs typeface="Consolas" pitchFamily="34" charset="-120"/>
               </a:rPr>
-              <a:t>FRN coupon  =  MRR  +  Credit spread            Quarterly interest  =  (Coupon × Principal) / 4</a:t>
+              <a:t>FRN coupon = MRR + Credit spread      Quarterly interest = (Coupon × Principal) / 4</a:t>
             </a:r>
             <a:endParaRPr lang="en-US" sz="1800" dirty="0"/>
           </a:p>
@@ -40495,7 +42407,7 @@
         </p:nvSpPr>
         <p:spPr>
           <a:xfrm>
-            <a:off x="320040" y="1920240"/>
+            <a:off x="320040" y="1819656"/>
             <a:ext cx="8503920" cy="256032"/>
           </a:xfrm>
           <a:prstGeom prst="rect">
@@ -40523,7 +42435,7 @@
                 <a:ea typeface="Calibri" pitchFamily="34" charset="-122"/>
                 <a:cs typeface="Calibri" pitchFamily="34" charset="-120"/>
               </a:rPr>
-              <a:t>where: MRR = market reference rate (e.g. SOFR, €STR); Credit spread is issuer-specific and fixed at issuance.</a:t>
+              <a:t>where: MRR = market reference rate (SOFR, €STR, …), reset each period. The credit spread is issuer-specific and fixed for the life of the note.</a:t>
             </a:r>
             <a:endParaRPr lang="en-US" sz="1100" dirty="0"/>
           </a:p>
@@ -40537,8 +42449,8 @@
         </p:nvSpPr>
         <p:spPr>
           <a:xfrm>
-            <a:off x="320040" y="2331720"/>
-            <a:ext cx="8503920" cy="1965960"/>
+            <a:off x="320040" y="2029968"/>
+            <a:ext cx="8503920" cy="2176272"/>
           </a:xfrm>
           <a:prstGeom prst="rect">
             <a:avLst/>
@@ -40562,7 +42474,7 @@
         </p:nvSpPr>
         <p:spPr>
           <a:xfrm>
-            <a:off x="457200" y="2377440"/>
+            <a:off x="457200" y="2075688"/>
             <a:ext cx="8229600" cy="256032"/>
           </a:xfrm>
           <a:prstGeom prst="rect">
@@ -40590,7 +42502,7 @@
                 <a:ea typeface="Trebuchet MS" pitchFamily="34" charset="-122"/>
                 <a:cs typeface="Trebuchet MS" pitchFamily="34" charset="-120"/>
               </a:rPr>
-              <a:t>CFA LM 1 — ANTELAS AG FOUR-YEAR FRN</a:t>
+              <a:t>CFA LM 1 — ANTELAS AG FRN · EUR 250m · MRR + 250 bps · QUARTERLY</a:t>
             </a:r>
             <a:endParaRPr lang="en-US" sz="1100" dirty="0"/>
           </a:p>
@@ -40604,8 +42516,8 @@
         </p:nvSpPr>
         <p:spPr>
           <a:xfrm>
-            <a:off x="457200" y="2670048"/>
-            <a:ext cx="8229600" cy="457200"/>
+            <a:off x="457200" y="2368296"/>
+            <a:ext cx="8229600" cy="1325880"/>
           </a:xfrm>
           <a:prstGeom prst="rect">
             <a:avLst/>
@@ -40614,13 +42526,33 @@
           <a:ln/>
         </p:spPr>
         <p:txBody>
-          <a:bodyPr wrap="square" lIns="508" tIns="508" rIns="508" bIns="508" rtlCol="0" anchor="t">
+          <a:bodyPr wrap="square" lIns="254" tIns="254" rIns="254" bIns="254" rtlCol="0" anchor="t">
             <a:normAutofit/>
             <a:spAutoFit/>
           </a:bodyPr>
           <a:lstStyle/>
           <a:p>
-            <a:pPr algn="l" indent="0" marL="0">
+            <a:pPr indent="0" marL="0">
+              <a:spcAft>
+                <a:spcPts val="200"/>
+              </a:spcAft>
+              <a:buNone/>
+            </a:pPr>
+            <a:r>
+              <a:rPr lang="en-US" sz="1200" b="1" dirty="0">
+                <a:solidFill>
+                  <a:srgbClr val="1B2A4A"/>
+                </a:solidFill>
+                <a:latin typeface="Calibri" pitchFamily="34" charset="0"/>
+                <a:ea typeface="Calibri" pitchFamily="34" charset="-122"/>
+                <a:cs typeface="Calibri" pitchFamily="34" charset="-120"/>
+              </a:rPr>
+              <a:t>1. </a:t>
+            </a:r>
+            <a:pPr indent="0" marL="0">
+              <a:spcAft>
+                <a:spcPts val="200"/>
+              </a:spcAft>
               <a:buNone/>
             </a:pPr>
             <a:r>
@@ -40632,36 +42564,9 @@
                 <a:ea typeface="Calibri" pitchFamily="34" charset="-122"/>
                 <a:cs typeface="Calibri" pitchFamily="34" charset="-120"/>
               </a:rPr>
-              <a:t>EUR 250m principal · coupon = 3-month MRR + 250 bps · paid quarterly · MRR for this quarter = 0.25%.</a:t>
-            </a:r>
-            <a:endParaRPr lang="en-US" sz="1200" dirty="0"/>
-          </a:p>
-        </p:txBody>
-      </p:sp>
-      <p:sp>
-        <p:nvSpPr>
-          <p:cNvPr id="15" name="Text 13"/>
-          <p:cNvSpPr txBox="1"/>
-          <p:nvPr/>
-        </p:nvSpPr>
-        <p:spPr>
-          <a:xfrm>
-            <a:off x="457200" y="3182112"/>
-            <a:ext cx="8229600" cy="603504"/>
-          </a:xfrm>
-          <a:prstGeom prst="rect">
-            <a:avLst/>
-          </a:prstGeom>
-          <a:noFill/>
-          <a:ln/>
-        </p:spPr>
-        <p:txBody>
-          <a:bodyPr wrap="square" lIns="254" tIns="254" rIns="254" bIns="254" rtlCol="0" anchor="t">
-            <a:normAutofit/>
-            <a:spAutoFit/>
-          </a:bodyPr>
-          <a:lstStyle/>
-          <a:p>
+              <a:t>MRR for the final interest period = 0.25% → coupon rate = 0.25% + 2.50% = 2.75% p.a.
+</a:t>
+            </a:r>
             <a:pPr indent="0" marL="0">
               <a:spcAft>
                 <a:spcPts val="200"/>
@@ -40669,42 +42574,7 @@
               <a:buNone/>
             </a:pPr>
             <a:r>
-              <a:rPr lang="en-US" sz="1050" b="1" dirty="0">
-                <a:solidFill>
-                  <a:srgbClr val="1B2A4A"/>
-                </a:solidFill>
-                <a:latin typeface="Calibri" pitchFamily="34" charset="0"/>
-                <a:ea typeface="Calibri" pitchFamily="34" charset="-122"/>
-                <a:cs typeface="Calibri" pitchFamily="34" charset="-120"/>
-              </a:rPr>
-              <a:t>1. </a:t>
-            </a:r>
-            <a:pPr indent="0" marL="0">
-              <a:spcAft>
-                <a:spcPts val="200"/>
-              </a:spcAft>
-              <a:buNone/>
-            </a:pPr>
-            <a:r>
-              <a:rPr lang="en-US" sz="1050" dirty="0">
-                <a:solidFill>
-                  <a:srgbClr val="334155"/>
-                </a:solidFill>
-                <a:latin typeface="Calibri" pitchFamily="34" charset="0"/>
-                <a:ea typeface="Calibri" pitchFamily="34" charset="-122"/>
-                <a:cs typeface="Calibri" pitchFamily="34" charset="-120"/>
-              </a:rPr>
-              <a:t>Coupon rate this quarter = 0.25% MRR + 2.50% spread = 2.75% p.a.
-</a:t>
-            </a:r>
-            <a:pPr indent="0" marL="0">
-              <a:spcAft>
-                <a:spcPts val="200"/>
-              </a:spcAft>
-              <a:buNone/>
-            </a:pPr>
-            <a:r>
-              <a:rPr lang="en-US" sz="1050" b="1" dirty="0">
+              <a:rPr lang="en-US" sz="1200" b="1" dirty="0">
                 <a:solidFill>
                   <a:srgbClr val="1B2A4A"/>
                 </a:solidFill>
@@ -40721,7 +42591,7 @@
               <a:buNone/>
             </a:pPr>
             <a:r>
-              <a:rPr lang="en-US" sz="1050" dirty="0">
+              <a:rPr lang="en-US" sz="1200" dirty="0">
                 <a:solidFill>
                   <a:srgbClr val="334155"/>
                 </a:solidFill>
@@ -40729,7 +42599,7 @@
                 <a:ea typeface="Calibri" pitchFamily="34" charset="-122"/>
                 <a:cs typeface="Calibri" pitchFamily="34" charset="-120"/>
               </a:rPr>
-              <a:t>Annual interest = 250,000,000 × 2.75% = EUR 6,875,000
+              <a:t>Annual interest = EUR 250,000,000 × 2.75% = EUR 6,875,000
 </a:t>
             </a:r>
             <a:pPr indent="0" marL="0">
@@ -40739,7 +42609,7 @@
               <a:buNone/>
             </a:pPr>
             <a:r>
-              <a:rPr lang="en-US" sz="1050" b="1" dirty="0">
+              <a:rPr lang="en-US" sz="1200" b="1" dirty="0">
                 <a:solidFill>
                   <a:srgbClr val="1B2A4A"/>
                 </a:solidFill>
@@ -40756,7 +42626,7 @@
               <a:buNone/>
             </a:pPr>
             <a:r>
-              <a:rPr lang="en-US" sz="1050" dirty="0">
+              <a:rPr lang="en-US" sz="1200" dirty="0">
                 <a:solidFill>
                   <a:srgbClr val="334155"/>
                 </a:solidFill>
@@ -40774,7 +42644,7 @@
               <a:buNone/>
             </a:pPr>
             <a:r>
-              <a:rPr lang="en-US" sz="1050" b="1" dirty="0">
+              <a:rPr lang="en-US" sz="1200" b="1" dirty="0">
                 <a:solidFill>
                   <a:srgbClr val="1B2A4A"/>
                 </a:solidFill>
@@ -40791,7 +42661,7 @@
               <a:buNone/>
             </a:pPr>
             <a:r>
-              <a:rPr lang="en-US" sz="1050" dirty="0">
+              <a:rPr lang="en-US" sz="1200" dirty="0">
                 <a:solidFill>
                   <a:srgbClr val="334155"/>
                 </a:solidFill>
@@ -40799,21 +42669,56 @@
                 <a:ea typeface="Calibri" pitchFamily="34" charset="-122"/>
                 <a:cs typeface="Calibri" pitchFamily="34" charset="-120"/>
               </a:rPr>
-              <a:t>If MRR moves to 0.50% next quarter, coupon resets to 3.00% → EUR 1,875,000 — spread stays put at 250 bps.</a:t>
-            </a:r>
-            <a:endParaRPr lang="en-US" sz="1050" dirty="0"/>
+              <a:t>Maturity-date payment = principal 250,000,000 + final coupon 1,718,750 = EUR 251,718,750
+</a:t>
+            </a:r>
+            <a:pPr indent="0" marL="0">
+              <a:spcAft>
+                <a:spcPts val="200"/>
+              </a:spcAft>
+              <a:buNone/>
+            </a:pPr>
+            <a:r>
+              <a:rPr lang="en-US" sz="1200" b="1" dirty="0">
+                <a:solidFill>
+                  <a:srgbClr val="1B2A4A"/>
+                </a:solidFill>
+                <a:latin typeface="Calibri" pitchFamily="34" charset="0"/>
+                <a:ea typeface="Calibri" pitchFamily="34" charset="-122"/>
+                <a:cs typeface="Calibri" pitchFamily="34" charset="-120"/>
+              </a:rPr>
+              <a:t>5. </a:t>
+            </a:r>
+            <a:pPr indent="0" marL="0">
+              <a:spcAft>
+                <a:spcPts val="200"/>
+              </a:spcAft>
+              <a:buNone/>
+            </a:pPr>
+            <a:r>
+              <a:rPr lang="en-US" sz="1200" dirty="0">
+                <a:solidFill>
+                  <a:srgbClr val="334155"/>
+                </a:solidFill>
+                <a:latin typeface="Calibri" pitchFamily="34" charset="0"/>
+                <a:ea typeface="Calibri" pitchFamily="34" charset="-122"/>
+                <a:cs typeface="Calibri" pitchFamily="34" charset="-120"/>
+              </a:rPr>
+              <a:t>If MRR resets to 0.50%, coupon goes to 3.00% → EUR 1,875,000. The 250 bps spread does not move.</a:t>
+            </a:r>
+            <a:endParaRPr lang="en-US" sz="1200" dirty="0"/>
           </a:p>
         </p:txBody>
       </p:sp>
       <p:sp>
         <p:nvSpPr>
-          <p:cNvPr id="16" name="Shape 14"/>
+          <p:cNvPr id="15" name="Shape 13"/>
           <p:cNvSpPr/>
           <p:nvPr/>
         </p:nvSpPr>
         <p:spPr>
           <a:xfrm>
-            <a:off x="411480" y="3858768"/>
+            <a:off x="411480" y="3767328"/>
             <a:ext cx="8321040" cy="365760"/>
           </a:xfrm>
           <a:prstGeom prst="rect">
@@ -40827,13 +42732,13 @@
       </p:sp>
       <p:sp>
         <p:nvSpPr>
-          <p:cNvPr id="17" name="Text 15"/>
+          <p:cNvPr id="16" name="Text 14"/>
           <p:cNvSpPr txBox="1"/>
           <p:nvPr/>
         </p:nvSpPr>
         <p:spPr>
           <a:xfrm>
-            <a:off x="457200" y="3858768"/>
+            <a:off x="457200" y="3767328"/>
             <a:ext cx="8229600" cy="365760"/>
           </a:xfrm>
           <a:prstGeom prst="rect">
@@ -40861,7 +42766,7 @@
                 <a:ea typeface="Consolas" pitchFamily="34" charset="-122"/>
                 <a:cs typeface="Consolas" pitchFamily="34" charset="-120"/>
               </a:rPr>
-              <a:t>Quarterly payment = EUR 1,718,750 · coupon moves with MRR · credit spread fixed at 250 bps</a:t>
+              <a:t>Quarterly coupon EUR 1,718,750 · final payment EUR 251,718,750 · spread fixed at 250 bps</a:t>
             </a:r>
             <a:endParaRPr lang="en-US" sz="1150" dirty="0"/>
           </a:p>
@@ -41072,7 +42977,7 @@
                 <a:ea typeface="Calibri" pitchFamily="34" charset="-122"/>
                 <a:cs typeface="Calibri" pitchFamily="34" charset="-120"/>
               </a:rPr>
-              <a:t>Source: CFA Institute, Curriculum Vol 6, Learning Module 1, "Bond Indentures and Covenants", pp. 14–19.</a:t>
+              <a:t>Source: CFA Institute, Curriculum Vol 6, Learning Module 1, "Bond Indentures and Covenants", Exhibits 8–10, pp. 14–19.</a:t>
             </a:r>
             <a:endParaRPr lang="en-US" sz="750" dirty="0"/>
           </a:p>
@@ -41114,7 +43019,7 @@
                 <a:ea typeface="Calibri" pitchFamily="34" charset="-122"/>
                 <a:cs typeface="Calibri" pitchFamily="34" charset="-120"/>
               </a:rPr>
-              <a:t>BRWA is investment grade and gets a short covenant list. VIVU is high-yield secured and wears a full monitoring regime — the covenant stack is the credit premium made legal.</a:t>
+              <a:t>BRWA is investment grade and gets a short list. VIVU is high-yield secured and wears a full monitoring regime — the covenant stack is the credit premium made legal.</a:t>
             </a:r>
             <a:endParaRPr lang="en-US" sz="1300" dirty="0"/>
           </a:p>
@@ -41196,7 +43101,7 @@
                 <a:ea typeface="Trebuchet MS" pitchFamily="34" charset="-122"/>
                 <a:cs typeface="Trebuchet MS" pitchFamily="34" charset="-120"/>
               </a:rPr>
-              <a:t>BRWA  ·  INVESTMENT GRADE  ·  UNSECURED</a:t>
+              <a:t>BRWA  ·  IG  ·  UNSECURED</a:t>
             </a:r>
             <a:endParaRPr lang="en-US" sz="1100" dirty="0"/>
           </a:p>
@@ -41238,7 +43143,7 @@
                 <a:ea typeface="Calibri" pitchFamily="34" charset="-122"/>
                 <a:cs typeface="Calibri" pitchFamily="34" charset="-120"/>
               </a:rPr>
-              <a:t>AFFIRMATIVE covenants only:</a:t>
+              <a:t>AFFIRMATIVE — must do:</a:t>
             </a:r>
             <a:endParaRPr lang="en-US" sz="1100" dirty="0"/>
           </a:p>
@@ -41255,7 +43160,7 @@
                 <a:ea typeface="Calibri" pitchFamily="34" charset="-122"/>
                 <a:cs typeface="Calibri" pitchFamily="34" charset="-120"/>
               </a:rPr>
-              <a:t>  • Use-of-proceeds defined</a:t>
+              <a:t>  • Use of proceeds defined</a:t>
             </a:r>
             <a:endParaRPr lang="en-US" sz="1100" dirty="0"/>
           </a:p>
@@ -41272,7 +43177,7 @@
                 <a:ea typeface="Calibri" pitchFamily="34" charset="-122"/>
                 <a:cs typeface="Calibri" pitchFamily="34" charset="-120"/>
               </a:rPr>
-              <a:t>  • Pari passu with other unsecured debt</a:t>
+              <a:t>  • Pari passu with unsecured debt</a:t>
             </a:r>
             <a:endParaRPr lang="en-US" sz="1100" dirty="0"/>
           </a:p>
@@ -41297,12 +43202,6 @@
             <a:pPr algn="l" indent="0" marL="0">
               <a:buNone/>
             </a:pPr>
-            <a:endParaRPr lang="en-US" sz="1100" dirty="0"/>
-          </a:p>
-          <a:p>
-            <a:pPr algn="l" indent="0" marL="0">
-              <a:buNone/>
-            </a:pPr>
             <a:r>
               <a:rPr lang="en-US" sz="1100" dirty="0">
                 <a:solidFill>
@@ -41312,7 +43211,30 @@
                 <a:ea typeface="Calibri" pitchFamily="34" charset="-122"/>
                 <a:cs typeface="Calibri" pitchFamily="34" charset="-120"/>
               </a:rPr>
-              <a:t>Light NEGATIVE covenants:</a:t>
+              <a:t>  • Cross-default clause</a:t>
+            </a:r>
+            <a:endParaRPr lang="en-US" sz="1100" dirty="0"/>
+          </a:p>
+          <a:p>
+            <a:pPr algn="l" indent="0" marL="0">
+              <a:buNone/>
+            </a:pPr>
+            <a:endParaRPr lang="en-US" sz="1100" dirty="0"/>
+          </a:p>
+          <a:p>
+            <a:pPr algn="l" indent="0" marL="0">
+              <a:buNone/>
+            </a:pPr>
+            <a:r>
+              <a:rPr lang="en-US" sz="1100" dirty="0">
+                <a:solidFill>
+                  <a:srgbClr val="334155"/>
+                </a:solidFill>
+                <a:latin typeface="Calibri" pitchFamily="34" charset="0"/>
+                <a:ea typeface="Calibri" pitchFamily="34" charset="-122"/>
+                <a:cs typeface="Calibri" pitchFamily="34" charset="-120"/>
+              </a:rPr>
+              <a:t>NEGATIVE — must not do (light):</a:t>
             </a:r>
             <a:endParaRPr lang="en-US" sz="1100" dirty="0"/>
           </a:p>
@@ -41363,7 +43285,7 @@
                 <a:ea typeface="Calibri" pitchFamily="34" charset="-122"/>
                 <a:cs typeface="Calibri" pitchFamily="34" charset="-120"/>
               </a:rPr>
-              <a:t>  • Merger/consolidation protection</a:t>
+              <a:t>  • Merger / consolidation limits</a:t>
             </a:r>
             <a:endParaRPr lang="en-US" sz="1100" dirty="0"/>
           </a:p>
@@ -41386,7 +43308,7 @@
                 <a:ea typeface="Calibri" pitchFamily="34" charset="-122"/>
                 <a:cs typeface="Calibri" pitchFamily="34" charset="-120"/>
               </a:rPr>
-              <a:t>No leverage tests. No dividend blocks. No call.</a:t>
+              <a:t>No leverage test. No dividend block. No call.</a:t>
             </a:r>
             <a:endParaRPr lang="en-US" sz="1100" dirty="0"/>
           </a:p>
@@ -41468,7 +43390,7 @@
                 <a:ea typeface="Trebuchet MS" pitchFamily="34" charset="-122"/>
                 <a:cs typeface="Trebuchet MS" pitchFamily="34" charset="-120"/>
               </a:rPr>
-              <a:t>VIVU  ·  HIGH YIELD  ·  SECURED CALLABLE</a:t>
+              <a:t>VIVU  ·  HY  ·  SECURED CALLABLE</a:t>
             </a:r>
             <a:endParaRPr lang="en-US" sz="1100" dirty="0"/>
           </a:p>
@@ -41510,7 +43432,7 @@
                 <a:ea typeface="Calibri" pitchFamily="34" charset="-122"/>
                 <a:cs typeface="Calibri" pitchFamily="34" charset="-120"/>
               </a:rPr>
-              <a:t>Above + security pledge PLUS:</a:t>
+              <a:t>All of the above, PLUS a security pledge:</a:t>
             </a:r>
             <a:endParaRPr lang="en-US" sz="1100" dirty="0"/>
           </a:p>
@@ -41561,7 +43483,7 @@
                 <a:ea typeface="Calibri" pitchFamily="34" charset="-122"/>
                 <a:cs typeface="Calibri" pitchFamily="34" charset="-120"/>
               </a:rPr>
-              <a:t>  • Debt/EBITDA ≤ 5.00×</a:t>
+              <a:t>  • Net debt / EBITDA ≤ 5.00×</a:t>
             </a:r>
             <a:endParaRPr lang="en-US" sz="1100" dirty="0"/>
           </a:p>
@@ -41601,7 +43523,7 @@
                 <a:ea typeface="Calibri" pitchFamily="34" charset="-122"/>
                 <a:cs typeface="Calibri" pitchFamily="34" charset="-120"/>
               </a:rPr>
-              <a:t>INCURRENCE TEST (tighter 4.5× / 3.0×) must be met before paying dividends or issuing new debt.</a:t>
+              <a:t>INCURRENCE TEST — tighter, at 4.50× and 3.00× — must be met before paying a dividend or issuing new debt.</a:t>
             </a:r>
             <a:endParaRPr lang="en-US" sz="1100" dirty="0"/>
           </a:p>
@@ -41624,7 +43546,7 @@
                 <a:ea typeface="Calibri" pitchFamily="34" charset="-122"/>
                 <a:cs typeface="Calibri" pitchFamily="34" charset="-120"/>
               </a:rPr>
-              <a:t>Plus fixed-price call schedule — issuer retains refinancing flexibility.</a:t>
+              <a:t>Plus a fixed-price call schedule: the issuer keeps the refinancing option.</a:t>
             </a:r>
             <a:endParaRPr lang="en-US" sz="1100" dirty="0"/>
           </a:p>
@@ -41638,7 +43560,7 @@
         </p:nvSpPr>
         <p:spPr>
           <a:xfrm>
-            <a:off x="320040" y="4343400"/>
+            <a:off x="320040" y="4352544"/>
             <a:ext cx="8503920" cy="274320"/>
           </a:xfrm>
           <a:prstGeom prst="rect">
@@ -41658,7 +43580,7 @@
         </p:nvSpPr>
         <p:spPr>
           <a:xfrm>
-            <a:off x="320040" y="4343400"/>
+            <a:off x="320040" y="4352544"/>
             <a:ext cx="73152" cy="274320"/>
           </a:xfrm>
           <a:prstGeom prst="rect">
@@ -41678,7 +43600,7 @@
         </p:nvSpPr>
         <p:spPr>
           <a:xfrm>
-            <a:off x="457200" y="4416552"/>
+            <a:off x="457200" y="4425696"/>
             <a:ext cx="8275320" cy="164592"/>
           </a:xfrm>
           <a:prstGeom prst="rect">
@@ -41706,7 +43628,7 @@
                 <a:ea typeface="Calibri" pitchFamily="34" charset="-122"/>
                 <a:cs typeface="Calibri" pitchFamily="34" charset="-120"/>
               </a:rPr>
-              <a:t>Covenant violations → increased interest rate, accelerated payment, or termination of debt agreement. Strict covenants can also force default — not always in bondholders' interest.</a:t>
+              <a:t>A breach gives bondholders recourse: a change in financial terms (higher rate or added security), accelerated payment, or termination of the agreement.</a:t>
             </a:r>
             <a:endParaRPr lang="en-US" sz="1200" dirty="0"/>
           </a:p>
@@ -41813,7 +43735,7 @@
                 <a:ea typeface="Trebuchet MS" pitchFamily="34" charset="-122"/>
                 <a:cs typeface="Trebuchet MS" pitchFamily="34" charset="-120"/>
               </a:rPr>
-              <a:t>Callable bonds let the issuer buy bonds back at a predetermined schedule — cheap refinancing for the issuer, call risk for the investor</a:t>
+              <a:t>A call belongs to the ISSUER — it buys back at a fixed schedule when rates fall, which caps the investor's price and pays the investor a higher yield up front</a:t>
             </a:r>
             <a:endParaRPr lang="en-US" sz="1600" dirty="0"/>
           </a:p>
@@ -41917,7 +43839,7 @@
                 <a:ea typeface="Calibri" pitchFamily="34" charset="-122"/>
                 <a:cs typeface="Calibri" pitchFamily="34" charset="-120"/>
               </a:rPr>
-              <a:t>Source: CFA Institute, Curriculum Vol 6, Learning Module 2, Exhibit 9 (VIVU), pp. 39–42.</a:t>
+              <a:t>Source: CFA Institute, Curriculum Vol 6, Learning Module 2, "Fixed-Income Contingency Provisions", Exhibit 9 (VIVU), pp. 39–40.</a:t>
             </a:r>
             <a:endParaRPr lang="en-US" sz="750" dirty="0"/>
           </a:p>
@@ -41959,7 +43881,7 @@
                 <a:ea typeface="Calibri" pitchFamily="34" charset="-122"/>
                 <a:cs typeface="Calibri" pitchFamily="34" charset="-120"/>
               </a:rPr>
-              <a:t>The call price declines toward par as maturity approaches — VIVU pays a premium for the flexibility, and that premium shrinks as optionality becomes less valuable.</a:t>
+              <a:t>The call price declines toward par as maturity approaches: the option is worth less with less time left, so VIVU pays less to exercise it.</a:t>
             </a:r>
             <a:endParaRPr lang="en-US" sz="1300" dirty="0"/>
           </a:p>
@@ -42717,8 +44639,132 @@
         </p:nvSpPr>
         <p:spPr>
           <a:xfrm>
+            <a:off x="320040" y="3154680"/>
+            <a:ext cx="4297680" cy="1143000"/>
+          </a:xfrm>
+          <a:prstGeom prst="rect">
+            <a:avLst/>
+          </a:prstGeom>
+          <a:solidFill>
+            <a:srgbClr val="FEF0E7"/>
+          </a:solidFill>
+          <a:ln/>
+        </p:spPr>
+      </p:sp>
+      <p:sp>
+        <p:nvSpPr>
+          <p:cNvPr id="11" name="Shape 8"/>
+          <p:cNvSpPr/>
+          <p:nvPr/>
+        </p:nvSpPr>
+        <p:spPr>
+          <a:xfrm>
+            <a:off x="320040" y="3154680"/>
+            <a:ext cx="73152" cy="1143000"/>
+          </a:xfrm>
+          <a:prstGeom prst="rect">
+            <a:avLst/>
+          </a:prstGeom>
+          <a:solidFill>
+            <a:srgbClr val="E8600A"/>
+          </a:solidFill>
+          <a:ln/>
+        </p:spPr>
+      </p:sp>
+      <p:sp>
+        <p:nvSpPr>
+          <p:cNvPr id="12" name="Text 9"/>
+          <p:cNvSpPr txBox="1"/>
+          <p:nvPr/>
+        </p:nvSpPr>
+        <p:spPr>
+          <a:xfrm>
+            <a:off x="457200" y="3200400"/>
+            <a:ext cx="4069080" cy="256032"/>
+          </a:xfrm>
+          <a:prstGeom prst="rect">
+            <a:avLst/>
+          </a:prstGeom>
+          <a:noFill/>
+          <a:ln/>
+        </p:spPr>
+        <p:txBody>
+          <a:bodyPr wrap="square" lIns="508" tIns="508" rIns="508" bIns="508" rtlCol="0" anchor="ctr">
+            <a:normAutofit/>
+            <a:spAutoFit/>
+          </a:bodyPr>
+          <a:lstStyle/>
+          <a:p>
+            <a:pPr algn="l" indent="0" marL="0">
+              <a:buNone/>
+            </a:pPr>
+            <a:r>
+              <a:rPr lang="en-US" sz="1100" b="1" spc="400" kern="0" dirty="0">
+                <a:solidFill>
+                  <a:srgbClr val="E8600A"/>
+                </a:solidFill>
+                <a:latin typeface="Trebuchet MS" pitchFamily="34" charset="0"/>
+                <a:ea typeface="Trebuchet MS" pitchFamily="34" charset="-122"/>
+                <a:cs typeface="Trebuchet MS" pitchFamily="34" charset="-120"/>
+              </a:rPr>
+              <a:t>WHY THE CALLABLE YIELDS MORE</a:t>
+            </a:r>
+            <a:endParaRPr lang="en-US" sz="1100" dirty="0"/>
+          </a:p>
+        </p:txBody>
+      </p:sp>
+      <p:sp>
+        <p:nvSpPr>
+          <p:cNvPr id="13" name="Text 10"/>
+          <p:cNvSpPr txBox="1"/>
+          <p:nvPr/>
+        </p:nvSpPr>
+        <p:spPr>
+          <a:xfrm>
+            <a:off x="457200" y="3474720"/>
+            <a:ext cx="4069080" cy="777240"/>
+          </a:xfrm>
+          <a:prstGeom prst="rect">
+            <a:avLst/>
+          </a:prstGeom>
+          <a:noFill/>
+          <a:ln/>
+        </p:spPr>
+        <p:txBody>
+          <a:bodyPr wrap="square" lIns="508" tIns="508" rIns="508" bIns="508" rtlCol="0" anchor="t">
+            <a:normAutofit/>
+            <a:spAutoFit/>
+          </a:bodyPr>
+          <a:lstStyle/>
+          <a:p>
+            <a:pPr algn="l" indent="0" marL="0">
+              <a:buNone/>
+            </a:pPr>
+            <a:r>
+              <a:rPr lang="en-US" sz="1200" dirty="0">
+                <a:solidFill>
+                  <a:srgbClr val="334155"/>
+                </a:solidFill>
+                <a:latin typeface="Calibri" pitchFamily="34" charset="0"/>
+                <a:ea typeface="Calibri" pitchFamily="34" charset="-122"/>
+                <a:cs typeface="Calibri" pitchFamily="34" charset="-120"/>
+              </a:rPr>
+              <a:t>If YTM rises ABOVE the coupon, the call is worthless and the bond behaves like a straight bond. If YTM falls BELOW the coupon, the price is capped at the call price while a non-callable keeps rising. Investors demand a higher yield up front for that capped upside — call risk.</a:t>
+            </a:r>
+            <a:endParaRPr lang="en-US" sz="1200" dirty="0"/>
+          </a:p>
+        </p:txBody>
+      </p:sp>
+      <p:sp>
+        <p:nvSpPr>
+          <p:cNvPr id="14" name="Shape 11"/>
+          <p:cNvSpPr/>
+          <p:nvPr/>
+        </p:nvSpPr>
+        <p:spPr>
+          <a:xfrm>
             <a:off x="4754880" y="1188720"/>
-            <a:ext cx="4069080" cy="3154680"/>
+            <a:ext cx="4069080" cy="3108960"/>
           </a:xfrm>
           <a:prstGeom prst="rect">
             <a:avLst/>
@@ -42736,7 +44782,7 @@
       </p:sp>
       <p:sp>
         <p:nvSpPr>
-          <p:cNvPr id="11" name="Text 8"/>
+          <p:cNvPr id="15" name="Text 12"/>
           <p:cNvSpPr txBox="1"/>
           <p:nvPr/>
         </p:nvSpPr>
@@ -42770,7 +44816,7 @@
                 <a:ea typeface="Trebuchet MS" pitchFamily="34" charset="-122"/>
                 <a:cs typeface="Trebuchet MS" pitchFamily="34" charset="-120"/>
               </a:rPr>
-              <a:t>SOLUTION — WHEN DOES VIVU CALL?</a:t>
+              <a:t>ILLUSTRATION — NOT THE CURRICULUM</a:t>
             </a:r>
             <a:endParaRPr lang="en-US" sz="1100" dirty="0"/>
           </a:p>
@@ -42778,7 +44824,7 @@
       </p:sp>
       <p:sp>
         <p:nvSpPr>
-          <p:cNvPr id="12" name="Text 9"/>
+          <p:cNvPr id="16" name="Text 13"/>
           <p:cNvSpPr txBox="1"/>
           <p:nvPr/>
         </p:nvSpPr>
@@ -42812,7 +44858,7 @@
                 <a:ea typeface="Calibri" pitchFamily="34" charset="-122"/>
                 <a:cs typeface="Calibri" pitchFamily="34" charset="-120"/>
               </a:rPr>
-              <a:t>VIVU 6.5% 7y callable, USD 400m. If yields fall 200 bps 3 years in, VIVU can refinance at 4.5%.</a:t>
+              <a:t>When does VIVU call? 6.5% seven-year, USD 400m; yields fall 200 bps by year 3, so VIVU can refinance at 4.5%.</a:t>
             </a:r>
             <a:endParaRPr lang="en-US" sz="1200" dirty="0"/>
           </a:p>
@@ -42820,14 +44866,14 @@
       </p:sp>
       <p:sp>
         <p:nvSpPr>
-          <p:cNvPr id="13" name="Text 10"/>
+          <p:cNvPr id="17" name="Text 14"/>
           <p:cNvSpPr txBox="1"/>
           <p:nvPr/>
         </p:nvSpPr>
         <p:spPr>
           <a:xfrm>
             <a:off x="4892040" y="2039112"/>
-            <a:ext cx="3794760" cy="1792224"/>
+            <a:ext cx="3794760" cy="1746504"/>
           </a:xfrm>
           <a:prstGeom prst="rect">
             <a:avLst/>
@@ -42874,7 +44920,7 @@
                 <a:ea typeface="Calibri" pitchFamily="34" charset="-122"/>
                 <a:cs typeface="Calibri" pitchFamily="34" charset="-120"/>
               </a:rPr>
-              <a:t>After call protection ends (yr 3) → call price is 103.25% = USD 413m
+              <a:t>Call protection ends at year 3 → call price 103.25% = USD 413m
 </a:t>
             </a:r>
             <a:pPr indent="0" marL="0">
@@ -42909,7 +44955,7 @@
                 <a:ea typeface="Calibri" pitchFamily="34" charset="-122"/>
                 <a:cs typeface="Calibri" pitchFamily="34" charset="-120"/>
               </a:rPr>
-              <a:t>Annual interest saving on refi: 400 × (6.5% − 4.5%) = USD 8m
+              <a:t>Call premium paid = 3.25% × 400m = USD 13m
 </a:t>
             </a:r>
             <a:pPr indent="0" marL="0">
@@ -42944,7 +44990,7 @@
                 <a:ea typeface="Calibri" pitchFamily="34" charset="-122"/>
                 <a:cs typeface="Calibri" pitchFamily="34" charset="-120"/>
               </a:rPr>
-              <a:t>Call premium paid: USD 13m — recouped in &lt;2 years
+              <a:t>Annual interest saved = 400 × (6.5% − 4.5%) = USD 8m
 </a:t>
             </a:r>
             <a:pPr indent="0" marL="0">
@@ -42979,7 +45025,7 @@
                 <a:ea typeface="Calibri" pitchFamily="34" charset="-122"/>
                 <a:cs typeface="Calibri" pitchFamily="34" charset="-120"/>
               </a:rPr>
-              <a:t>Economics work → VIVU calls. Investor is forced to reinvest at the lower 4.5% rate.
+              <a:t>Premium recovered in 13 / 8 = 1.6 years, well inside the remaining four → VIVU calls
 </a:t>
             </a:r>
             <a:pPr indent="0" marL="0">
@@ -43014,7 +45060,7 @@
                 <a:ea typeface="Calibri" pitchFamily="34" charset="-122"/>
                 <a:cs typeface="Calibri" pitchFamily="34" charset="-120"/>
               </a:rPr>
-              <a:t>Callable bond YTM &gt; equivalent non-callable — investor is compensated for call risk ex ante.</a:t>
+              <a:t>Investor is repaid early and reinvests at 4.5%: reinvestment risk, realised.</a:t>
             </a:r>
             <a:endParaRPr lang="en-US" sz="1200" dirty="0"/>
           </a:p>
@@ -43022,13 +45068,13 @@
       </p:sp>
       <p:sp>
         <p:nvSpPr>
-          <p:cNvPr id="14" name="Shape 11"/>
+          <p:cNvPr id="18" name="Shape 15"/>
           <p:cNvSpPr/>
           <p:nvPr/>
         </p:nvSpPr>
         <p:spPr>
           <a:xfrm>
-            <a:off x="4846320" y="3904488"/>
+            <a:off x="4846320" y="3858768"/>
             <a:ext cx="3886200" cy="365760"/>
           </a:xfrm>
           <a:prstGeom prst="rect">
@@ -43042,13 +45088,13 @@
       </p:sp>
       <p:sp>
         <p:nvSpPr>
-          <p:cNvPr id="15" name="Text 12"/>
+          <p:cNvPr id="19" name="Text 16"/>
           <p:cNvSpPr txBox="1"/>
           <p:nvPr/>
         </p:nvSpPr>
         <p:spPr>
           <a:xfrm>
-            <a:off x="4892040" y="3904488"/>
+            <a:off x="4892040" y="3858768"/>
             <a:ext cx="3794760" cy="365760"/>
           </a:xfrm>
           <a:prstGeom prst="rect">
@@ -43076,7 +45122,7 @@
                 <a:ea typeface="Consolas" pitchFamily="34" charset="-122"/>
                 <a:cs typeface="Consolas" pitchFamily="34" charset="-120"/>
               </a:rPr>
-              <a:t>Issuer refinances cheaply; investor faces reinvestment risk + capped upside</a:t>
+              <a:t>Issuer refinances cheaply; investor gets capped upside and reinvestment risk</a:t>
             </a:r>
             <a:endParaRPr lang="en-US" sz="1150" dirty="0"/>
           </a:p>
